--- a/EC_Sprint_2_1TSCOA_EvidenciasConstrucao_LEITO360_GRUPO61.pptx
+++ b/EC_Sprint_2_1TSCOA_EvidenciasConstrucao_LEITO360_GRUPO61.pptx
@@ -3507,7 +3507,7 @@
                 <a:ea typeface="Calibri" pitchFamily="34" charset="-122"/>
                 <a:cs typeface="Calibri" pitchFamily="34" charset="-120"/>
               </a:rPr>
-              <a:t>Scripts Oracle (DDL relacional/JSON/external table/view/validações)</a:t>
+              <a:t>Execução Oracle (3 formatos + view, 162 registros confirmados no LiveLabs)</a:t>
             </a:r>
             <a:endParaRPr lang="en-US" sz="1200" dirty="0"/>
           </a:p>
@@ -3697,7 +3697,7 @@
                 <a:ea typeface="Calibri" pitchFamily="34" charset="-122"/>
                 <a:cs typeface="Calibri" pitchFamily="34" charset="-120"/>
               </a:rPr>
-              <a:t>Execução Oracle + evidências (depende do ambiente acadêmico do usuário)</a:t>
+              <a:t>Select AI — perfil criado; GENERATE bloqueado por indisponibilidade do OCI GenAI no sandbox</a:t>
             </a:r>
             <a:endParaRPr lang="en-US" sz="1200" dirty="0"/>
           </a:p>
@@ -3734,7 +3734,7 @@
         <p:spPr>
           <a:xfrm>
             <a:off x="7315200" y="3538728"/>
-            <a:ext cx="1170432" cy="219456"/>
+            <a:ext cx="2048256" cy="219456"/>
           </a:xfrm>
           <a:prstGeom prst="roundRect">
             <a:avLst>
@@ -3780,7 +3780,7 @@
                 <a:ea typeface="Calibri" pitchFamily="34" charset="-122"/>
                 <a:cs typeface="Calibri" pitchFamily="34" charset="-120"/>
               </a:rPr>
-              <a:t>40%</a:t>
+              <a:t>70%</a:t>
             </a:r>
             <a:endParaRPr lang="en-US" sz="1100" dirty="0"/>
           </a:p>
@@ -3887,7 +3887,7 @@
                 <a:ea typeface="Calibri" pitchFamily="34" charset="-122"/>
                 <a:cs typeface="Calibri" pitchFamily="34" charset="-120"/>
               </a:rPr>
-              <a:t>Select AI — perfil e perguntas (scripts prontos, seguindo LiveLabs 4222)</a:t>
+              <a:t>Dashboard sem mocks (filtros, mapa, export CSV)</a:t>
             </a:r>
             <a:endParaRPr lang="en-US" sz="1200" dirty="0"/>
           </a:p>
@@ -3924,7 +3924,7 @@
         <p:spPr>
           <a:xfrm>
             <a:off x="7315200" y="4197096"/>
-            <a:ext cx="1755648" cy="219456"/>
+            <a:ext cx="2926080" cy="219456"/>
           </a:xfrm>
           <a:prstGeom prst="roundRect">
             <a:avLst>
@@ -3932,7 +3932,7 @@
             </a:avLst>
           </a:prstGeom>
           <a:solidFill>
-            <a:srgbClr val="F59E0B"/>
+            <a:srgbClr val="14B8A6"/>
           </a:solidFill>
           <a:ln/>
         </p:spPr>
@@ -3964,13 +3964,13 @@
             <a:r>
               <a:rPr lang="en-US" sz="1100" b="1" dirty="0">
                 <a:solidFill>
-                  <a:srgbClr val="F59E0B"/>
-                </a:solidFill>
-                <a:latin typeface="Calibri" pitchFamily="34" charset="0"/>
-                <a:ea typeface="Calibri" pitchFamily="34" charset="-122"/>
-                <a:cs typeface="Calibri" pitchFamily="34" charset="-120"/>
-              </a:rPr>
-              <a:t>60%</a:t>
+                  <a:srgbClr val="14B8A6"/>
+                </a:solidFill>
+                <a:latin typeface="Calibri" pitchFamily="34" charset="0"/>
+                <a:ea typeface="Calibri" pitchFamily="34" charset="-122"/>
+                <a:cs typeface="Calibri" pitchFamily="34" charset="-120"/>
+              </a:rPr>
+              <a:t>100%</a:t>
             </a:r>
             <a:endParaRPr lang="en-US" sz="1100" dirty="0"/>
           </a:p>
@@ -3985,196 +3985,6 @@
         <p:spPr>
           <a:xfrm>
             <a:off x="10881360" y="4151376"/>
-            <a:ext cx="1737360" cy="320040"/>
-          </a:xfrm>
-          <a:prstGeom prst="roundRect">
-            <a:avLst>
-              <a:gd name="adj" fmla="val 48571"/>
-            </a:avLst>
-          </a:prstGeom>
-          <a:solidFill>
-            <a:srgbClr val="1E3A5F">
-              <a:alpha val="80000"/>
-            </a:srgbClr>
-          </a:solidFill>
-          <a:ln w="12700">
-            <a:solidFill>
-              <a:srgbClr val="F59E0B"/>
-            </a:solidFill>
-            <a:prstDash val="solid"/>
-          </a:ln>
-        </p:spPr>
-      </p:sp>
-      <p:sp>
-        <p:nvSpPr>
-          <p:cNvPr id="29" name="Text 27"/>
-          <p:cNvSpPr/>
-          <p:nvPr/>
-        </p:nvSpPr>
-        <p:spPr>
-          <a:xfrm>
-            <a:off x="10881360" y="4151376"/>
-            <a:ext cx="1737360" cy="320040"/>
-          </a:xfrm>
-          <a:prstGeom prst="rect">
-            <a:avLst/>
-          </a:prstGeom>
-          <a:noFill/>
-          <a:ln/>
-        </p:spPr>
-        <p:txBody>
-          <a:bodyPr wrap="square" lIns="0" tIns="0" rIns="0" bIns="0" rtlCol="0" anchor="ctr"/>
-          <a:lstStyle/>
-          <a:p>
-            <a:pPr algn="ctr" indent="0" marL="0">
-              <a:buNone/>
-            </a:pPr>
-            <a:r>
-              <a:rPr lang="en-US" sz="1000" b="1" dirty="0">
-                <a:solidFill>
-                  <a:srgbClr val="F59E0B"/>
-                </a:solidFill>
-                <a:latin typeface="Calibri" pitchFamily="34" charset="0"/>
-                <a:ea typeface="Calibri" pitchFamily="34" charset="-122"/>
-                <a:cs typeface="Calibri" pitchFamily="34" charset="-120"/>
-              </a:rPr>
-              <a:t>Parcial</a:t>
-            </a:r>
-            <a:endParaRPr lang="en-US" sz="1000" dirty="0"/>
-          </a:p>
-        </p:txBody>
-      </p:sp>
-      <p:sp>
-        <p:nvSpPr>
-          <p:cNvPr id="30" name="Text 28"/>
-          <p:cNvSpPr/>
-          <p:nvPr/>
-        </p:nvSpPr>
-        <p:spPr>
-          <a:xfrm>
-            <a:off x="457200" y="4782312"/>
-            <a:ext cx="6675120" cy="365760"/>
-          </a:xfrm>
-          <a:prstGeom prst="rect">
-            <a:avLst/>
-          </a:prstGeom>
-          <a:noFill/>
-          <a:ln/>
-        </p:spPr>
-        <p:txBody>
-          <a:bodyPr wrap="square" lIns="0" tIns="0" rIns="0" bIns="0" rtlCol="0" anchor="ctr"/>
-          <a:lstStyle/>
-          <a:p>
-            <a:pPr indent="0" marL="0">
-              <a:buNone/>
-            </a:pPr>
-            <a:r>
-              <a:rPr lang="en-US" sz="1200" dirty="0">
-                <a:solidFill>
-                  <a:srgbClr val="EAF6F3"/>
-                </a:solidFill>
-                <a:latin typeface="Calibri" pitchFamily="34" charset="0"/>
-                <a:ea typeface="Calibri" pitchFamily="34" charset="-122"/>
-                <a:cs typeface="Calibri" pitchFamily="34" charset="-120"/>
-              </a:rPr>
-              <a:t>Dashboard sem mocks (filtros, mapa, export CSV)</a:t>
-            </a:r>
-            <a:endParaRPr lang="en-US" sz="1200" dirty="0"/>
-          </a:p>
-        </p:txBody>
-      </p:sp>
-      <p:sp>
-        <p:nvSpPr>
-          <p:cNvPr id="31" name="Shape 29"/>
-          <p:cNvSpPr/>
-          <p:nvPr/>
-        </p:nvSpPr>
-        <p:spPr>
-          <a:xfrm>
-            <a:off x="7315200" y="4855464"/>
-            <a:ext cx="2926080" cy="219456"/>
-          </a:xfrm>
-          <a:prstGeom prst="roundRect">
-            <a:avLst>
-              <a:gd name="adj" fmla="val 20833"/>
-            </a:avLst>
-          </a:prstGeom>
-          <a:solidFill>
-            <a:srgbClr val="1E3A5F"/>
-          </a:solidFill>
-          <a:ln/>
-        </p:spPr>
-      </p:sp>
-      <p:sp>
-        <p:nvSpPr>
-          <p:cNvPr id="32" name="Shape 30"/>
-          <p:cNvSpPr/>
-          <p:nvPr/>
-        </p:nvSpPr>
-        <p:spPr>
-          <a:xfrm>
-            <a:off x="7315200" y="4855464"/>
-            <a:ext cx="2926080" cy="219456"/>
-          </a:xfrm>
-          <a:prstGeom prst="roundRect">
-            <a:avLst>
-              <a:gd name="adj" fmla="val 20833"/>
-            </a:avLst>
-          </a:prstGeom>
-          <a:solidFill>
-            <a:srgbClr val="14B8A6"/>
-          </a:solidFill>
-          <a:ln/>
-        </p:spPr>
-      </p:sp>
-      <p:sp>
-        <p:nvSpPr>
-          <p:cNvPr id="33" name="Text 31"/>
-          <p:cNvSpPr/>
-          <p:nvPr/>
-        </p:nvSpPr>
-        <p:spPr>
-          <a:xfrm>
-            <a:off x="10287000" y="4782312"/>
-            <a:ext cx="548640" cy="365760"/>
-          </a:xfrm>
-          <a:prstGeom prst="rect">
-            <a:avLst/>
-          </a:prstGeom>
-          <a:noFill/>
-          <a:ln/>
-        </p:spPr>
-        <p:txBody>
-          <a:bodyPr wrap="square" lIns="0" tIns="0" rIns="0" bIns="0" rtlCol="0" anchor="ctr"/>
-          <a:lstStyle/>
-          <a:p>
-            <a:pPr indent="0" marL="0">
-              <a:buNone/>
-            </a:pPr>
-            <a:r>
-              <a:rPr lang="en-US" sz="1100" b="1" dirty="0">
-                <a:solidFill>
-                  <a:srgbClr val="14B8A6"/>
-                </a:solidFill>
-                <a:latin typeface="Calibri" pitchFamily="34" charset="0"/>
-                <a:ea typeface="Calibri" pitchFamily="34" charset="-122"/>
-                <a:cs typeface="Calibri" pitchFamily="34" charset="-120"/>
-              </a:rPr>
-              <a:t>100%</a:t>
-            </a:r>
-            <a:endParaRPr lang="en-US" sz="1100" dirty="0"/>
-          </a:p>
-        </p:txBody>
-      </p:sp>
-      <p:sp>
-        <p:nvSpPr>
-          <p:cNvPr id="34" name="Shape 32"/>
-          <p:cNvSpPr/>
-          <p:nvPr/>
-        </p:nvSpPr>
-        <p:spPr>
-          <a:xfrm>
-            <a:off x="10881360" y="4809744"/>
             <a:ext cx="1737360" cy="320040"/>
           </a:xfrm>
           <a:prstGeom prst="roundRect">
@@ -4197,7 +4007,168 @@
       </p:sp>
       <p:sp>
         <p:nvSpPr>
-          <p:cNvPr id="35" name="Text 33"/>
+          <p:cNvPr id="29" name="Text 27"/>
+          <p:cNvSpPr/>
+          <p:nvPr/>
+        </p:nvSpPr>
+        <p:spPr>
+          <a:xfrm>
+            <a:off x="10881360" y="4151376"/>
+            <a:ext cx="1737360" cy="320040"/>
+          </a:xfrm>
+          <a:prstGeom prst="rect">
+            <a:avLst/>
+          </a:prstGeom>
+          <a:noFill/>
+          <a:ln/>
+        </p:spPr>
+        <p:txBody>
+          <a:bodyPr wrap="square" lIns="0" tIns="0" rIns="0" bIns="0" rtlCol="0" anchor="ctr"/>
+          <a:lstStyle/>
+          <a:p>
+            <a:pPr algn="ctr" indent="0" marL="0">
+              <a:buNone/>
+            </a:pPr>
+            <a:r>
+              <a:rPr lang="en-US" sz="1000" b="1" dirty="0">
+                <a:solidFill>
+                  <a:srgbClr val="14B8A6"/>
+                </a:solidFill>
+                <a:latin typeface="Calibri" pitchFamily="34" charset="0"/>
+                <a:ea typeface="Calibri" pitchFamily="34" charset="-122"/>
+                <a:cs typeface="Calibri" pitchFamily="34" charset="-120"/>
+              </a:rPr>
+              <a:t>Implementado</a:t>
+            </a:r>
+            <a:endParaRPr lang="en-US" sz="1000" dirty="0"/>
+          </a:p>
+        </p:txBody>
+      </p:sp>
+      <p:sp>
+        <p:nvSpPr>
+          <p:cNvPr id="30" name="Text 28"/>
+          <p:cNvSpPr/>
+          <p:nvPr/>
+        </p:nvSpPr>
+        <p:spPr>
+          <a:xfrm>
+            <a:off x="457200" y="4782312"/>
+            <a:ext cx="6675120" cy="365760"/>
+          </a:xfrm>
+          <a:prstGeom prst="rect">
+            <a:avLst/>
+          </a:prstGeom>
+          <a:noFill/>
+          <a:ln/>
+        </p:spPr>
+        <p:txBody>
+          <a:bodyPr wrap="square" lIns="0" tIns="0" rIns="0" bIns="0" rtlCol="0" anchor="ctr"/>
+          <a:lstStyle/>
+          <a:p>
+            <a:pPr indent="0" marL="0">
+              <a:buNone/>
+            </a:pPr>
+            <a:r>
+              <a:rPr lang="en-US" sz="1200" dirty="0">
+                <a:solidFill>
+                  <a:srgbClr val="EAF6F3"/>
+                </a:solidFill>
+                <a:latin typeface="Calibri" pitchFamily="34" charset="0"/>
+                <a:ea typeface="Calibri" pitchFamily="34" charset="-122"/>
+                <a:cs typeface="Calibri" pitchFamily="34" charset="-120"/>
+              </a:rPr>
+              <a:t>Publicação (GitHub público + GitHub Pages ao vivo)</a:t>
+            </a:r>
+            <a:endParaRPr lang="en-US" sz="1200" dirty="0"/>
+          </a:p>
+        </p:txBody>
+      </p:sp>
+      <p:sp>
+        <p:nvSpPr>
+          <p:cNvPr id="31" name="Shape 29"/>
+          <p:cNvSpPr/>
+          <p:nvPr/>
+        </p:nvSpPr>
+        <p:spPr>
+          <a:xfrm>
+            <a:off x="7315200" y="4855464"/>
+            <a:ext cx="2926080" cy="219456"/>
+          </a:xfrm>
+          <a:prstGeom prst="roundRect">
+            <a:avLst>
+              <a:gd name="adj" fmla="val 20833"/>
+            </a:avLst>
+          </a:prstGeom>
+          <a:solidFill>
+            <a:srgbClr val="1E3A5F"/>
+          </a:solidFill>
+          <a:ln/>
+        </p:spPr>
+      </p:sp>
+      <p:sp>
+        <p:nvSpPr>
+          <p:cNvPr id="32" name="Shape 30"/>
+          <p:cNvSpPr/>
+          <p:nvPr/>
+        </p:nvSpPr>
+        <p:spPr>
+          <a:xfrm>
+            <a:off x="7315200" y="4855464"/>
+            <a:ext cx="2926080" cy="219456"/>
+          </a:xfrm>
+          <a:prstGeom prst="roundRect">
+            <a:avLst>
+              <a:gd name="adj" fmla="val 20833"/>
+            </a:avLst>
+          </a:prstGeom>
+          <a:solidFill>
+            <a:srgbClr val="14B8A6"/>
+          </a:solidFill>
+          <a:ln/>
+        </p:spPr>
+      </p:sp>
+      <p:sp>
+        <p:nvSpPr>
+          <p:cNvPr id="33" name="Text 31"/>
+          <p:cNvSpPr/>
+          <p:nvPr/>
+        </p:nvSpPr>
+        <p:spPr>
+          <a:xfrm>
+            <a:off x="10287000" y="4782312"/>
+            <a:ext cx="548640" cy="365760"/>
+          </a:xfrm>
+          <a:prstGeom prst="rect">
+            <a:avLst/>
+          </a:prstGeom>
+          <a:noFill/>
+          <a:ln/>
+        </p:spPr>
+        <p:txBody>
+          <a:bodyPr wrap="square" lIns="0" tIns="0" rIns="0" bIns="0" rtlCol="0" anchor="ctr"/>
+          <a:lstStyle/>
+          <a:p>
+            <a:pPr indent="0" marL="0">
+              <a:buNone/>
+            </a:pPr>
+            <a:r>
+              <a:rPr lang="en-US" sz="1100" b="1" dirty="0">
+                <a:solidFill>
+                  <a:srgbClr val="14B8A6"/>
+                </a:solidFill>
+                <a:latin typeface="Calibri" pitchFamily="34" charset="0"/>
+                <a:ea typeface="Calibri" pitchFamily="34" charset="-122"/>
+                <a:cs typeface="Calibri" pitchFamily="34" charset="-120"/>
+              </a:rPr>
+              <a:t>100%</a:t>
+            </a:r>
+            <a:endParaRPr lang="en-US" sz="1100" dirty="0"/>
+          </a:p>
+        </p:txBody>
+      </p:sp>
+      <p:sp>
+        <p:nvSpPr>
+          <p:cNvPr id="34" name="Shape 32"/>
           <p:cNvSpPr/>
           <p:nvPr/>
         </p:nvSpPr>
@@ -4206,6 +4177,35 @@
             <a:off x="10881360" y="4809744"/>
             <a:ext cx="1737360" cy="320040"/>
           </a:xfrm>
+          <a:prstGeom prst="roundRect">
+            <a:avLst>
+              <a:gd name="adj" fmla="val 48571"/>
+            </a:avLst>
+          </a:prstGeom>
+          <a:solidFill>
+            <a:srgbClr val="1E3A5F">
+              <a:alpha val="80000"/>
+            </a:srgbClr>
+          </a:solidFill>
+          <a:ln w="12700">
+            <a:solidFill>
+              <a:srgbClr val="14B8A6"/>
+            </a:solidFill>
+            <a:prstDash val="solid"/>
+          </a:ln>
+        </p:spPr>
+      </p:sp>
+      <p:sp>
+        <p:nvSpPr>
+          <p:cNvPr id="35" name="Text 33"/>
+          <p:cNvSpPr/>
+          <p:nvPr/>
+        </p:nvSpPr>
+        <p:spPr>
+          <a:xfrm>
+            <a:off x="10881360" y="4809744"/>
+            <a:ext cx="1737360" cy="320040"/>
+          </a:xfrm>
           <a:prstGeom prst="rect">
             <a:avLst/>
           </a:prstGeom>
@@ -4267,7 +4267,7 @@
                 <a:ea typeface="Calibri" pitchFamily="34" charset="-122"/>
                 <a:cs typeface="Calibri" pitchFamily="34" charset="-120"/>
               </a:rPr>
-              <a:t>Publicação (GitHub público + Pages + vídeo)</a:t>
+              <a:t>Vídeo pitch (produção com outro integrante do grupo)</a:t>
             </a:r>
             <a:endParaRPr lang="en-US" sz="1200" dirty="0"/>
           </a:p>
@@ -7246,7 +7246,7 @@
                 <a:ea typeface="Cambria" pitchFamily="34" charset="-122"/>
                 <a:cs typeface="Cambria" pitchFamily="34" charset="-120"/>
               </a:rPr>
-              <a:t>Evidências visuais — Oracle (tabelas, JSON, external table, view)</a:t>
+              <a:t>Evidências — execução real no Oracle (LiveLabs sandbox #229599)</a:t>
             </a:r>
             <a:endParaRPr lang="en-US" sz="2800" dirty="0"/>
           </a:p>
@@ -7285,83 +7285,896 @@
                 <a:ea typeface="Calibri" pitchFamily="34" charset="-122"/>
                 <a:cs typeface="Calibri" pitchFamily="34" charset="-120"/>
               </a:rPr>
-              <a:t>Capturar após rodar oracle/sql/01 a 06 no ambiente acadêmico. Cada print deve indicar: o que mostra, o que comprova, a fonte e a limitação.</a:t>
+              <a:t>Rodado de verdade em 31/08–01/09/2026, usuário MOVIESTREAM, tenancy C4U04 (India South).</a:t>
             </a:r>
             <a:endParaRPr lang="en-US" sz="1400" dirty="0"/>
           </a:p>
         </p:txBody>
       </p:sp>
-      <p:sp>
-        <p:nvSpPr>
-          <p:cNvPr id="6" name="Shape 4"/>
-          <p:cNvSpPr/>
-          <p:nvPr/>
-        </p:nvSpPr>
-        <p:spPr>
-          <a:xfrm>
-            <a:off x="457200" y="2103120"/>
-            <a:ext cx="5486400" cy="1965960"/>
-          </a:xfrm>
-          <a:prstGeom prst="roundRect">
-            <a:avLst>
-              <a:gd name="adj" fmla="val 2791"/>
-            </a:avLst>
-          </a:prstGeom>
-          <a:solidFill>
-            <a:srgbClr val="060D1E"/>
-          </a:solidFill>
-          <a:ln w="15875">
-            <a:solidFill>
-              <a:srgbClr val="F59E0B"/>
-            </a:solidFill>
-            <a:prstDash val="dash"/>
-          </a:ln>
-        </p:spPr>
-      </p:sp>
-      <p:sp>
-        <p:nvSpPr>
-          <p:cNvPr id="7" name="Text 5"/>
-          <p:cNvSpPr/>
-          <p:nvPr/>
-        </p:nvSpPr>
-        <p:spPr>
-          <a:xfrm>
-            <a:off x="640080" y="2286000"/>
-            <a:ext cx="5120640" cy="1600200"/>
-          </a:xfrm>
-          <a:prstGeom prst="rect">
-            <a:avLst/>
-          </a:prstGeom>
-          <a:noFill/>
-          <a:ln/>
-        </p:spPr>
-        <p:txBody>
-          <a:bodyPr wrap="square" lIns="0" tIns="0" rIns="0" bIns="0" rtlCol="0" anchor="ctr"/>
-          <a:lstStyle/>
-          <a:p>
-            <a:pPr algn="ctr" indent="0" marL="0">
-              <a:buNone/>
-            </a:pPr>
-            <a:r>
-              <a:rPr lang="en-US" sz="1200" b="1" dirty="0">
-                <a:solidFill>
-                  <a:srgbClr val="F59E0B"/>
-                </a:solidFill>
-                <a:latin typeface="Calibri" pitchFamily="34" charset="0"/>
-                <a:ea typeface="Calibri" pitchFamily="34" charset="-122"/>
-                <a:cs typeface="Calibri" pitchFamily="34" charset="-120"/>
-              </a:rPr>
-              <a:t>PRINT PENDENTE
-</a:t>
-            </a:r>
-            <a:endParaRPr lang="en-US" sz="1200" dirty="0"/>
-          </a:p>
-          <a:p>
-            <a:pPr algn="ctr" indent="0" marL="0">
-              <a:buNone/>
-            </a:pPr>
-            <a:r>
-              <a:rPr lang="en-US" sz="1050" dirty="0">
+      <p:graphicFrame>
+        <p:nvGraphicFramePr>
+          <p:cNvPr id="15" name="Table 0"/>
+          <p:cNvGraphicFramePr>
+            <a:graphicFrameLocks noGrp="1"/>
+          </p:cNvGraphicFramePr>
+          <p:nvPr>
+            <p:extLst>
+              <p:ext uri="{D42A27DB-BD31-4B8C-83A1-F6EECF244321}">
+                <p14:modId xmlns:p14="http://schemas.microsoft.com/office/powerpoint/2010/main" val="1579011935"/>
+              </p:ext>
+            </p:extLst>
+          </p:nvPr>
+        </p:nvGraphicFramePr>
+        <p:xfrm>
+          <a:off x="457200" y="2103120"/>
+          <a:ext cx="11247120" cy="3931920"/>
+        </p:xfrm>
+        <a:graphic>
+          <a:graphicData uri="http://schemas.openxmlformats.org/drawingml/2006/table">
+            <a:tbl>
+              <a:tblPr/>
+              <a:tblGrid>
+                <a:gridCol w="5029200"/>
+                <a:gridCol w="6217920"/>
+              </a:tblGrid>
+              <a:tr h="655320">
+                <a:tc>
+                  <a:txBody>
+                    <a:bodyPr/>
+                    <a:lstStyle/>
+                    <a:p>
+                      <a:pPr indent="0" marL="0">
+                        <a:buNone/>
+                      </a:pPr>
+                      <a:r>
+                        <a:rPr lang="en-US" sz="1050" b="1" dirty="0">
+                          <a:solidFill>
+                            <a:srgbClr val="FFFFFF"/>
+                          </a:solidFill>
+                          <a:latin typeface="Calibri" pitchFamily="34" charset="0"/>
+                          <a:ea typeface="Calibri" pitchFamily="34" charset="-122"/>
+                          <a:cs typeface="Calibri" pitchFamily="34" charset="-120"/>
+                        </a:rPr>
+                        <a:t>Verificação</a:t>
+                      </a:r>
+                      <a:endParaRPr lang="en-US" sz="1050" dirty="0">
+                        <a:latin typeface="Calibri" charset="0"/>
+                        <a:ea typeface="Calibri" charset="0"/>
+                        <a:cs typeface="Calibri" charset="0"/>
+                      </a:endParaRPr>
+                    </a:p>
+                  </a:txBody>
+                  <a:tcPr marL="91440" marR="91440" marT="45720" marB="45720">
+                    <a:lnL w="6350" cap="flat" cmpd="sng" algn="ctr">
+                      <a:solidFill>
+                        <a:srgbClr val="1E3A5F"/>
+                      </a:solidFill>
+                      <a:prstDash val="solid"/>
+                      <a:round/>
+                      <a:headEnd type="none" w="med" len="med"/>
+                      <a:tailEnd type="none" w="med" len="med"/>
+                    </a:lnL>
+                    <a:lnR w="6350" cap="flat" cmpd="sng" algn="ctr">
+                      <a:solidFill>
+                        <a:srgbClr val="1E3A5F"/>
+                      </a:solidFill>
+                      <a:prstDash val="solid"/>
+                      <a:round/>
+                      <a:headEnd type="none" w="med" len="med"/>
+                      <a:tailEnd type="none" w="med" len="med"/>
+                    </a:lnR>
+                    <a:lnT w="6350" cap="flat" cmpd="sng" algn="ctr">
+                      <a:solidFill>
+                        <a:srgbClr val="1E3A5F"/>
+                      </a:solidFill>
+                      <a:prstDash val="solid"/>
+                      <a:round/>
+                      <a:headEnd type="none" w="med" len="med"/>
+                      <a:tailEnd type="none" w="med" len="med"/>
+                    </a:lnT>
+                    <a:lnB w="6350" cap="flat" cmpd="sng" algn="ctr">
+                      <a:solidFill>
+                        <a:srgbClr val="1E3A5F"/>
+                      </a:solidFill>
+                      <a:prstDash val="solid"/>
+                      <a:round/>
+                      <a:headEnd type="none" w="med" len="med"/>
+                      <a:tailEnd type="none" w="med" len="med"/>
+                    </a:lnB>
+                    <a:solidFill>
+                      <a:srgbClr val="091832"/>
+                    </a:solidFill>
+                  </a:tcPr>
+                </a:tc>
+                <a:tc>
+                  <a:txBody>
+                    <a:bodyPr/>
+                    <a:lstStyle/>
+                    <a:p>
+                      <a:pPr indent="0" marL="0">
+                        <a:buNone/>
+                      </a:pPr>
+                      <a:r>
+                        <a:rPr lang="en-US" sz="1050" b="1" dirty="0">
+                          <a:solidFill>
+                            <a:srgbClr val="FFFFFF"/>
+                          </a:solidFill>
+                          <a:latin typeface="Calibri" pitchFamily="34" charset="0"/>
+                          <a:ea typeface="Calibri" pitchFamily="34" charset="-122"/>
+                          <a:cs typeface="Calibri" pitchFamily="34" charset="-120"/>
+                        </a:rPr>
+                        <a:t>Resultado real (Oracle)</a:t>
+                      </a:r>
+                      <a:endParaRPr lang="en-US" sz="1050" dirty="0">
+                        <a:latin typeface="Calibri" charset="0"/>
+                        <a:ea typeface="Calibri" charset="0"/>
+                        <a:cs typeface="Calibri" charset="0"/>
+                      </a:endParaRPr>
+                    </a:p>
+                  </a:txBody>
+                  <a:tcPr marL="91440" marR="91440" marT="45720" marB="45720">
+                    <a:lnL w="6350" cap="flat" cmpd="sng" algn="ctr">
+                      <a:solidFill>
+                        <a:srgbClr val="1E3A5F"/>
+                      </a:solidFill>
+                      <a:prstDash val="solid"/>
+                      <a:round/>
+                      <a:headEnd type="none" w="med" len="med"/>
+                      <a:tailEnd type="none" w="med" len="med"/>
+                    </a:lnL>
+                    <a:lnR w="6350" cap="flat" cmpd="sng" algn="ctr">
+                      <a:solidFill>
+                        <a:srgbClr val="1E3A5F"/>
+                      </a:solidFill>
+                      <a:prstDash val="solid"/>
+                      <a:round/>
+                      <a:headEnd type="none" w="med" len="med"/>
+                      <a:tailEnd type="none" w="med" len="med"/>
+                    </a:lnR>
+                    <a:lnT w="6350" cap="flat" cmpd="sng" algn="ctr">
+                      <a:solidFill>
+                        <a:srgbClr val="1E3A5F"/>
+                      </a:solidFill>
+                      <a:prstDash val="solid"/>
+                      <a:round/>
+                      <a:headEnd type="none" w="med" len="med"/>
+                      <a:tailEnd type="none" w="med" len="med"/>
+                    </a:lnT>
+                    <a:lnB w="6350" cap="flat" cmpd="sng" algn="ctr">
+                      <a:solidFill>
+                        <a:srgbClr val="1E3A5F"/>
+                      </a:solidFill>
+                      <a:prstDash val="solid"/>
+                      <a:round/>
+                      <a:headEnd type="none" w="med" len="med"/>
+                      <a:tailEnd type="none" w="med" len="med"/>
+                    </a:lnB>
+                    <a:solidFill>
+                      <a:srgbClr val="091832"/>
+                    </a:solidFill>
+                  </a:tcPr>
+                </a:tc>
+              </a:tr>
+              <a:tr h="655320">
+                <a:tc>
+                  <a:txBody>
+                    <a:bodyPr/>
+                    <a:lstStyle/>
+                    <a:p>
+                      <a:pPr indent="0" marL="0">
+                        <a:buNone/>
+                      </a:pPr>
+                      <a:r>
+                        <a:rPr lang="en-US" sz="1050" dirty="0">
+                          <a:solidFill>
+                            <a:srgbClr val="EAF6F3"/>
+                          </a:solidFill>
+                          <a:latin typeface="Calibri" pitchFamily="34" charset="0"/>
+                          <a:ea typeface="Calibri" pitchFamily="34" charset="-122"/>
+                          <a:cs typeface="Calibri" pitchFamily="34" charset="-120"/>
+                        </a:rPr>
+                        <a:t>SELECT COUNT(*) FROM VW_LEITO360_ANALITICO</a:t>
+                      </a:r>
+                      <a:endParaRPr lang="en-US" sz="1050" dirty="0">
+                        <a:latin typeface="Calibri" charset="0"/>
+                        <a:ea typeface="Calibri" charset="0"/>
+                        <a:cs typeface="Calibri" charset="0"/>
+                      </a:endParaRPr>
+                    </a:p>
+                  </a:txBody>
+                  <a:tcPr marL="91440" marR="91440" marT="45720" marB="45720" anchor="ctr">
+                    <a:lnL w="6350" cap="flat" cmpd="sng" algn="ctr">
+                      <a:solidFill>
+                        <a:srgbClr val="1E3A5F"/>
+                      </a:solidFill>
+                      <a:prstDash val="solid"/>
+                      <a:round/>
+                      <a:headEnd type="none" w="med" len="med"/>
+                      <a:tailEnd type="none" w="med" len="med"/>
+                    </a:lnL>
+                    <a:lnR w="6350" cap="flat" cmpd="sng" algn="ctr">
+                      <a:solidFill>
+                        <a:srgbClr val="1E3A5F"/>
+                      </a:solidFill>
+                      <a:prstDash val="solid"/>
+                      <a:round/>
+                      <a:headEnd type="none" w="med" len="med"/>
+                      <a:tailEnd type="none" w="med" len="med"/>
+                    </a:lnR>
+                    <a:lnT w="6350" cap="flat" cmpd="sng" algn="ctr">
+                      <a:solidFill>
+                        <a:srgbClr val="1E3A5F"/>
+                      </a:solidFill>
+                      <a:prstDash val="solid"/>
+                      <a:round/>
+                      <a:headEnd type="none" w="med" len="med"/>
+                      <a:tailEnd type="none" w="med" len="med"/>
+                    </a:lnT>
+                    <a:lnB w="6350" cap="flat" cmpd="sng" algn="ctr">
+                      <a:solidFill>
+                        <a:srgbClr val="1E3A5F"/>
+                      </a:solidFill>
+                      <a:prstDash val="solid"/>
+                      <a:round/>
+                      <a:headEnd type="none" w="med" len="med"/>
+                      <a:tailEnd type="none" w="med" len="med"/>
+                    </a:lnB>
+                    <a:solidFill>
+                      <a:srgbClr val="0F2A4A"/>
+                    </a:solidFill>
+                  </a:tcPr>
+                </a:tc>
+                <a:tc>
+                  <a:txBody>
+                    <a:bodyPr/>
+                    <a:lstStyle/>
+                    <a:p>
+                      <a:pPr indent="0" marL="0">
+                        <a:buNone/>
+                      </a:pPr>
+                      <a:r>
+                        <a:rPr lang="en-US" sz="1050" dirty="0">
+                          <a:solidFill>
+                            <a:srgbClr val="EAF6F3"/>
+                          </a:solidFill>
+                          <a:latin typeface="Calibri" pitchFamily="34" charset="0"/>
+                          <a:ea typeface="Calibri" pitchFamily="34" charset="-122"/>
+                          <a:cs typeface="Calibri" pitchFamily="34" charset="-120"/>
+                        </a:rPr>
+                        <a:t>162 (27 UFs × 6 competências)</a:t>
+                      </a:r>
+                      <a:endParaRPr lang="en-US" sz="1050" dirty="0">
+                        <a:latin typeface="Calibri" charset="0"/>
+                        <a:ea typeface="Calibri" charset="0"/>
+                        <a:cs typeface="Calibri" charset="0"/>
+                      </a:endParaRPr>
+                    </a:p>
+                  </a:txBody>
+                  <a:tcPr marL="91440" marR="91440" marT="45720" marB="45720" anchor="ctr">
+                    <a:lnL w="6350" cap="flat" cmpd="sng" algn="ctr">
+                      <a:solidFill>
+                        <a:srgbClr val="1E3A5F"/>
+                      </a:solidFill>
+                      <a:prstDash val="solid"/>
+                      <a:round/>
+                      <a:headEnd type="none" w="med" len="med"/>
+                      <a:tailEnd type="none" w="med" len="med"/>
+                    </a:lnL>
+                    <a:lnR w="6350" cap="flat" cmpd="sng" algn="ctr">
+                      <a:solidFill>
+                        <a:srgbClr val="1E3A5F"/>
+                      </a:solidFill>
+                      <a:prstDash val="solid"/>
+                      <a:round/>
+                      <a:headEnd type="none" w="med" len="med"/>
+                      <a:tailEnd type="none" w="med" len="med"/>
+                    </a:lnR>
+                    <a:lnT w="6350" cap="flat" cmpd="sng" algn="ctr">
+                      <a:solidFill>
+                        <a:srgbClr val="1E3A5F"/>
+                      </a:solidFill>
+                      <a:prstDash val="solid"/>
+                      <a:round/>
+                      <a:headEnd type="none" w="med" len="med"/>
+                      <a:tailEnd type="none" w="med" len="med"/>
+                    </a:lnT>
+                    <a:lnB w="6350" cap="flat" cmpd="sng" algn="ctr">
+                      <a:solidFill>
+                        <a:srgbClr val="1E3A5F"/>
+                      </a:solidFill>
+                      <a:prstDash val="solid"/>
+                      <a:round/>
+                      <a:headEnd type="none" w="med" len="med"/>
+                      <a:tailEnd type="none" w="med" len="med"/>
+                    </a:lnB>
+                    <a:solidFill>
+                      <a:srgbClr val="0F2A4A"/>
+                    </a:solidFill>
+                  </a:tcPr>
+                </a:tc>
+              </a:tr>
+              <a:tr h="655320">
+                <a:tc>
+                  <a:txBody>
+                    <a:bodyPr/>
+                    <a:lstStyle/>
+                    <a:p>
+                      <a:pPr indent="0" marL="0">
+                        <a:buNone/>
+                      </a:pPr>
+                      <a:r>
+                        <a:rPr lang="en-US" sz="1050" dirty="0">
+                          <a:solidFill>
+                            <a:srgbClr val="EAF6F3"/>
+                          </a:solidFill>
+                          <a:latin typeface="Calibri" pitchFamily="34" charset="0"/>
+                          <a:ea typeface="Calibri" pitchFamily="34" charset="-122"/>
+                          <a:cs typeface="Calibri" pitchFamily="34" charset="-120"/>
+                        </a:rPr>
+                        <a:t>Documentos JSON válidos (doc IS JSON)</a:t>
+                      </a:r>
+                      <a:endParaRPr lang="en-US" sz="1050" dirty="0">
+                        <a:latin typeface="Calibri" charset="0"/>
+                        <a:ea typeface="Calibri" charset="0"/>
+                        <a:cs typeface="Calibri" charset="0"/>
+                      </a:endParaRPr>
+                    </a:p>
+                  </a:txBody>
+                  <a:tcPr marL="91440" marR="91440" marT="45720" marB="45720" anchor="ctr">
+                    <a:lnL w="6350" cap="flat" cmpd="sng" algn="ctr">
+                      <a:solidFill>
+                        <a:srgbClr val="1E3A5F"/>
+                      </a:solidFill>
+                      <a:prstDash val="solid"/>
+                      <a:round/>
+                      <a:headEnd type="none" w="med" len="med"/>
+                      <a:tailEnd type="none" w="med" len="med"/>
+                    </a:lnL>
+                    <a:lnR w="6350" cap="flat" cmpd="sng" algn="ctr">
+                      <a:solidFill>
+                        <a:srgbClr val="1E3A5F"/>
+                      </a:solidFill>
+                      <a:prstDash val="solid"/>
+                      <a:round/>
+                      <a:headEnd type="none" w="med" len="med"/>
+                      <a:tailEnd type="none" w="med" len="med"/>
+                    </a:lnR>
+                    <a:lnT w="6350" cap="flat" cmpd="sng" algn="ctr">
+                      <a:solidFill>
+                        <a:srgbClr val="1E3A5F"/>
+                      </a:solidFill>
+                      <a:prstDash val="solid"/>
+                      <a:round/>
+                      <a:headEnd type="none" w="med" len="med"/>
+                      <a:tailEnd type="none" w="med" len="med"/>
+                    </a:lnT>
+                    <a:lnB w="6350" cap="flat" cmpd="sng" algn="ctr">
+                      <a:solidFill>
+                        <a:srgbClr val="1E3A5F"/>
+                      </a:solidFill>
+                      <a:prstDash val="solid"/>
+                      <a:round/>
+                      <a:headEnd type="none" w="med" len="med"/>
+                      <a:tailEnd type="none" w="med" len="med"/>
+                    </a:lnB>
+                    <a:solidFill>
+                      <a:srgbClr val="0F2A4A"/>
+                    </a:solidFill>
+                  </a:tcPr>
+                </a:tc>
+                <a:tc>
+                  <a:txBody>
+                    <a:bodyPr/>
+                    <a:lstStyle/>
+                    <a:p>
+                      <a:pPr indent="0" marL="0">
+                        <a:buNone/>
+                      </a:pPr>
+                      <a:r>
+                        <a:rPr lang="en-US" sz="1050" dirty="0">
+                          <a:solidFill>
+                            <a:srgbClr val="EAF6F3"/>
+                          </a:solidFill>
+                          <a:latin typeface="Calibri" pitchFamily="34" charset="0"/>
+                          <a:ea typeface="Calibri" pitchFamily="34" charset="-122"/>
+                          <a:cs typeface="Calibri" pitchFamily="34" charset="-120"/>
+                        </a:rPr>
+                        <a:t>162 / 162</a:t>
+                      </a:r>
+                      <a:endParaRPr lang="en-US" sz="1050" dirty="0">
+                        <a:latin typeface="Calibri" charset="0"/>
+                        <a:ea typeface="Calibri" charset="0"/>
+                        <a:cs typeface="Calibri" charset="0"/>
+                      </a:endParaRPr>
+                    </a:p>
+                  </a:txBody>
+                  <a:tcPr marL="91440" marR="91440" marT="45720" marB="45720" anchor="ctr">
+                    <a:lnL w="6350" cap="flat" cmpd="sng" algn="ctr">
+                      <a:solidFill>
+                        <a:srgbClr val="1E3A5F"/>
+                      </a:solidFill>
+                      <a:prstDash val="solid"/>
+                      <a:round/>
+                      <a:headEnd type="none" w="med" len="med"/>
+                      <a:tailEnd type="none" w="med" len="med"/>
+                    </a:lnL>
+                    <a:lnR w="6350" cap="flat" cmpd="sng" algn="ctr">
+                      <a:solidFill>
+                        <a:srgbClr val="1E3A5F"/>
+                      </a:solidFill>
+                      <a:prstDash val="solid"/>
+                      <a:round/>
+                      <a:headEnd type="none" w="med" len="med"/>
+                      <a:tailEnd type="none" w="med" len="med"/>
+                    </a:lnR>
+                    <a:lnT w="6350" cap="flat" cmpd="sng" algn="ctr">
+                      <a:solidFill>
+                        <a:srgbClr val="1E3A5F"/>
+                      </a:solidFill>
+                      <a:prstDash val="solid"/>
+                      <a:round/>
+                      <a:headEnd type="none" w="med" len="med"/>
+                      <a:tailEnd type="none" w="med" len="med"/>
+                    </a:lnT>
+                    <a:lnB w="6350" cap="flat" cmpd="sng" algn="ctr">
+                      <a:solidFill>
+                        <a:srgbClr val="1E3A5F"/>
+                      </a:solidFill>
+                      <a:prstDash val="solid"/>
+                      <a:round/>
+                      <a:headEnd type="none" w="med" len="med"/>
+                      <a:tailEnd type="none" w="med" len="med"/>
+                    </a:lnB>
+                    <a:solidFill>
+                      <a:srgbClr val="0F2A4A"/>
+                    </a:solidFill>
+                  </a:tcPr>
+                </a:tc>
+              </a:tr>
+              <a:tr h="655320">
+                <a:tc>
+                  <a:txBody>
+                    <a:bodyPr/>
+                    <a:lstStyle/>
+                    <a:p>
+                      <a:pPr indent="0" marL="0">
+                        <a:buNone/>
+                      </a:pPr>
+                      <a:r>
+                        <a:rPr lang="en-US" sz="1050" dirty="0">
+                          <a:solidFill>
+                            <a:srgbClr val="EAF6F3"/>
+                          </a:solidFill>
+                          <a:latin typeface="Calibri" pitchFamily="34" charset="0"/>
+                          <a:ea typeface="Calibri" pitchFamily="34" charset="-122"/>
+                          <a:cs typeface="Calibri" pitchFamily="34" charset="-120"/>
+                        </a:rPr>
+                        <a:t>Soma internações por competência (Oracle x controle)</a:t>
+                      </a:r>
+                      <a:endParaRPr lang="en-US" sz="1050" dirty="0">
+                        <a:latin typeface="Calibri" charset="0"/>
+                        <a:ea typeface="Calibri" charset="0"/>
+                        <a:cs typeface="Calibri" charset="0"/>
+                      </a:endParaRPr>
+                    </a:p>
+                  </a:txBody>
+                  <a:tcPr marL="91440" marR="91440" marT="45720" marB="45720" anchor="ctr">
+                    <a:lnL w="6350" cap="flat" cmpd="sng" algn="ctr">
+                      <a:solidFill>
+                        <a:srgbClr val="1E3A5F"/>
+                      </a:solidFill>
+                      <a:prstDash val="solid"/>
+                      <a:round/>
+                      <a:headEnd type="none" w="med" len="med"/>
+                      <a:tailEnd type="none" w="med" len="med"/>
+                    </a:lnL>
+                    <a:lnR w="6350" cap="flat" cmpd="sng" algn="ctr">
+                      <a:solidFill>
+                        <a:srgbClr val="1E3A5F"/>
+                      </a:solidFill>
+                      <a:prstDash val="solid"/>
+                      <a:round/>
+                      <a:headEnd type="none" w="med" len="med"/>
+                      <a:tailEnd type="none" w="med" len="med"/>
+                    </a:lnR>
+                    <a:lnT w="6350" cap="flat" cmpd="sng" algn="ctr">
+                      <a:solidFill>
+                        <a:srgbClr val="1E3A5F"/>
+                      </a:solidFill>
+                      <a:prstDash val="solid"/>
+                      <a:round/>
+                      <a:headEnd type="none" w="med" len="med"/>
+                      <a:tailEnd type="none" w="med" len="med"/>
+                    </a:lnT>
+                    <a:lnB w="6350" cap="flat" cmpd="sng" algn="ctr">
+                      <a:solidFill>
+                        <a:srgbClr val="1E3A5F"/>
+                      </a:solidFill>
+                      <a:prstDash val="solid"/>
+                      <a:round/>
+                      <a:headEnd type="none" w="med" len="med"/>
+                      <a:tailEnd type="none" w="med" len="med"/>
+                    </a:lnB>
+                    <a:solidFill>
+                      <a:srgbClr val="0F2A4A"/>
+                    </a:solidFill>
+                  </a:tcPr>
+                </a:tc>
+                <a:tc>
+                  <a:txBody>
+                    <a:bodyPr/>
+                    <a:lstStyle/>
+                    <a:p>
+                      <a:pPr indent="0" marL="0">
+                        <a:buNone/>
+                      </a:pPr>
+                      <a:r>
+                        <a:rPr lang="en-US" sz="1050" dirty="0">
+                          <a:solidFill>
+                            <a:srgbClr val="EAF6F3"/>
+                          </a:solidFill>
+                          <a:latin typeface="Calibri" pitchFamily="34" charset="0"/>
+                          <a:ea typeface="Calibri" pitchFamily="34" charset="-122"/>
+                          <a:cs typeface="Calibri" pitchFamily="34" charset="-120"/>
+                        </a:rPr>
+                        <a:t>1.193.539 / 1.162.871 / 1.178.308 / 1.143.546 / 1.256.010 / 1.218.903 — 0 de diferença em todas</a:t>
+                      </a:r>
+                      <a:endParaRPr lang="en-US" sz="1050" dirty="0">
+                        <a:latin typeface="Calibri" charset="0"/>
+                        <a:ea typeface="Calibri" charset="0"/>
+                        <a:cs typeface="Calibri" charset="0"/>
+                      </a:endParaRPr>
+                    </a:p>
+                  </a:txBody>
+                  <a:tcPr marL="91440" marR="91440" marT="45720" marB="45720" anchor="ctr">
+                    <a:lnL w="6350" cap="flat" cmpd="sng" algn="ctr">
+                      <a:solidFill>
+                        <a:srgbClr val="1E3A5F"/>
+                      </a:solidFill>
+                      <a:prstDash val="solid"/>
+                      <a:round/>
+                      <a:headEnd type="none" w="med" len="med"/>
+                      <a:tailEnd type="none" w="med" len="med"/>
+                    </a:lnL>
+                    <a:lnR w="6350" cap="flat" cmpd="sng" algn="ctr">
+                      <a:solidFill>
+                        <a:srgbClr val="1E3A5F"/>
+                      </a:solidFill>
+                      <a:prstDash val="solid"/>
+                      <a:round/>
+                      <a:headEnd type="none" w="med" len="med"/>
+                      <a:tailEnd type="none" w="med" len="med"/>
+                    </a:lnR>
+                    <a:lnT w="6350" cap="flat" cmpd="sng" algn="ctr">
+                      <a:solidFill>
+                        <a:srgbClr val="1E3A5F"/>
+                      </a:solidFill>
+                      <a:prstDash val="solid"/>
+                      <a:round/>
+                      <a:headEnd type="none" w="med" len="med"/>
+                      <a:tailEnd type="none" w="med" len="med"/>
+                    </a:lnT>
+                    <a:lnB w="6350" cap="flat" cmpd="sng" algn="ctr">
+                      <a:solidFill>
+                        <a:srgbClr val="1E3A5F"/>
+                      </a:solidFill>
+                      <a:prstDash val="solid"/>
+                      <a:round/>
+                      <a:headEnd type="none" w="med" len="med"/>
+                      <a:tailEnd type="none" w="med" len="med"/>
+                    </a:lnB>
+                    <a:solidFill>
+                      <a:srgbClr val="0F2A4A"/>
+                    </a:solidFill>
+                  </a:tcPr>
+                </a:tc>
+              </a:tr>
+              <a:tr h="655320">
+                <a:tc>
+                  <a:txBody>
+                    <a:bodyPr/>
+                    <a:lstStyle/>
+                    <a:p>
+                      <a:pPr indent="0" marL="0">
+                        <a:buNone/>
+                      </a:pPr>
+                      <a:r>
+                        <a:rPr lang="en-US" sz="1050" dirty="0">
+                          <a:solidFill>
+                            <a:srgbClr val="EAF6F3"/>
+                          </a:solidFill>
+                          <a:latin typeface="Calibri" pitchFamily="34" charset="0"/>
+                          <a:ea typeface="Calibri" pitchFamily="34" charset="-122"/>
+                          <a:cs typeface="Calibri" pitchFamily="34" charset="-120"/>
+                        </a:rPr>
+                        <a:t>Soma leitos SUS por competência (Oracle x controle)</a:t>
+                      </a:r>
+                      <a:endParaRPr lang="en-US" sz="1050" dirty="0">
+                        <a:latin typeface="Calibri" charset="0"/>
+                        <a:ea typeface="Calibri" charset="0"/>
+                        <a:cs typeface="Calibri" charset="0"/>
+                      </a:endParaRPr>
+                    </a:p>
+                  </a:txBody>
+                  <a:tcPr marL="91440" marR="91440" marT="45720" marB="45720" anchor="ctr">
+                    <a:lnL w="6350" cap="flat" cmpd="sng" algn="ctr">
+                      <a:solidFill>
+                        <a:srgbClr val="1E3A5F"/>
+                      </a:solidFill>
+                      <a:prstDash val="solid"/>
+                      <a:round/>
+                      <a:headEnd type="none" w="med" len="med"/>
+                      <a:tailEnd type="none" w="med" len="med"/>
+                    </a:lnL>
+                    <a:lnR w="6350" cap="flat" cmpd="sng" algn="ctr">
+                      <a:solidFill>
+                        <a:srgbClr val="1E3A5F"/>
+                      </a:solidFill>
+                      <a:prstDash val="solid"/>
+                      <a:round/>
+                      <a:headEnd type="none" w="med" len="med"/>
+                      <a:tailEnd type="none" w="med" len="med"/>
+                    </a:lnR>
+                    <a:lnT w="6350" cap="flat" cmpd="sng" algn="ctr">
+                      <a:solidFill>
+                        <a:srgbClr val="1E3A5F"/>
+                      </a:solidFill>
+                      <a:prstDash val="solid"/>
+                      <a:round/>
+                      <a:headEnd type="none" w="med" len="med"/>
+                      <a:tailEnd type="none" w="med" len="med"/>
+                    </a:lnT>
+                    <a:lnB w="6350" cap="flat" cmpd="sng" algn="ctr">
+                      <a:solidFill>
+                        <a:srgbClr val="1E3A5F"/>
+                      </a:solidFill>
+                      <a:prstDash val="solid"/>
+                      <a:round/>
+                      <a:headEnd type="none" w="med" len="med"/>
+                      <a:tailEnd type="none" w="med" len="med"/>
+                    </a:lnB>
+                    <a:solidFill>
+                      <a:srgbClr val="0F2A4A"/>
+                    </a:solidFill>
+                  </a:tcPr>
+                </a:tc>
+                <a:tc>
+                  <a:txBody>
+                    <a:bodyPr/>
+                    <a:lstStyle/>
+                    <a:p>
+                      <a:pPr indent="0" marL="0">
+                        <a:buNone/>
+                      </a:pPr>
+                      <a:r>
+                        <a:rPr lang="en-US" sz="1050" dirty="0">
+                          <a:solidFill>
+                            <a:srgbClr val="EAF6F3"/>
+                          </a:solidFill>
+                          <a:latin typeface="Calibri" pitchFamily="34" charset="0"/>
+                          <a:ea typeface="Calibri" pitchFamily="34" charset="-122"/>
+                          <a:cs typeface="Calibri" pitchFamily="34" charset="-120"/>
+                        </a:rPr>
+                        <a:t>315.733 / 316.529 / 316.339 / 316.227 / 316.454 / 316.235 — 0 de diferença em todas</a:t>
+                      </a:r>
+                      <a:endParaRPr lang="en-US" sz="1050" dirty="0">
+                        <a:latin typeface="Calibri" charset="0"/>
+                        <a:ea typeface="Calibri" charset="0"/>
+                        <a:cs typeface="Calibri" charset="0"/>
+                      </a:endParaRPr>
+                    </a:p>
+                  </a:txBody>
+                  <a:tcPr marL="91440" marR="91440" marT="45720" marB="45720" anchor="ctr">
+                    <a:lnL w="6350" cap="flat" cmpd="sng" algn="ctr">
+                      <a:solidFill>
+                        <a:srgbClr val="1E3A5F"/>
+                      </a:solidFill>
+                      <a:prstDash val="solid"/>
+                      <a:round/>
+                      <a:headEnd type="none" w="med" len="med"/>
+                      <a:tailEnd type="none" w="med" len="med"/>
+                    </a:lnL>
+                    <a:lnR w="6350" cap="flat" cmpd="sng" algn="ctr">
+                      <a:solidFill>
+                        <a:srgbClr val="1E3A5F"/>
+                      </a:solidFill>
+                      <a:prstDash val="solid"/>
+                      <a:round/>
+                      <a:headEnd type="none" w="med" len="med"/>
+                      <a:tailEnd type="none" w="med" len="med"/>
+                    </a:lnR>
+                    <a:lnT w="6350" cap="flat" cmpd="sng" algn="ctr">
+                      <a:solidFill>
+                        <a:srgbClr val="1E3A5F"/>
+                      </a:solidFill>
+                      <a:prstDash val="solid"/>
+                      <a:round/>
+                      <a:headEnd type="none" w="med" len="med"/>
+                      <a:tailEnd type="none" w="med" len="med"/>
+                    </a:lnT>
+                    <a:lnB w="6350" cap="flat" cmpd="sng" algn="ctr">
+                      <a:solidFill>
+                        <a:srgbClr val="1E3A5F"/>
+                      </a:solidFill>
+                      <a:prstDash val="solid"/>
+                      <a:round/>
+                      <a:headEnd type="none" w="med" len="med"/>
+                      <a:tailEnd type="none" w="med" len="med"/>
+                    </a:lnB>
+                    <a:solidFill>
+                      <a:srgbClr val="0F2A4A"/>
+                    </a:solidFill>
+                  </a:tcPr>
+                </a:tc>
+              </a:tr>
+              <a:tr h="655320">
+                <a:tc>
+                  <a:txBody>
+                    <a:bodyPr/>
+                    <a:lstStyle/>
+                    <a:p>
+                      <a:pPr indent="0" marL="0">
+                        <a:buNone/>
+                      </a:pPr>
+                      <a:r>
+                        <a:rPr lang="en-US" sz="900" dirty="0">
+                          <a:solidFill>
+                            <a:srgbClr val="EAF6F3"/>
+                          </a:solidFill>
+                          <a:latin typeface="Courier New" pitchFamily="34" charset="0"/>
+                          <a:ea typeface="Courier New" pitchFamily="34" charset="-122"/>
+                          <a:cs typeface="Courier New" pitchFamily="34" charset="-120"/>
+                        </a:rPr>
+                        <a:t>Documento JSON de exemplo (SP, abr/2026)</a:t>
+                      </a:r>
+                      <a:endParaRPr lang="en-US" sz="900" dirty="0">
+                        <a:latin typeface="Courier New" charset="0"/>
+                        <a:ea typeface="Courier New" charset="0"/>
+                        <a:cs typeface="Courier New" charset="0"/>
+                      </a:endParaRPr>
+                    </a:p>
+                  </a:txBody>
+                  <a:tcPr marL="91440" marR="91440" marT="45720" marB="45720" anchor="ctr">
+                    <a:lnL w="6350" cap="flat" cmpd="sng" algn="ctr">
+                      <a:solidFill>
+                        <a:srgbClr val="1E3A5F"/>
+                      </a:solidFill>
+                      <a:prstDash val="solid"/>
+                      <a:round/>
+                      <a:headEnd type="none" w="med" len="med"/>
+                      <a:tailEnd type="none" w="med" len="med"/>
+                    </a:lnL>
+                    <a:lnR w="6350" cap="flat" cmpd="sng" algn="ctr">
+                      <a:solidFill>
+                        <a:srgbClr val="1E3A5F"/>
+                      </a:solidFill>
+                      <a:prstDash val="solid"/>
+                      <a:round/>
+                      <a:headEnd type="none" w="med" len="med"/>
+                      <a:tailEnd type="none" w="med" len="med"/>
+                    </a:lnR>
+                    <a:lnT w="6350" cap="flat" cmpd="sng" algn="ctr">
+                      <a:solidFill>
+                        <a:srgbClr val="1E3A5F"/>
+                      </a:solidFill>
+                      <a:prstDash val="solid"/>
+                      <a:round/>
+                      <a:headEnd type="none" w="med" len="med"/>
+                      <a:tailEnd type="none" w="med" len="med"/>
+                    </a:lnT>
+                    <a:lnB w="6350" cap="flat" cmpd="sng" algn="ctr">
+                      <a:solidFill>
+                        <a:srgbClr val="1E3A5F"/>
+                      </a:solidFill>
+                      <a:prstDash val="solid"/>
+                      <a:round/>
+                      <a:headEnd type="none" w="med" len="med"/>
+                      <a:tailEnd type="none" w="med" len="med"/>
+                    </a:lnB>
+                    <a:solidFill>
+                      <a:srgbClr val="0F2A4A"/>
+                    </a:solidFill>
+                  </a:tcPr>
+                </a:tc>
+                <a:tc>
+                  <a:txBody>
+                    <a:bodyPr/>
+                    <a:lstStyle/>
+                    <a:p>
+                      <a:pPr indent="0" marL="0">
+                        <a:buNone/>
+                      </a:pPr>
+                      <a:r>
+                        <a:rPr lang="en-US" sz="900" dirty="0">
+                          <a:solidFill>
+                            <a:srgbClr val="EAF6F3"/>
+                          </a:solidFill>
+                          <a:latin typeface="Courier New" pitchFamily="34" charset="0"/>
+                          <a:ea typeface="Courier New" pitchFamily="34" charset="-122"/>
+                          <a:cs typeface="Courier New" pitchFamily="34" charset="-120"/>
+                        </a:rPr>
+                        <a:t>{"competencia":"2026-04","codigo_uf":"35","sigla_uf":"SP","estado":"São Paulo","regiao":"Sudeste","leitos_sus_cadastrados":54722}</a:t>
+                      </a:r>
+                      <a:endParaRPr lang="en-US" sz="900" dirty="0">
+                        <a:latin typeface="Courier New" charset="0"/>
+                        <a:ea typeface="Courier New" charset="0"/>
+                        <a:cs typeface="Courier New" charset="0"/>
+                      </a:endParaRPr>
+                    </a:p>
+                  </a:txBody>
+                  <a:tcPr marL="91440" marR="91440" marT="45720" marB="45720" anchor="ctr">
+                    <a:lnL w="6350" cap="flat" cmpd="sng" algn="ctr">
+                      <a:solidFill>
+                        <a:srgbClr val="1E3A5F"/>
+                      </a:solidFill>
+                      <a:prstDash val="solid"/>
+                      <a:round/>
+                      <a:headEnd type="none" w="med" len="med"/>
+                      <a:tailEnd type="none" w="med" len="med"/>
+                    </a:lnL>
+                    <a:lnR w="6350" cap="flat" cmpd="sng" algn="ctr">
+                      <a:solidFill>
+                        <a:srgbClr val="1E3A5F"/>
+                      </a:solidFill>
+                      <a:prstDash val="solid"/>
+                      <a:round/>
+                      <a:headEnd type="none" w="med" len="med"/>
+                      <a:tailEnd type="none" w="med" len="med"/>
+                    </a:lnR>
+                    <a:lnT w="6350" cap="flat" cmpd="sng" algn="ctr">
+                      <a:solidFill>
+                        <a:srgbClr val="1E3A5F"/>
+                      </a:solidFill>
+                      <a:prstDash val="solid"/>
+                      <a:round/>
+                      <a:headEnd type="none" w="med" len="med"/>
+                      <a:tailEnd type="none" w="med" len="med"/>
+                    </a:lnT>
+                    <a:lnB w="6350" cap="flat" cmpd="sng" algn="ctr">
+                      <a:solidFill>
+                        <a:srgbClr val="1E3A5F"/>
+                      </a:solidFill>
+                      <a:prstDash val="solid"/>
+                      <a:round/>
+                      <a:headEnd type="none" w="med" len="med"/>
+                      <a:tailEnd type="none" w="med" len="med"/>
+                    </a:lnB>
+                    <a:solidFill>
+                      <a:srgbClr val="0F2A4A"/>
+                    </a:solidFill>
+                  </a:tcPr>
+                </a:tc>
+              </a:tr>
+            </a:tbl>
+          </a:graphicData>
+        </a:graphic>
+      </p:graphicFrame>
+      <p:sp>
+        <p:nvSpPr>
+          <p:cNvPr id="7" name="Text 4"/>
+          <p:cNvSpPr/>
+          <p:nvPr/>
+        </p:nvSpPr>
+        <p:spPr>
+          <a:xfrm>
+            <a:off x="457200" y="6172200"/>
+            <a:ext cx="11247120" cy="320040"/>
+          </a:xfrm>
+          <a:prstGeom prst="rect">
+            <a:avLst/>
+          </a:prstGeom>
+          <a:noFill/>
+          <a:ln/>
+        </p:spPr>
+        <p:txBody>
+          <a:bodyPr wrap="square" lIns="0" tIns="0" rIns="0" bIns="0" rtlCol="0" anchor="ctr"/>
+          <a:lstStyle/>
+          <a:p>
+            <a:pPr indent="0" marL="0">
+              <a:buNone/>
+            </a:pPr>
+            <a:r>
+              <a:rPr lang="en-US" sz="900" i="1" dirty="0">
                 <a:solidFill>
                   <a:srgbClr val="94A3B8"/>
                 </a:solidFill>
@@ -7369,335 +8182,15 @@
                 <a:ea typeface="Calibri" pitchFamily="34" charset="-122"/>
                 <a:cs typeface="Calibri" pitchFamily="34" charset="-120"/>
               </a:rPr>
-              <a:t>Tabela relacional LEITO360_SIH</a:t>
-            </a:r>
-            <a:endParaRPr lang="en-US" sz="1200" dirty="0"/>
-          </a:p>
-          <a:p>
-            <a:pPr algn="ctr" indent="0" marL="0">
-              <a:buNone/>
-            </a:pPr>
-            <a:r>
-              <a:rPr lang="en-US" sz="1050" dirty="0">
-                <a:solidFill>
-                  <a:srgbClr val="94A3B8"/>
-                </a:solidFill>
-                <a:latin typeface="Calibri" pitchFamily="34" charset="0"/>
-                <a:ea typeface="Calibri" pitchFamily="34" charset="-122"/>
-                <a:cs typeface="Calibri" pitchFamily="34" charset="-120"/>
-              </a:rPr>
-              <a:t>(SELECT * + COUNT)</a:t>
-            </a:r>
-            <a:endParaRPr lang="en-US" sz="1200" dirty="0"/>
-          </a:p>
-        </p:txBody>
-      </p:sp>
-      <p:sp>
-        <p:nvSpPr>
-          <p:cNvPr id="8" name="Shape 6"/>
-          <p:cNvSpPr/>
-          <p:nvPr/>
-        </p:nvSpPr>
-        <p:spPr>
-          <a:xfrm>
-            <a:off x="6080760" y="2103120"/>
-            <a:ext cx="5486400" cy="1965960"/>
-          </a:xfrm>
-          <a:prstGeom prst="roundRect">
-            <a:avLst>
-              <a:gd name="adj" fmla="val 2791"/>
-            </a:avLst>
-          </a:prstGeom>
-          <a:solidFill>
-            <a:srgbClr val="060D1E"/>
-          </a:solidFill>
-          <a:ln w="15875">
-            <a:solidFill>
-              <a:srgbClr val="F59E0B"/>
-            </a:solidFill>
-            <a:prstDash val="dash"/>
-          </a:ln>
-        </p:spPr>
-      </p:sp>
-      <p:sp>
-        <p:nvSpPr>
-          <p:cNvPr id="9" name="Text 7"/>
-          <p:cNvSpPr/>
-          <p:nvPr/>
-        </p:nvSpPr>
-        <p:spPr>
-          <a:xfrm>
-            <a:off x="6263640" y="2286000"/>
-            <a:ext cx="5120640" cy="1600200"/>
-          </a:xfrm>
-          <a:prstGeom prst="rect">
-            <a:avLst/>
-          </a:prstGeom>
-          <a:noFill/>
-          <a:ln/>
-        </p:spPr>
-        <p:txBody>
-          <a:bodyPr wrap="square" lIns="0" tIns="0" rIns="0" bIns="0" rtlCol="0" anchor="ctr"/>
-          <a:lstStyle/>
-          <a:p>
-            <a:pPr algn="ctr" indent="0" marL="0">
-              <a:buNone/>
-            </a:pPr>
-            <a:r>
-              <a:rPr lang="en-US" sz="1200" b="1" dirty="0">
-                <a:solidFill>
-                  <a:srgbClr val="F59E0B"/>
-                </a:solidFill>
-                <a:latin typeface="Calibri" pitchFamily="34" charset="0"/>
-                <a:ea typeface="Calibri" pitchFamily="34" charset="-122"/>
-                <a:cs typeface="Calibri" pitchFamily="34" charset="-120"/>
-              </a:rPr>
-              <a:t>PRINT PENDENTE
-</a:t>
-            </a:r>
-            <a:endParaRPr lang="en-US" sz="1200" dirty="0"/>
-          </a:p>
-          <a:p>
-            <a:pPr algn="ctr" indent="0" marL="0">
-              <a:buNone/>
-            </a:pPr>
-            <a:r>
-              <a:rPr lang="en-US" sz="1050" dirty="0">
-                <a:solidFill>
-                  <a:srgbClr val="94A3B8"/>
-                </a:solidFill>
-                <a:latin typeface="Calibri" pitchFamily="34" charset="0"/>
-                <a:ea typeface="Calibri" pitchFamily="34" charset="-122"/>
-                <a:cs typeface="Calibri" pitchFamily="34" charset="-120"/>
-              </a:rPr>
-              <a:t>Documento JSON LEITO360_CNES_JSON</a:t>
-            </a:r>
-            <a:endParaRPr lang="en-US" sz="1200" dirty="0"/>
-          </a:p>
-          <a:p>
-            <a:pPr algn="ctr" indent="0" marL="0">
-              <a:buNone/>
-            </a:pPr>
-            <a:r>
-              <a:rPr lang="en-US" sz="1050" dirty="0">
-                <a:solidFill>
-                  <a:srgbClr val="94A3B8"/>
-                </a:solidFill>
-                <a:latin typeface="Calibri" pitchFamily="34" charset="0"/>
-                <a:ea typeface="Calibri" pitchFamily="34" charset="-122"/>
-                <a:cs typeface="Calibri" pitchFamily="34" charset="-120"/>
-              </a:rPr>
-              <a:t>(doc IS JSON)</a:t>
-            </a:r>
-            <a:endParaRPr lang="en-US" sz="1200" dirty="0"/>
-          </a:p>
-        </p:txBody>
-      </p:sp>
-      <p:sp>
-        <p:nvSpPr>
-          <p:cNvPr id="10" name="Shape 8"/>
-          <p:cNvSpPr/>
-          <p:nvPr/>
-        </p:nvSpPr>
-        <p:spPr>
-          <a:xfrm>
-            <a:off x="457200" y="4206240"/>
-            <a:ext cx="5486400" cy="1965960"/>
-          </a:xfrm>
-          <a:prstGeom prst="roundRect">
-            <a:avLst>
-              <a:gd name="adj" fmla="val 2791"/>
-            </a:avLst>
-          </a:prstGeom>
-          <a:solidFill>
-            <a:srgbClr val="060D1E"/>
-          </a:solidFill>
-          <a:ln w="15875">
-            <a:solidFill>
-              <a:srgbClr val="F59E0B"/>
-            </a:solidFill>
-            <a:prstDash val="dash"/>
-          </a:ln>
-        </p:spPr>
-      </p:sp>
-      <p:sp>
-        <p:nvSpPr>
-          <p:cNvPr id="11" name="Text 9"/>
-          <p:cNvSpPr/>
-          <p:nvPr/>
-        </p:nvSpPr>
-        <p:spPr>
-          <a:xfrm>
-            <a:off x="640080" y="4389120"/>
-            <a:ext cx="5120640" cy="1600200"/>
-          </a:xfrm>
-          <a:prstGeom prst="rect">
-            <a:avLst/>
-          </a:prstGeom>
-          <a:noFill/>
-          <a:ln/>
-        </p:spPr>
-        <p:txBody>
-          <a:bodyPr wrap="square" lIns="0" tIns="0" rIns="0" bIns="0" rtlCol="0" anchor="ctr"/>
-          <a:lstStyle/>
-          <a:p>
-            <a:pPr algn="ctr" indent="0" marL="0">
-              <a:buNone/>
-            </a:pPr>
-            <a:r>
-              <a:rPr lang="en-US" sz="1200" b="1" dirty="0">
-                <a:solidFill>
-                  <a:srgbClr val="F59E0B"/>
-                </a:solidFill>
-                <a:latin typeface="Calibri" pitchFamily="34" charset="0"/>
-                <a:ea typeface="Calibri" pitchFamily="34" charset="-122"/>
-                <a:cs typeface="Calibri" pitchFamily="34" charset="-120"/>
-              </a:rPr>
-              <a:t>PRINT PENDENTE
-</a:t>
-            </a:r>
-            <a:endParaRPr lang="en-US" sz="1200" dirty="0"/>
-          </a:p>
-          <a:p>
-            <a:pPr algn="ctr" indent="0" marL="0">
-              <a:buNone/>
-            </a:pPr>
-            <a:r>
-              <a:rPr lang="en-US" sz="1050" dirty="0">
-                <a:solidFill>
-                  <a:srgbClr val="94A3B8"/>
-                </a:solidFill>
-                <a:latin typeface="Calibri" pitchFamily="34" charset="0"/>
-                <a:ea typeface="Calibri" pitchFamily="34" charset="-122"/>
-                <a:cs typeface="Calibri" pitchFamily="34" charset="-120"/>
-              </a:rPr>
-              <a:t>External Table LEITO360_POPULACAO_EXT</a:t>
-            </a:r>
-            <a:endParaRPr lang="en-US" sz="1200" dirty="0"/>
-          </a:p>
-          <a:p>
-            <a:pPr algn="ctr" indent="0" marL="0">
-              <a:buNone/>
-            </a:pPr>
-            <a:r>
-              <a:rPr lang="en-US" sz="1050" dirty="0">
-                <a:solidFill>
-                  <a:srgbClr val="94A3B8"/>
-                </a:solidFill>
-                <a:latin typeface="Calibri" pitchFamily="34" charset="0"/>
-                <a:ea typeface="Calibri" pitchFamily="34" charset="-122"/>
-                <a:cs typeface="Calibri" pitchFamily="34" charset="-120"/>
-              </a:rPr>
-              <a:t>(SELECT COUNT/SUM)</a:t>
-            </a:r>
-            <a:endParaRPr lang="en-US" sz="1200" dirty="0"/>
-          </a:p>
-        </p:txBody>
-      </p:sp>
-      <p:sp>
-        <p:nvSpPr>
-          <p:cNvPr id="12" name="Shape 10"/>
-          <p:cNvSpPr/>
-          <p:nvPr/>
-        </p:nvSpPr>
-        <p:spPr>
-          <a:xfrm>
-            <a:off x="6080760" y="4206240"/>
-            <a:ext cx="5486400" cy="1965960"/>
-          </a:xfrm>
-          <a:prstGeom prst="roundRect">
-            <a:avLst>
-              <a:gd name="adj" fmla="val 2791"/>
-            </a:avLst>
-          </a:prstGeom>
-          <a:solidFill>
-            <a:srgbClr val="060D1E"/>
-          </a:solidFill>
-          <a:ln w="15875">
-            <a:solidFill>
-              <a:srgbClr val="F59E0B"/>
-            </a:solidFill>
-            <a:prstDash val="dash"/>
-          </a:ln>
-        </p:spPr>
-      </p:sp>
-      <p:sp>
-        <p:nvSpPr>
-          <p:cNvPr id="13" name="Text 11"/>
-          <p:cNvSpPr/>
-          <p:nvPr/>
-        </p:nvSpPr>
-        <p:spPr>
-          <a:xfrm>
-            <a:off x="6263640" y="4389120"/>
-            <a:ext cx="5120640" cy="1600200"/>
-          </a:xfrm>
-          <a:prstGeom prst="rect">
-            <a:avLst/>
-          </a:prstGeom>
-          <a:noFill/>
-          <a:ln/>
-        </p:spPr>
-        <p:txBody>
-          <a:bodyPr wrap="square" lIns="0" tIns="0" rIns="0" bIns="0" rtlCol="0" anchor="ctr"/>
-          <a:lstStyle/>
-          <a:p>
-            <a:pPr algn="ctr" indent="0" marL="0">
-              <a:buNone/>
-            </a:pPr>
-            <a:r>
-              <a:rPr lang="en-US" sz="1200" b="1" dirty="0">
-                <a:solidFill>
-                  <a:srgbClr val="F59E0B"/>
-                </a:solidFill>
-                <a:latin typeface="Calibri" pitchFamily="34" charset="0"/>
-                <a:ea typeface="Calibri" pitchFamily="34" charset="-122"/>
-                <a:cs typeface="Calibri" pitchFamily="34" charset="-120"/>
-              </a:rPr>
-              <a:t>PRINT PENDENTE
-</a:t>
-            </a:r>
-            <a:endParaRPr lang="en-US" sz="1200" dirty="0"/>
-          </a:p>
-          <a:p>
-            <a:pPr algn="ctr" indent="0" marL="0">
-              <a:buNone/>
-            </a:pPr>
-            <a:r>
-              <a:rPr lang="en-US" sz="1050" dirty="0">
-                <a:solidFill>
-                  <a:srgbClr val="94A3B8"/>
-                </a:solidFill>
-                <a:latin typeface="Calibri" pitchFamily="34" charset="0"/>
-                <a:ea typeface="Calibri" pitchFamily="34" charset="-122"/>
-                <a:cs typeface="Calibri" pitchFamily="34" charset="-120"/>
-              </a:rPr>
-              <a:t>View VW_LEITO360_ANALITICO</a:t>
-            </a:r>
-            <a:endParaRPr lang="en-US" sz="1200" dirty="0"/>
-          </a:p>
-          <a:p>
-            <a:pPr algn="ctr" indent="0" marL="0">
-              <a:buNone/>
-            </a:pPr>
-            <a:r>
-              <a:rPr lang="en-US" sz="1050" dirty="0">
-                <a:solidFill>
-                  <a:srgbClr val="94A3B8"/>
-                </a:solidFill>
-                <a:latin typeface="Calibri" pitchFamily="34" charset="0"/>
-                <a:ea typeface="Calibri" pitchFamily="34" charset="-122"/>
-                <a:cs typeface="Calibri" pitchFamily="34" charset="-120"/>
-              </a:rPr>
-              <a:t>(consulta integrada)</a:t>
-            </a:r>
-            <a:endParaRPr lang="en-US" sz="1200" dirty="0"/>
-          </a:p>
-        </p:txBody>
-      </p:sp>
-      <p:sp>
-        <p:nvSpPr>
-          <p:cNvPr id="14" name="Text 12"/>
+              <a:t>Executado por MOVIESTREAM no SQL Worksheet do Database Actions. Ambiente temporário do LiveLabs (expira após a reserva) — usado apenas para gerar estas evidências, não é a infraestrutura definitiva do projeto.</a:t>
+            </a:r>
+            <a:endParaRPr lang="en-US" sz="900" dirty="0"/>
+          </a:p>
+        </p:txBody>
+      </p:sp>
+      <p:sp>
+        <p:nvSpPr>
+          <p:cNvPr id="8" name="Text 5"/>
           <p:cNvSpPr/>
           <p:nvPr/>
         </p:nvSpPr>
@@ -7736,7 +8229,7 @@
       </p:sp>
       <p:sp>
         <p:nvSpPr>
-          <p:cNvPr id="15" name="Text 13"/>
+          <p:cNvPr id="9" name="Text 6"/>
           <p:cNvSpPr/>
           <p:nvPr/>
         </p:nvSpPr>
@@ -7892,7 +8385,7 @@
                 <a:ea typeface="Cambria" pitchFamily="34" charset="-122"/>
                 <a:cs typeface="Cambria" pitchFamily="34" charset="-120"/>
               </a:rPr>
-              <a:t>Evidências visuais — Select AI (sem expor credenciais)</a:t>
+              <a:t>Select AI — perfil real criado, execução bloqueada por infraestrutura</a:t>
             </a:r>
             <a:endParaRPr lang="en-US" sz="2800" dirty="0"/>
           </a:p>
@@ -7931,7 +8424,7 @@
                 <a:ea typeface="Calibri" pitchFamily="34" charset="-122"/>
                 <a:cs typeface="Calibri" pitchFamily="34" charset="-120"/>
               </a:rPr>
-              <a:t>Print da configuração do perfil, de um prompt real e do SQL + resultado gerados.</a:t>
+              <a:t>Diagnóstico técnico completo em docs/evidencias/select_ai_perguntas.md — nada aqui foi inventado ou simulado.</a:t>
             </a:r>
             <a:endParaRPr lang="en-US" sz="1400" dirty="0"/>
           </a:p>
@@ -7946,22 +8439,29 @@
         <p:spPr>
           <a:xfrm>
             <a:off x="457200" y="2103120"/>
-            <a:ext cx="5486400" cy="1965960"/>
+            <a:ext cx="11247120" cy="914400"/>
           </a:xfrm>
           <a:prstGeom prst="roundRect">
             <a:avLst>
-              <a:gd name="adj" fmla="val 2791"/>
+              <a:gd name="adj" fmla="val 8000"/>
             </a:avLst>
           </a:prstGeom>
           <a:solidFill>
-            <a:srgbClr val="060D1E"/>
+            <a:srgbClr val="0F2A4A"/>
           </a:solidFill>
-          <a:ln w="15875">
+          <a:ln w="12700">
             <a:solidFill>
-              <a:srgbClr val="F59E0B"/>
+              <a:srgbClr val="1E3A5F"/>
             </a:solidFill>
-            <a:prstDash val="dash"/>
+            <a:prstDash val="solid"/>
           </a:ln>
+          <a:effectLst>
+            <a:outerShdw sx="100000" sy="100000" kx="0" ky="0" algn="bl" rotWithShape="0" blurRad="101600" dist="38100" dir="5400000">
+              <a:srgbClr val="000000">
+                <a:alpha val="35000"/>
+              </a:srgbClr>
+            </a:outerShdw>
+          </a:effectLst>
         </p:spPr>
       </p:sp>
       <p:sp>
@@ -7972,143 +8472,387 @@
         </p:nvSpPr>
         <p:spPr>
           <a:xfrm>
-            <a:off x="640080" y="2286000"/>
-            <a:ext cx="5120640" cy="1600200"/>
-          </a:xfrm>
-          <a:prstGeom prst="rect">
-            <a:avLst/>
-          </a:prstGeom>
-          <a:noFill/>
-          <a:ln/>
-        </p:spPr>
-        <p:txBody>
-          <a:bodyPr wrap="square" lIns="0" tIns="0" rIns="0" bIns="0" rtlCol="0" anchor="ctr"/>
-          <a:lstStyle/>
-          <a:p>
-            <a:pPr algn="ctr" indent="0" marL="0">
+            <a:off x="685800" y="2212848"/>
+            <a:ext cx="10789920" cy="274320"/>
+          </a:xfrm>
+          <a:prstGeom prst="rect">
+            <a:avLst/>
+          </a:prstGeom>
+          <a:noFill/>
+          <a:ln/>
+        </p:spPr>
+        <p:txBody>
+          <a:bodyPr wrap="square" lIns="0" tIns="0" rIns="0" bIns="0" rtlCol="0" anchor="ctr"/>
+          <a:lstStyle/>
+          <a:p>
+            <a:pPr indent="0" marL="0">
               <a:buNone/>
             </a:pPr>
             <a:r>
               <a:rPr lang="en-US" sz="1200" b="1" dirty="0">
                 <a:solidFill>
-                  <a:srgbClr val="F59E0B"/>
-                </a:solidFill>
-                <a:latin typeface="Calibri" pitchFamily="34" charset="0"/>
-                <a:ea typeface="Calibri" pitchFamily="34" charset="-122"/>
-                <a:cs typeface="Calibri" pitchFamily="34" charset="-120"/>
-              </a:rPr>
-              <a:t>PRINT PENDENTE
-</a:t>
+                  <a:srgbClr val="14B8A6"/>
+                </a:solidFill>
+                <a:latin typeface="Calibri" pitchFamily="34" charset="0"/>
+                <a:ea typeface="Calibri" pitchFamily="34" charset="-122"/>
+                <a:cs typeface="Calibri" pitchFamily="34" charset="-120"/>
+              </a:rPr>
+              <a:t>✓ Implementado e confirmado</a:t>
             </a:r>
             <a:endParaRPr lang="en-US" sz="1200" dirty="0"/>
           </a:p>
-          <a:p>
-            <a:pPr algn="ctr" indent="0" marL="0">
-              <a:buNone/>
-            </a:pPr>
-            <a:r>
-              <a:rPr lang="en-US" sz="1050" dirty="0">
-                <a:solidFill>
-                  <a:srgbClr val="94A3B8"/>
-                </a:solidFill>
-                <a:latin typeface="Calibri" pitchFamily="34" charset="0"/>
-                <a:ea typeface="Calibri" pitchFamily="34" charset="-122"/>
-                <a:cs typeface="Calibri" pitchFamily="34" charset="-120"/>
-              </a:rPr>
-              <a:t>Configuração do perfil LEITO360_AI</a:t>
-            </a:r>
-            <a:endParaRPr lang="en-US" sz="1200" dirty="0"/>
-          </a:p>
-          <a:p>
-            <a:pPr algn="ctr" indent="0" marL="0">
-              <a:buNone/>
-            </a:pPr>
-            <a:r>
-              <a:rPr lang="en-US" sz="1050" dirty="0">
-                <a:solidFill>
-                  <a:srgbClr val="94A3B8"/>
-                </a:solidFill>
-                <a:latin typeface="Calibri" pitchFamily="34" charset="0"/>
-                <a:ea typeface="Calibri" pitchFamily="34" charset="-122"/>
-                <a:cs typeface="Calibri" pitchFamily="34" charset="-120"/>
-              </a:rPr>
-              <a:t>(sem usuário/senha visíveis)</a:t>
-            </a:r>
-            <a:endParaRPr lang="en-US" sz="1200" dirty="0"/>
-          </a:p>
-        </p:txBody>
-      </p:sp>
-      <p:sp>
-        <p:nvSpPr>
-          <p:cNvPr id="8" name="Shape 6"/>
-          <p:cNvSpPr/>
-          <p:nvPr/>
-        </p:nvSpPr>
-        <p:spPr>
-          <a:xfrm>
-            <a:off x="6080760" y="2103120"/>
-            <a:ext cx="5486400" cy="1965960"/>
+        </p:txBody>
+      </p:sp>
+      <p:sp>
+        <p:nvSpPr>
+          <p:cNvPr id="8" name="Text 6"/>
+          <p:cNvSpPr/>
+          <p:nvPr/>
+        </p:nvSpPr>
+        <p:spPr>
+          <a:xfrm>
+            <a:off x="685800" y="2468880"/>
+            <a:ext cx="10789920" cy="502920"/>
+          </a:xfrm>
+          <a:prstGeom prst="rect">
+            <a:avLst/>
+          </a:prstGeom>
+          <a:noFill/>
+          <a:ln/>
+        </p:spPr>
+        <p:txBody>
+          <a:bodyPr wrap="square" lIns="0" tIns="0" rIns="0" bIns="0" rtlCol="0" anchor="ctr"/>
+          <a:lstStyle/>
+          <a:p>
+            <a:pPr indent="0" marL="0">
+              <a:buNone/>
+            </a:pPr>
+            <a:r>
+              <a:rPr lang="en-US" sz="1000" dirty="0">
+                <a:solidFill>
+                  <a:srgbClr val="EAF6F3"/>
+                </a:solidFill>
+                <a:latin typeface="Calibri" pitchFamily="34" charset="0"/>
+                <a:ea typeface="Calibri" pitchFamily="34" charset="-122"/>
+                <a:cs typeface="Calibri" pitchFamily="34" charset="-120"/>
+              </a:rPr>
+              <a:t>Perfil LEITO360_AI criado com sucesso (credencial nativa AI_CREDENTIAL indicada pela Task 2 do workshop, não OCI$RESOURCE_PRINCIPAL); DROP/CREATE_PROFILE respondem em ~1-2s; as 5 perguntas de negócio estão prontas em oracle/sql/08_select_ai_perguntas.sql.</a:t>
+            </a:r>
+            <a:endParaRPr lang="en-US" sz="1000" dirty="0"/>
+          </a:p>
+        </p:txBody>
+      </p:sp>
+      <p:sp>
+        <p:nvSpPr>
+          <p:cNvPr id="9" name="Shape 7"/>
+          <p:cNvSpPr/>
+          <p:nvPr/>
+        </p:nvSpPr>
+        <p:spPr>
+          <a:xfrm>
+            <a:off x="457200" y="3154680"/>
+            <a:ext cx="11247120" cy="2286000"/>
           </a:xfrm>
           <a:prstGeom prst="roundRect">
             <a:avLst>
-              <a:gd name="adj" fmla="val 2791"/>
+              <a:gd name="adj" fmla="val 3200"/>
             </a:avLst>
           </a:prstGeom>
           <a:solidFill>
-            <a:srgbClr val="060D1E"/>
+            <a:srgbClr val="2A1810"/>
           </a:solidFill>
-          <a:ln w="15875">
+          <a:ln w="12700">
             <a:solidFill>
-              <a:srgbClr val="F59E0B"/>
+              <a:srgbClr val="1E3A5F"/>
             </a:solidFill>
-            <a:prstDash val="dash"/>
+            <a:prstDash val="solid"/>
           </a:ln>
-        </p:spPr>
-      </p:sp>
-      <p:sp>
-        <p:nvSpPr>
-          <p:cNvPr id="9" name="Text 7"/>
-          <p:cNvSpPr/>
-          <p:nvPr/>
-        </p:nvSpPr>
-        <p:spPr>
-          <a:xfrm>
-            <a:off x="6263640" y="2286000"/>
-            <a:ext cx="5120640" cy="1600200"/>
-          </a:xfrm>
-          <a:prstGeom prst="rect">
-            <a:avLst/>
-          </a:prstGeom>
-          <a:noFill/>
-          <a:ln/>
-        </p:spPr>
-        <p:txBody>
-          <a:bodyPr wrap="square" lIns="0" tIns="0" rIns="0" bIns="0" rtlCol="0" anchor="ctr"/>
-          <a:lstStyle/>
-          <a:p>
-            <a:pPr algn="ctr" indent="0" marL="0">
+          <a:effectLst>
+            <a:outerShdw sx="100000" sy="100000" kx="0" ky="0" algn="bl" rotWithShape="0" blurRad="101600" dist="38100" dir="5400000">
+              <a:srgbClr val="000000">
+                <a:alpha val="35000"/>
+              </a:srgbClr>
+            </a:outerShdw>
+          </a:effectLst>
+        </p:spPr>
+      </p:sp>
+      <p:sp>
+        <p:nvSpPr>
+          <p:cNvPr id="10" name="Text 8"/>
+          <p:cNvSpPr/>
+          <p:nvPr/>
+        </p:nvSpPr>
+        <p:spPr>
+          <a:xfrm>
+            <a:off x="685800" y="3273552"/>
+            <a:ext cx="10789920" cy="274320"/>
+          </a:xfrm>
+          <a:prstGeom prst="rect">
+            <a:avLst/>
+          </a:prstGeom>
+          <a:noFill/>
+          <a:ln/>
+        </p:spPr>
+        <p:txBody>
+          <a:bodyPr wrap="square" lIns="0" tIns="0" rIns="0" bIns="0" rtlCol="0" anchor="ctr"/>
+          <a:lstStyle/>
+          <a:p>
+            <a:pPr indent="0" marL="0">
               <a:buNone/>
             </a:pPr>
             <a:r>
               <a:rPr lang="en-US" sz="1200" b="1" dirty="0">
                 <a:solidFill>
-                  <a:srgbClr val="F59E0B"/>
-                </a:solidFill>
-                <a:latin typeface="Calibri" pitchFamily="34" charset="0"/>
-                <a:ea typeface="Calibri" pitchFamily="34" charset="-122"/>
-                <a:cs typeface="Calibri" pitchFamily="34" charset="-120"/>
-              </a:rPr>
-              <a:t>PRINT PENDENTE
-</a:t>
+                  <a:srgbClr val="EF4444"/>
+                </a:solidFill>
+                <a:latin typeface="Calibri" pitchFamily="34" charset="0"/>
+                <a:ea typeface="Calibri" pitchFamily="34" charset="-122"/>
+                <a:cs typeface="Calibri" pitchFamily="34" charset="-120"/>
+              </a:rPr>
+              <a:t>✗ Bloqueado nesta execução</a:t>
             </a:r>
             <a:endParaRPr lang="en-US" sz="1200" dirty="0"/>
           </a:p>
-          <a:p>
-            <a:pPr algn="ctr" indent="0" marL="0">
-              <a:buNone/>
-            </a:pPr>
-            <a:r>
-              <a:rPr lang="en-US" sz="1050" dirty="0">
+        </p:txBody>
+      </p:sp>
+      <p:sp>
+        <p:nvSpPr>
+          <p:cNvPr id="11" name="Text 9"/>
+          <p:cNvSpPr/>
+          <p:nvPr/>
+        </p:nvSpPr>
+        <p:spPr>
+          <a:xfrm>
+            <a:off x="685800" y="3611880"/>
+            <a:ext cx="10789920" cy="457200"/>
+          </a:xfrm>
+          <a:prstGeom prst="rect">
+            <a:avLst/>
+          </a:prstGeom>
+          <a:noFill/>
+          <a:ln/>
+        </p:spPr>
+        <p:txBody>
+          <a:bodyPr wrap="square" lIns="0" tIns="0" rIns="0" bIns="0" rtlCol="0" anchor="ctr"/>
+          <a:lstStyle/>
+          <a:p>
+            <a:pPr indent="0" marL="0">
+              <a:buNone/>
+            </a:pPr>
+            <a:r>
+              <a:rPr lang="en-US" sz="1000" dirty="0">
+                <a:solidFill>
+                  <a:srgbClr val="EF4444"/>
+                </a:solidFill>
+                <a:latin typeface="Calibri" pitchFamily="34" charset="0"/>
+                <a:ea typeface="Calibri" pitchFamily="34" charset="-122"/>
+                <a:cs typeface="Calibri" pitchFamily="34" charset="-120"/>
+              </a:rPr>
+              <a:t>• </a:t>
+            </a:r>
+            <a:pPr indent="0" marL="0">
+              <a:buNone/>
+            </a:pPr>
+            <a:r>
+              <a:rPr lang="en-US" sz="1000" dirty="0">
+                <a:solidFill>
+                  <a:srgbClr val="EAF6F3"/>
+                </a:solidFill>
+                <a:latin typeface="Calibri" pitchFamily="34" charset="0"/>
+                <a:ea typeface="Calibri" pitchFamily="34" charset="-122"/>
+                <a:cs typeface="Calibri" pitchFamily="34" charset="-120"/>
+              </a:rPr>
+              <a:t>Toda chamada a DBMS_CLOUD_AI.GENERATE (chat, showsql) ficou pendente 3-10 min e falhou — testado 4x, em 2 worksheets, com prompts diferentes.</a:t>
+            </a:r>
+            <a:endParaRPr lang="en-US" sz="1000" dirty="0"/>
+          </a:p>
+        </p:txBody>
+      </p:sp>
+      <p:sp>
+        <p:nvSpPr>
+          <p:cNvPr id="12" name="Text 10"/>
+          <p:cNvSpPr/>
+          <p:nvPr/>
+        </p:nvSpPr>
+        <p:spPr>
+          <a:xfrm>
+            <a:off x="685800" y="4050792"/>
+            <a:ext cx="10789920" cy="457200"/>
+          </a:xfrm>
+          <a:prstGeom prst="rect">
+            <a:avLst/>
+          </a:prstGeom>
+          <a:noFill/>
+          <a:ln/>
+        </p:spPr>
+        <p:txBody>
+          <a:bodyPr wrap="square" lIns="0" tIns="0" rIns="0" bIns="0" rtlCol="0" anchor="ctr"/>
+          <a:lstStyle/>
+          <a:p>
+            <a:pPr indent="0" marL="0">
+              <a:buNone/>
+            </a:pPr>
+            <a:r>
+              <a:rPr lang="en-US" sz="1000" dirty="0">
+                <a:solidFill>
+                  <a:srgbClr val="EF4444"/>
+                </a:solidFill>
+                <a:latin typeface="Calibri" pitchFamily="34" charset="0"/>
+                <a:ea typeface="Calibri" pitchFamily="34" charset="-122"/>
+                <a:cs typeface="Calibri" pitchFamily="34" charset="-120"/>
+              </a:rPr>
+              <a:t>• </a:t>
+            </a:r>
+            <a:pPr indent="0" marL="0">
+              <a:buNone/>
+            </a:pPr>
+            <a:r>
+              <a:rPr lang="en-US" sz="1000" dirty="0">
+                <a:solidFill>
+                  <a:srgbClr val="EAF6F3"/>
+                </a:solidFill>
+                <a:latin typeface="Calibri" pitchFamily="34" charset="0"/>
+                <a:ea typeface="Calibri" pitchFamily="34" charset="-122"/>
+                <a:cs typeface="Calibri" pitchFamily="34" charset="-120"/>
+              </a:rPr>
+              <a:t>1ª tentativa (credencial OCI$RESOURCE_PRINCIPAL): erro imediato ORA-20404 com URL contendo "my$cloud_domain" não substituído — bug de configuração do sandbox, não do LEITO360.</a:t>
+            </a:r>
+            <a:endParaRPr lang="en-US" sz="1000" dirty="0"/>
+          </a:p>
+        </p:txBody>
+      </p:sp>
+      <p:sp>
+        <p:nvSpPr>
+          <p:cNvPr id="13" name="Text 11"/>
+          <p:cNvSpPr/>
+          <p:nvPr/>
+        </p:nvSpPr>
+        <p:spPr>
+          <a:xfrm>
+            <a:off x="685800" y="4489704"/>
+            <a:ext cx="10789920" cy="457200"/>
+          </a:xfrm>
+          <a:prstGeom prst="rect">
+            <a:avLst/>
+          </a:prstGeom>
+          <a:noFill/>
+          <a:ln/>
+        </p:spPr>
+        <p:txBody>
+          <a:bodyPr wrap="square" lIns="0" tIns="0" rIns="0" bIns="0" rtlCol="0" anchor="ctr"/>
+          <a:lstStyle/>
+          <a:p>
+            <a:pPr indent="0" marL="0">
+              <a:buNone/>
+            </a:pPr>
+            <a:r>
+              <a:rPr lang="en-US" sz="1000" dirty="0">
+                <a:solidFill>
+                  <a:srgbClr val="EF4444"/>
+                </a:solidFill>
+                <a:latin typeface="Calibri" pitchFamily="34" charset="0"/>
+                <a:ea typeface="Calibri" pitchFamily="34" charset="-122"/>
+                <a:cs typeface="Calibri" pitchFamily="34" charset="-120"/>
+              </a:rPr>
+              <a:t>• </a:t>
+            </a:r>
+            <a:pPr indent="0" marL="0">
+              <a:buNone/>
+            </a:pPr>
+            <a:r>
+              <a:rPr lang="en-US" sz="1000" dirty="0">
+                <a:solidFill>
+                  <a:srgbClr val="EAF6F3"/>
+                </a:solidFill>
+                <a:latin typeface="Calibri" pitchFamily="34" charset="0"/>
+                <a:ea typeface="Calibri" pitchFamily="34" charset="-122"/>
+                <a:cs typeface="Calibri" pitchFamily="34" charset="-120"/>
+              </a:rPr>
+              <a:t>2ª tentativa (credencial correta AI_CREDENTIAL, indicada pelo próprio workshop): sem erro imediato, mas timeout após vários minutos, sem corpo de erro recuperável.</a:t>
+            </a:r>
+            <a:endParaRPr lang="en-US" sz="1000" dirty="0"/>
+          </a:p>
+        </p:txBody>
+      </p:sp>
+      <p:sp>
+        <p:nvSpPr>
+          <p:cNvPr id="14" name="Text 12"/>
+          <p:cNvSpPr/>
+          <p:nvPr/>
+        </p:nvSpPr>
+        <p:spPr>
+          <a:xfrm>
+            <a:off x="685800" y="4928616"/>
+            <a:ext cx="10789920" cy="457200"/>
+          </a:xfrm>
+          <a:prstGeom prst="rect">
+            <a:avLst/>
+          </a:prstGeom>
+          <a:noFill/>
+          <a:ln/>
+        </p:spPr>
+        <p:txBody>
+          <a:bodyPr wrap="square" lIns="0" tIns="0" rIns="0" bIns="0" rtlCol="0" anchor="ctr"/>
+          <a:lstStyle/>
+          <a:p>
+            <a:pPr indent="0" marL="0">
+              <a:buNone/>
+            </a:pPr>
+            <a:r>
+              <a:rPr lang="en-US" sz="1000" dirty="0">
+                <a:solidFill>
+                  <a:srgbClr val="EF4444"/>
+                </a:solidFill>
+                <a:latin typeface="Calibri" pitchFamily="34" charset="0"/>
+                <a:ea typeface="Calibri" pitchFamily="34" charset="-122"/>
+                <a:cs typeface="Calibri" pitchFamily="34" charset="-120"/>
+              </a:rPr>
+              <a:t>• </a:t>
+            </a:r>
+            <a:pPr indent="0" marL="0">
+              <a:buNone/>
+            </a:pPr>
+            <a:r>
+              <a:rPr lang="en-US" sz="1000" dirty="0">
+                <a:solidFill>
+                  <a:srgbClr val="EAF6F3"/>
+                </a:solidFill>
+                <a:latin typeface="Calibri" pitchFamily="34" charset="0"/>
+                <a:ea typeface="Calibri" pitchFamily="34" charset="-122"/>
+                <a:cs typeface="Calibri" pitchFamily="34" charset="-120"/>
+              </a:rPr>
+              <a:t>Uma consulta SQL comum (SELECT 1 FROM dual) no mesmo worksheet respondeu em milissegundos — confirma que o banco está saudável; o problema é isolado ao serviço de inferência do OCI Generative AI.</a:t>
+            </a:r>
+            <a:endParaRPr lang="en-US" sz="1000" dirty="0"/>
+          </a:p>
+        </p:txBody>
+      </p:sp>
+      <p:sp>
+        <p:nvSpPr>
+          <p:cNvPr id="15" name="Text 13"/>
+          <p:cNvSpPr/>
+          <p:nvPr/>
+        </p:nvSpPr>
+        <p:spPr>
+          <a:xfrm>
+            <a:off x="457200" y="5577840"/>
+            <a:ext cx="11247120" cy="365760"/>
+          </a:xfrm>
+          <a:prstGeom prst="rect">
+            <a:avLst/>
+          </a:prstGeom>
+          <a:noFill/>
+          <a:ln/>
+        </p:spPr>
+        <p:txBody>
+          <a:bodyPr wrap="square" lIns="0" tIns="0" rIns="0" bIns="0" rtlCol="0" anchor="ctr"/>
+          <a:lstStyle/>
+          <a:p>
+            <a:pPr indent="0" marL="0">
+              <a:buNone/>
+            </a:pPr>
+            <a:r>
+              <a:rPr lang="en-US" sz="1000" i="1" dirty="0">
                 <a:solidFill>
                   <a:srgbClr val="94A3B8"/>
                 </a:solidFill>
@@ -8116,200 +8860,15 @@
                 <a:ea typeface="Calibri" pitchFamily="34" charset="-122"/>
                 <a:cs typeface="Calibri" pitchFamily="34" charset="-120"/>
               </a:rPr>
-              <a:t>Prompt real (uma das 5 perguntas)</a:t>
-            </a:r>
-            <a:endParaRPr lang="en-US" sz="1200" dirty="0"/>
-          </a:p>
-          <a:p>
-            <a:pPr algn="ctr" indent="0" marL="0">
-              <a:buNone/>
-            </a:pPr>
-            <a:r>
-              <a:rPr lang="en-US" sz="1050" dirty="0">
-                <a:solidFill>
-                  <a:srgbClr val="94A3B8"/>
-                </a:solidFill>
-                <a:latin typeface="Calibri" pitchFamily="34" charset="0"/>
-                <a:ea typeface="Calibri" pitchFamily="34" charset="-122"/>
-                <a:cs typeface="Calibri" pitchFamily="34" charset="-120"/>
-              </a:rPr>
-              <a:t>+ ação SHOWSQL</a:t>
-            </a:r>
-            <a:endParaRPr lang="en-US" sz="1200" dirty="0"/>
-          </a:p>
-        </p:txBody>
-      </p:sp>
-      <p:sp>
-        <p:nvSpPr>
-          <p:cNvPr id="10" name="Shape 8"/>
-          <p:cNvSpPr/>
-          <p:nvPr/>
-        </p:nvSpPr>
-        <p:spPr>
-          <a:xfrm>
-            <a:off x="457200" y="4206240"/>
-            <a:ext cx="5486400" cy="1965960"/>
-          </a:xfrm>
-          <a:prstGeom prst="roundRect">
-            <a:avLst>
-              <a:gd name="adj" fmla="val 2791"/>
-            </a:avLst>
-          </a:prstGeom>
-          <a:solidFill>
-            <a:srgbClr val="060D1E"/>
-          </a:solidFill>
-          <a:ln w="15875">
-            <a:solidFill>
-              <a:srgbClr val="F59E0B"/>
-            </a:solidFill>
-            <a:prstDash val="dash"/>
-          </a:ln>
-        </p:spPr>
-      </p:sp>
-      <p:sp>
-        <p:nvSpPr>
-          <p:cNvPr id="11" name="Text 9"/>
-          <p:cNvSpPr/>
-          <p:nvPr/>
-        </p:nvSpPr>
-        <p:spPr>
-          <a:xfrm>
-            <a:off x="640080" y="4389120"/>
-            <a:ext cx="5120640" cy="1600200"/>
-          </a:xfrm>
-          <a:prstGeom prst="rect">
-            <a:avLst/>
-          </a:prstGeom>
-          <a:noFill/>
-          <a:ln/>
-        </p:spPr>
-        <p:txBody>
-          <a:bodyPr wrap="square" lIns="0" tIns="0" rIns="0" bIns="0" rtlCol="0" anchor="ctr"/>
-          <a:lstStyle/>
-          <a:p>
-            <a:pPr algn="ctr" indent="0" marL="0">
-              <a:buNone/>
-            </a:pPr>
-            <a:r>
-              <a:rPr lang="en-US" sz="1200" b="1" dirty="0">
-                <a:solidFill>
-                  <a:srgbClr val="F59E0B"/>
-                </a:solidFill>
-                <a:latin typeface="Calibri" pitchFamily="34" charset="0"/>
-                <a:ea typeface="Calibri" pitchFamily="34" charset="-122"/>
-                <a:cs typeface="Calibri" pitchFamily="34" charset="-120"/>
-              </a:rPr>
-              <a:t>PRINT PENDENTE
-</a:t>
-            </a:r>
-            <a:endParaRPr lang="en-US" sz="1200" dirty="0"/>
-          </a:p>
-          <a:p>
-            <a:pPr algn="ctr" indent="0" marL="0">
-              <a:buNone/>
-            </a:pPr>
-            <a:r>
-              <a:rPr lang="en-US" sz="1050" dirty="0">
-                <a:solidFill>
-                  <a:srgbClr val="94A3B8"/>
-                </a:solidFill>
-                <a:latin typeface="Calibri" pitchFamily="34" charset="0"/>
-                <a:ea typeface="Calibri" pitchFamily="34" charset="-122"/>
-                <a:cs typeface="Calibri" pitchFamily="34" charset="-120"/>
-              </a:rPr>
-              <a:t>SQL gerado pelo Select AI</a:t>
-            </a:r>
-            <a:endParaRPr lang="en-US" sz="1200" dirty="0"/>
-          </a:p>
-        </p:txBody>
-      </p:sp>
-      <p:sp>
-        <p:nvSpPr>
-          <p:cNvPr id="12" name="Shape 10"/>
-          <p:cNvSpPr/>
-          <p:nvPr/>
-        </p:nvSpPr>
-        <p:spPr>
-          <a:xfrm>
-            <a:off x="6080760" y="4206240"/>
-            <a:ext cx="5486400" cy="1965960"/>
-          </a:xfrm>
-          <a:prstGeom prst="roundRect">
-            <a:avLst>
-              <a:gd name="adj" fmla="val 2791"/>
-            </a:avLst>
-          </a:prstGeom>
-          <a:solidFill>
-            <a:srgbClr val="060D1E"/>
-          </a:solidFill>
-          <a:ln w="15875">
-            <a:solidFill>
-              <a:srgbClr val="F59E0B"/>
-            </a:solidFill>
-            <a:prstDash val="dash"/>
-          </a:ln>
-        </p:spPr>
-      </p:sp>
-      <p:sp>
-        <p:nvSpPr>
-          <p:cNvPr id="13" name="Text 11"/>
-          <p:cNvSpPr/>
-          <p:nvPr/>
-        </p:nvSpPr>
-        <p:spPr>
-          <a:xfrm>
-            <a:off x="6263640" y="4389120"/>
-            <a:ext cx="5120640" cy="1600200"/>
-          </a:xfrm>
-          <a:prstGeom prst="rect">
-            <a:avLst/>
-          </a:prstGeom>
-          <a:noFill/>
-          <a:ln/>
-        </p:spPr>
-        <p:txBody>
-          <a:bodyPr wrap="square" lIns="0" tIns="0" rIns="0" bIns="0" rtlCol="0" anchor="ctr"/>
-          <a:lstStyle/>
-          <a:p>
-            <a:pPr algn="ctr" indent="0" marL="0">
-              <a:buNone/>
-            </a:pPr>
-            <a:r>
-              <a:rPr lang="en-US" sz="1200" b="1" dirty="0">
-                <a:solidFill>
-                  <a:srgbClr val="F59E0B"/>
-                </a:solidFill>
-                <a:latin typeface="Calibri" pitchFamily="34" charset="0"/>
-                <a:ea typeface="Calibri" pitchFamily="34" charset="-122"/>
-                <a:cs typeface="Calibri" pitchFamily="34" charset="-120"/>
-              </a:rPr>
-              <a:t>PRINT PENDENTE
-</a:t>
-            </a:r>
-            <a:endParaRPr lang="en-US" sz="1200" dirty="0"/>
-          </a:p>
-          <a:p>
-            <a:pPr algn="ctr" indent="0" marL="0">
-              <a:buNone/>
-            </a:pPr>
-            <a:r>
-              <a:rPr lang="en-US" sz="1050" dirty="0">
-                <a:solidFill>
-                  <a:srgbClr val="94A3B8"/>
-                </a:solidFill>
-                <a:latin typeface="Calibri" pitchFamily="34" charset="0"/>
-                <a:ea typeface="Calibri" pitchFamily="34" charset="-122"/>
-                <a:cs typeface="Calibri" pitchFamily="34" charset="-120"/>
-              </a:rPr>
-              <a:t>Resultado da execução (RUNSQL)</a:t>
-            </a:r>
-            <a:endParaRPr lang="en-US" sz="1200" dirty="0"/>
-          </a:p>
-        </p:txBody>
-      </p:sp>
-      <p:sp>
-        <p:nvSpPr>
-          <p:cNvPr id="14" name="Text 12"/>
+              <a:t>Próximo passo: reexecutar em um ambiente com OCI Generative AI confirmadamente saudável (tenancy própria ou nova reserva de sandbox) e preencher as evidências reais das 5 perguntas.</a:t>
+            </a:r>
+            <a:endParaRPr lang="en-US" sz="1000" dirty="0"/>
+          </a:p>
+        </p:txBody>
+      </p:sp>
+      <p:sp>
+        <p:nvSpPr>
+          <p:cNvPr id="16" name="Text 14"/>
           <p:cNvSpPr/>
           <p:nvPr/>
         </p:nvSpPr>
@@ -8348,7 +8907,7 @@
       </p:sp>
       <p:sp>
         <p:nvSpPr>
-          <p:cNvPr id="15" name="Text 13"/>
+          <p:cNvPr id="17" name="Text 15"/>
           <p:cNvSpPr/>
           <p:nvPr/>
         </p:nvSpPr>
@@ -9344,15 +9903,15 @@
               <a:buNone/>
             </a:pPr>
             <a:r>
-              <a:rPr lang="en-US" sz="1100" i="1" dirty="0">
-                <a:solidFill>
-                  <a:srgbClr val="F59E0B"/>
-                </a:solidFill>
-                <a:latin typeface="Calibri" pitchFamily="34" charset="0"/>
-                <a:ea typeface="Calibri" pitchFamily="34" charset="-122"/>
-                <a:cs typeface="Calibri" pitchFamily="34" charset="-120"/>
-              </a:rPr>
-              <a:t>[preencher após publicar no GitHub Pages]</a:t>
+              <a:rPr lang="en-US" sz="1100" dirty="0">
+                <a:solidFill>
+                  <a:srgbClr val="EAF6F3"/>
+                </a:solidFill>
+                <a:latin typeface="Courier New" pitchFamily="34" charset="0"/>
+                <a:ea typeface="Courier New" pitchFamily="34" charset="-122"/>
+                <a:cs typeface="Courier New" pitchFamily="34" charset="-120"/>
+              </a:rPr>
+              <a:t>gabriellive1817-stack.github.io/Leito_360</a:t>
             </a:r>
             <a:endParaRPr lang="en-US" sz="1100" dirty="0"/>
           </a:p>
@@ -20305,7 +20864,7 @@
                 <a:ea typeface="Calibri" pitchFamily="34" charset="-122"/>
                 <a:cs typeface="Calibri" pitchFamily="34" charset="-120"/>
               </a:rPr>
-              <a:t>Capturar em: pnpm dev → tela Visão Executiva</a:t>
+              <a:t>Capturar em: gabriellive1817-stack.github.io/Leito_360</a:t>
             </a:r>
             <a:endParaRPr lang="en-US" sz="1200" dirty="0"/>
           </a:p>
@@ -20322,7 +20881,7 @@
                 <a:ea typeface="Calibri" pitchFamily="34" charset="-122"/>
                 <a:cs typeface="Calibri" pitchFamily="34" charset="-120"/>
               </a:rPr>
-              <a:t>(filtro de competência + região + UF selecionada)</a:t>
+              <a:t>(tela Visão Executiva — filtro de competência + região + UF selecionada)</a:t>
             </a:r>
             <a:endParaRPr lang="en-US" sz="1200" dirty="0"/>
           </a:p>
@@ -20648,7 +21207,7 @@
                 <a:ea typeface="Calibri" pitchFamily="34" charset="-122"/>
                 <a:cs typeface="Calibri" pitchFamily="34" charset="-120"/>
               </a:rPr>
-              <a:t>Capturar em: pnpm dev → tela Explorador Analítico</a:t>
+              <a:t>Capturar em: gabriellive1817-stack.github.io/Leito_360</a:t>
             </a:r>
             <a:endParaRPr lang="en-US" sz="1200" dirty="0"/>
           </a:p>
@@ -20665,7 +21224,7 @@
                 <a:ea typeface="Calibri" pitchFamily="34" charset="-122"/>
                 <a:cs typeface="Calibri" pitchFamily="34" charset="-120"/>
               </a:rPr>
-              <a:t>(tabela ordenada + painel de fontes/limitações)</a:t>
+              <a:t>(tela Explorador Analítico — tabela ordenada + painel de fontes/limitações)</a:t>
             </a:r>
             <a:endParaRPr lang="en-US" sz="1200" dirty="0"/>
           </a:p>

--- a/EC_Sprint_2_1TSCOA_EvidenciasConstrucao_LEITO360_GRUPO61.pptx
+++ b/EC_Sprint_2_1TSCOA_EvidenciasConstrucao_LEITO360_GRUPO61.pptx
@@ -2503,9 +2503,53 @@
           <a:chExt cx="0" cy="0"/>
         </a:xfrm>
       </p:grpSpPr>
-      <p:sp>
-        <p:nvSpPr>
-          <p:cNvPr id="2" name="Text 0"/>
+      <p:pic>
+        <p:nvPicPr>
+          <p:cNvPr id="2" name="Image 0" descr="shots/mapa_marca.png">    </p:cNvPr>
+          <p:cNvPicPr>
+            <a:picLocks noChangeAspect="1"/>
+          </p:cNvPicPr>
+          <p:nvPr/>
+        </p:nvPicPr>
+        <p:blipFill>
+          <a:blip r:embed="rId1"/>
+          <a:stretch>
+            <a:fillRect/>
+          </a:stretch>
+        </p:blipFill>
+        <p:spPr>
+          <a:xfrm>
+            <a:off x="7863840" y="320040"/>
+            <a:ext cx="3749040" cy="3749040"/>
+          </a:xfrm>
+          <a:prstGeom prst="rect">
+            <a:avLst/>
+          </a:prstGeom>
+        </p:spPr>
+      </p:pic>
+      <p:sp>
+        <p:nvSpPr>
+          <p:cNvPr id="3" name="Shape 0"/>
+          <p:cNvSpPr/>
+          <p:nvPr/>
+        </p:nvSpPr>
+        <p:spPr>
+          <a:xfrm>
+            <a:off x="822960" y="1417320"/>
+            <a:ext cx="1371600" cy="54864"/>
+          </a:xfrm>
+          <a:prstGeom prst="rect">
+            <a:avLst/>
+          </a:prstGeom>
+          <a:solidFill>
+            <a:srgbClr val="14B8A6"/>
+          </a:solidFill>
+          <a:ln/>
+        </p:spPr>
+      </p:sp>
+      <p:sp>
+        <p:nvSpPr>
+          <p:cNvPr id="4" name="Text 1"/>
           <p:cNvSpPr/>
           <p:nvPr/>
         </p:nvSpPr>
@@ -2558,7 +2602,7 @@
       </p:sp>
       <p:sp>
         <p:nvSpPr>
-          <p:cNvPr id="3" name="Text 1"/>
+          <p:cNvPr id="5" name="Text 2"/>
           <p:cNvSpPr/>
           <p:nvPr/>
         </p:nvSpPr>
@@ -2597,7 +2641,7 @@
       </p:sp>
       <p:sp>
         <p:nvSpPr>
-          <p:cNvPr id="4" name="Text 2"/>
+          <p:cNvPr id="6" name="Text 3"/>
           <p:cNvSpPr/>
           <p:nvPr/>
         </p:nvSpPr>
@@ -2636,7 +2680,7 @@
       </p:sp>
       <p:sp>
         <p:nvSpPr>
-          <p:cNvPr id="5" name="Shape 3"/>
+          <p:cNvPr id="7" name="Shape 4"/>
           <p:cNvSpPr/>
           <p:nvPr/>
         </p:nvSpPr>
@@ -2670,7 +2714,7 @@
       </p:sp>
       <p:sp>
         <p:nvSpPr>
-          <p:cNvPr id="6" name="Text 4"/>
+          <p:cNvPr id="8" name="Text 5"/>
           <p:cNvSpPr/>
           <p:nvPr/>
         </p:nvSpPr>
@@ -2709,7 +2753,7 @@
       </p:sp>
       <p:sp>
         <p:nvSpPr>
-          <p:cNvPr id="7" name="Text 5"/>
+          <p:cNvPr id="9" name="Text 6"/>
           <p:cNvSpPr/>
           <p:nvPr/>
         </p:nvSpPr>
@@ -2776,7 +2820,7 @@
       </p:sp>
       <p:sp>
         <p:nvSpPr>
-          <p:cNvPr id="8" name="Text 6"/>
+          <p:cNvPr id="10" name="Text 7"/>
           <p:cNvSpPr/>
           <p:nvPr/>
         </p:nvSpPr>
@@ -2843,7 +2887,7 @@
       </p:sp>
       <p:sp>
         <p:nvSpPr>
-          <p:cNvPr id="9" name="Text 7"/>
+          <p:cNvPr id="11" name="Text 8"/>
           <p:cNvSpPr/>
           <p:nvPr/>
         </p:nvSpPr>
@@ -2910,7 +2954,7 @@
       </p:sp>
       <p:sp>
         <p:nvSpPr>
-          <p:cNvPr id="10" name="Text 8"/>
+          <p:cNvPr id="12" name="Text 9"/>
           <p:cNvSpPr/>
           <p:nvPr/>
         </p:nvSpPr>
@@ -2977,7 +3021,7 @@
       </p:sp>
       <p:sp>
         <p:nvSpPr>
-          <p:cNvPr id="11" name="Text 9"/>
+          <p:cNvPr id="13" name="Text 10"/>
           <p:cNvSpPr/>
           <p:nvPr/>
         </p:nvSpPr>
@@ -3044,7 +3088,7 @@
       </p:sp>
       <p:sp>
         <p:nvSpPr>
-          <p:cNvPr id="12" name="Text 10"/>
+          <p:cNvPr id="14" name="Text 11"/>
           <p:cNvSpPr/>
           <p:nvPr/>
         </p:nvSpPr>
@@ -3083,7 +3127,7 @@
       </p:sp>
       <p:sp>
         <p:nvSpPr>
-          <p:cNvPr id="13" name="Text 11"/>
+          <p:cNvPr id="15" name="Text 12"/>
           <p:cNvSpPr/>
           <p:nvPr/>
         </p:nvSpPr>
@@ -3208,7 +3252,27 @@
       </p:sp>
       <p:sp>
         <p:nvSpPr>
-          <p:cNvPr id="4" name="Text 2"/>
+          <p:cNvPr id="4" name="Shape 2"/>
+          <p:cNvSpPr/>
+          <p:nvPr/>
+        </p:nvSpPr>
+        <p:spPr>
+          <a:xfrm>
+            <a:off x="457200" y="1938528"/>
+            <a:ext cx="11277295" cy="18288"/>
+          </a:xfrm>
+          <a:prstGeom prst="rect">
+            <a:avLst/>
+          </a:prstGeom>
+          <a:solidFill>
+            <a:srgbClr val="1E3A5F"/>
+          </a:solidFill>
+          <a:ln/>
+        </p:spPr>
+      </p:sp>
+      <p:sp>
+        <p:nvSpPr>
+          <p:cNvPr id="5" name="Text 3"/>
           <p:cNvSpPr/>
           <p:nvPr/>
         </p:nvSpPr>
@@ -3247,7 +3311,7 @@
       </p:sp>
       <p:sp>
         <p:nvSpPr>
-          <p:cNvPr id="5" name="Text 3"/>
+          <p:cNvPr id="6" name="Text 4"/>
           <p:cNvSpPr/>
           <p:nvPr/>
         </p:nvSpPr>
@@ -3286,14 +3350,14 @@
       </p:sp>
       <p:sp>
         <p:nvSpPr>
-          <p:cNvPr id="6" name="Text 4"/>
-          <p:cNvSpPr/>
-          <p:nvPr/>
-        </p:nvSpPr>
-        <p:spPr>
-          <a:xfrm>
-            <a:off x="457200" y="2148840"/>
-            <a:ext cx="6675120" cy="365760"/>
+          <p:cNvPr id="7" name="Text 5"/>
+          <p:cNvSpPr/>
+          <p:nvPr/>
+        </p:nvSpPr>
+        <p:spPr>
+          <a:xfrm>
+            <a:off x="457200" y="2240280"/>
+            <a:ext cx="6309360" cy="365760"/>
           </a:xfrm>
           <a:prstGeom prst="rect">
             <a:avLst/>
@@ -3325,14 +3389,14 @@
       </p:sp>
       <p:sp>
         <p:nvSpPr>
-          <p:cNvPr id="7" name="Shape 5"/>
-          <p:cNvSpPr/>
-          <p:nvPr/>
-        </p:nvSpPr>
-        <p:spPr>
-          <a:xfrm>
-            <a:off x="7315200" y="2221992"/>
-            <a:ext cx="2926080" cy="219456"/>
+          <p:cNvPr id="8" name="Shape 6"/>
+          <p:cNvSpPr/>
+          <p:nvPr/>
+        </p:nvSpPr>
+        <p:spPr>
+          <a:xfrm>
+            <a:off x="6903720" y="2313432"/>
+            <a:ext cx="2377440" cy="219456"/>
           </a:xfrm>
           <a:prstGeom prst="roundRect">
             <a:avLst>
@@ -3347,14 +3411,14 @@
       </p:sp>
       <p:sp>
         <p:nvSpPr>
-          <p:cNvPr id="8" name="Shape 6"/>
-          <p:cNvSpPr/>
-          <p:nvPr/>
-        </p:nvSpPr>
-        <p:spPr>
-          <a:xfrm>
-            <a:off x="7315200" y="2221992"/>
-            <a:ext cx="2926080" cy="219456"/>
+          <p:cNvPr id="9" name="Shape 7"/>
+          <p:cNvSpPr/>
+          <p:nvPr/>
+        </p:nvSpPr>
+        <p:spPr>
+          <a:xfrm>
+            <a:off x="6903720" y="2313432"/>
+            <a:ext cx="2377440" cy="219456"/>
           </a:xfrm>
           <a:prstGeom prst="roundRect">
             <a:avLst>
@@ -3369,14 +3433,14 @@
       </p:sp>
       <p:sp>
         <p:nvSpPr>
-          <p:cNvPr id="9" name="Text 7"/>
-          <p:cNvSpPr/>
-          <p:nvPr/>
-        </p:nvSpPr>
-        <p:spPr>
-          <a:xfrm>
-            <a:off x="10287000" y="2148840"/>
-            <a:ext cx="548640" cy="365760"/>
+          <p:cNvPr id="10" name="Text 8"/>
+          <p:cNvSpPr/>
+          <p:nvPr/>
+        </p:nvSpPr>
+        <p:spPr>
+          <a:xfrm>
+            <a:off x="9372600" y="2240280"/>
+            <a:ext cx="594360" cy="365760"/>
           </a:xfrm>
           <a:prstGeom prst="rect">
             <a:avLst/>
@@ -3408,13 +3472,13 @@
       </p:sp>
       <p:sp>
         <p:nvSpPr>
-          <p:cNvPr id="10" name="Shape 8"/>
-          <p:cNvSpPr/>
-          <p:nvPr/>
-        </p:nvSpPr>
-        <p:spPr>
-          <a:xfrm>
-            <a:off x="10881360" y="2176272"/>
+          <p:cNvPr id="11" name="Shape 9"/>
+          <p:cNvSpPr/>
+          <p:nvPr/>
+        </p:nvSpPr>
+        <p:spPr>
+          <a:xfrm>
+            <a:off x="10058400" y="2267712"/>
             <a:ext cx="1737360" cy="320040"/>
           </a:xfrm>
           <a:prstGeom prst="roundRect">
@@ -3437,13 +3501,13 @@
       </p:sp>
       <p:sp>
         <p:nvSpPr>
-          <p:cNvPr id="11" name="Text 9"/>
-          <p:cNvSpPr/>
-          <p:nvPr/>
-        </p:nvSpPr>
-        <p:spPr>
-          <a:xfrm>
-            <a:off x="10881360" y="2176272"/>
+          <p:cNvPr id="12" name="Text 10"/>
+          <p:cNvSpPr/>
+          <p:nvPr/>
+        </p:nvSpPr>
+        <p:spPr>
+          <a:xfrm>
+            <a:off x="10058400" y="2267712"/>
             <a:ext cx="1737360" cy="320040"/>
           </a:xfrm>
           <a:prstGeom prst="rect">
@@ -3476,14 +3540,14 @@
       </p:sp>
       <p:sp>
         <p:nvSpPr>
-          <p:cNvPr id="12" name="Text 10"/>
-          <p:cNvSpPr/>
-          <p:nvPr/>
-        </p:nvSpPr>
-        <p:spPr>
-          <a:xfrm>
-            <a:off x="457200" y="2807208"/>
-            <a:ext cx="6675120" cy="365760"/>
+          <p:cNvPr id="13" name="Text 11"/>
+          <p:cNvSpPr/>
+          <p:nvPr/>
+        </p:nvSpPr>
+        <p:spPr>
+          <a:xfrm>
+            <a:off x="457200" y="2953512"/>
+            <a:ext cx="6309360" cy="365760"/>
           </a:xfrm>
           <a:prstGeom prst="rect">
             <a:avLst/>
@@ -3515,14 +3579,14 @@
       </p:sp>
       <p:sp>
         <p:nvSpPr>
-          <p:cNvPr id="13" name="Shape 11"/>
-          <p:cNvSpPr/>
-          <p:nvPr/>
-        </p:nvSpPr>
-        <p:spPr>
-          <a:xfrm>
-            <a:off x="7315200" y="2880360"/>
-            <a:ext cx="2926080" cy="219456"/>
+          <p:cNvPr id="14" name="Shape 12"/>
+          <p:cNvSpPr/>
+          <p:nvPr/>
+        </p:nvSpPr>
+        <p:spPr>
+          <a:xfrm>
+            <a:off x="6903720" y="3026664"/>
+            <a:ext cx="2377440" cy="219456"/>
           </a:xfrm>
           <a:prstGeom prst="roundRect">
             <a:avLst>
@@ -3537,14 +3601,14 @@
       </p:sp>
       <p:sp>
         <p:nvSpPr>
-          <p:cNvPr id="14" name="Shape 12"/>
-          <p:cNvSpPr/>
-          <p:nvPr/>
-        </p:nvSpPr>
-        <p:spPr>
-          <a:xfrm>
-            <a:off x="7315200" y="2880360"/>
-            <a:ext cx="2926080" cy="219456"/>
+          <p:cNvPr id="15" name="Shape 13"/>
+          <p:cNvSpPr/>
+          <p:nvPr/>
+        </p:nvSpPr>
+        <p:spPr>
+          <a:xfrm>
+            <a:off x="6903720" y="3026664"/>
+            <a:ext cx="2377440" cy="219456"/>
           </a:xfrm>
           <a:prstGeom prst="roundRect">
             <a:avLst>
@@ -3559,14 +3623,14 @@
       </p:sp>
       <p:sp>
         <p:nvSpPr>
-          <p:cNvPr id="15" name="Text 13"/>
-          <p:cNvSpPr/>
-          <p:nvPr/>
-        </p:nvSpPr>
-        <p:spPr>
-          <a:xfrm>
-            <a:off x="10287000" y="2807208"/>
-            <a:ext cx="548640" cy="365760"/>
+          <p:cNvPr id="16" name="Text 14"/>
+          <p:cNvSpPr/>
+          <p:nvPr/>
+        </p:nvSpPr>
+        <p:spPr>
+          <a:xfrm>
+            <a:off x="9372600" y="2953512"/>
+            <a:ext cx="594360" cy="365760"/>
           </a:xfrm>
           <a:prstGeom prst="rect">
             <a:avLst/>
@@ -3598,13 +3662,13 @@
       </p:sp>
       <p:sp>
         <p:nvSpPr>
-          <p:cNvPr id="16" name="Shape 14"/>
-          <p:cNvSpPr/>
-          <p:nvPr/>
-        </p:nvSpPr>
-        <p:spPr>
-          <a:xfrm>
-            <a:off x="10881360" y="2834640"/>
+          <p:cNvPr id="17" name="Shape 15"/>
+          <p:cNvSpPr/>
+          <p:nvPr/>
+        </p:nvSpPr>
+        <p:spPr>
+          <a:xfrm>
+            <a:off x="10058400" y="2980944"/>
             <a:ext cx="1737360" cy="320040"/>
           </a:xfrm>
           <a:prstGeom prst="roundRect">
@@ -3627,13 +3691,13 @@
       </p:sp>
       <p:sp>
         <p:nvSpPr>
-          <p:cNvPr id="17" name="Text 15"/>
-          <p:cNvSpPr/>
-          <p:nvPr/>
-        </p:nvSpPr>
-        <p:spPr>
-          <a:xfrm>
-            <a:off x="10881360" y="2834640"/>
+          <p:cNvPr id="18" name="Text 16"/>
+          <p:cNvSpPr/>
+          <p:nvPr/>
+        </p:nvSpPr>
+        <p:spPr>
+          <a:xfrm>
+            <a:off x="10058400" y="2980944"/>
             <a:ext cx="1737360" cy="320040"/>
           </a:xfrm>
           <a:prstGeom prst="rect">
@@ -3666,14 +3730,14 @@
       </p:sp>
       <p:sp>
         <p:nvSpPr>
-          <p:cNvPr id="18" name="Text 16"/>
-          <p:cNvSpPr/>
-          <p:nvPr/>
-        </p:nvSpPr>
-        <p:spPr>
-          <a:xfrm>
-            <a:off x="457200" y="3465576"/>
-            <a:ext cx="6675120" cy="365760"/>
+          <p:cNvPr id="19" name="Text 17"/>
+          <p:cNvSpPr/>
+          <p:nvPr/>
+        </p:nvSpPr>
+        <p:spPr>
+          <a:xfrm>
+            <a:off x="457200" y="3666744"/>
+            <a:ext cx="6309360" cy="365760"/>
           </a:xfrm>
           <a:prstGeom prst="rect">
             <a:avLst/>
@@ -3705,14 +3769,14 @@
       </p:sp>
       <p:sp>
         <p:nvSpPr>
-          <p:cNvPr id="19" name="Shape 17"/>
-          <p:cNvSpPr/>
-          <p:nvPr/>
-        </p:nvSpPr>
-        <p:spPr>
-          <a:xfrm>
-            <a:off x="7315200" y="3538728"/>
-            <a:ext cx="2926080" cy="219456"/>
+          <p:cNvPr id="20" name="Shape 18"/>
+          <p:cNvSpPr/>
+          <p:nvPr/>
+        </p:nvSpPr>
+        <p:spPr>
+          <a:xfrm>
+            <a:off x="6903720" y="3739896"/>
+            <a:ext cx="2377440" cy="219456"/>
           </a:xfrm>
           <a:prstGeom prst="roundRect">
             <a:avLst>
@@ -3727,14 +3791,14 @@
       </p:sp>
       <p:sp>
         <p:nvSpPr>
-          <p:cNvPr id="20" name="Shape 18"/>
-          <p:cNvSpPr/>
-          <p:nvPr/>
-        </p:nvSpPr>
-        <p:spPr>
-          <a:xfrm>
-            <a:off x="7315200" y="3538728"/>
-            <a:ext cx="2048256" cy="219456"/>
+          <p:cNvPr id="21" name="Shape 19"/>
+          <p:cNvSpPr/>
+          <p:nvPr/>
+        </p:nvSpPr>
+        <p:spPr>
+          <a:xfrm>
+            <a:off x="6903720" y="3739896"/>
+            <a:ext cx="1664208" cy="219456"/>
           </a:xfrm>
           <a:prstGeom prst="roundRect">
             <a:avLst>
@@ -3749,14 +3813,14 @@
       </p:sp>
       <p:sp>
         <p:nvSpPr>
-          <p:cNvPr id="21" name="Text 19"/>
-          <p:cNvSpPr/>
-          <p:nvPr/>
-        </p:nvSpPr>
-        <p:spPr>
-          <a:xfrm>
-            <a:off x="10287000" y="3465576"/>
-            <a:ext cx="548640" cy="365760"/>
+          <p:cNvPr id="22" name="Text 20"/>
+          <p:cNvSpPr/>
+          <p:nvPr/>
+        </p:nvSpPr>
+        <p:spPr>
+          <a:xfrm>
+            <a:off x="9372600" y="3666744"/>
+            <a:ext cx="594360" cy="365760"/>
           </a:xfrm>
           <a:prstGeom prst="rect">
             <a:avLst/>
@@ -3788,13 +3852,13 @@
       </p:sp>
       <p:sp>
         <p:nvSpPr>
-          <p:cNvPr id="22" name="Shape 20"/>
-          <p:cNvSpPr/>
-          <p:nvPr/>
-        </p:nvSpPr>
-        <p:spPr>
-          <a:xfrm>
-            <a:off x="10881360" y="3493008"/>
+          <p:cNvPr id="23" name="Shape 21"/>
+          <p:cNvSpPr/>
+          <p:nvPr/>
+        </p:nvSpPr>
+        <p:spPr>
+          <a:xfrm>
+            <a:off x="10058400" y="3694176"/>
             <a:ext cx="1737360" cy="320040"/>
           </a:xfrm>
           <a:prstGeom prst="roundRect">
@@ -3817,13 +3881,13 @@
       </p:sp>
       <p:sp>
         <p:nvSpPr>
-          <p:cNvPr id="23" name="Text 21"/>
-          <p:cNvSpPr/>
-          <p:nvPr/>
-        </p:nvSpPr>
-        <p:spPr>
-          <a:xfrm>
-            <a:off x="10881360" y="3493008"/>
+          <p:cNvPr id="24" name="Text 22"/>
+          <p:cNvSpPr/>
+          <p:nvPr/>
+        </p:nvSpPr>
+        <p:spPr>
+          <a:xfrm>
+            <a:off x="10058400" y="3694176"/>
             <a:ext cx="1737360" cy="320040"/>
           </a:xfrm>
           <a:prstGeom prst="rect">
@@ -3856,14 +3920,14 @@
       </p:sp>
       <p:sp>
         <p:nvSpPr>
-          <p:cNvPr id="24" name="Text 22"/>
-          <p:cNvSpPr/>
-          <p:nvPr/>
-        </p:nvSpPr>
-        <p:spPr>
-          <a:xfrm>
-            <a:off x="457200" y="4123944"/>
-            <a:ext cx="6675120" cy="365760"/>
+          <p:cNvPr id="25" name="Text 23"/>
+          <p:cNvSpPr/>
+          <p:nvPr/>
+        </p:nvSpPr>
+        <p:spPr>
+          <a:xfrm>
+            <a:off x="457200" y="4379976"/>
+            <a:ext cx="6309360" cy="365760"/>
           </a:xfrm>
           <a:prstGeom prst="rect">
             <a:avLst/>
@@ -3895,14 +3959,14 @@
       </p:sp>
       <p:sp>
         <p:nvSpPr>
-          <p:cNvPr id="25" name="Shape 23"/>
-          <p:cNvSpPr/>
-          <p:nvPr/>
-        </p:nvSpPr>
-        <p:spPr>
-          <a:xfrm>
-            <a:off x="7315200" y="4197096"/>
-            <a:ext cx="2926080" cy="219456"/>
+          <p:cNvPr id="26" name="Shape 24"/>
+          <p:cNvSpPr/>
+          <p:nvPr/>
+        </p:nvSpPr>
+        <p:spPr>
+          <a:xfrm>
+            <a:off x="6903720" y="4453128"/>
+            <a:ext cx="2377440" cy="219456"/>
           </a:xfrm>
           <a:prstGeom prst="roundRect">
             <a:avLst>
@@ -3917,14 +3981,14 @@
       </p:sp>
       <p:sp>
         <p:nvSpPr>
-          <p:cNvPr id="26" name="Shape 24"/>
-          <p:cNvSpPr/>
-          <p:nvPr/>
-        </p:nvSpPr>
-        <p:spPr>
-          <a:xfrm>
-            <a:off x="7315200" y="4197096"/>
-            <a:ext cx="2926080" cy="219456"/>
+          <p:cNvPr id="27" name="Shape 25"/>
+          <p:cNvSpPr/>
+          <p:nvPr/>
+        </p:nvSpPr>
+        <p:spPr>
+          <a:xfrm>
+            <a:off x="6903720" y="4453128"/>
+            <a:ext cx="2377440" cy="219456"/>
           </a:xfrm>
           <a:prstGeom prst="roundRect">
             <a:avLst>
@@ -3939,14 +4003,14 @@
       </p:sp>
       <p:sp>
         <p:nvSpPr>
-          <p:cNvPr id="27" name="Text 25"/>
-          <p:cNvSpPr/>
-          <p:nvPr/>
-        </p:nvSpPr>
-        <p:spPr>
-          <a:xfrm>
-            <a:off x="10287000" y="4123944"/>
-            <a:ext cx="548640" cy="365760"/>
+          <p:cNvPr id="28" name="Text 26"/>
+          <p:cNvSpPr/>
+          <p:nvPr/>
+        </p:nvSpPr>
+        <p:spPr>
+          <a:xfrm>
+            <a:off x="9372600" y="4379976"/>
+            <a:ext cx="594360" cy="365760"/>
           </a:xfrm>
           <a:prstGeom prst="rect">
             <a:avLst/>
@@ -3978,13 +4042,13 @@
       </p:sp>
       <p:sp>
         <p:nvSpPr>
-          <p:cNvPr id="28" name="Shape 26"/>
-          <p:cNvSpPr/>
-          <p:nvPr/>
-        </p:nvSpPr>
-        <p:spPr>
-          <a:xfrm>
-            <a:off x="10881360" y="4151376"/>
+          <p:cNvPr id="29" name="Shape 27"/>
+          <p:cNvSpPr/>
+          <p:nvPr/>
+        </p:nvSpPr>
+        <p:spPr>
+          <a:xfrm>
+            <a:off x="10058400" y="4407408"/>
             <a:ext cx="1737360" cy="320040"/>
           </a:xfrm>
           <a:prstGeom prst="roundRect">
@@ -4007,13 +4071,13 @@
       </p:sp>
       <p:sp>
         <p:nvSpPr>
-          <p:cNvPr id="29" name="Text 27"/>
-          <p:cNvSpPr/>
-          <p:nvPr/>
-        </p:nvSpPr>
-        <p:spPr>
-          <a:xfrm>
-            <a:off x="10881360" y="4151376"/>
+          <p:cNvPr id="30" name="Text 28"/>
+          <p:cNvSpPr/>
+          <p:nvPr/>
+        </p:nvSpPr>
+        <p:spPr>
+          <a:xfrm>
+            <a:off x="10058400" y="4407408"/>
             <a:ext cx="1737360" cy="320040"/>
           </a:xfrm>
           <a:prstGeom prst="rect">
@@ -4046,14 +4110,14 @@
       </p:sp>
       <p:sp>
         <p:nvSpPr>
-          <p:cNvPr id="30" name="Text 28"/>
-          <p:cNvSpPr/>
-          <p:nvPr/>
-        </p:nvSpPr>
-        <p:spPr>
-          <a:xfrm>
-            <a:off x="457200" y="4782312"/>
-            <a:ext cx="6675120" cy="365760"/>
+          <p:cNvPr id="31" name="Text 29"/>
+          <p:cNvSpPr/>
+          <p:nvPr/>
+        </p:nvSpPr>
+        <p:spPr>
+          <a:xfrm>
+            <a:off x="457200" y="5093208"/>
+            <a:ext cx="6309360" cy="365760"/>
           </a:xfrm>
           <a:prstGeom prst="rect">
             <a:avLst/>
@@ -4085,14 +4149,14 @@
       </p:sp>
       <p:sp>
         <p:nvSpPr>
-          <p:cNvPr id="31" name="Shape 29"/>
-          <p:cNvSpPr/>
-          <p:nvPr/>
-        </p:nvSpPr>
-        <p:spPr>
-          <a:xfrm>
-            <a:off x="7315200" y="4855464"/>
-            <a:ext cx="2926080" cy="219456"/>
+          <p:cNvPr id="32" name="Shape 30"/>
+          <p:cNvSpPr/>
+          <p:nvPr/>
+        </p:nvSpPr>
+        <p:spPr>
+          <a:xfrm>
+            <a:off x="6903720" y="5166360"/>
+            <a:ext cx="2377440" cy="219456"/>
           </a:xfrm>
           <a:prstGeom prst="roundRect">
             <a:avLst>
@@ -4107,14 +4171,14 @@
       </p:sp>
       <p:sp>
         <p:nvSpPr>
-          <p:cNvPr id="32" name="Shape 30"/>
-          <p:cNvSpPr/>
-          <p:nvPr/>
-        </p:nvSpPr>
-        <p:spPr>
-          <a:xfrm>
-            <a:off x="7315200" y="4855464"/>
-            <a:ext cx="2926080" cy="219456"/>
+          <p:cNvPr id="33" name="Shape 31"/>
+          <p:cNvSpPr/>
+          <p:nvPr/>
+        </p:nvSpPr>
+        <p:spPr>
+          <a:xfrm>
+            <a:off x="6903720" y="5166360"/>
+            <a:ext cx="2377440" cy="219456"/>
           </a:xfrm>
           <a:prstGeom prst="roundRect">
             <a:avLst>
@@ -4129,14 +4193,14 @@
       </p:sp>
       <p:sp>
         <p:nvSpPr>
-          <p:cNvPr id="33" name="Text 31"/>
-          <p:cNvSpPr/>
-          <p:nvPr/>
-        </p:nvSpPr>
-        <p:spPr>
-          <a:xfrm>
-            <a:off x="10287000" y="4782312"/>
-            <a:ext cx="548640" cy="365760"/>
+          <p:cNvPr id="34" name="Text 32"/>
+          <p:cNvSpPr/>
+          <p:nvPr/>
+        </p:nvSpPr>
+        <p:spPr>
+          <a:xfrm>
+            <a:off x="9372600" y="5093208"/>
+            <a:ext cx="594360" cy="365760"/>
           </a:xfrm>
           <a:prstGeom prst="rect">
             <a:avLst/>
@@ -4168,13 +4232,13 @@
       </p:sp>
       <p:sp>
         <p:nvSpPr>
-          <p:cNvPr id="34" name="Shape 32"/>
-          <p:cNvSpPr/>
-          <p:nvPr/>
-        </p:nvSpPr>
-        <p:spPr>
-          <a:xfrm>
-            <a:off x="10881360" y="4809744"/>
+          <p:cNvPr id="35" name="Shape 33"/>
+          <p:cNvSpPr/>
+          <p:nvPr/>
+        </p:nvSpPr>
+        <p:spPr>
+          <a:xfrm>
+            <a:off x="10058400" y="5120640"/>
             <a:ext cx="1737360" cy="320040"/>
           </a:xfrm>
           <a:prstGeom prst="roundRect">
@@ -4197,13 +4261,13 @@
       </p:sp>
       <p:sp>
         <p:nvSpPr>
-          <p:cNvPr id="35" name="Text 33"/>
-          <p:cNvSpPr/>
-          <p:nvPr/>
-        </p:nvSpPr>
-        <p:spPr>
-          <a:xfrm>
-            <a:off x="10881360" y="4809744"/>
+          <p:cNvPr id="36" name="Text 34"/>
+          <p:cNvSpPr/>
+          <p:nvPr/>
+        </p:nvSpPr>
+        <p:spPr>
+          <a:xfrm>
+            <a:off x="10058400" y="5120640"/>
             <a:ext cx="1737360" cy="320040"/>
           </a:xfrm>
           <a:prstGeom prst="rect">
@@ -4236,14 +4300,14 @@
       </p:sp>
       <p:sp>
         <p:nvSpPr>
-          <p:cNvPr id="36" name="Text 34"/>
-          <p:cNvSpPr/>
-          <p:nvPr/>
-        </p:nvSpPr>
-        <p:spPr>
-          <a:xfrm>
-            <a:off x="457200" y="5440680"/>
-            <a:ext cx="6675120" cy="365760"/>
+          <p:cNvPr id="37" name="Text 35"/>
+          <p:cNvSpPr/>
+          <p:nvPr/>
+        </p:nvSpPr>
+        <p:spPr>
+          <a:xfrm>
+            <a:off x="457200" y="5806440"/>
+            <a:ext cx="6309360" cy="365760"/>
           </a:xfrm>
           <a:prstGeom prst="rect">
             <a:avLst/>
@@ -4275,14 +4339,14 @@
       </p:sp>
       <p:sp>
         <p:nvSpPr>
-          <p:cNvPr id="37" name="Shape 35"/>
-          <p:cNvSpPr/>
-          <p:nvPr/>
-        </p:nvSpPr>
-        <p:spPr>
-          <a:xfrm>
-            <a:off x="7315200" y="5513832"/>
-            <a:ext cx="2926080" cy="219456"/>
+          <p:cNvPr id="38" name="Shape 36"/>
+          <p:cNvSpPr/>
+          <p:nvPr/>
+        </p:nvSpPr>
+        <p:spPr>
+          <a:xfrm>
+            <a:off x="6903720" y="5879592"/>
+            <a:ext cx="2377440" cy="219456"/>
           </a:xfrm>
           <a:prstGeom prst="roundRect">
             <a:avLst>
@@ -4297,13 +4361,13 @@
       </p:sp>
       <p:sp>
         <p:nvSpPr>
-          <p:cNvPr id="38" name="Shape 36"/>
-          <p:cNvSpPr/>
-          <p:nvPr/>
-        </p:nvSpPr>
-        <p:spPr>
-          <a:xfrm>
-            <a:off x="7315200" y="5513832"/>
+          <p:cNvPr id="39" name="Shape 37"/>
+          <p:cNvSpPr/>
+          <p:nvPr/>
+        </p:nvSpPr>
+        <p:spPr>
+          <a:xfrm>
+            <a:off x="6903720" y="5879592"/>
             <a:ext cx="45720" cy="219456"/>
           </a:xfrm>
           <a:prstGeom prst="roundRect">
@@ -4319,14 +4383,14 @@
       </p:sp>
       <p:sp>
         <p:nvSpPr>
-          <p:cNvPr id="39" name="Text 37"/>
-          <p:cNvSpPr/>
-          <p:nvPr/>
-        </p:nvSpPr>
-        <p:spPr>
-          <a:xfrm>
-            <a:off x="10287000" y="5440680"/>
-            <a:ext cx="548640" cy="365760"/>
+          <p:cNvPr id="40" name="Text 38"/>
+          <p:cNvSpPr/>
+          <p:nvPr/>
+        </p:nvSpPr>
+        <p:spPr>
+          <a:xfrm>
+            <a:off x="9372600" y="5806440"/>
+            <a:ext cx="594360" cy="365760"/>
           </a:xfrm>
           <a:prstGeom prst="rect">
             <a:avLst/>
@@ -4358,13 +4422,13 @@
       </p:sp>
       <p:sp>
         <p:nvSpPr>
-          <p:cNvPr id="40" name="Shape 38"/>
-          <p:cNvSpPr/>
-          <p:nvPr/>
-        </p:nvSpPr>
-        <p:spPr>
-          <a:xfrm>
-            <a:off x="10881360" y="5468112"/>
+          <p:cNvPr id="41" name="Shape 39"/>
+          <p:cNvSpPr/>
+          <p:nvPr/>
+        </p:nvSpPr>
+        <p:spPr>
+          <a:xfrm>
+            <a:off x="10058400" y="5833872"/>
             <a:ext cx="1737360" cy="320040"/>
           </a:xfrm>
           <a:prstGeom prst="roundRect">
@@ -4387,13 +4451,13 @@
       </p:sp>
       <p:sp>
         <p:nvSpPr>
-          <p:cNvPr id="41" name="Text 39"/>
-          <p:cNvSpPr/>
-          <p:nvPr/>
-        </p:nvSpPr>
-        <p:spPr>
-          <a:xfrm>
-            <a:off x="10881360" y="5468112"/>
+          <p:cNvPr id="42" name="Text 40"/>
+          <p:cNvSpPr/>
+          <p:nvPr/>
+        </p:nvSpPr>
+        <p:spPr>
+          <a:xfrm>
+            <a:off x="10058400" y="5833872"/>
             <a:ext cx="1737360" cy="320040"/>
           </a:xfrm>
           <a:prstGeom prst="rect">
@@ -4426,7 +4490,7 @@
       </p:sp>
       <p:sp>
         <p:nvSpPr>
-          <p:cNvPr id="42" name="Text 40"/>
+          <p:cNvPr id="43" name="Text 41"/>
           <p:cNvSpPr/>
           <p:nvPr/>
         </p:nvSpPr>
@@ -4465,7 +4529,7 @@
       </p:sp>
       <p:sp>
         <p:nvSpPr>
-          <p:cNvPr id="43" name="Text 41"/>
+          <p:cNvPr id="44" name="Text 42"/>
           <p:cNvSpPr/>
           <p:nvPr/>
         </p:nvSpPr>
@@ -4590,7 +4654,27 @@
       </p:sp>
       <p:sp>
         <p:nvSpPr>
-          <p:cNvPr id="4" name="Text 2"/>
+          <p:cNvPr id="4" name="Shape 2"/>
+          <p:cNvSpPr/>
+          <p:nvPr/>
+        </p:nvSpPr>
+        <p:spPr>
+          <a:xfrm>
+            <a:off x="457200" y="1938528"/>
+            <a:ext cx="11277295" cy="18288"/>
+          </a:xfrm>
+          <a:prstGeom prst="rect">
+            <a:avLst/>
+          </a:prstGeom>
+          <a:solidFill>
+            <a:srgbClr val="1E3A5F"/>
+          </a:solidFill>
+          <a:ln/>
+        </p:spPr>
+      </p:sp>
+      <p:sp>
+        <p:nvSpPr>
+          <p:cNvPr id="5" name="Text 3"/>
           <p:cNvSpPr/>
           <p:nvPr/>
         </p:nvSpPr>
@@ -4629,7 +4713,7 @@
       </p:sp>
       <p:sp>
         <p:nvSpPr>
-          <p:cNvPr id="5" name="Text 3"/>
+          <p:cNvPr id="6" name="Text 4"/>
           <p:cNvSpPr/>
           <p:nvPr/>
         </p:nvSpPr>
@@ -4668,7 +4752,7 @@
       </p:sp>
       <p:sp>
         <p:nvSpPr>
-          <p:cNvPr id="6" name="Shape 4"/>
+          <p:cNvPr id="7" name="Shape 5"/>
           <p:cNvSpPr/>
           <p:nvPr/>
         </p:nvSpPr>
@@ -4702,7 +4786,7 @@
       </p:sp>
       <p:sp>
         <p:nvSpPr>
-          <p:cNvPr id="7" name="Text 5"/>
+          <p:cNvPr id="8" name="Text 6"/>
           <p:cNvSpPr/>
           <p:nvPr/>
         </p:nvSpPr>
@@ -4741,7 +4825,7 @@
       </p:sp>
       <p:sp>
         <p:nvSpPr>
-          <p:cNvPr id="8" name="Text 6"/>
+          <p:cNvPr id="9" name="Text 7"/>
           <p:cNvSpPr/>
           <p:nvPr/>
         </p:nvSpPr>
@@ -4780,7 +4864,7 @@
       </p:sp>
       <p:sp>
         <p:nvSpPr>
-          <p:cNvPr id="9" name="Shape 7"/>
+          <p:cNvPr id="10" name="Shape 8"/>
           <p:cNvSpPr/>
           <p:nvPr/>
         </p:nvSpPr>
@@ -4814,7 +4898,7 @@
       </p:sp>
       <p:sp>
         <p:nvSpPr>
-          <p:cNvPr id="10" name="Text 8"/>
+          <p:cNvPr id="11" name="Text 9"/>
           <p:cNvSpPr/>
           <p:nvPr/>
         </p:nvSpPr>
@@ -4853,7 +4937,7 @@
       </p:sp>
       <p:sp>
         <p:nvSpPr>
-          <p:cNvPr id="11" name="Text 9"/>
+          <p:cNvPr id="12" name="Text 10"/>
           <p:cNvSpPr/>
           <p:nvPr/>
         </p:nvSpPr>
@@ -4892,7 +4976,7 @@
       </p:sp>
       <p:sp>
         <p:nvSpPr>
-          <p:cNvPr id="12" name="Shape 10"/>
+          <p:cNvPr id="13" name="Shape 11"/>
           <p:cNvSpPr/>
           <p:nvPr/>
         </p:nvSpPr>
@@ -4926,7 +5010,7 @@
       </p:sp>
       <p:sp>
         <p:nvSpPr>
-          <p:cNvPr id="13" name="Text 11"/>
+          <p:cNvPr id="14" name="Text 12"/>
           <p:cNvSpPr/>
           <p:nvPr/>
         </p:nvSpPr>
@@ -4965,7 +5049,7 @@
       </p:sp>
       <p:sp>
         <p:nvSpPr>
-          <p:cNvPr id="14" name="Text 12"/>
+          <p:cNvPr id="15" name="Text 13"/>
           <p:cNvSpPr/>
           <p:nvPr/>
         </p:nvSpPr>
@@ -5004,7 +5088,7 @@
       </p:sp>
       <p:sp>
         <p:nvSpPr>
-          <p:cNvPr id="15" name="Shape 13"/>
+          <p:cNvPr id="16" name="Shape 14"/>
           <p:cNvSpPr/>
           <p:nvPr/>
         </p:nvSpPr>
@@ -5038,7 +5122,7 @@
       </p:sp>
       <p:sp>
         <p:nvSpPr>
-          <p:cNvPr id="16" name="Text 14"/>
+          <p:cNvPr id="17" name="Text 15"/>
           <p:cNvSpPr/>
           <p:nvPr/>
         </p:nvSpPr>
@@ -5077,7 +5161,7 @@
       </p:sp>
       <p:sp>
         <p:nvSpPr>
-          <p:cNvPr id="17" name="Text 15"/>
+          <p:cNvPr id="18" name="Text 16"/>
           <p:cNvSpPr/>
           <p:nvPr/>
         </p:nvSpPr>
@@ -5116,7 +5200,7 @@
       </p:sp>
       <p:sp>
         <p:nvSpPr>
-          <p:cNvPr id="18" name="Shape 16"/>
+          <p:cNvPr id="19" name="Shape 17"/>
           <p:cNvSpPr/>
           <p:nvPr/>
         </p:nvSpPr>
@@ -5150,7 +5234,7 @@
       </p:sp>
       <p:sp>
         <p:nvSpPr>
-          <p:cNvPr id="19" name="Text 17"/>
+          <p:cNvPr id="20" name="Text 18"/>
           <p:cNvSpPr/>
           <p:nvPr/>
         </p:nvSpPr>
@@ -5189,7 +5273,7 @@
       </p:sp>
       <p:sp>
         <p:nvSpPr>
-          <p:cNvPr id="20" name="Text 18"/>
+          <p:cNvPr id="21" name="Text 19"/>
           <p:cNvSpPr/>
           <p:nvPr/>
         </p:nvSpPr>
@@ -5228,7 +5312,7 @@
       </p:sp>
       <p:sp>
         <p:nvSpPr>
-          <p:cNvPr id="21" name="Shape 19"/>
+          <p:cNvPr id="22" name="Shape 20"/>
           <p:cNvSpPr/>
           <p:nvPr/>
         </p:nvSpPr>
@@ -5262,7 +5346,7 @@
       </p:sp>
       <p:sp>
         <p:nvSpPr>
-          <p:cNvPr id="22" name="Text 20"/>
+          <p:cNvPr id="23" name="Text 21"/>
           <p:cNvSpPr/>
           <p:nvPr/>
         </p:nvSpPr>
@@ -5301,7 +5385,7 @@
       </p:sp>
       <p:sp>
         <p:nvSpPr>
-          <p:cNvPr id="23" name="Text 21"/>
+          <p:cNvPr id="24" name="Text 22"/>
           <p:cNvSpPr/>
           <p:nvPr/>
         </p:nvSpPr>
@@ -5340,7 +5424,7 @@
       </p:sp>
       <p:sp>
         <p:nvSpPr>
-          <p:cNvPr id="24" name="Text 22"/>
+          <p:cNvPr id="25" name="Text 23"/>
           <p:cNvSpPr/>
           <p:nvPr/>
         </p:nvSpPr>
@@ -5379,7 +5463,7 @@
       </p:sp>
       <p:sp>
         <p:nvSpPr>
-          <p:cNvPr id="25" name="Text 23"/>
+          <p:cNvPr id="26" name="Text 24"/>
           <p:cNvSpPr/>
           <p:nvPr/>
         </p:nvSpPr>
@@ -5504,7 +5588,27 @@
       </p:sp>
       <p:sp>
         <p:nvSpPr>
-          <p:cNvPr id="4" name="Text 2"/>
+          <p:cNvPr id="4" name="Shape 2"/>
+          <p:cNvSpPr/>
+          <p:nvPr/>
+        </p:nvSpPr>
+        <p:spPr>
+          <a:xfrm>
+            <a:off x="457200" y="1938528"/>
+            <a:ext cx="11277295" cy="18288"/>
+          </a:xfrm>
+          <a:prstGeom prst="rect">
+            <a:avLst/>
+          </a:prstGeom>
+          <a:solidFill>
+            <a:srgbClr val="1E3A5F"/>
+          </a:solidFill>
+          <a:ln/>
+        </p:spPr>
+      </p:sp>
+      <p:sp>
+        <p:nvSpPr>
+          <p:cNvPr id="5" name="Text 3"/>
           <p:cNvSpPr/>
           <p:nvPr/>
         </p:nvSpPr>
@@ -5543,7 +5647,7 @@
       </p:sp>
       <p:sp>
         <p:nvSpPr>
-          <p:cNvPr id="5" name="Text 3"/>
+          <p:cNvPr id="6" name="Text 4"/>
           <p:cNvSpPr/>
           <p:nvPr/>
         </p:nvSpPr>
@@ -5582,7 +5686,7 @@
       </p:sp>
       <p:sp>
         <p:nvSpPr>
-          <p:cNvPr id="6" name="Shape 4"/>
+          <p:cNvPr id="7" name="Shape 5"/>
           <p:cNvSpPr/>
           <p:nvPr/>
         </p:nvSpPr>
@@ -5616,7 +5720,7 @@
       </p:sp>
       <p:sp>
         <p:nvSpPr>
-          <p:cNvPr id="7" name="Text 5"/>
+          <p:cNvPr id="8" name="Text 6"/>
           <p:cNvSpPr/>
           <p:nvPr/>
         </p:nvSpPr>
@@ -5655,7 +5759,7 @@
       </p:sp>
       <p:sp>
         <p:nvSpPr>
-          <p:cNvPr id="8" name="Text 6"/>
+          <p:cNvPr id="9" name="Text 7"/>
           <p:cNvSpPr/>
           <p:nvPr/>
         </p:nvSpPr>
@@ -5694,7 +5798,7 @@
       </p:sp>
       <p:sp>
         <p:nvSpPr>
-          <p:cNvPr id="9" name="Text 7"/>
+          <p:cNvPr id="10" name="Text 8"/>
           <p:cNvSpPr/>
           <p:nvPr/>
         </p:nvSpPr>
@@ -5733,7 +5837,7 @@
       </p:sp>
       <p:sp>
         <p:nvSpPr>
-          <p:cNvPr id="10" name="Shape 8"/>
+          <p:cNvPr id="11" name="Shape 9"/>
           <p:cNvSpPr/>
           <p:nvPr/>
         </p:nvSpPr>
@@ -5767,7 +5871,7 @@
       </p:sp>
       <p:sp>
         <p:nvSpPr>
-          <p:cNvPr id="11" name="Text 9"/>
+          <p:cNvPr id="12" name="Text 10"/>
           <p:cNvSpPr/>
           <p:nvPr/>
         </p:nvSpPr>
@@ -5806,7 +5910,7 @@
       </p:sp>
       <p:sp>
         <p:nvSpPr>
-          <p:cNvPr id="12" name="Text 10"/>
+          <p:cNvPr id="13" name="Text 11"/>
           <p:cNvSpPr/>
           <p:nvPr/>
         </p:nvSpPr>
@@ -5845,7 +5949,7 @@
       </p:sp>
       <p:sp>
         <p:nvSpPr>
-          <p:cNvPr id="13" name="Text 11"/>
+          <p:cNvPr id="14" name="Text 12"/>
           <p:cNvSpPr/>
           <p:nvPr/>
         </p:nvSpPr>
@@ -5884,7 +5988,7 @@
       </p:sp>
       <p:sp>
         <p:nvSpPr>
-          <p:cNvPr id="14" name="Shape 12"/>
+          <p:cNvPr id="15" name="Shape 13"/>
           <p:cNvSpPr/>
           <p:nvPr/>
         </p:nvSpPr>
@@ -5918,7 +6022,7 @@
       </p:sp>
       <p:sp>
         <p:nvSpPr>
-          <p:cNvPr id="15" name="Text 13"/>
+          <p:cNvPr id="16" name="Text 14"/>
           <p:cNvSpPr/>
           <p:nvPr/>
         </p:nvSpPr>
@@ -5957,7 +6061,7 @@
       </p:sp>
       <p:sp>
         <p:nvSpPr>
-          <p:cNvPr id="16" name="Text 14"/>
+          <p:cNvPr id="17" name="Text 15"/>
           <p:cNvSpPr/>
           <p:nvPr/>
         </p:nvSpPr>
@@ -5996,7 +6100,7 @@
       </p:sp>
       <p:sp>
         <p:nvSpPr>
-          <p:cNvPr id="17" name="Text 15"/>
+          <p:cNvPr id="18" name="Text 16"/>
           <p:cNvSpPr/>
           <p:nvPr/>
         </p:nvSpPr>
@@ -6035,7 +6139,7 @@
       </p:sp>
       <p:sp>
         <p:nvSpPr>
-          <p:cNvPr id="18" name="Shape 16"/>
+          <p:cNvPr id="19" name="Shape 17"/>
           <p:cNvSpPr/>
           <p:nvPr/>
         </p:nvSpPr>
@@ -6069,7 +6173,7 @@
       </p:sp>
       <p:sp>
         <p:nvSpPr>
-          <p:cNvPr id="19" name="Text 17"/>
+          <p:cNvPr id="20" name="Text 18"/>
           <p:cNvSpPr/>
           <p:nvPr/>
         </p:nvSpPr>
@@ -6108,7 +6212,7 @@
       </p:sp>
       <p:sp>
         <p:nvSpPr>
-          <p:cNvPr id="20" name="Text 18"/>
+          <p:cNvPr id="21" name="Text 19"/>
           <p:cNvSpPr/>
           <p:nvPr/>
         </p:nvSpPr>
@@ -6147,7 +6251,7 @@
       </p:sp>
       <p:sp>
         <p:nvSpPr>
-          <p:cNvPr id="21" name="Text 19"/>
+          <p:cNvPr id="22" name="Text 20"/>
           <p:cNvSpPr/>
           <p:nvPr/>
         </p:nvSpPr>
@@ -6186,7 +6290,7 @@
       </p:sp>
       <p:sp>
         <p:nvSpPr>
-          <p:cNvPr id="22" name="Text 20"/>
+          <p:cNvPr id="23" name="Text 21"/>
           <p:cNvSpPr/>
           <p:nvPr/>
         </p:nvSpPr>
@@ -6225,7 +6329,7 @@
       </p:sp>
       <p:sp>
         <p:nvSpPr>
-          <p:cNvPr id="23" name="Text 21"/>
+          <p:cNvPr id="24" name="Text 22"/>
           <p:cNvSpPr/>
           <p:nvPr/>
         </p:nvSpPr>
@@ -6264,7 +6368,7 @@
       </p:sp>
       <p:sp>
         <p:nvSpPr>
-          <p:cNvPr id="24" name="Text 22"/>
+          <p:cNvPr id="25" name="Text 23"/>
           <p:cNvSpPr/>
           <p:nvPr/>
         </p:nvSpPr>
@@ -6389,7 +6493,27 @@
       </p:sp>
       <p:sp>
         <p:nvSpPr>
-          <p:cNvPr id="4" name="Text 2"/>
+          <p:cNvPr id="4" name="Shape 2"/>
+          <p:cNvSpPr/>
+          <p:nvPr/>
+        </p:nvSpPr>
+        <p:spPr>
+          <a:xfrm>
+            <a:off x="457200" y="1938528"/>
+            <a:ext cx="11277295" cy="18288"/>
+          </a:xfrm>
+          <a:prstGeom prst="rect">
+            <a:avLst/>
+          </a:prstGeom>
+          <a:solidFill>
+            <a:srgbClr val="1E3A5F"/>
+          </a:solidFill>
+          <a:ln/>
+        </p:spPr>
+      </p:sp>
+      <p:sp>
+        <p:nvSpPr>
+          <p:cNvPr id="5" name="Text 3"/>
           <p:cNvSpPr/>
           <p:nvPr/>
         </p:nvSpPr>
@@ -6428,7 +6552,7 @@
       </p:sp>
       <p:sp>
         <p:nvSpPr>
-          <p:cNvPr id="5" name="Text 3"/>
+          <p:cNvPr id="6" name="Text 4"/>
           <p:cNvSpPr/>
           <p:nvPr/>
         </p:nvSpPr>
@@ -6467,7 +6591,7 @@
       </p:sp>
       <p:sp>
         <p:nvSpPr>
-          <p:cNvPr id="6" name="Shape 4"/>
+          <p:cNvPr id="7" name="Shape 5"/>
           <p:cNvSpPr/>
           <p:nvPr/>
         </p:nvSpPr>
@@ -6501,7 +6625,7 @@
       </p:sp>
       <p:sp>
         <p:nvSpPr>
-          <p:cNvPr id="7" name="Text 5"/>
+          <p:cNvPr id="8" name="Text 6"/>
           <p:cNvSpPr/>
           <p:nvPr/>
         </p:nvSpPr>
@@ -6537,7 +6661,7 @@
       </p:sp>
       <p:sp>
         <p:nvSpPr>
-          <p:cNvPr id="8" name="Text 6"/>
+          <p:cNvPr id="9" name="Text 7"/>
           <p:cNvSpPr/>
           <p:nvPr/>
         </p:nvSpPr>
@@ -6576,7 +6700,7 @@
       </p:sp>
       <p:sp>
         <p:nvSpPr>
-          <p:cNvPr id="9" name="Shape 7"/>
+          <p:cNvPr id="10" name="Shape 8"/>
           <p:cNvSpPr/>
           <p:nvPr/>
         </p:nvSpPr>
@@ -6610,7 +6734,7 @@
       </p:sp>
       <p:sp>
         <p:nvSpPr>
-          <p:cNvPr id="10" name="Text 8"/>
+          <p:cNvPr id="11" name="Text 9"/>
           <p:cNvSpPr/>
           <p:nvPr/>
         </p:nvSpPr>
@@ -6646,7 +6770,7 @@
       </p:sp>
       <p:sp>
         <p:nvSpPr>
-          <p:cNvPr id="11" name="Text 9"/>
+          <p:cNvPr id="12" name="Text 10"/>
           <p:cNvSpPr/>
           <p:nvPr/>
         </p:nvSpPr>
@@ -6685,7 +6809,7 @@
       </p:sp>
       <p:sp>
         <p:nvSpPr>
-          <p:cNvPr id="12" name="Shape 10"/>
+          <p:cNvPr id="13" name="Shape 11"/>
           <p:cNvSpPr/>
           <p:nvPr/>
         </p:nvSpPr>
@@ -6719,7 +6843,7 @@
       </p:sp>
       <p:sp>
         <p:nvSpPr>
-          <p:cNvPr id="13" name="Text 11"/>
+          <p:cNvPr id="14" name="Text 12"/>
           <p:cNvSpPr/>
           <p:nvPr/>
         </p:nvSpPr>
@@ -6755,7 +6879,7 @@
       </p:sp>
       <p:sp>
         <p:nvSpPr>
-          <p:cNvPr id="14" name="Text 12"/>
+          <p:cNvPr id="15" name="Text 13"/>
           <p:cNvSpPr/>
           <p:nvPr/>
         </p:nvSpPr>
@@ -6794,7 +6918,7 @@
       </p:sp>
       <p:sp>
         <p:nvSpPr>
-          <p:cNvPr id="15" name="Shape 13"/>
+          <p:cNvPr id="16" name="Shape 14"/>
           <p:cNvSpPr/>
           <p:nvPr/>
         </p:nvSpPr>
@@ -6828,7 +6952,7 @@
       </p:sp>
       <p:sp>
         <p:nvSpPr>
-          <p:cNvPr id="16" name="Text 14"/>
+          <p:cNvPr id="17" name="Text 15"/>
           <p:cNvSpPr/>
           <p:nvPr/>
         </p:nvSpPr>
@@ -6864,7 +6988,7 @@
       </p:sp>
       <p:sp>
         <p:nvSpPr>
-          <p:cNvPr id="17" name="Text 15"/>
+          <p:cNvPr id="18" name="Text 16"/>
           <p:cNvSpPr/>
           <p:nvPr/>
         </p:nvSpPr>
@@ -6903,7 +7027,7 @@
       </p:sp>
       <p:sp>
         <p:nvSpPr>
-          <p:cNvPr id="18" name="Shape 16"/>
+          <p:cNvPr id="19" name="Shape 17"/>
           <p:cNvSpPr/>
           <p:nvPr/>
         </p:nvSpPr>
@@ -6937,7 +7061,7 @@
       </p:sp>
       <p:sp>
         <p:nvSpPr>
-          <p:cNvPr id="19" name="Text 17"/>
+          <p:cNvPr id="20" name="Text 18"/>
           <p:cNvSpPr/>
           <p:nvPr/>
         </p:nvSpPr>
@@ -6973,7 +7097,7 @@
       </p:sp>
       <p:sp>
         <p:nvSpPr>
-          <p:cNvPr id="20" name="Text 18"/>
+          <p:cNvPr id="21" name="Text 19"/>
           <p:cNvSpPr/>
           <p:nvPr/>
         </p:nvSpPr>
@@ -7012,7 +7136,7 @@
       </p:sp>
       <p:sp>
         <p:nvSpPr>
-          <p:cNvPr id="21" name="Text 19"/>
+          <p:cNvPr id="22" name="Text 20"/>
           <p:cNvSpPr/>
           <p:nvPr/>
         </p:nvSpPr>
@@ -7051,7 +7175,7 @@
       </p:sp>
       <p:sp>
         <p:nvSpPr>
-          <p:cNvPr id="22" name="Text 20"/>
+          <p:cNvPr id="23" name="Text 21"/>
           <p:cNvSpPr/>
           <p:nvPr/>
         </p:nvSpPr>
@@ -7090,7 +7214,7 @@
       </p:sp>
       <p:sp>
         <p:nvSpPr>
-          <p:cNvPr id="23" name="Text 21"/>
+          <p:cNvPr id="24" name="Text 22"/>
           <p:cNvSpPr/>
           <p:nvPr/>
         </p:nvSpPr>
@@ -7215,7 +7339,27 @@
       </p:sp>
       <p:sp>
         <p:nvSpPr>
-          <p:cNvPr id="4" name="Text 2"/>
+          <p:cNvPr id="4" name="Shape 2"/>
+          <p:cNvSpPr/>
+          <p:nvPr/>
+        </p:nvSpPr>
+        <p:spPr>
+          <a:xfrm>
+            <a:off x="457200" y="1938528"/>
+            <a:ext cx="11277295" cy="18288"/>
+          </a:xfrm>
+          <a:prstGeom prst="rect">
+            <a:avLst/>
+          </a:prstGeom>
+          <a:solidFill>
+            <a:srgbClr val="1E3A5F"/>
+          </a:solidFill>
+          <a:ln/>
+        </p:spPr>
+      </p:sp>
+      <p:sp>
+        <p:nvSpPr>
+          <p:cNvPr id="5" name="Text 3"/>
           <p:cNvSpPr/>
           <p:nvPr/>
         </p:nvSpPr>
@@ -7254,7 +7398,7 @@
       </p:sp>
       <p:sp>
         <p:nvSpPr>
-          <p:cNvPr id="5" name="Text 3"/>
+          <p:cNvPr id="6" name="Text 4"/>
           <p:cNvSpPr/>
           <p:nvPr/>
         </p:nvSpPr>
@@ -8151,7 +8295,7 @@
       </p:graphicFrame>
       <p:sp>
         <p:nvSpPr>
-          <p:cNvPr id="7" name="Text 4"/>
+          <p:cNvPr id="8" name="Text 5"/>
           <p:cNvSpPr/>
           <p:nvPr/>
         </p:nvSpPr>
@@ -8190,7 +8334,7 @@
       </p:sp>
       <p:sp>
         <p:nvSpPr>
-          <p:cNvPr id="8" name="Text 5"/>
+          <p:cNvPr id="9" name="Text 6"/>
           <p:cNvSpPr/>
           <p:nvPr/>
         </p:nvSpPr>
@@ -8229,7 +8373,7 @@
       </p:sp>
       <p:sp>
         <p:nvSpPr>
-          <p:cNvPr id="9" name="Text 6"/>
+          <p:cNvPr id="10" name="Text 7"/>
           <p:cNvSpPr/>
           <p:nvPr/>
         </p:nvSpPr>
@@ -8354,7 +8498,27 @@
       </p:sp>
       <p:sp>
         <p:nvSpPr>
-          <p:cNvPr id="4" name="Text 2"/>
+          <p:cNvPr id="4" name="Shape 2"/>
+          <p:cNvSpPr/>
+          <p:nvPr/>
+        </p:nvSpPr>
+        <p:spPr>
+          <a:xfrm>
+            <a:off x="457200" y="1938528"/>
+            <a:ext cx="11277295" cy="18288"/>
+          </a:xfrm>
+          <a:prstGeom prst="rect">
+            <a:avLst/>
+          </a:prstGeom>
+          <a:solidFill>
+            <a:srgbClr val="1E3A5F"/>
+          </a:solidFill>
+          <a:ln/>
+        </p:spPr>
+      </p:sp>
+      <p:sp>
+        <p:nvSpPr>
+          <p:cNvPr id="5" name="Text 3"/>
           <p:cNvSpPr/>
           <p:nvPr/>
         </p:nvSpPr>
@@ -8393,7 +8557,7 @@
       </p:sp>
       <p:sp>
         <p:nvSpPr>
-          <p:cNvPr id="5" name="Text 3"/>
+          <p:cNvPr id="6" name="Text 4"/>
           <p:cNvSpPr/>
           <p:nvPr/>
         </p:nvSpPr>
@@ -8432,7 +8596,7 @@
       </p:sp>
       <p:sp>
         <p:nvSpPr>
-          <p:cNvPr id="6" name="Shape 4"/>
+          <p:cNvPr id="7" name="Shape 5"/>
           <p:cNvSpPr/>
           <p:nvPr/>
         </p:nvSpPr>
@@ -8466,7 +8630,7 @@
       </p:sp>
       <p:sp>
         <p:nvSpPr>
-          <p:cNvPr id="7" name="Text 5"/>
+          <p:cNvPr id="8" name="Text 6"/>
           <p:cNvSpPr/>
           <p:nvPr/>
         </p:nvSpPr>
@@ -8505,7 +8669,7 @@
       </p:sp>
       <p:sp>
         <p:nvSpPr>
-          <p:cNvPr id="8" name="Text 6"/>
+          <p:cNvPr id="9" name="Text 7"/>
           <p:cNvSpPr/>
           <p:nvPr/>
         </p:nvSpPr>
@@ -8544,7 +8708,7 @@
       </p:sp>
       <p:sp>
         <p:nvSpPr>
-          <p:cNvPr id="9" name="Shape 7"/>
+          <p:cNvPr id="10" name="Shape 8"/>
           <p:cNvSpPr/>
           <p:nvPr/>
         </p:nvSpPr>
@@ -8578,7 +8742,7 @@
       </p:sp>
       <p:sp>
         <p:nvSpPr>
-          <p:cNvPr id="10" name="Text 8"/>
+          <p:cNvPr id="11" name="Text 9"/>
           <p:cNvSpPr/>
           <p:nvPr/>
         </p:nvSpPr>
@@ -8617,7 +8781,7 @@
       </p:sp>
       <p:sp>
         <p:nvSpPr>
-          <p:cNvPr id="11" name="Text 9"/>
+          <p:cNvPr id="12" name="Text 10"/>
           <p:cNvSpPr/>
           <p:nvPr/>
         </p:nvSpPr>
@@ -8670,7 +8834,7 @@
       </p:sp>
       <p:sp>
         <p:nvSpPr>
-          <p:cNvPr id="12" name="Text 10"/>
+          <p:cNvPr id="13" name="Text 11"/>
           <p:cNvSpPr/>
           <p:nvPr/>
         </p:nvSpPr>
@@ -8723,7 +8887,7 @@
       </p:sp>
       <p:sp>
         <p:nvSpPr>
-          <p:cNvPr id="13" name="Text 11"/>
+          <p:cNvPr id="14" name="Text 12"/>
           <p:cNvSpPr/>
           <p:nvPr/>
         </p:nvSpPr>
@@ -8776,7 +8940,7 @@
       </p:sp>
       <p:sp>
         <p:nvSpPr>
-          <p:cNvPr id="14" name="Text 12"/>
+          <p:cNvPr id="15" name="Text 13"/>
           <p:cNvSpPr/>
           <p:nvPr/>
         </p:nvSpPr>
@@ -8829,7 +8993,7 @@
       </p:sp>
       <p:sp>
         <p:nvSpPr>
-          <p:cNvPr id="15" name="Text 13"/>
+          <p:cNvPr id="16" name="Text 14"/>
           <p:cNvSpPr/>
           <p:nvPr/>
         </p:nvSpPr>
@@ -8868,7 +9032,7 @@
       </p:sp>
       <p:sp>
         <p:nvSpPr>
-          <p:cNvPr id="16" name="Text 14"/>
+          <p:cNvPr id="17" name="Text 15"/>
           <p:cNvSpPr/>
           <p:nvPr/>
         </p:nvSpPr>
@@ -8907,7 +9071,7 @@
       </p:sp>
       <p:sp>
         <p:nvSpPr>
-          <p:cNvPr id="17" name="Text 15"/>
+          <p:cNvPr id="18" name="Text 16"/>
           <p:cNvSpPr/>
           <p:nvPr/>
         </p:nvSpPr>
@@ -9032,7 +9196,27 @@
       </p:sp>
       <p:sp>
         <p:nvSpPr>
-          <p:cNvPr id="4" name="Text 2"/>
+          <p:cNvPr id="4" name="Shape 2"/>
+          <p:cNvSpPr/>
+          <p:nvPr/>
+        </p:nvSpPr>
+        <p:spPr>
+          <a:xfrm>
+            <a:off x="457200" y="1938528"/>
+            <a:ext cx="11277295" cy="18288"/>
+          </a:xfrm>
+          <a:prstGeom prst="rect">
+            <a:avLst/>
+          </a:prstGeom>
+          <a:solidFill>
+            <a:srgbClr val="1E3A5F"/>
+          </a:solidFill>
+          <a:ln/>
+        </p:spPr>
+      </p:sp>
+      <p:sp>
+        <p:nvSpPr>
+          <p:cNvPr id="5" name="Text 3"/>
           <p:cNvSpPr/>
           <p:nvPr/>
         </p:nvSpPr>
@@ -9071,7 +9255,7 @@
       </p:sp>
       <p:sp>
         <p:nvSpPr>
-          <p:cNvPr id="5" name="Text 3"/>
+          <p:cNvPr id="6" name="Text 4"/>
           <p:cNvSpPr/>
           <p:nvPr/>
         </p:nvSpPr>
@@ -9102,7 +9286,7 @@
                 <a:ea typeface="Calibri" pitchFamily="34" charset="-122"/>
                 <a:cs typeface="Calibri" pitchFamily="34" charset="-120"/>
               </a:rPr>
-              <a:t>github.com/gabriellive1817-stack/Leito_360 (publicar como público) — estrutura organizada por responsabilidade.</a:t>
+              <a:t>github.com/gabriellive1817-stack/Leito_360 — repositório público, estrutura organizada por responsabilidade.</a:t>
             </a:r>
             <a:endParaRPr lang="en-US" sz="1400" dirty="0"/>
           </a:p>
@@ -9110,7 +9294,7 @@
       </p:sp>
       <p:sp>
         <p:nvSpPr>
-          <p:cNvPr id="6" name="Shape 4"/>
+          <p:cNvPr id="7" name="Shape 5"/>
           <p:cNvSpPr/>
           <p:nvPr/>
         </p:nvSpPr>
@@ -9144,7 +9328,7 @@
       </p:sp>
       <p:sp>
         <p:nvSpPr>
-          <p:cNvPr id="7" name="Text 5"/>
+          <p:cNvPr id="8" name="Text 6"/>
           <p:cNvSpPr/>
           <p:nvPr/>
         </p:nvSpPr>
@@ -9183,7 +9367,7 @@
       </p:sp>
       <p:sp>
         <p:nvSpPr>
-          <p:cNvPr id="8" name="Text 6"/>
+          <p:cNvPr id="9" name="Text 7"/>
           <p:cNvSpPr/>
           <p:nvPr/>
         </p:nvSpPr>
@@ -9222,7 +9406,7 @@
       </p:sp>
       <p:sp>
         <p:nvSpPr>
-          <p:cNvPr id="9" name="Text 7"/>
+          <p:cNvPr id="10" name="Text 8"/>
           <p:cNvSpPr/>
           <p:nvPr/>
         </p:nvSpPr>
@@ -9261,7 +9445,7 @@
       </p:sp>
       <p:sp>
         <p:nvSpPr>
-          <p:cNvPr id="10" name="Text 8"/>
+          <p:cNvPr id="11" name="Text 9"/>
           <p:cNvSpPr/>
           <p:nvPr/>
         </p:nvSpPr>
@@ -9292,7 +9476,7 @@
                 <a:ea typeface="Courier New" pitchFamily="34" charset="-122"/>
                 <a:cs typeface="Courier New" pitchFamily="34" charset="-120"/>
               </a:rPr>
-              <a:t>├── etl/                  pipeline Python (fetch, parse, validação, indicadores)</a:t>
+              <a:t>├── etl/                  pipeline Python (fetch, parse, validação, indicadores, malha)</a:t>
             </a:r>
             <a:endParaRPr lang="en-US" sz="1100" dirty="0"/>
           </a:p>
@@ -9300,7 +9484,7 @@
       </p:sp>
       <p:sp>
         <p:nvSpPr>
-          <p:cNvPr id="11" name="Text 9"/>
+          <p:cNvPr id="12" name="Text 10"/>
           <p:cNvSpPr/>
           <p:nvPr/>
         </p:nvSpPr>
@@ -9339,7 +9523,7 @@
       </p:sp>
       <p:sp>
         <p:nvSpPr>
-          <p:cNvPr id="12" name="Text 10"/>
+          <p:cNvPr id="13" name="Text 11"/>
           <p:cNvSpPr/>
           <p:nvPr/>
         </p:nvSpPr>
@@ -9378,7 +9562,7 @@
       </p:sp>
       <p:sp>
         <p:nvSpPr>
-          <p:cNvPr id="13" name="Text 11"/>
+          <p:cNvPr id="14" name="Text 12"/>
           <p:cNvSpPr/>
           <p:nvPr/>
         </p:nvSpPr>
@@ -9417,7 +9601,7 @@
       </p:sp>
       <p:sp>
         <p:nvSpPr>
-          <p:cNvPr id="14" name="Text 12"/>
+          <p:cNvPr id="15" name="Text 13"/>
           <p:cNvSpPr/>
           <p:nvPr/>
         </p:nvSpPr>
@@ -9456,7 +9640,7 @@
       </p:sp>
       <p:sp>
         <p:nvSpPr>
-          <p:cNvPr id="15" name="Text 13"/>
+          <p:cNvPr id="16" name="Text 14"/>
           <p:cNvSpPr/>
           <p:nvPr/>
         </p:nvSpPr>
@@ -9495,7 +9679,7 @@
       </p:sp>
       <p:sp>
         <p:nvSpPr>
-          <p:cNvPr id="16" name="Text 14"/>
+          <p:cNvPr id="17" name="Text 15"/>
           <p:cNvSpPr/>
           <p:nvPr/>
         </p:nvSpPr>
@@ -9534,7 +9718,7 @@
       </p:sp>
       <p:sp>
         <p:nvSpPr>
-          <p:cNvPr id="17" name="Text 15"/>
+          <p:cNvPr id="18" name="Text 16"/>
           <p:cNvSpPr/>
           <p:nvPr/>
         </p:nvSpPr>
@@ -9573,7 +9757,7 @@
       </p:sp>
       <p:sp>
         <p:nvSpPr>
-          <p:cNvPr id="18" name="Text 16"/>
+          <p:cNvPr id="19" name="Text 17"/>
           <p:cNvSpPr/>
           <p:nvPr/>
         </p:nvSpPr>
@@ -9612,7 +9796,7 @@
       </p:sp>
       <p:sp>
         <p:nvSpPr>
-          <p:cNvPr id="19" name="Text 17"/>
+          <p:cNvPr id="20" name="Text 18"/>
           <p:cNvSpPr/>
           <p:nvPr/>
         </p:nvSpPr>
@@ -9651,7 +9835,7 @@
       </p:sp>
       <p:sp>
         <p:nvSpPr>
-          <p:cNvPr id="20" name="Shape 18"/>
+          <p:cNvPr id="21" name="Shape 19"/>
           <p:cNvSpPr/>
           <p:nvPr/>
         </p:nvSpPr>
@@ -9685,7 +9869,7 @@
       </p:sp>
       <p:sp>
         <p:nvSpPr>
-          <p:cNvPr id="21" name="Text 19"/>
+          <p:cNvPr id="22" name="Text 20"/>
           <p:cNvSpPr/>
           <p:nvPr/>
         </p:nvSpPr>
@@ -9724,7 +9908,7 @@
       </p:sp>
       <p:sp>
         <p:nvSpPr>
-          <p:cNvPr id="22" name="Text 20"/>
+          <p:cNvPr id="23" name="Text 21"/>
           <p:cNvSpPr/>
           <p:nvPr/>
         </p:nvSpPr>
@@ -9763,7 +9947,7 @@
       </p:sp>
       <p:sp>
         <p:nvSpPr>
-          <p:cNvPr id="23" name="Text 21"/>
+          <p:cNvPr id="24" name="Text 22"/>
           <p:cNvSpPr/>
           <p:nvPr/>
         </p:nvSpPr>
@@ -9802,7 +9986,7 @@
       </p:sp>
       <p:sp>
         <p:nvSpPr>
-          <p:cNvPr id="24" name="Text 22"/>
+          <p:cNvPr id="25" name="Text 23"/>
           <p:cNvSpPr/>
           <p:nvPr/>
         </p:nvSpPr>
@@ -9841,7 +10025,7 @@
       </p:sp>
       <p:sp>
         <p:nvSpPr>
-          <p:cNvPr id="25" name="Text 23"/>
+          <p:cNvPr id="26" name="Text 24"/>
           <p:cNvSpPr/>
           <p:nvPr/>
         </p:nvSpPr>
@@ -9880,7 +10064,7 @@
       </p:sp>
       <p:sp>
         <p:nvSpPr>
-          <p:cNvPr id="26" name="Text 24"/>
+          <p:cNvPr id="27" name="Text 25"/>
           <p:cNvSpPr/>
           <p:nvPr/>
         </p:nvSpPr>
@@ -9919,7 +10103,7 @@
       </p:sp>
       <p:sp>
         <p:nvSpPr>
-          <p:cNvPr id="27" name="Text 25"/>
+          <p:cNvPr id="28" name="Text 26"/>
           <p:cNvSpPr/>
           <p:nvPr/>
         </p:nvSpPr>
@@ -9958,7 +10142,7 @@
       </p:sp>
       <p:sp>
         <p:nvSpPr>
-          <p:cNvPr id="28" name="Text 26"/>
+          <p:cNvPr id="29" name="Text 27"/>
           <p:cNvSpPr/>
           <p:nvPr/>
         </p:nvSpPr>
@@ -10083,7 +10267,27 @@
       </p:sp>
       <p:sp>
         <p:nvSpPr>
-          <p:cNvPr id="4" name="Text 2"/>
+          <p:cNvPr id="4" name="Shape 2"/>
+          <p:cNvSpPr/>
+          <p:nvPr/>
+        </p:nvSpPr>
+        <p:spPr>
+          <a:xfrm>
+            <a:off x="457200" y="1938528"/>
+            <a:ext cx="11277295" cy="18288"/>
+          </a:xfrm>
+          <a:prstGeom prst="rect">
+            <a:avLst/>
+          </a:prstGeom>
+          <a:solidFill>
+            <a:srgbClr val="1E3A5F"/>
+          </a:solidFill>
+          <a:ln/>
+        </p:spPr>
+      </p:sp>
+      <p:sp>
+        <p:nvSpPr>
+          <p:cNvPr id="5" name="Text 3"/>
           <p:cNvSpPr/>
           <p:nvPr/>
         </p:nvSpPr>
@@ -10122,7 +10326,7 @@
       </p:sp>
       <p:sp>
         <p:nvSpPr>
-          <p:cNvPr id="5" name="Text 3"/>
+          <p:cNvPr id="6" name="Text 4"/>
           <p:cNvSpPr/>
           <p:nvPr/>
         </p:nvSpPr>
@@ -10161,7 +10365,7 @@
       </p:sp>
       <p:sp>
         <p:nvSpPr>
-          <p:cNvPr id="6" name="Shape 4"/>
+          <p:cNvPr id="7" name="Shape 5"/>
           <p:cNvSpPr/>
           <p:nvPr/>
         </p:nvSpPr>
@@ -10195,7 +10399,7 @@
       </p:sp>
       <p:sp>
         <p:nvSpPr>
-          <p:cNvPr id="7" name="Text 5"/>
+          <p:cNvPr id="8" name="Text 6"/>
           <p:cNvSpPr/>
           <p:nvPr/>
         </p:nvSpPr>
@@ -10234,7 +10438,7 @@
       </p:sp>
       <p:sp>
         <p:nvSpPr>
-          <p:cNvPr id="8" name="Text 6"/>
+          <p:cNvPr id="9" name="Text 7"/>
           <p:cNvSpPr/>
           <p:nvPr/>
         </p:nvSpPr>
@@ -10273,7 +10477,7 @@
       </p:sp>
       <p:sp>
         <p:nvSpPr>
-          <p:cNvPr id="9" name="Text 7"/>
+          <p:cNvPr id="10" name="Text 8"/>
           <p:cNvSpPr/>
           <p:nvPr/>
         </p:nvSpPr>
@@ -10312,7 +10516,7 @@
       </p:sp>
       <p:sp>
         <p:nvSpPr>
-          <p:cNvPr id="10" name="Shape 8"/>
+          <p:cNvPr id="11" name="Shape 9"/>
           <p:cNvSpPr/>
           <p:nvPr/>
         </p:nvSpPr>
@@ -10346,7 +10550,7 @@
       </p:sp>
       <p:sp>
         <p:nvSpPr>
-          <p:cNvPr id="11" name="Text 9"/>
+          <p:cNvPr id="12" name="Text 10"/>
           <p:cNvSpPr/>
           <p:nvPr/>
         </p:nvSpPr>
@@ -10385,7 +10589,7 @@
       </p:sp>
       <p:sp>
         <p:nvSpPr>
-          <p:cNvPr id="12" name="Text 10"/>
+          <p:cNvPr id="13" name="Text 11"/>
           <p:cNvSpPr/>
           <p:nvPr/>
         </p:nvSpPr>
@@ -10424,7 +10628,7 @@
       </p:sp>
       <p:sp>
         <p:nvSpPr>
-          <p:cNvPr id="13" name="Text 11"/>
+          <p:cNvPr id="14" name="Text 12"/>
           <p:cNvSpPr/>
           <p:nvPr/>
         </p:nvSpPr>
@@ -10463,7 +10667,7 @@
       </p:sp>
       <p:sp>
         <p:nvSpPr>
-          <p:cNvPr id="14" name="Shape 12"/>
+          <p:cNvPr id="15" name="Shape 13"/>
           <p:cNvSpPr/>
           <p:nvPr/>
         </p:nvSpPr>
@@ -10497,7 +10701,7 @@
       </p:sp>
       <p:sp>
         <p:nvSpPr>
-          <p:cNvPr id="15" name="Text 13"/>
+          <p:cNvPr id="16" name="Text 14"/>
           <p:cNvSpPr/>
           <p:nvPr/>
         </p:nvSpPr>
@@ -10536,7 +10740,7 @@
       </p:sp>
       <p:sp>
         <p:nvSpPr>
-          <p:cNvPr id="16" name="Text 14"/>
+          <p:cNvPr id="17" name="Text 15"/>
           <p:cNvSpPr/>
           <p:nvPr/>
         </p:nvSpPr>
@@ -10575,7 +10779,7 @@
       </p:sp>
       <p:sp>
         <p:nvSpPr>
-          <p:cNvPr id="17" name="Text 15"/>
+          <p:cNvPr id="18" name="Text 16"/>
           <p:cNvSpPr/>
           <p:nvPr/>
         </p:nvSpPr>
@@ -10614,7 +10818,7 @@
       </p:sp>
       <p:sp>
         <p:nvSpPr>
-          <p:cNvPr id="18" name="Shape 16"/>
+          <p:cNvPr id="19" name="Shape 17"/>
           <p:cNvSpPr/>
           <p:nvPr/>
         </p:nvSpPr>
@@ -10648,7 +10852,7 @@
       </p:sp>
       <p:sp>
         <p:nvSpPr>
-          <p:cNvPr id="19" name="Text 17"/>
+          <p:cNvPr id="20" name="Text 18"/>
           <p:cNvSpPr/>
           <p:nvPr/>
         </p:nvSpPr>
@@ -10687,7 +10891,7 @@
       </p:sp>
       <p:sp>
         <p:nvSpPr>
-          <p:cNvPr id="20" name="Text 18"/>
+          <p:cNvPr id="21" name="Text 19"/>
           <p:cNvSpPr/>
           <p:nvPr/>
         </p:nvSpPr>
@@ -10726,7 +10930,7 @@
       </p:sp>
       <p:sp>
         <p:nvSpPr>
-          <p:cNvPr id="21" name="Text 19"/>
+          <p:cNvPr id="22" name="Text 20"/>
           <p:cNvSpPr/>
           <p:nvPr/>
         </p:nvSpPr>
@@ -10765,7 +10969,7 @@
       </p:sp>
       <p:sp>
         <p:nvSpPr>
-          <p:cNvPr id="22" name="Shape 20"/>
+          <p:cNvPr id="23" name="Shape 21"/>
           <p:cNvSpPr/>
           <p:nvPr/>
         </p:nvSpPr>
@@ -10799,7 +11003,7 @@
       </p:sp>
       <p:sp>
         <p:nvSpPr>
-          <p:cNvPr id="23" name="Text 21"/>
+          <p:cNvPr id="24" name="Text 22"/>
           <p:cNvSpPr/>
           <p:nvPr/>
         </p:nvSpPr>
@@ -10838,7 +11042,7 @@
       </p:sp>
       <p:sp>
         <p:nvSpPr>
-          <p:cNvPr id="24" name="Text 22"/>
+          <p:cNvPr id="25" name="Text 23"/>
           <p:cNvSpPr/>
           <p:nvPr/>
         </p:nvSpPr>
@@ -10877,7 +11081,7 @@
       </p:sp>
       <p:sp>
         <p:nvSpPr>
-          <p:cNvPr id="25" name="Text 23"/>
+          <p:cNvPr id="26" name="Text 24"/>
           <p:cNvSpPr/>
           <p:nvPr/>
         </p:nvSpPr>
@@ -10916,7 +11120,7 @@
       </p:sp>
       <p:sp>
         <p:nvSpPr>
-          <p:cNvPr id="26" name="Shape 24"/>
+          <p:cNvPr id="27" name="Shape 25"/>
           <p:cNvSpPr/>
           <p:nvPr/>
         </p:nvSpPr>
@@ -10950,7 +11154,7 @@
       </p:sp>
       <p:sp>
         <p:nvSpPr>
-          <p:cNvPr id="27" name="Text 25"/>
+          <p:cNvPr id="28" name="Text 26"/>
           <p:cNvSpPr/>
           <p:nvPr/>
         </p:nvSpPr>
@@ -10989,7 +11193,7 @@
       </p:sp>
       <p:sp>
         <p:nvSpPr>
-          <p:cNvPr id="28" name="Text 26"/>
+          <p:cNvPr id="29" name="Text 27"/>
           <p:cNvSpPr/>
           <p:nvPr/>
         </p:nvSpPr>
@@ -11028,7 +11232,7 @@
       </p:sp>
       <p:sp>
         <p:nvSpPr>
-          <p:cNvPr id="29" name="Text 27"/>
+          <p:cNvPr id="30" name="Text 28"/>
           <p:cNvSpPr/>
           <p:nvPr/>
         </p:nvSpPr>
@@ -11067,7 +11271,7 @@
       </p:sp>
       <p:sp>
         <p:nvSpPr>
-          <p:cNvPr id="30" name="Text 28"/>
+          <p:cNvPr id="31" name="Text 29"/>
           <p:cNvSpPr/>
           <p:nvPr/>
         </p:nvSpPr>
@@ -11106,7 +11310,7 @@
       </p:sp>
       <p:sp>
         <p:nvSpPr>
-          <p:cNvPr id="31" name="Text 29"/>
+          <p:cNvPr id="32" name="Text 30"/>
           <p:cNvSpPr/>
           <p:nvPr/>
         </p:nvSpPr>
@@ -11145,7 +11349,7 @@
       </p:sp>
       <p:sp>
         <p:nvSpPr>
-          <p:cNvPr id="32" name="Text 30"/>
+          <p:cNvPr id="33" name="Text 31"/>
           <p:cNvSpPr/>
           <p:nvPr/>
         </p:nvSpPr>
@@ -11270,7 +11474,27 @@
       </p:sp>
       <p:sp>
         <p:nvSpPr>
-          <p:cNvPr id="4" name="Text 2"/>
+          <p:cNvPr id="4" name="Shape 2"/>
+          <p:cNvSpPr/>
+          <p:nvPr/>
+        </p:nvSpPr>
+        <p:spPr>
+          <a:xfrm>
+            <a:off x="457200" y="1938528"/>
+            <a:ext cx="11277295" cy="18288"/>
+          </a:xfrm>
+          <a:prstGeom prst="rect">
+            <a:avLst/>
+          </a:prstGeom>
+          <a:solidFill>
+            <a:srgbClr val="1E3A5F"/>
+          </a:solidFill>
+          <a:ln/>
+        </p:spPr>
+      </p:sp>
+      <p:sp>
+        <p:nvSpPr>
+          <p:cNvPr id="5" name="Text 3"/>
           <p:cNvSpPr/>
           <p:nvPr/>
         </p:nvSpPr>
@@ -11309,7 +11533,7 @@
       </p:sp>
       <p:sp>
         <p:nvSpPr>
-          <p:cNvPr id="5" name="Shape 3"/>
+          <p:cNvPr id="6" name="Shape 4"/>
           <p:cNvSpPr/>
           <p:nvPr/>
         </p:nvSpPr>
@@ -11343,7 +11567,7 @@
       </p:sp>
       <p:sp>
         <p:nvSpPr>
-          <p:cNvPr id="6" name="Text 4"/>
+          <p:cNvPr id="7" name="Text 5"/>
           <p:cNvSpPr/>
           <p:nvPr/>
         </p:nvSpPr>
@@ -11382,7 +11606,7 @@
       </p:sp>
       <p:sp>
         <p:nvSpPr>
-          <p:cNvPr id="7" name="Text 5"/>
+          <p:cNvPr id="8" name="Text 6"/>
           <p:cNvSpPr/>
           <p:nvPr/>
         </p:nvSpPr>
@@ -11476,7 +11700,7 @@
                 <a:ea typeface="Calibri" pitchFamily="34" charset="-122"/>
                 <a:cs typeface="Calibri" pitchFamily="34" charset="-120"/>
               </a:rPr>
-              <a:t>• Dashboard sem nenhum mock, testado no navegador</a:t>
+              <a:t>• Dashboard sem nenhum mock, publicado e testado no navegador</a:t>
             </a:r>
             <a:endParaRPr lang="en-US" sz="1100" dirty="0"/>
           </a:p>
@@ -11504,7 +11728,7 @@
       </p:sp>
       <p:sp>
         <p:nvSpPr>
-          <p:cNvPr id="8" name="Shape 6"/>
+          <p:cNvPr id="9" name="Shape 7"/>
           <p:cNvSpPr/>
           <p:nvPr/>
         </p:nvSpPr>
@@ -11538,7 +11762,7 @@
       </p:sp>
       <p:sp>
         <p:nvSpPr>
-          <p:cNvPr id="9" name="Text 7"/>
+          <p:cNvPr id="10" name="Text 8"/>
           <p:cNvSpPr/>
           <p:nvPr/>
         </p:nvSpPr>
@@ -11577,7 +11801,7 @@
       </p:sp>
       <p:sp>
         <p:nvSpPr>
-          <p:cNvPr id="10" name="Text 8"/>
+          <p:cNvPr id="11" name="Text 9"/>
           <p:cNvSpPr/>
           <p:nvPr/>
         </p:nvSpPr>
@@ -11671,7 +11895,7 @@
                 <a:ea typeface="Calibri" pitchFamily="34" charset="-122"/>
                 <a:cs typeface="Calibri" pitchFamily="34" charset="-120"/>
               </a:rPr>
-              <a:t>• Mapa usa geometria estilizada, não shapefile oficial</a:t>
+              <a:t>• Mapa usa a malha do IBGE em qualidade mínima (simplificada)</a:t>
             </a:r>
             <a:endParaRPr lang="en-US" sz="1100" dirty="0"/>
           </a:p>
@@ -11699,7 +11923,7 @@
       </p:sp>
       <p:sp>
         <p:nvSpPr>
-          <p:cNvPr id="11" name="Shape 9"/>
+          <p:cNvPr id="12" name="Shape 10"/>
           <p:cNvSpPr/>
           <p:nvPr/>
         </p:nvSpPr>
@@ -11733,7 +11957,7 @@
       </p:sp>
       <p:sp>
         <p:nvSpPr>
-          <p:cNvPr id="12" name="Text 10"/>
+          <p:cNvPr id="13" name="Text 11"/>
           <p:cNvSpPr/>
           <p:nvPr/>
         </p:nvSpPr>
@@ -11772,7 +11996,7 @@
       </p:sp>
       <p:sp>
         <p:nvSpPr>
-          <p:cNvPr id="13" name="Text 11"/>
+          <p:cNvPr id="14" name="Text 12"/>
           <p:cNvSpPr/>
           <p:nvPr/>
         </p:nvSpPr>
@@ -11866,7 +12090,7 @@
                 <a:ea typeface="Calibri" pitchFamily="34" charset="-122"/>
                 <a:cs typeface="Calibri" pitchFamily="34" charset="-120"/>
               </a:rPr>
-              <a:t>• Publicar GitHub, GitHub Pages e vídeo</a:t>
+              <a:t>• Gravar e publicar o vídeo pitch</a:t>
             </a:r>
             <a:endParaRPr lang="en-US" sz="1100" dirty="0"/>
           </a:p>
@@ -11874,7 +12098,7 @@
       </p:sp>
       <p:sp>
         <p:nvSpPr>
-          <p:cNvPr id="14" name="Text 12"/>
+          <p:cNvPr id="15" name="Text 13"/>
           <p:cNvSpPr/>
           <p:nvPr/>
         </p:nvSpPr>
@@ -11913,7 +12137,7 @@
       </p:sp>
       <p:sp>
         <p:nvSpPr>
-          <p:cNvPr id="15" name="Text 13"/>
+          <p:cNvPr id="16" name="Text 14"/>
           <p:cNvSpPr/>
           <p:nvPr/>
         </p:nvSpPr>
@@ -12540,7 +12764,27 @@
       </p:sp>
       <p:sp>
         <p:nvSpPr>
-          <p:cNvPr id="4" name="Text 2"/>
+          <p:cNvPr id="4" name="Shape 2"/>
+          <p:cNvSpPr/>
+          <p:nvPr/>
+        </p:nvSpPr>
+        <p:spPr>
+          <a:xfrm>
+            <a:off x="457200" y="1938528"/>
+            <a:ext cx="11277295" cy="18288"/>
+          </a:xfrm>
+          <a:prstGeom prst="rect">
+            <a:avLst/>
+          </a:prstGeom>
+          <a:solidFill>
+            <a:srgbClr val="1E3A5F"/>
+          </a:solidFill>
+          <a:ln/>
+        </p:spPr>
+      </p:sp>
+      <p:sp>
+        <p:nvSpPr>
+          <p:cNvPr id="5" name="Text 3"/>
           <p:cNvSpPr/>
           <p:nvPr/>
         </p:nvSpPr>
@@ -12579,7 +12823,7 @@
       </p:sp>
       <p:sp>
         <p:nvSpPr>
-          <p:cNvPr id="5" name="Text 3"/>
+          <p:cNvPr id="6" name="Text 4"/>
           <p:cNvSpPr/>
           <p:nvPr/>
         </p:nvSpPr>
@@ -12618,7 +12862,7 @@
       </p:sp>
       <p:sp>
         <p:nvSpPr>
-          <p:cNvPr id="6" name="Shape 4"/>
+          <p:cNvPr id="7" name="Shape 5"/>
           <p:cNvSpPr/>
           <p:nvPr/>
         </p:nvSpPr>
@@ -12652,7 +12896,7 @@
       </p:sp>
       <p:sp>
         <p:nvSpPr>
-          <p:cNvPr id="7" name="Text 5"/>
+          <p:cNvPr id="8" name="Text 6"/>
           <p:cNvSpPr/>
           <p:nvPr/>
         </p:nvSpPr>
@@ -12691,7 +12935,7 @@
       </p:sp>
       <p:sp>
         <p:nvSpPr>
-          <p:cNvPr id="8" name="Text 6"/>
+          <p:cNvPr id="9" name="Text 7"/>
           <p:cNvSpPr/>
           <p:nvPr/>
         </p:nvSpPr>
@@ -12733,7 +12977,7 @@
       </p:sp>
       <p:sp>
         <p:nvSpPr>
-          <p:cNvPr id="9" name="Shape 7"/>
+          <p:cNvPr id="10" name="Shape 8"/>
           <p:cNvSpPr/>
           <p:nvPr/>
         </p:nvSpPr>
@@ -12767,7 +13011,7 @@
       </p:sp>
       <p:sp>
         <p:nvSpPr>
-          <p:cNvPr id="10" name="Text 8"/>
+          <p:cNvPr id="11" name="Text 9"/>
           <p:cNvSpPr/>
           <p:nvPr/>
         </p:nvSpPr>
@@ -12806,7 +13050,7 @@
       </p:sp>
       <p:sp>
         <p:nvSpPr>
-          <p:cNvPr id="11" name="Text 9"/>
+          <p:cNvPr id="12" name="Text 10"/>
           <p:cNvSpPr/>
           <p:nvPr/>
         </p:nvSpPr>
@@ -12848,7 +13092,7 @@
       </p:sp>
       <p:sp>
         <p:nvSpPr>
-          <p:cNvPr id="12" name="Shape 10"/>
+          <p:cNvPr id="13" name="Shape 11"/>
           <p:cNvSpPr/>
           <p:nvPr/>
         </p:nvSpPr>
@@ -12882,7 +13126,7 @@
       </p:sp>
       <p:sp>
         <p:nvSpPr>
-          <p:cNvPr id="13" name="Text 11"/>
+          <p:cNvPr id="14" name="Text 12"/>
           <p:cNvSpPr/>
           <p:nvPr/>
         </p:nvSpPr>
@@ -12921,7 +13165,7 @@
       </p:sp>
       <p:sp>
         <p:nvSpPr>
-          <p:cNvPr id="14" name="Text 12"/>
+          <p:cNvPr id="15" name="Text 13"/>
           <p:cNvSpPr/>
           <p:nvPr/>
         </p:nvSpPr>
@@ -12963,7 +13207,7 @@
       </p:sp>
       <p:sp>
         <p:nvSpPr>
-          <p:cNvPr id="15" name="Text 13"/>
+          <p:cNvPr id="16" name="Text 14"/>
           <p:cNvSpPr/>
           <p:nvPr/>
         </p:nvSpPr>
@@ -13002,7 +13246,7 @@
       </p:sp>
       <p:sp>
         <p:nvSpPr>
-          <p:cNvPr id="16" name="Text 14"/>
+          <p:cNvPr id="17" name="Text 15"/>
           <p:cNvSpPr/>
           <p:nvPr/>
         </p:nvSpPr>
@@ -13127,7 +13371,27 @@
       </p:sp>
       <p:sp>
         <p:nvSpPr>
-          <p:cNvPr id="4" name="Text 2"/>
+          <p:cNvPr id="4" name="Shape 2"/>
+          <p:cNvSpPr/>
+          <p:nvPr/>
+        </p:nvSpPr>
+        <p:spPr>
+          <a:xfrm>
+            <a:off x="457200" y="1938528"/>
+            <a:ext cx="11277295" cy="18288"/>
+          </a:xfrm>
+          <a:prstGeom prst="rect">
+            <a:avLst/>
+          </a:prstGeom>
+          <a:solidFill>
+            <a:srgbClr val="1E3A5F"/>
+          </a:solidFill>
+          <a:ln/>
+        </p:spPr>
+      </p:sp>
+      <p:sp>
+        <p:nvSpPr>
+          <p:cNvPr id="5" name="Text 3"/>
           <p:cNvSpPr/>
           <p:nvPr/>
         </p:nvSpPr>
@@ -13166,7 +13430,7 @@
       </p:sp>
       <p:sp>
         <p:nvSpPr>
-          <p:cNvPr id="5" name="Text 3"/>
+          <p:cNvPr id="6" name="Text 4"/>
           <p:cNvSpPr/>
           <p:nvPr/>
         </p:nvSpPr>
@@ -13241,15 +13505,15 @@
                         <a:buNone/>
                       </a:pPr>
                       <a:r>
-                        <a:rPr lang="en-US" sz="1050" dirty="0">
+                        <a:rPr lang="en-US" sz="1050" b="1" dirty="0">
                           <a:solidFill>
-                            <a:srgbClr val="EAF6F3"/>
+                            <a:srgbClr val="FFFFFF"/>
                           </a:solidFill>
                           <a:latin typeface="Calibri" pitchFamily="34" charset="0"/>
                           <a:ea typeface="Calibri" pitchFamily="34" charset="-122"/>
                           <a:cs typeface="Calibri" pitchFamily="34" charset="-120"/>
                         </a:rPr>
-                        <a:t>[object Object]</a:t>
+                        <a:t>Item</a:t>
                       </a:r>
                       <a:endParaRPr lang="en-US" sz="1050" dirty="0">
                         <a:latin typeface="Calibri" charset="0"/>
@@ -13296,7 +13560,7 @@
                       <a:tailEnd type="none" w="med" len="med"/>
                     </a:lnB>
                     <a:solidFill>
-                      <a:srgbClr val="0F2A4A"/>
+                      <a:srgbClr val="091832"/>
                     </a:solidFill>
                   </a:tcPr>
                 </a:tc>
@@ -13326,7 +13590,7 @@
                       </a:endParaRPr>
                     </a:p>
                   </a:txBody>
-                  <a:tcPr marL="91440" marR="91440" marT="45720" marB="45720">
+                  <a:tcPr marL="91440" marR="91440" marT="45720" marB="45720" anchor="ctr">
                     <a:lnL w="6350" cap="flat" cmpd="sng" algn="ctr">
                       <a:solidFill>
                         <a:srgbClr val="1E3A5F"/>
@@ -13394,7 +13658,7 @@
                       </a:endParaRPr>
                     </a:p>
                   </a:txBody>
-                  <a:tcPr marL="91440" marR="91440" marT="45720" marB="45720">
+                  <a:tcPr marL="91440" marR="91440" marT="45720" marB="45720" anchor="ctr">
                     <a:lnL w="6350" cap="flat" cmpd="sng" algn="ctr">
                       <a:solidFill>
                         <a:srgbClr val="1E3A5F"/>
@@ -13462,7 +13726,7 @@
                       </a:endParaRPr>
                     </a:p>
                   </a:txBody>
-                  <a:tcPr marL="91440" marR="91440" marT="45720" marB="45720">
+                  <a:tcPr marL="91440" marR="91440" marT="45720" marB="45720" anchor="ctr">
                     <a:lnL w="6350" cap="flat" cmpd="sng" algn="ctr">
                       <a:solidFill>
                         <a:srgbClr val="1E3A5F"/>
@@ -13719,7 +13983,7 @@
                         <a:buNone/>
                       </a:pPr>
                       <a:r>
-                        <a:rPr lang="en-US" sz="1050" dirty="0">
+                        <a:rPr lang="en-US" sz="1050" b="1" dirty="0">
                           <a:solidFill>
                             <a:srgbClr val="14B8A6"/>
                           </a:solidFill>
@@ -13933,7 +14197,7 @@
                           <a:ea typeface="Calibri" pitchFamily="34" charset="-122"/>
                           <a:cs typeface="Calibri" pitchFamily="34" charset="-120"/>
                         </a:rPr>
-                        <a:t>Tabela relacional + JSON nativo + external table + view analítica</a:t>
+                        <a:t>Relacional + JSON nativo + external table + view, executados no Oracle</a:t>
                       </a:r>
                       <a:endParaRPr lang="en-US" sz="1050" dirty="0">
                         <a:latin typeface="Calibri" charset="0"/>
@@ -13993,15 +14257,15 @@
                         <a:buNone/>
                       </a:pPr>
                       <a:r>
-                        <a:rPr lang="en-US" sz="1050" dirty="0">
+                        <a:rPr lang="en-US" sz="1050" b="1" dirty="0">
                           <a:solidFill>
-                            <a:srgbClr val="F59E0B"/>
+                            <a:srgbClr val="14B8A6"/>
                           </a:solidFill>
                           <a:latin typeface="Calibri" pitchFamily="34" charset="0"/>
                           <a:ea typeface="Calibri" pitchFamily="34" charset="-122"/>
                           <a:cs typeface="Calibri" pitchFamily="34" charset="-120"/>
                         </a:rPr>
-                        <a:t>Implementado*</a:t>
+                        <a:t>Implementado</a:t>
                       </a:r>
                       <a:endParaRPr lang="en-US" sz="1050" dirty="0">
                         <a:latin typeface="Calibri" charset="0"/>
@@ -14207,7 +14471,7 @@
                           <a:ea typeface="Calibri" pitchFamily="34" charset="-122"/>
                           <a:cs typeface="Calibri" pitchFamily="34" charset="-120"/>
                         </a:rPr>
-                        <a:t>Perfil real seguindo o LiveLabs 4222, 5 perguntas via SHOWSQL/RUNSQL</a:t>
+                        <a:t>Perfil real criado; GENERATE bloqueado pelo OCI GenAI do sandbox</a:t>
                       </a:r>
                       <a:endParaRPr lang="en-US" sz="1050" dirty="0">
                         <a:latin typeface="Calibri" charset="0"/>
@@ -14267,7 +14531,7 @@
                         <a:buNone/>
                       </a:pPr>
                       <a:r>
-                        <a:rPr lang="en-US" sz="1050" dirty="0">
+                        <a:rPr lang="en-US" sz="1050" b="1" dirty="0">
                           <a:solidFill>
                             <a:srgbClr val="F59E0B"/>
                           </a:solidFill>
@@ -14481,7 +14745,7 @@
                           <a:ea typeface="Calibri" pitchFamily="34" charset="-122"/>
                           <a:cs typeface="Calibri" pitchFamily="34" charset="-120"/>
                         </a:rPr>
-                        <a:t>Filtros reais, mapa por pressão assistencial, export CSV, sem mocks</a:t>
+                        <a:t>Filtros reais, mapa com malha oficial do IBGE, export CSV, sem mocks</a:t>
                       </a:r>
                       <a:endParaRPr lang="en-US" sz="1050" dirty="0">
                         <a:latin typeface="Calibri" charset="0"/>
@@ -14541,7 +14805,7 @@
                         <a:buNone/>
                       </a:pPr>
                       <a:r>
-                        <a:rPr lang="en-US" sz="1050" dirty="0">
+                        <a:rPr lang="en-US" sz="1050" b="1" dirty="0">
                           <a:solidFill>
                             <a:srgbClr val="14B8A6"/>
                           </a:solidFill>
@@ -14755,7 +15019,7 @@
                           <a:ea typeface="Calibri" pitchFamily="34" charset="-122"/>
                           <a:cs typeface="Calibri" pitchFamily="34" charset="-120"/>
                         </a:rPr>
-                        <a:t>Pendente de ação da equipe (GitHub + Pages)</a:t>
+                        <a:t>Repositório público no GitHub + dashboard no ar via GitHub Pages</a:t>
                       </a:r>
                       <a:endParaRPr lang="en-US" sz="1050" dirty="0">
                         <a:latin typeface="Calibri" charset="0"/>
@@ -14815,15 +15079,15 @@
                         <a:buNone/>
                       </a:pPr>
                       <a:r>
-                        <a:rPr lang="en-US" sz="1050" dirty="0">
+                        <a:rPr lang="en-US" sz="1050" b="1" dirty="0">
                           <a:solidFill>
-                            <a:srgbClr val="94A3B8"/>
+                            <a:srgbClr val="14B8A6"/>
                           </a:solidFill>
                           <a:latin typeface="Calibri" pitchFamily="34" charset="0"/>
                           <a:ea typeface="Calibri" pitchFamily="34" charset="-122"/>
                           <a:cs typeface="Calibri" pitchFamily="34" charset="-120"/>
                         </a:rPr>
-                        <a:t>Planejado</a:t>
+                        <a:t>Implementado</a:t>
                       </a:r>
                       <a:endParaRPr lang="en-US" sz="1050" dirty="0">
                         <a:latin typeface="Calibri" charset="0"/>
@@ -14881,7 +15145,7 @@
       </p:graphicFrame>
       <p:sp>
         <p:nvSpPr>
-          <p:cNvPr id="7" name="Text 4"/>
+          <p:cNvPr id="8" name="Text 5"/>
           <p:cNvSpPr/>
           <p:nvPr/>
         </p:nvSpPr>
@@ -14912,7 +15176,7 @@
                 <a:ea typeface="Calibri" pitchFamily="34" charset="-122"/>
                 <a:cs typeface="Calibri" pitchFamily="34" charset="-120"/>
               </a:rPr>
-              <a:t>* Execução real no Oracle acadêmico e evidências do Select AI dependem da conta OCI de cada integrante — scripts prontos, aguardando rodada.</a:t>
+              <a:t>* Oracle e dashboard executados de verdade (evidências nos slides 6, 7, 8 e 14). O Select AI teve o perfil criado com sucesso, mas o serviço OCI Generative AI do sandbox LiveLabs não respondeu — diagnóstico completo no slide 15.</a:t>
             </a:r>
             <a:endParaRPr lang="en-US" sz="950" dirty="0"/>
           </a:p>
@@ -14920,7 +15184,7 @@
       </p:sp>
       <p:sp>
         <p:nvSpPr>
-          <p:cNvPr id="8" name="Text 5"/>
+          <p:cNvPr id="9" name="Text 6"/>
           <p:cNvSpPr/>
           <p:nvPr/>
         </p:nvSpPr>
@@ -14959,7 +15223,7 @@
       </p:sp>
       <p:sp>
         <p:nvSpPr>
-          <p:cNvPr id="9" name="Text 6"/>
+          <p:cNvPr id="10" name="Text 7"/>
           <p:cNvSpPr/>
           <p:nvPr/>
         </p:nvSpPr>
@@ -15084,7 +15348,27 @@
       </p:sp>
       <p:sp>
         <p:nvSpPr>
-          <p:cNvPr id="4" name="Text 2"/>
+          <p:cNvPr id="4" name="Shape 2"/>
+          <p:cNvSpPr/>
+          <p:nvPr/>
+        </p:nvSpPr>
+        <p:spPr>
+          <a:xfrm>
+            <a:off x="457200" y="1938528"/>
+            <a:ext cx="11277295" cy="18288"/>
+          </a:xfrm>
+          <a:prstGeom prst="rect">
+            <a:avLst/>
+          </a:prstGeom>
+          <a:solidFill>
+            <a:srgbClr val="1E3A5F"/>
+          </a:solidFill>
+          <a:ln/>
+        </p:spPr>
+      </p:sp>
+      <p:sp>
+        <p:nvSpPr>
+          <p:cNvPr id="5" name="Text 3"/>
           <p:cNvSpPr/>
           <p:nvPr/>
         </p:nvSpPr>
@@ -15123,7 +15407,7 @@
       </p:sp>
       <p:sp>
         <p:nvSpPr>
-          <p:cNvPr id="5" name="Text 3"/>
+          <p:cNvPr id="6" name="Text 4"/>
           <p:cNvSpPr/>
           <p:nvPr/>
         </p:nvSpPr>
@@ -15162,18 +15446,18 @@
       </p:sp>
       <p:sp>
         <p:nvSpPr>
-          <p:cNvPr id="6" name="Shape 4"/>
+          <p:cNvPr id="7" name="Shape 5"/>
           <p:cNvSpPr/>
           <p:nvPr/>
         </p:nvSpPr>
         <p:spPr>
           <a:xfrm>
             <a:off x="457200" y="2103120"/>
-            <a:ext cx="11247120" cy="1234440"/>
+            <a:ext cx="11247120" cy="1188720"/>
           </a:xfrm>
           <a:prstGeom prst="roundRect">
             <a:avLst>
-              <a:gd name="adj" fmla="val 5926"/>
+              <a:gd name="adj" fmla="val 6154"/>
             </a:avLst>
           </a:prstGeom>
           <a:solidFill>
@@ -15196,7 +15480,7 @@
       </p:sp>
       <p:sp>
         <p:nvSpPr>
-          <p:cNvPr id="7" name="Shape 5"/>
+          <p:cNvPr id="8" name="Shape 6"/>
           <p:cNvSpPr/>
           <p:nvPr/>
         </p:nvSpPr>
@@ -15223,7 +15507,7 @@
       </p:sp>
       <p:sp>
         <p:nvSpPr>
-          <p:cNvPr id="8" name="Text 6"/>
+          <p:cNvPr id="9" name="Text 7"/>
           <p:cNvSpPr/>
           <p:nvPr/>
         </p:nvSpPr>
@@ -15259,7 +15543,7 @@
       </p:sp>
       <p:sp>
         <p:nvSpPr>
-          <p:cNvPr id="9" name="Text 7"/>
+          <p:cNvPr id="10" name="Text 8"/>
           <p:cNvSpPr/>
           <p:nvPr/>
         </p:nvSpPr>
@@ -15298,7 +15582,7 @@
       </p:sp>
       <p:sp>
         <p:nvSpPr>
-          <p:cNvPr id="10" name="Text 8"/>
+          <p:cNvPr id="11" name="Text 9"/>
           <p:cNvSpPr/>
           <p:nvPr/>
         </p:nvSpPr>
@@ -15337,7 +15621,7 @@
       </p:sp>
       <p:sp>
         <p:nvSpPr>
-          <p:cNvPr id="11" name="Text 9"/>
+          <p:cNvPr id="12" name="Text 10"/>
           <p:cNvSpPr/>
           <p:nvPr/>
         </p:nvSpPr>
@@ -15376,7 +15660,7 @@
       </p:sp>
       <p:sp>
         <p:nvSpPr>
-          <p:cNvPr id="12" name="Text 10"/>
+          <p:cNvPr id="13" name="Text 11"/>
           <p:cNvSpPr/>
           <p:nvPr/>
         </p:nvSpPr>
@@ -15415,18 +15699,18 @@
       </p:sp>
       <p:sp>
         <p:nvSpPr>
-          <p:cNvPr id="13" name="Shape 11"/>
-          <p:cNvSpPr/>
-          <p:nvPr/>
-        </p:nvSpPr>
-        <p:spPr>
-          <a:xfrm>
-            <a:off x="457200" y="3493008"/>
-            <a:ext cx="11247120" cy="1234440"/>
+          <p:cNvPr id="14" name="Shape 12"/>
+          <p:cNvSpPr/>
+          <p:nvPr/>
+        </p:nvSpPr>
+        <p:spPr>
+          <a:xfrm>
+            <a:off x="457200" y="3429000"/>
+            <a:ext cx="11247120" cy="1188720"/>
           </a:xfrm>
           <a:prstGeom prst="roundRect">
             <a:avLst>
-              <a:gd name="adj" fmla="val 5926"/>
+              <a:gd name="adj" fmla="val 6154"/>
             </a:avLst>
           </a:prstGeom>
           <a:solidFill>
@@ -15449,13 +15733,13 @@
       </p:sp>
       <p:sp>
         <p:nvSpPr>
-          <p:cNvPr id="14" name="Shape 12"/>
-          <p:cNvSpPr/>
-          <p:nvPr/>
-        </p:nvSpPr>
-        <p:spPr>
-          <a:xfrm>
-            <a:off x="685800" y="3749040"/>
+          <p:cNvPr id="15" name="Shape 13"/>
+          <p:cNvSpPr/>
+          <p:nvPr/>
+        </p:nvSpPr>
+        <p:spPr>
+          <a:xfrm>
+            <a:off x="685800" y="3685032"/>
             <a:ext cx="731520" cy="731520"/>
           </a:xfrm>
           <a:prstGeom prst="ellipse">
@@ -15476,13 +15760,13 @@
       </p:sp>
       <p:sp>
         <p:nvSpPr>
-          <p:cNvPr id="15" name="Text 13"/>
-          <p:cNvSpPr/>
-          <p:nvPr/>
-        </p:nvSpPr>
-        <p:spPr>
-          <a:xfrm>
-            <a:off x="685800" y="3749040"/>
+          <p:cNvPr id="16" name="Text 14"/>
+          <p:cNvSpPr/>
+          <p:nvPr/>
+        </p:nvSpPr>
+        <p:spPr>
+          <a:xfrm>
+            <a:off x="685800" y="3685032"/>
             <a:ext cx="731520" cy="731520"/>
           </a:xfrm>
           <a:prstGeom prst="rect">
@@ -15512,13 +15796,13 @@
       </p:sp>
       <p:sp>
         <p:nvSpPr>
-          <p:cNvPr id="16" name="Text 14"/>
-          <p:cNvSpPr/>
-          <p:nvPr/>
-        </p:nvSpPr>
-        <p:spPr>
-          <a:xfrm>
-            <a:off x="1600200" y="3602736"/>
+          <p:cNvPr id="17" name="Text 15"/>
+          <p:cNvSpPr/>
+          <p:nvPr/>
+        </p:nvSpPr>
+        <p:spPr>
+          <a:xfrm>
+            <a:off x="1600200" y="3538728"/>
             <a:ext cx="2743200" cy="320040"/>
           </a:xfrm>
           <a:prstGeom prst="rect">
@@ -15551,13 +15835,13 @@
       </p:sp>
       <p:sp>
         <p:nvSpPr>
-          <p:cNvPr id="17" name="Text 15"/>
-          <p:cNvSpPr/>
-          <p:nvPr/>
-        </p:nvSpPr>
-        <p:spPr>
-          <a:xfrm>
-            <a:off x="1600200" y="3931920"/>
+          <p:cNvPr id="18" name="Text 16"/>
+          <p:cNvSpPr/>
+          <p:nvPr/>
+        </p:nvSpPr>
+        <p:spPr>
+          <a:xfrm>
+            <a:off x="1600200" y="3867912"/>
             <a:ext cx="2743200" cy="274320"/>
           </a:xfrm>
           <a:prstGeom prst="rect">
@@ -15590,13 +15874,13 @@
       </p:sp>
       <p:sp>
         <p:nvSpPr>
-          <p:cNvPr id="18" name="Text 16"/>
-          <p:cNvSpPr/>
-          <p:nvPr/>
-        </p:nvSpPr>
-        <p:spPr>
-          <a:xfrm>
-            <a:off x="4663440" y="3657600"/>
+          <p:cNvPr id="19" name="Text 17"/>
+          <p:cNvSpPr/>
+          <p:nvPr/>
+        </p:nvSpPr>
+        <p:spPr>
+          <a:xfrm>
+            <a:off x="4663440" y="3593592"/>
             <a:ext cx="4572000" cy="822960"/>
           </a:xfrm>
           <a:prstGeom prst="rect">
@@ -15629,13 +15913,13 @@
       </p:sp>
       <p:sp>
         <p:nvSpPr>
-          <p:cNvPr id="19" name="Text 17"/>
-          <p:cNvSpPr/>
-          <p:nvPr/>
-        </p:nvSpPr>
-        <p:spPr>
-          <a:xfrm>
-            <a:off x="9326880" y="3858768"/>
+          <p:cNvPr id="20" name="Text 18"/>
+          <p:cNvSpPr/>
+          <p:nvPr/>
+        </p:nvSpPr>
+        <p:spPr>
+          <a:xfrm>
+            <a:off x="9326880" y="3794760"/>
             <a:ext cx="2194560" cy="457200"/>
           </a:xfrm>
           <a:prstGeom prst="rect">
@@ -15668,18 +15952,18 @@
       </p:sp>
       <p:sp>
         <p:nvSpPr>
-          <p:cNvPr id="20" name="Shape 18"/>
-          <p:cNvSpPr/>
-          <p:nvPr/>
-        </p:nvSpPr>
-        <p:spPr>
-          <a:xfrm>
-            <a:off x="457200" y="4882896"/>
-            <a:ext cx="11247120" cy="1234440"/>
+          <p:cNvPr id="21" name="Shape 19"/>
+          <p:cNvSpPr/>
+          <p:nvPr/>
+        </p:nvSpPr>
+        <p:spPr>
+          <a:xfrm>
+            <a:off x="457200" y="4754880"/>
+            <a:ext cx="11247120" cy="1188720"/>
           </a:xfrm>
           <a:prstGeom prst="roundRect">
             <a:avLst>
-              <a:gd name="adj" fmla="val 5926"/>
+              <a:gd name="adj" fmla="val 6154"/>
             </a:avLst>
           </a:prstGeom>
           <a:solidFill>
@@ -15702,13 +15986,13 @@
       </p:sp>
       <p:sp>
         <p:nvSpPr>
-          <p:cNvPr id="21" name="Shape 19"/>
-          <p:cNvSpPr/>
-          <p:nvPr/>
-        </p:nvSpPr>
-        <p:spPr>
-          <a:xfrm>
-            <a:off x="685800" y="5138928"/>
+          <p:cNvPr id="22" name="Shape 20"/>
+          <p:cNvSpPr/>
+          <p:nvPr/>
+        </p:nvSpPr>
+        <p:spPr>
+          <a:xfrm>
+            <a:off x="685800" y="5010912"/>
             <a:ext cx="731520" cy="731520"/>
           </a:xfrm>
           <a:prstGeom prst="ellipse">
@@ -15729,13 +16013,13 @@
       </p:sp>
       <p:sp>
         <p:nvSpPr>
-          <p:cNvPr id="22" name="Text 20"/>
-          <p:cNvSpPr/>
-          <p:nvPr/>
-        </p:nvSpPr>
-        <p:spPr>
-          <a:xfrm>
-            <a:off x="685800" y="5138928"/>
+          <p:cNvPr id="23" name="Text 21"/>
+          <p:cNvSpPr/>
+          <p:nvPr/>
+        </p:nvSpPr>
+        <p:spPr>
+          <a:xfrm>
+            <a:off x="685800" y="5010912"/>
             <a:ext cx="731520" cy="731520"/>
           </a:xfrm>
           <a:prstGeom prst="rect">
@@ -15765,13 +16049,13 @@
       </p:sp>
       <p:sp>
         <p:nvSpPr>
-          <p:cNvPr id="23" name="Text 21"/>
-          <p:cNvSpPr/>
-          <p:nvPr/>
-        </p:nvSpPr>
-        <p:spPr>
-          <a:xfrm>
-            <a:off x="1600200" y="4992624"/>
+          <p:cNvPr id="24" name="Text 22"/>
+          <p:cNvSpPr/>
+          <p:nvPr/>
+        </p:nvSpPr>
+        <p:spPr>
+          <a:xfrm>
+            <a:off x="1600200" y="4864608"/>
             <a:ext cx="2743200" cy="320040"/>
           </a:xfrm>
           <a:prstGeom prst="rect">
@@ -15796,7 +16080,7 @@
                 <a:ea typeface="Calibri" pitchFamily="34" charset="-122"/>
                 <a:cs typeface="Calibri" pitchFamily="34" charset="-120"/>
               </a:rPr>
-              <a:t>IBGE/SIDRA</a:t>
+              <a:t>IBGE</a:t>
             </a:r>
             <a:endParaRPr lang="en-US" sz="1500" dirty="0"/>
           </a:p>
@@ -15804,13 +16088,13 @@
       </p:sp>
       <p:sp>
         <p:nvSpPr>
-          <p:cNvPr id="24" name="Text 22"/>
-          <p:cNvSpPr/>
-          <p:nvPr/>
-        </p:nvSpPr>
-        <p:spPr>
-          <a:xfrm>
-            <a:off x="1600200" y="5321808"/>
+          <p:cNvPr id="25" name="Text 23"/>
+          <p:cNvSpPr/>
+          <p:nvPr/>
+        </p:nvSpPr>
+        <p:spPr>
+          <a:xfrm>
+            <a:off x="1600200" y="5193792"/>
             <a:ext cx="2743200" cy="274320"/>
           </a:xfrm>
           <a:prstGeom prst="rect">
@@ -15835,7 +16119,7 @@
                 <a:ea typeface="Calibri" pitchFamily="34" charset="-122"/>
                 <a:cs typeface="Calibri" pitchFamily="34" charset="-120"/>
               </a:rPr>
-              <a:t>População Estimada</a:t>
+              <a:t>População + Malha Territorial</a:t>
             </a:r>
             <a:endParaRPr lang="en-US" sz="1050" dirty="0"/>
           </a:p>
@@ -15843,13 +16127,13 @@
       </p:sp>
       <p:sp>
         <p:nvSpPr>
-          <p:cNvPr id="25" name="Text 23"/>
-          <p:cNvSpPr/>
-          <p:nvPr/>
-        </p:nvSpPr>
-        <p:spPr>
-          <a:xfrm>
-            <a:off x="4663440" y="5047488"/>
+          <p:cNvPr id="26" name="Text 24"/>
+          <p:cNvSpPr/>
+          <p:nvPr/>
+        </p:nvSpPr>
+        <p:spPr>
+          <a:xfrm>
+            <a:off x="4663440" y="4919472"/>
             <a:ext cx="4572000" cy="822960"/>
           </a:xfrm>
           <a:prstGeom prst="rect">
@@ -15874,7 +16158,7 @@
                 <a:ea typeface="Calibri" pitchFamily="34" charset="-122"/>
                 <a:cs typeface="Calibri" pitchFamily="34" charset="-120"/>
               </a:rPr>
-              <a:t>População estimada 2026 por UF — tabela 6579</a:t>
+              <a:t>População estimada 2026 por UF (SIDRA, tabela 6579) e malha oficial das UFs usada no mapa</a:t>
             </a:r>
             <a:endParaRPr lang="en-US" sz="1050" dirty="0"/>
           </a:p>
@@ -15882,13 +16166,13 @@
       </p:sp>
       <p:sp>
         <p:nvSpPr>
-          <p:cNvPr id="26" name="Text 24"/>
-          <p:cNvSpPr/>
-          <p:nvPr/>
-        </p:nvSpPr>
-        <p:spPr>
-          <a:xfrm>
-            <a:off x="9326880" y="5248656"/>
+          <p:cNvPr id="27" name="Text 25"/>
+          <p:cNvSpPr/>
+          <p:nvPr/>
+        </p:nvSpPr>
+        <p:spPr>
+          <a:xfrm>
+            <a:off x="9326880" y="5120640"/>
             <a:ext cx="2194560" cy="457200"/>
           </a:xfrm>
           <a:prstGeom prst="rect">
@@ -15913,7 +16197,7 @@
                 <a:ea typeface="Courier New" pitchFamily="34" charset="-122"/>
                 <a:cs typeface="Courier New" pitchFamily="34" charset="-120"/>
               </a:rPr>
-              <a:t>apisidra.ibge.gov.br</a:t>
+              <a:t>apisidra.ibge.gov.br · servicodados.ibge.gov.br</a:t>
             </a:r>
             <a:endParaRPr lang="en-US" sz="900" dirty="0"/>
           </a:p>
@@ -15921,14 +16205,14 @@
       </p:sp>
       <p:sp>
         <p:nvSpPr>
-          <p:cNvPr id="27" name="Text 25"/>
-          <p:cNvSpPr/>
-          <p:nvPr/>
-        </p:nvSpPr>
-        <p:spPr>
-          <a:xfrm>
-            <a:off x="457200" y="6318504"/>
-            <a:ext cx="11247120" cy="457200"/>
+          <p:cNvPr id="28" name="Text 26"/>
+          <p:cNvSpPr/>
+          <p:nvPr/>
+        </p:nvSpPr>
+        <p:spPr>
+          <a:xfrm>
+            <a:off x="457200" y="6153912"/>
+            <a:ext cx="11247120" cy="365760"/>
           </a:xfrm>
           <a:prstGeom prst="rect">
             <a:avLst/>
@@ -15960,7 +16244,7 @@
       </p:sp>
       <p:sp>
         <p:nvSpPr>
-          <p:cNvPr id="28" name="Text 26"/>
+          <p:cNvPr id="29" name="Text 27"/>
           <p:cNvSpPr/>
           <p:nvPr/>
         </p:nvSpPr>
@@ -15999,7 +16283,7 @@
       </p:sp>
       <p:sp>
         <p:nvSpPr>
-          <p:cNvPr id="29" name="Text 27"/>
+          <p:cNvPr id="30" name="Text 28"/>
           <p:cNvSpPr/>
           <p:nvPr/>
         </p:nvSpPr>
@@ -16124,7 +16408,27 @@
       </p:sp>
       <p:sp>
         <p:nvSpPr>
-          <p:cNvPr id="4" name="Text 2"/>
+          <p:cNvPr id="4" name="Shape 2"/>
+          <p:cNvSpPr/>
+          <p:nvPr/>
+        </p:nvSpPr>
+        <p:spPr>
+          <a:xfrm>
+            <a:off x="457200" y="1938528"/>
+            <a:ext cx="11277295" cy="18288"/>
+          </a:xfrm>
+          <a:prstGeom prst="rect">
+            <a:avLst/>
+          </a:prstGeom>
+          <a:solidFill>
+            <a:srgbClr val="1E3A5F"/>
+          </a:solidFill>
+          <a:ln/>
+        </p:spPr>
+      </p:sp>
+      <p:sp>
+        <p:nvSpPr>
+          <p:cNvPr id="5" name="Text 3"/>
           <p:cNvSpPr/>
           <p:nvPr/>
         </p:nvSpPr>
@@ -16163,7 +16467,7 @@
       </p:sp>
       <p:sp>
         <p:nvSpPr>
-          <p:cNvPr id="5" name="Text 3"/>
+          <p:cNvPr id="6" name="Text 4"/>
           <p:cNvSpPr/>
           <p:nvPr/>
         </p:nvSpPr>
@@ -16202,7 +16506,7 @@
       </p:sp>
       <p:sp>
         <p:nvSpPr>
-          <p:cNvPr id="6" name="Shape 4"/>
+          <p:cNvPr id="7" name="Shape 5"/>
           <p:cNvSpPr/>
           <p:nvPr/>
         </p:nvSpPr>
@@ -16236,7 +16540,7 @@
       </p:sp>
       <p:sp>
         <p:nvSpPr>
-          <p:cNvPr id="7" name="Text 5"/>
+          <p:cNvPr id="8" name="Text 6"/>
           <p:cNvSpPr/>
           <p:nvPr/>
         </p:nvSpPr>
@@ -16287,42 +16591,6 @@
               <a:t>(HTTP real)</a:t>
             </a:r>
             <a:endParaRPr lang="en-US" sz="1100" dirty="0"/>
-          </a:p>
-        </p:txBody>
-      </p:sp>
-      <p:sp>
-        <p:nvSpPr>
-          <p:cNvPr id="8" name="Text 6"/>
-          <p:cNvSpPr/>
-          <p:nvPr/>
-        </p:nvSpPr>
-        <p:spPr>
-          <a:xfrm>
-            <a:off x="2194560" y="2331720"/>
-            <a:ext cx="320040" cy="548640"/>
-          </a:xfrm>
-          <a:prstGeom prst="rect">
-            <a:avLst/>
-          </a:prstGeom>
-          <a:noFill/>
-          <a:ln/>
-        </p:spPr>
-        <p:txBody>
-          <a:bodyPr wrap="square" lIns="0" tIns="0" rIns="0" bIns="0" rtlCol="0" anchor="ctr"/>
-          <a:lstStyle/>
-          <a:p>
-            <a:pPr algn="ctr" indent="0" marL="0">
-              <a:buNone/>
-            </a:pPr>
-            <a:r>
-              <a:rPr lang="en-US" sz="1800" dirty="0">
-                <a:solidFill>
-                  <a:srgbClr val="14B8A6"/>
-                </a:solidFill>
-              </a:rPr>
-              <a:t>→</a:t>
-            </a:r>
-            <a:endParaRPr lang="en-US" sz="1800" dirty="0"/>
           </a:p>
         </p:txBody>
       </p:sp>
@@ -16418,43 +16686,7 @@
       </p:sp>
       <p:sp>
         <p:nvSpPr>
-          <p:cNvPr id="11" name="Text 9"/>
-          <p:cNvSpPr/>
-          <p:nvPr/>
-        </p:nvSpPr>
-        <p:spPr>
-          <a:xfrm>
-            <a:off x="4133088" y="2331720"/>
-            <a:ext cx="320040" cy="548640"/>
-          </a:xfrm>
-          <a:prstGeom prst="rect">
-            <a:avLst/>
-          </a:prstGeom>
-          <a:noFill/>
-          <a:ln/>
-        </p:spPr>
-        <p:txBody>
-          <a:bodyPr wrap="square" lIns="0" tIns="0" rIns="0" bIns="0" rtlCol="0" anchor="ctr"/>
-          <a:lstStyle/>
-          <a:p>
-            <a:pPr algn="ctr" indent="0" marL="0">
-              <a:buNone/>
-            </a:pPr>
-            <a:r>
-              <a:rPr lang="en-US" sz="1800" dirty="0">
-                <a:solidFill>
-                  <a:srgbClr val="14B8A6"/>
-                </a:solidFill>
-              </a:rPr>
-              <a:t>→</a:t>
-            </a:r>
-            <a:endParaRPr lang="en-US" sz="1800" dirty="0"/>
-          </a:p>
-        </p:txBody>
-      </p:sp>
-      <p:sp>
-        <p:nvSpPr>
-          <p:cNvPr id="12" name="Shape 10"/>
+          <p:cNvPr id="11" name="Shape 9"/>
           <p:cNvSpPr/>
           <p:nvPr/>
         </p:nvSpPr>
@@ -16488,7 +16720,7 @@
       </p:sp>
       <p:sp>
         <p:nvSpPr>
-          <p:cNvPr id="13" name="Text 11"/>
+          <p:cNvPr id="12" name="Text 10"/>
           <p:cNvSpPr/>
           <p:nvPr/>
         </p:nvSpPr>
@@ -16544,175 +16776,13 @@
       </p:sp>
       <p:sp>
         <p:nvSpPr>
-          <p:cNvPr id="14" name="Text 12"/>
-          <p:cNvSpPr/>
-          <p:nvPr/>
-        </p:nvSpPr>
-        <p:spPr>
-          <a:xfrm>
-            <a:off x="6071616" y="2331720"/>
-            <a:ext cx="320040" cy="548640"/>
-          </a:xfrm>
-          <a:prstGeom prst="rect">
-            <a:avLst/>
-          </a:prstGeom>
-          <a:noFill/>
-          <a:ln/>
-        </p:spPr>
-        <p:txBody>
-          <a:bodyPr wrap="square" lIns="0" tIns="0" rIns="0" bIns="0" rtlCol="0" anchor="ctr"/>
-          <a:lstStyle/>
-          <a:p>
-            <a:pPr algn="ctr" indent="0" marL="0">
-              <a:buNone/>
-            </a:pPr>
-            <a:r>
-              <a:rPr lang="en-US" sz="1800" dirty="0">
-                <a:solidFill>
-                  <a:srgbClr val="14B8A6"/>
-                </a:solidFill>
-              </a:rPr>
-              <a:t>→</a:t>
-            </a:r>
-            <a:endParaRPr lang="en-US" sz="1800" dirty="0"/>
-          </a:p>
-        </p:txBody>
-      </p:sp>
-      <p:sp>
-        <p:nvSpPr>
-          <p:cNvPr id="15" name="Shape 13"/>
+          <p:cNvPr id="13" name="Shape 11"/>
           <p:cNvSpPr/>
           <p:nvPr/>
         </p:nvSpPr>
         <p:spPr>
           <a:xfrm>
             <a:off x="6272784" y="2103120"/>
-            <a:ext cx="1783080" cy="1005840"/>
-          </a:xfrm>
-          <a:prstGeom prst="roundRect">
-            <a:avLst>
-              <a:gd name="adj" fmla="val 7273"/>
-            </a:avLst>
-          </a:prstGeom>
-          <a:solidFill>
-            <a:srgbClr val="1F2937"/>
-          </a:solidFill>
-          <a:ln w="12700">
-            <a:solidFill>
-              <a:srgbClr val="1E3A5F"/>
-            </a:solidFill>
-            <a:prstDash val="solid"/>
-          </a:ln>
-          <a:effectLst>
-            <a:outerShdw sx="100000" sy="100000" kx="0" ky="0" algn="bl" rotWithShape="0" blurRad="101600" dist="38100" dir="5400000">
-              <a:srgbClr val="000000">
-                <a:alpha val="35000"/>
-              </a:srgbClr>
-            </a:outerShdw>
-          </a:effectLst>
-        </p:spPr>
-      </p:sp>
-      <p:sp>
-        <p:nvSpPr>
-          <p:cNvPr id="16" name="Text 14"/>
-          <p:cNvSpPr/>
-          <p:nvPr/>
-        </p:nvSpPr>
-        <p:spPr>
-          <a:xfrm>
-            <a:off x="6272784" y="2103120"/>
-            <a:ext cx="1783080" cy="1005840"/>
-          </a:xfrm>
-          <a:prstGeom prst="rect">
-            <a:avLst/>
-          </a:prstGeom>
-          <a:noFill/>
-          <a:ln/>
-        </p:spPr>
-        <p:txBody>
-          <a:bodyPr wrap="square" lIns="0" tIns="0" rIns="0" bIns="0" rtlCol="0" anchor="ctr"/>
-          <a:lstStyle/>
-          <a:p>
-            <a:pPr algn="ctr" indent="0" marL="0">
-              <a:buNone/>
-            </a:pPr>
-            <a:r>
-              <a:rPr lang="en-US" sz="1100" b="1" dirty="0">
-                <a:solidFill>
-                  <a:srgbClr val="FFFFFF"/>
-                </a:solidFill>
-                <a:latin typeface="Calibri" pitchFamily="34" charset="0"/>
-                <a:ea typeface="Calibri" pitchFamily="34" charset="-122"/>
-                <a:cs typeface="Calibri" pitchFamily="34" charset="-120"/>
-              </a:rPr>
-              <a:t>4. Valida</a:t>
-            </a:r>
-            <a:endParaRPr lang="en-US" sz="1100" dirty="0"/>
-          </a:p>
-          <a:p>
-            <a:pPr algn="ctr" indent="0" marL="0">
-              <a:buNone/>
-            </a:pPr>
-            <a:r>
-              <a:rPr lang="en-US" sz="1100" b="1" dirty="0">
-                <a:solidFill>
-                  <a:srgbClr val="FFFFFF"/>
-                </a:solidFill>
-                <a:latin typeface="Calibri" pitchFamily="34" charset="0"/>
-                <a:ea typeface="Calibri" pitchFamily="34" charset="-122"/>
-                <a:cs typeface="Calibri" pitchFamily="34" charset="-120"/>
-              </a:rPr>
-              <a:t>(cobertura/nulos)</a:t>
-            </a:r>
-            <a:endParaRPr lang="en-US" sz="1100" dirty="0"/>
-          </a:p>
-        </p:txBody>
-      </p:sp>
-      <p:sp>
-        <p:nvSpPr>
-          <p:cNvPr id="17" name="Text 15"/>
-          <p:cNvSpPr/>
-          <p:nvPr/>
-        </p:nvSpPr>
-        <p:spPr>
-          <a:xfrm>
-            <a:off x="8010144" y="2331720"/>
-            <a:ext cx="320040" cy="548640"/>
-          </a:xfrm>
-          <a:prstGeom prst="rect">
-            <a:avLst/>
-          </a:prstGeom>
-          <a:noFill/>
-          <a:ln/>
-        </p:spPr>
-        <p:txBody>
-          <a:bodyPr wrap="square" lIns="0" tIns="0" rIns="0" bIns="0" rtlCol="0" anchor="ctr"/>
-          <a:lstStyle/>
-          <a:p>
-            <a:pPr algn="ctr" indent="0" marL="0">
-              <a:buNone/>
-            </a:pPr>
-            <a:r>
-              <a:rPr lang="en-US" sz="1800" dirty="0">
-                <a:solidFill>
-                  <a:srgbClr val="14B8A6"/>
-                </a:solidFill>
-              </a:rPr>
-              <a:t>→</a:t>
-            </a:r>
-            <a:endParaRPr lang="en-US" sz="1800" dirty="0"/>
-          </a:p>
-        </p:txBody>
-      </p:sp>
-      <p:sp>
-        <p:nvSpPr>
-          <p:cNvPr id="18" name="Shape 16"/>
-          <p:cNvSpPr/>
-          <p:nvPr/>
-        </p:nvSpPr>
-        <p:spPr>
-          <a:xfrm>
-            <a:off x="8211312" y="2103120"/>
             <a:ext cx="1783080" cy="1005840"/>
           </a:xfrm>
           <a:prstGeom prst="roundRect">
@@ -16740,105 +16810,69 @@
       </p:sp>
       <p:sp>
         <p:nvSpPr>
-          <p:cNvPr id="19" name="Text 17"/>
+          <p:cNvPr id="14" name="Text 12"/>
+          <p:cNvSpPr/>
+          <p:nvPr/>
+        </p:nvSpPr>
+        <p:spPr>
+          <a:xfrm>
+            <a:off x="6272784" y="2103120"/>
+            <a:ext cx="1783080" cy="1005840"/>
+          </a:xfrm>
+          <a:prstGeom prst="rect">
+            <a:avLst/>
+          </a:prstGeom>
+          <a:noFill/>
+          <a:ln/>
+        </p:spPr>
+        <p:txBody>
+          <a:bodyPr wrap="square" lIns="0" tIns="0" rIns="0" bIns="0" rtlCol="0" anchor="ctr"/>
+          <a:lstStyle/>
+          <a:p>
+            <a:pPr algn="ctr" indent="0" marL="0">
+              <a:buNone/>
+            </a:pPr>
+            <a:r>
+              <a:rPr lang="en-US" sz="1100" b="1" dirty="0">
+                <a:solidFill>
+                  <a:srgbClr val="FFFFFF"/>
+                </a:solidFill>
+                <a:latin typeface="Calibri" pitchFamily="34" charset="0"/>
+                <a:ea typeface="Calibri" pitchFamily="34" charset="-122"/>
+                <a:cs typeface="Calibri" pitchFamily="34" charset="-120"/>
+              </a:rPr>
+              <a:t>4. Valida</a:t>
+            </a:r>
+            <a:endParaRPr lang="en-US" sz="1100" dirty="0"/>
+          </a:p>
+          <a:p>
+            <a:pPr algn="ctr" indent="0" marL="0">
+              <a:buNone/>
+            </a:pPr>
+            <a:r>
+              <a:rPr lang="en-US" sz="1100" b="1" dirty="0">
+                <a:solidFill>
+                  <a:srgbClr val="FFFFFF"/>
+                </a:solidFill>
+                <a:latin typeface="Calibri" pitchFamily="34" charset="0"/>
+                <a:ea typeface="Calibri" pitchFamily="34" charset="-122"/>
+                <a:cs typeface="Calibri" pitchFamily="34" charset="-120"/>
+              </a:rPr>
+              <a:t>(cobertura/nulos)</a:t>
+            </a:r>
+            <a:endParaRPr lang="en-US" sz="1100" dirty="0"/>
+          </a:p>
+        </p:txBody>
+      </p:sp>
+      <p:sp>
+        <p:nvSpPr>
+          <p:cNvPr id="15" name="Shape 13"/>
           <p:cNvSpPr/>
           <p:nvPr/>
         </p:nvSpPr>
         <p:spPr>
           <a:xfrm>
             <a:off x="8211312" y="2103120"/>
-            <a:ext cx="1783080" cy="1005840"/>
-          </a:xfrm>
-          <a:prstGeom prst="rect">
-            <a:avLst/>
-          </a:prstGeom>
-          <a:noFill/>
-          <a:ln/>
-        </p:spPr>
-        <p:txBody>
-          <a:bodyPr wrap="square" lIns="0" tIns="0" rIns="0" bIns="0" rtlCol="0" anchor="ctr"/>
-          <a:lstStyle/>
-          <a:p>
-            <a:pPr algn="ctr" indent="0" marL="0">
-              <a:buNone/>
-            </a:pPr>
-            <a:r>
-              <a:rPr lang="en-US" sz="1100" b="1" dirty="0">
-                <a:solidFill>
-                  <a:srgbClr val="FFFFFF"/>
-                </a:solidFill>
-                <a:latin typeface="Calibri" pitchFamily="34" charset="0"/>
-                <a:ea typeface="Calibri" pitchFamily="34" charset="-122"/>
-                <a:cs typeface="Calibri" pitchFamily="34" charset="-120"/>
-              </a:rPr>
-              <a:t>5. Indicadores</a:t>
-            </a:r>
-            <a:endParaRPr lang="en-US" sz="1100" dirty="0"/>
-          </a:p>
-          <a:p>
-            <a:pPr algn="ctr" indent="0" marL="0">
-              <a:buNone/>
-            </a:pPr>
-            <a:r>
-              <a:rPr lang="en-US" sz="1100" b="1" dirty="0">
-                <a:solidFill>
-                  <a:srgbClr val="FFFFFF"/>
-                </a:solidFill>
-                <a:latin typeface="Calibri" pitchFamily="34" charset="0"/>
-                <a:ea typeface="Calibri" pitchFamily="34" charset="-122"/>
-                <a:cs typeface="Calibri" pitchFamily="34" charset="-120"/>
-              </a:rPr>
-              <a:t>(fórmulas)</a:t>
-            </a:r>
-            <a:endParaRPr lang="en-US" sz="1100" dirty="0"/>
-          </a:p>
-        </p:txBody>
-      </p:sp>
-      <p:sp>
-        <p:nvSpPr>
-          <p:cNvPr id="20" name="Text 18"/>
-          <p:cNvSpPr/>
-          <p:nvPr/>
-        </p:nvSpPr>
-        <p:spPr>
-          <a:xfrm>
-            <a:off x="9948672" y="2331720"/>
-            <a:ext cx="320040" cy="548640"/>
-          </a:xfrm>
-          <a:prstGeom prst="rect">
-            <a:avLst/>
-          </a:prstGeom>
-          <a:noFill/>
-          <a:ln/>
-        </p:spPr>
-        <p:txBody>
-          <a:bodyPr wrap="square" lIns="0" tIns="0" rIns="0" bIns="0" rtlCol="0" anchor="ctr"/>
-          <a:lstStyle/>
-          <a:p>
-            <a:pPr algn="ctr" indent="0" marL="0">
-              <a:buNone/>
-            </a:pPr>
-            <a:r>
-              <a:rPr lang="en-US" sz="1800" dirty="0">
-                <a:solidFill>
-                  <a:srgbClr val="14B8A6"/>
-                </a:solidFill>
-              </a:rPr>
-              <a:t>→</a:t>
-            </a:r>
-            <a:endParaRPr lang="en-US" sz="1800" dirty="0"/>
-          </a:p>
-        </p:txBody>
-      </p:sp>
-      <p:sp>
-        <p:nvSpPr>
-          <p:cNvPr id="21" name="Shape 19"/>
-          <p:cNvSpPr/>
-          <p:nvPr/>
-        </p:nvSpPr>
-        <p:spPr>
-          <a:xfrm>
-            <a:off x="10149840" y="2103120"/>
             <a:ext cx="1783080" cy="1005840"/>
           </a:xfrm>
           <a:prstGeom prst="roundRect">
@@ -16866,7 +16900,63 @@
       </p:sp>
       <p:sp>
         <p:nvSpPr>
-          <p:cNvPr id="22" name="Text 20"/>
+          <p:cNvPr id="16" name="Text 14"/>
+          <p:cNvSpPr/>
+          <p:nvPr/>
+        </p:nvSpPr>
+        <p:spPr>
+          <a:xfrm>
+            <a:off x="8211312" y="2103120"/>
+            <a:ext cx="1783080" cy="1005840"/>
+          </a:xfrm>
+          <a:prstGeom prst="rect">
+            <a:avLst/>
+          </a:prstGeom>
+          <a:noFill/>
+          <a:ln/>
+        </p:spPr>
+        <p:txBody>
+          <a:bodyPr wrap="square" lIns="0" tIns="0" rIns="0" bIns="0" rtlCol="0" anchor="ctr"/>
+          <a:lstStyle/>
+          <a:p>
+            <a:pPr algn="ctr" indent="0" marL="0">
+              <a:buNone/>
+            </a:pPr>
+            <a:r>
+              <a:rPr lang="en-US" sz="1100" b="1" dirty="0">
+                <a:solidFill>
+                  <a:srgbClr val="FFFFFF"/>
+                </a:solidFill>
+                <a:latin typeface="Calibri" pitchFamily="34" charset="0"/>
+                <a:ea typeface="Calibri" pitchFamily="34" charset="-122"/>
+                <a:cs typeface="Calibri" pitchFamily="34" charset="-120"/>
+              </a:rPr>
+              <a:t>5. Indicadores</a:t>
+            </a:r>
+            <a:endParaRPr lang="en-US" sz="1100" dirty="0"/>
+          </a:p>
+          <a:p>
+            <a:pPr algn="ctr" indent="0" marL="0">
+              <a:buNone/>
+            </a:pPr>
+            <a:r>
+              <a:rPr lang="en-US" sz="1100" b="1" dirty="0">
+                <a:solidFill>
+                  <a:srgbClr val="FFFFFF"/>
+                </a:solidFill>
+                <a:latin typeface="Calibri" pitchFamily="34" charset="0"/>
+                <a:ea typeface="Calibri" pitchFamily="34" charset="-122"/>
+                <a:cs typeface="Calibri" pitchFamily="34" charset="-120"/>
+              </a:rPr>
+              <a:t>(fórmulas)</a:t>
+            </a:r>
+            <a:endParaRPr lang="en-US" sz="1100" dirty="0"/>
+          </a:p>
+        </p:txBody>
+      </p:sp>
+      <p:sp>
+        <p:nvSpPr>
+          <p:cNvPr id="17" name="Shape 15"/>
           <p:cNvSpPr/>
           <p:nvPr/>
         </p:nvSpPr>
@@ -16875,65 +16965,9 @@
             <a:off x="10149840" y="2103120"/>
             <a:ext cx="1783080" cy="1005840"/>
           </a:xfrm>
-          <a:prstGeom prst="rect">
-            <a:avLst/>
-          </a:prstGeom>
-          <a:noFill/>
-          <a:ln/>
-        </p:spPr>
-        <p:txBody>
-          <a:bodyPr wrap="square" lIns="0" tIns="0" rIns="0" bIns="0" rtlCol="0" anchor="ctr"/>
-          <a:lstStyle/>
-          <a:p>
-            <a:pPr algn="ctr" indent="0" marL="0">
-              <a:buNone/>
-            </a:pPr>
-            <a:r>
-              <a:rPr lang="en-US" sz="1100" b="1" dirty="0">
-                <a:solidFill>
-                  <a:srgbClr val="FFFFFF"/>
-                </a:solidFill>
-                <a:latin typeface="Calibri" pitchFamily="34" charset="0"/>
-                <a:ea typeface="Calibri" pitchFamily="34" charset="-122"/>
-                <a:cs typeface="Calibri" pitchFamily="34" charset="-120"/>
-              </a:rPr>
-              <a:t>6. Export</a:t>
-            </a:r>
-            <a:endParaRPr lang="en-US" sz="1100" dirty="0"/>
-          </a:p>
-          <a:p>
-            <a:pPr algn="ctr" indent="0" marL="0">
-              <a:buNone/>
-            </a:pPr>
-            <a:r>
-              <a:rPr lang="en-US" sz="1100" b="1" dirty="0">
-                <a:solidFill>
-                  <a:srgbClr val="FFFFFF"/>
-                </a:solidFill>
-                <a:latin typeface="Calibri" pitchFamily="34" charset="0"/>
-                <a:ea typeface="Calibri" pitchFamily="34" charset="-122"/>
-                <a:cs typeface="Calibri" pitchFamily="34" charset="-120"/>
-              </a:rPr>
-              <a:t>(CSV/JSON)</a:t>
-            </a:r>
-            <a:endParaRPr lang="en-US" sz="1100" dirty="0"/>
-          </a:p>
-        </p:txBody>
-      </p:sp>
-      <p:sp>
-        <p:nvSpPr>
-          <p:cNvPr id="23" name="Shape 21"/>
-          <p:cNvSpPr/>
-          <p:nvPr/>
-        </p:nvSpPr>
-        <p:spPr>
-          <a:xfrm>
-            <a:off x="457200" y="3383280"/>
-            <a:ext cx="11247120" cy="2743200"/>
-          </a:xfrm>
           <a:prstGeom prst="roundRect">
             <a:avLst>
-              <a:gd name="adj" fmla="val 2667"/>
+              <a:gd name="adj" fmla="val 7273"/>
             </a:avLst>
           </a:prstGeom>
           <a:solidFill>
@@ -16956,7 +16990,277 @@
       </p:sp>
       <p:sp>
         <p:nvSpPr>
-          <p:cNvPr id="24" name="Text 22"/>
+          <p:cNvPr id="18" name="Text 16"/>
+          <p:cNvSpPr/>
+          <p:nvPr/>
+        </p:nvSpPr>
+        <p:spPr>
+          <a:xfrm>
+            <a:off x="10149840" y="2103120"/>
+            <a:ext cx="1783080" cy="1005840"/>
+          </a:xfrm>
+          <a:prstGeom prst="rect">
+            <a:avLst/>
+          </a:prstGeom>
+          <a:noFill/>
+          <a:ln/>
+        </p:spPr>
+        <p:txBody>
+          <a:bodyPr wrap="square" lIns="0" tIns="0" rIns="0" bIns="0" rtlCol="0" anchor="ctr"/>
+          <a:lstStyle/>
+          <a:p>
+            <a:pPr algn="ctr" indent="0" marL="0">
+              <a:buNone/>
+            </a:pPr>
+            <a:r>
+              <a:rPr lang="en-US" sz="1100" b="1" dirty="0">
+                <a:solidFill>
+                  <a:srgbClr val="FFFFFF"/>
+                </a:solidFill>
+                <a:latin typeface="Calibri" pitchFamily="34" charset="0"/>
+                <a:ea typeface="Calibri" pitchFamily="34" charset="-122"/>
+                <a:cs typeface="Calibri" pitchFamily="34" charset="-120"/>
+              </a:rPr>
+              <a:t>6. Export</a:t>
+            </a:r>
+            <a:endParaRPr lang="en-US" sz="1100" dirty="0"/>
+          </a:p>
+          <a:p>
+            <a:pPr algn="ctr" indent="0" marL="0">
+              <a:buNone/>
+            </a:pPr>
+            <a:r>
+              <a:rPr lang="en-US" sz="1100" b="1" dirty="0">
+                <a:solidFill>
+                  <a:srgbClr val="FFFFFF"/>
+                </a:solidFill>
+                <a:latin typeface="Calibri" pitchFamily="34" charset="0"/>
+                <a:ea typeface="Calibri" pitchFamily="34" charset="-122"/>
+                <a:cs typeface="Calibri" pitchFamily="34" charset="-120"/>
+              </a:rPr>
+              <a:t>(CSV/JSON)</a:t>
+            </a:r>
+            <a:endParaRPr lang="en-US" sz="1100" dirty="0"/>
+          </a:p>
+        </p:txBody>
+      </p:sp>
+      <p:sp>
+        <p:nvSpPr>
+          <p:cNvPr id="19" name="Text 17"/>
+          <p:cNvSpPr/>
+          <p:nvPr/>
+        </p:nvSpPr>
+        <p:spPr>
+          <a:xfrm>
+            <a:off x="2157984" y="2331720"/>
+            <a:ext cx="320040" cy="548640"/>
+          </a:xfrm>
+          <a:prstGeom prst="rect">
+            <a:avLst/>
+          </a:prstGeom>
+          <a:noFill/>
+          <a:ln/>
+        </p:spPr>
+        <p:txBody>
+          <a:bodyPr wrap="square" lIns="0" tIns="0" rIns="0" bIns="0" rtlCol="0" anchor="ctr"/>
+          <a:lstStyle/>
+          <a:p>
+            <a:pPr algn="ctr" indent="0" marL="0">
+              <a:buNone/>
+            </a:pPr>
+            <a:r>
+              <a:rPr lang="en-US" sz="1600" dirty="0">
+                <a:solidFill>
+                  <a:srgbClr val="14B8A6"/>
+                </a:solidFill>
+              </a:rPr>
+              <a:t>→</a:t>
+            </a:r>
+            <a:endParaRPr lang="en-US" sz="1600" dirty="0"/>
+          </a:p>
+        </p:txBody>
+      </p:sp>
+      <p:sp>
+        <p:nvSpPr>
+          <p:cNvPr id="20" name="Text 18"/>
+          <p:cNvSpPr/>
+          <p:nvPr/>
+        </p:nvSpPr>
+        <p:spPr>
+          <a:xfrm>
+            <a:off x="4096512" y="2331720"/>
+            <a:ext cx="320040" cy="548640"/>
+          </a:xfrm>
+          <a:prstGeom prst="rect">
+            <a:avLst/>
+          </a:prstGeom>
+          <a:noFill/>
+          <a:ln/>
+        </p:spPr>
+        <p:txBody>
+          <a:bodyPr wrap="square" lIns="0" tIns="0" rIns="0" bIns="0" rtlCol="0" anchor="ctr"/>
+          <a:lstStyle/>
+          <a:p>
+            <a:pPr algn="ctr" indent="0" marL="0">
+              <a:buNone/>
+            </a:pPr>
+            <a:r>
+              <a:rPr lang="en-US" sz="1600" dirty="0">
+                <a:solidFill>
+                  <a:srgbClr val="14B8A6"/>
+                </a:solidFill>
+              </a:rPr>
+              <a:t>→</a:t>
+            </a:r>
+            <a:endParaRPr lang="en-US" sz="1600" dirty="0"/>
+          </a:p>
+        </p:txBody>
+      </p:sp>
+      <p:sp>
+        <p:nvSpPr>
+          <p:cNvPr id="21" name="Text 19"/>
+          <p:cNvSpPr/>
+          <p:nvPr/>
+        </p:nvSpPr>
+        <p:spPr>
+          <a:xfrm>
+            <a:off x="6035040" y="2331720"/>
+            <a:ext cx="320040" cy="548640"/>
+          </a:xfrm>
+          <a:prstGeom prst="rect">
+            <a:avLst/>
+          </a:prstGeom>
+          <a:noFill/>
+          <a:ln/>
+        </p:spPr>
+        <p:txBody>
+          <a:bodyPr wrap="square" lIns="0" tIns="0" rIns="0" bIns="0" rtlCol="0" anchor="ctr"/>
+          <a:lstStyle/>
+          <a:p>
+            <a:pPr algn="ctr" indent="0" marL="0">
+              <a:buNone/>
+            </a:pPr>
+            <a:r>
+              <a:rPr lang="en-US" sz="1600" dirty="0">
+                <a:solidFill>
+                  <a:srgbClr val="14B8A6"/>
+                </a:solidFill>
+              </a:rPr>
+              <a:t>→</a:t>
+            </a:r>
+            <a:endParaRPr lang="en-US" sz="1600" dirty="0"/>
+          </a:p>
+        </p:txBody>
+      </p:sp>
+      <p:sp>
+        <p:nvSpPr>
+          <p:cNvPr id="22" name="Text 20"/>
+          <p:cNvSpPr/>
+          <p:nvPr/>
+        </p:nvSpPr>
+        <p:spPr>
+          <a:xfrm>
+            <a:off x="7973568" y="2331720"/>
+            <a:ext cx="320040" cy="548640"/>
+          </a:xfrm>
+          <a:prstGeom prst="rect">
+            <a:avLst/>
+          </a:prstGeom>
+          <a:noFill/>
+          <a:ln/>
+        </p:spPr>
+        <p:txBody>
+          <a:bodyPr wrap="square" lIns="0" tIns="0" rIns="0" bIns="0" rtlCol="0" anchor="ctr"/>
+          <a:lstStyle/>
+          <a:p>
+            <a:pPr algn="ctr" indent="0" marL="0">
+              <a:buNone/>
+            </a:pPr>
+            <a:r>
+              <a:rPr lang="en-US" sz="1600" dirty="0">
+                <a:solidFill>
+                  <a:srgbClr val="14B8A6"/>
+                </a:solidFill>
+              </a:rPr>
+              <a:t>→</a:t>
+            </a:r>
+            <a:endParaRPr lang="en-US" sz="1600" dirty="0"/>
+          </a:p>
+        </p:txBody>
+      </p:sp>
+      <p:sp>
+        <p:nvSpPr>
+          <p:cNvPr id="23" name="Text 21"/>
+          <p:cNvSpPr/>
+          <p:nvPr/>
+        </p:nvSpPr>
+        <p:spPr>
+          <a:xfrm>
+            <a:off x="9912096" y="2331720"/>
+            <a:ext cx="320040" cy="548640"/>
+          </a:xfrm>
+          <a:prstGeom prst="rect">
+            <a:avLst/>
+          </a:prstGeom>
+          <a:noFill/>
+          <a:ln/>
+        </p:spPr>
+        <p:txBody>
+          <a:bodyPr wrap="square" lIns="0" tIns="0" rIns="0" bIns="0" rtlCol="0" anchor="ctr"/>
+          <a:lstStyle/>
+          <a:p>
+            <a:pPr algn="ctr" indent="0" marL="0">
+              <a:buNone/>
+            </a:pPr>
+            <a:r>
+              <a:rPr lang="en-US" sz="1600" dirty="0">
+                <a:solidFill>
+                  <a:srgbClr val="14B8A6"/>
+                </a:solidFill>
+              </a:rPr>
+              <a:t>→</a:t>
+            </a:r>
+            <a:endParaRPr lang="en-US" sz="1600" dirty="0"/>
+          </a:p>
+        </p:txBody>
+      </p:sp>
+      <p:sp>
+        <p:nvSpPr>
+          <p:cNvPr id="24" name="Shape 22"/>
+          <p:cNvSpPr/>
+          <p:nvPr/>
+        </p:nvSpPr>
+        <p:spPr>
+          <a:xfrm>
+            <a:off x="457200" y="3383280"/>
+            <a:ext cx="11247120" cy="2788920"/>
+          </a:xfrm>
+          <a:prstGeom prst="roundRect">
+            <a:avLst>
+              <a:gd name="adj" fmla="val 2623"/>
+            </a:avLst>
+          </a:prstGeom>
+          <a:solidFill>
+            <a:srgbClr val="0F2A4A"/>
+          </a:solidFill>
+          <a:ln w="12700">
+            <a:solidFill>
+              <a:srgbClr val="1E3A5F"/>
+            </a:solidFill>
+            <a:prstDash val="solid"/>
+          </a:ln>
+          <a:effectLst>
+            <a:outerShdw sx="100000" sy="100000" kx="0" ky="0" algn="bl" rotWithShape="0" blurRad="101600" dist="38100" dir="5400000">
+              <a:srgbClr val="000000">
+                <a:alpha val="35000"/>
+              </a:srgbClr>
+            </a:outerShdw>
+          </a:effectLst>
+        </p:spPr>
+      </p:sp>
+      <p:sp>
+        <p:nvSpPr>
+          <p:cNvPr id="25" name="Text 23"/>
           <p:cNvSpPr/>
           <p:nvPr/>
         </p:nvSpPr>
@@ -16995,13 +17299,13 @@
       </p:sp>
       <p:sp>
         <p:nvSpPr>
-          <p:cNvPr id="25" name="Text 23"/>
-          <p:cNvSpPr/>
-          <p:nvPr/>
-        </p:nvSpPr>
-        <p:spPr>
-          <a:xfrm>
-            <a:off x="685800" y="3931920"/>
+          <p:cNvPr id="26" name="Text 24"/>
+          <p:cNvSpPr/>
+          <p:nvPr/>
+        </p:nvSpPr>
+        <p:spPr>
+          <a:xfrm>
+            <a:off x="685800" y="3886200"/>
             <a:ext cx="10789920" cy="365760"/>
           </a:xfrm>
           <a:prstGeom prst="rect">
@@ -17048,13 +17352,13 @@
       </p:sp>
       <p:sp>
         <p:nvSpPr>
-          <p:cNvPr id="26" name="Text 24"/>
-          <p:cNvSpPr/>
-          <p:nvPr/>
-        </p:nvSpPr>
-        <p:spPr>
-          <a:xfrm>
-            <a:off x="685800" y="4315968"/>
+          <p:cNvPr id="27" name="Text 25"/>
+          <p:cNvSpPr/>
+          <p:nvPr/>
+        </p:nvSpPr>
+        <p:spPr>
+          <a:xfrm>
+            <a:off x="685800" y="4251960"/>
             <a:ext cx="10789920" cy="365760"/>
           </a:xfrm>
           <a:prstGeom prst="rect">
@@ -17101,13 +17405,13 @@
       </p:sp>
       <p:sp>
         <p:nvSpPr>
-          <p:cNvPr id="27" name="Text 25"/>
-          <p:cNvSpPr/>
-          <p:nvPr/>
-        </p:nvSpPr>
-        <p:spPr>
-          <a:xfrm>
-            <a:off x="685800" y="4700016"/>
+          <p:cNvPr id="28" name="Text 26"/>
+          <p:cNvSpPr/>
+          <p:nvPr/>
+        </p:nvSpPr>
+        <p:spPr>
+          <a:xfrm>
+            <a:off x="685800" y="4617720"/>
             <a:ext cx="10789920" cy="365760"/>
           </a:xfrm>
           <a:prstGeom prst="rect">
@@ -17154,13 +17458,13 @@
       </p:sp>
       <p:sp>
         <p:nvSpPr>
-          <p:cNvPr id="28" name="Text 26"/>
-          <p:cNvSpPr/>
-          <p:nvPr/>
-        </p:nvSpPr>
-        <p:spPr>
-          <a:xfrm>
-            <a:off x="685800" y="5084064"/>
+          <p:cNvPr id="29" name="Text 27"/>
+          <p:cNvSpPr/>
+          <p:nvPr/>
+        </p:nvSpPr>
+        <p:spPr>
+          <a:xfrm>
+            <a:off x="685800" y="4983480"/>
             <a:ext cx="10789920" cy="365760"/>
           </a:xfrm>
           <a:prstGeom prst="rect">
@@ -17207,13 +17511,13 @@
       </p:sp>
       <p:sp>
         <p:nvSpPr>
-          <p:cNvPr id="29" name="Text 27"/>
-          <p:cNvSpPr/>
-          <p:nvPr/>
-        </p:nvSpPr>
-        <p:spPr>
-          <a:xfrm>
-            <a:off x="685800" y="5468112"/>
+          <p:cNvPr id="30" name="Text 28"/>
+          <p:cNvSpPr/>
+          <p:nvPr/>
+        </p:nvSpPr>
+        <p:spPr>
+          <a:xfrm>
+            <a:off x="685800" y="5349240"/>
             <a:ext cx="10789920" cy="365760"/>
           </a:xfrm>
           <a:prstGeom prst="rect">
@@ -17260,13 +17564,13 @@
       </p:sp>
       <p:sp>
         <p:nvSpPr>
-          <p:cNvPr id="30" name="Text 28"/>
-          <p:cNvSpPr/>
-          <p:nvPr/>
-        </p:nvSpPr>
-        <p:spPr>
-          <a:xfrm>
-            <a:off x="685800" y="5852160"/>
+          <p:cNvPr id="31" name="Text 29"/>
+          <p:cNvSpPr/>
+          <p:nvPr/>
+        </p:nvSpPr>
+        <p:spPr>
+          <a:xfrm>
+            <a:off x="685800" y="5715000"/>
             <a:ext cx="10789920" cy="365760"/>
           </a:xfrm>
           <a:prstGeom prst="rect">
@@ -17313,7 +17617,7 @@
       </p:sp>
       <p:sp>
         <p:nvSpPr>
-          <p:cNvPr id="31" name="Text 29"/>
+          <p:cNvPr id="32" name="Text 30"/>
           <p:cNvSpPr/>
           <p:nvPr/>
         </p:nvSpPr>
@@ -17352,7 +17656,7 @@
       </p:sp>
       <p:sp>
         <p:nvSpPr>
-          <p:cNvPr id="32" name="Text 30"/>
+          <p:cNvPr id="33" name="Text 31"/>
           <p:cNvSpPr/>
           <p:nvPr/>
         </p:nvSpPr>
@@ -17477,7 +17781,27 @@
       </p:sp>
       <p:sp>
         <p:nvSpPr>
-          <p:cNvPr id="4" name="Text 2"/>
+          <p:cNvPr id="4" name="Shape 2"/>
+          <p:cNvSpPr/>
+          <p:nvPr/>
+        </p:nvSpPr>
+        <p:spPr>
+          <a:xfrm>
+            <a:off x="457200" y="1938528"/>
+            <a:ext cx="11277295" cy="18288"/>
+          </a:xfrm>
+          <a:prstGeom prst="rect">
+            <a:avLst/>
+          </a:prstGeom>
+          <a:solidFill>
+            <a:srgbClr val="1E3A5F"/>
+          </a:solidFill>
+          <a:ln/>
+        </p:spPr>
+      </p:sp>
+      <p:sp>
+        <p:nvSpPr>
+          <p:cNvPr id="5" name="Text 3"/>
           <p:cNvSpPr/>
           <p:nvPr/>
         </p:nvSpPr>
@@ -17516,7 +17840,7 @@
       </p:sp>
       <p:sp>
         <p:nvSpPr>
-          <p:cNvPr id="5" name="Text 3"/>
+          <p:cNvPr id="6" name="Text 4"/>
           <p:cNvSpPr/>
           <p:nvPr/>
         </p:nvSpPr>
@@ -20459,7 +20783,7 @@
       </p:graphicFrame>
       <p:sp>
         <p:nvSpPr>
-          <p:cNvPr id="7" name="Shape 4"/>
+          <p:cNvPr id="8" name="Shape 5"/>
           <p:cNvSpPr/>
           <p:nvPr/>
         </p:nvSpPr>
@@ -20493,7 +20817,7 @@
       </p:sp>
       <p:sp>
         <p:nvSpPr>
-          <p:cNvPr id="8" name="Text 5"/>
+          <p:cNvPr id="9" name="Text 6"/>
           <p:cNvSpPr/>
           <p:nvPr/>
         </p:nvSpPr>
@@ -20546,7 +20870,7 @@
       </p:sp>
       <p:sp>
         <p:nvSpPr>
-          <p:cNvPr id="9" name="Text 6"/>
+          <p:cNvPr id="10" name="Text 7"/>
           <p:cNvSpPr/>
           <p:nvPr/>
         </p:nvSpPr>
@@ -20585,7 +20909,7 @@
       </p:sp>
       <p:sp>
         <p:nvSpPr>
-          <p:cNvPr id="10" name="Text 7"/>
+          <p:cNvPr id="11" name="Text 8"/>
           <p:cNvSpPr/>
           <p:nvPr/>
         </p:nvSpPr>
@@ -20710,7 +21034,27 @@
       </p:sp>
       <p:sp>
         <p:nvSpPr>
-          <p:cNvPr id="4" name="Text 2"/>
+          <p:cNvPr id="4" name="Shape 2"/>
+          <p:cNvSpPr/>
+          <p:nvPr/>
+        </p:nvSpPr>
+        <p:spPr>
+          <a:xfrm>
+            <a:off x="457200" y="1938528"/>
+            <a:ext cx="11277295" cy="18288"/>
+          </a:xfrm>
+          <a:prstGeom prst="rect">
+            <a:avLst/>
+          </a:prstGeom>
+          <a:solidFill>
+            <a:srgbClr val="1E3A5F"/>
+          </a:solidFill>
+          <a:ln/>
+        </p:spPr>
+      </p:sp>
+      <p:sp>
+        <p:nvSpPr>
+          <p:cNvPr id="5" name="Text 3"/>
           <p:cNvSpPr/>
           <p:nvPr/>
         </p:nvSpPr>
@@ -20749,7 +21093,7 @@
       </p:sp>
       <p:sp>
         <p:nvSpPr>
-          <p:cNvPr id="5" name="Text 3"/>
+          <p:cNvPr id="6" name="Text 4"/>
           <p:cNvSpPr/>
           <p:nvPr/>
         </p:nvSpPr>
@@ -20780,7 +21124,7 @@
                 <a:ea typeface="Calibri" pitchFamily="34" charset="-122"/>
                 <a:cs typeface="Calibri" pitchFamily="34" charset="-120"/>
               </a:rPr>
-              <a:t>KPIs recalculados, mapa por pressão assistencial comparativa (tercis reais), ranking e tendência de 6 meses — tudo consumindo public/data/leito360.json.</a:t>
+              <a:t>Captura real da aplicação publicada, com dados de Abr/2026 vindos de public/data/leito360.json — nenhum número digitado à mão.</a:t>
             </a:r>
             <a:endParaRPr lang="en-US" sz="1400" dirty="0"/>
           </a:p>
@@ -20788,75 +21132,485 @@
       </p:sp>
       <p:sp>
         <p:nvSpPr>
-          <p:cNvPr id="6" name="Shape 4"/>
-          <p:cNvSpPr/>
-          <p:nvPr/>
-        </p:nvSpPr>
-        <p:spPr>
-          <a:xfrm>
-            <a:off x="457200" y="2103120"/>
-            <a:ext cx="11247120" cy="4114800"/>
+          <p:cNvPr id="7" name="Shape 5"/>
+          <p:cNvSpPr/>
+          <p:nvPr/>
+        </p:nvSpPr>
+        <p:spPr>
+          <a:xfrm>
+            <a:off x="402336" y="2048256"/>
+            <a:ext cx="7178040" cy="4087368"/>
           </a:xfrm>
           <a:prstGeom prst="roundRect">
             <a:avLst>
-              <a:gd name="adj" fmla="val 1333"/>
+              <a:gd name="adj" fmla="val 1119"/>
             </a:avLst>
           </a:prstGeom>
           <a:solidFill>
             <a:srgbClr val="060D1E"/>
           </a:solidFill>
-          <a:ln w="15875">
+          <a:ln w="12700">
             <a:solidFill>
-              <a:srgbClr val="F59E0B"/>
+              <a:srgbClr val="1E3A5F"/>
             </a:solidFill>
-            <a:prstDash val="dash"/>
+            <a:prstDash val="solid"/>
           </a:ln>
-        </p:spPr>
-      </p:sp>
-      <p:sp>
-        <p:nvSpPr>
-          <p:cNvPr id="7" name="Text 5"/>
-          <p:cNvSpPr/>
-          <p:nvPr/>
-        </p:nvSpPr>
-        <p:spPr>
-          <a:xfrm>
-            <a:off x="640080" y="2286000"/>
-            <a:ext cx="10881360" cy="3749040"/>
-          </a:xfrm>
-          <a:prstGeom prst="rect">
-            <a:avLst/>
-          </a:prstGeom>
-          <a:noFill/>
-          <a:ln/>
-        </p:spPr>
-        <p:txBody>
-          <a:bodyPr wrap="square" lIns="0" tIns="0" rIns="0" bIns="0" rtlCol="0" anchor="ctr"/>
-          <a:lstStyle/>
-          <a:p>
-            <a:pPr algn="ctr" indent="0" marL="0">
-              <a:buNone/>
-            </a:pPr>
-            <a:r>
-              <a:rPr lang="en-US" sz="1200" b="1" dirty="0">
-                <a:solidFill>
-                  <a:srgbClr val="F59E0B"/>
-                </a:solidFill>
-                <a:latin typeface="Calibri" pitchFamily="34" charset="0"/>
-                <a:ea typeface="Calibri" pitchFamily="34" charset="-122"/>
-                <a:cs typeface="Calibri" pitchFamily="34" charset="-120"/>
-              </a:rPr>
-              <a:t>PRINT PENDENTE
-</a:t>
-            </a:r>
-            <a:endParaRPr lang="en-US" sz="1200" dirty="0"/>
-          </a:p>
-          <a:p>
-            <a:pPr algn="ctr" indent="0" marL="0">
-              <a:buNone/>
-            </a:pPr>
-            <a:r>
-              <a:rPr lang="en-US" sz="1050" dirty="0">
+          <a:effectLst>
+            <a:outerShdw sx="100000" sy="100000" kx="0" ky="0" algn="bl" rotWithShape="0" blurRad="127000" dist="38100" dir="5400000">
+              <a:srgbClr val="000000">
+                <a:alpha val="45000"/>
+              </a:srgbClr>
+            </a:outerShdw>
+          </a:effectLst>
+        </p:spPr>
+      </p:sp>
+      <p:pic>
+        <p:nvPicPr>
+          <p:cNvPr id="8" name="Image 0" descr="shots/print_executivo.png">    </p:cNvPr>
+          <p:cNvPicPr>
+            <a:picLocks noChangeAspect="1"/>
+          </p:cNvPicPr>
+          <p:nvPr/>
+        </p:nvPicPr>
+        <p:blipFill>
+          <a:blip r:embed="rId1"/>
+          <a:stretch>
+            <a:fillRect/>
+          </a:stretch>
+        </p:blipFill>
+        <p:spPr>
+          <a:xfrm>
+            <a:off x="457200" y="2103120"/>
+            <a:ext cx="7068312" cy="3977640"/>
+          </a:xfrm>
+          <a:prstGeom prst="rect">
+            <a:avLst/>
+          </a:prstGeom>
+        </p:spPr>
+      </p:pic>
+      <p:sp>
+        <p:nvSpPr>
+          <p:cNvPr id="9" name="Shape 6"/>
+          <p:cNvSpPr/>
+          <p:nvPr/>
+        </p:nvSpPr>
+        <p:spPr>
+          <a:xfrm>
+            <a:off x="7772400" y="2103120"/>
+            <a:ext cx="3959352" cy="3977640"/>
+          </a:xfrm>
+          <a:prstGeom prst="roundRect">
+            <a:avLst>
+              <a:gd name="adj" fmla="val 1848"/>
+            </a:avLst>
+          </a:prstGeom>
+          <a:solidFill>
+            <a:srgbClr val="0F2A4A"/>
+          </a:solidFill>
+          <a:ln w="12700">
+            <a:solidFill>
+              <a:srgbClr val="1E3A5F"/>
+            </a:solidFill>
+            <a:prstDash val="solid"/>
+          </a:ln>
+          <a:effectLst>
+            <a:outerShdw sx="100000" sy="100000" kx="0" ky="0" algn="bl" rotWithShape="0" blurRad="101600" dist="38100" dir="5400000">
+              <a:srgbClr val="000000">
+                <a:alpha val="35000"/>
+              </a:srgbClr>
+            </a:outerShdw>
+          </a:effectLst>
+        </p:spPr>
+      </p:sp>
+      <p:sp>
+        <p:nvSpPr>
+          <p:cNvPr id="10" name="Text 7"/>
+          <p:cNvSpPr/>
+          <p:nvPr/>
+        </p:nvSpPr>
+        <p:spPr>
+          <a:xfrm>
+            <a:off x="7973568" y="2267712"/>
+            <a:ext cx="3557016" cy="320040"/>
+          </a:xfrm>
+          <a:prstGeom prst="rect">
+            <a:avLst/>
+          </a:prstGeom>
+          <a:noFill/>
+          <a:ln/>
+        </p:spPr>
+        <p:txBody>
+          <a:bodyPr wrap="square" lIns="0" tIns="0" rIns="0" bIns="0" rtlCol="0" anchor="ctr"/>
+          <a:lstStyle/>
+          <a:p>
+            <a:pPr indent="0" marL="0">
+              <a:buNone/>
+            </a:pPr>
+            <a:r>
+              <a:rPr lang="en-US" sz="1300" b="1" dirty="0">
+                <a:solidFill>
+                  <a:srgbClr val="14B8A6"/>
+                </a:solidFill>
+                <a:latin typeface="Calibri" pitchFamily="34" charset="0"/>
+                <a:ea typeface="Calibri" pitchFamily="34" charset="-122"/>
+                <a:cs typeface="Calibri" pitchFamily="34" charset="-120"/>
+              </a:rPr>
+              <a:t>O que a tela mostra</a:t>
+            </a:r>
+            <a:endParaRPr lang="en-US" sz="1300" dirty="0"/>
+          </a:p>
+        </p:txBody>
+      </p:sp>
+      <p:sp>
+        <p:nvSpPr>
+          <p:cNvPr id="11" name="Text 8"/>
+          <p:cNvSpPr/>
+          <p:nvPr/>
+        </p:nvSpPr>
+        <p:spPr>
+          <a:xfrm>
+            <a:off x="7973568" y="2651760"/>
+            <a:ext cx="3557016" cy="237744"/>
+          </a:xfrm>
+          <a:prstGeom prst="rect">
+            <a:avLst/>
+          </a:prstGeom>
+          <a:noFill/>
+          <a:ln/>
+        </p:spPr>
+        <p:txBody>
+          <a:bodyPr wrap="square" lIns="0" tIns="0" rIns="0" bIns="0" rtlCol="0" anchor="ctr"/>
+          <a:lstStyle/>
+          <a:p>
+            <a:pPr indent="0" marL="0">
+              <a:buNone/>
+            </a:pPr>
+            <a:r>
+              <a:rPr lang="en-US" sz="1100" b="1" dirty="0">
+                <a:solidFill>
+                  <a:srgbClr val="FFFFFF"/>
+                </a:solidFill>
+                <a:latin typeface="Calibri" pitchFamily="34" charset="0"/>
+                <a:ea typeface="Calibri" pitchFamily="34" charset="-122"/>
+                <a:cs typeface="Calibri" pitchFamily="34" charset="-120"/>
+              </a:rPr>
+              <a:t>4 KPIs recalculados a cada recorte</a:t>
+            </a:r>
+            <a:endParaRPr lang="en-US" sz="1100" dirty="0"/>
+          </a:p>
+        </p:txBody>
+      </p:sp>
+      <p:sp>
+        <p:nvSpPr>
+          <p:cNvPr id="12" name="Text 9"/>
+          <p:cNvSpPr/>
+          <p:nvPr/>
+        </p:nvSpPr>
+        <p:spPr>
+          <a:xfrm>
+            <a:off x="7973568" y="2880360"/>
+            <a:ext cx="3557016" cy="621792"/>
+          </a:xfrm>
+          <a:prstGeom prst="rect">
+            <a:avLst/>
+          </a:prstGeom>
+          <a:noFill/>
+          <a:ln/>
+        </p:spPr>
+        <p:txBody>
+          <a:bodyPr wrap="square" lIns="0" tIns="0" rIns="0" bIns="0" rtlCol="0" anchor="ctr"/>
+          <a:lstStyle/>
+          <a:p>
+            <a:pPr indent="0" marL="0">
+              <a:lnSpc>
+                <a:spcPct val="112000"/>
+              </a:lnSpc>
+              <a:buNone/>
+            </a:pPr>
+            <a:r>
+              <a:rPr lang="en-US" sz="1000" dirty="0">
+                <a:solidFill>
+                  <a:srgbClr val="EAF6F3"/>
+                </a:solidFill>
+                <a:latin typeface="Calibri" pitchFamily="34" charset="0"/>
+                <a:ea typeface="Calibri" pitchFamily="34" charset="-122"/>
+                <a:cs typeface="Calibri" pitchFamily="34" charset="-120"/>
+              </a:rPr>
+              <a:t>Internações do período, média por dia, permanência ponderada e leitos SUS cadastrados, com a variação sobre o mês anterior.</a:t>
+            </a:r>
+            <a:endParaRPr lang="en-US" sz="1000" dirty="0"/>
+          </a:p>
+        </p:txBody>
+      </p:sp>
+      <p:sp>
+        <p:nvSpPr>
+          <p:cNvPr id="13" name="Text 10"/>
+          <p:cNvSpPr/>
+          <p:nvPr/>
+        </p:nvSpPr>
+        <p:spPr>
+          <a:xfrm>
+            <a:off x="7973568" y="3502152"/>
+            <a:ext cx="3557016" cy="237744"/>
+          </a:xfrm>
+          <a:prstGeom prst="rect">
+            <a:avLst/>
+          </a:prstGeom>
+          <a:noFill/>
+          <a:ln/>
+        </p:spPr>
+        <p:txBody>
+          <a:bodyPr wrap="square" lIns="0" tIns="0" rIns="0" bIns="0" rtlCol="0" anchor="ctr"/>
+          <a:lstStyle/>
+          <a:p>
+            <a:pPr indent="0" marL="0">
+              <a:buNone/>
+            </a:pPr>
+            <a:r>
+              <a:rPr lang="en-US" sz="1100" b="1" dirty="0">
+                <a:solidFill>
+                  <a:srgbClr val="FFFFFF"/>
+                </a:solidFill>
+                <a:latin typeface="Calibri" pitchFamily="34" charset="0"/>
+                <a:ea typeface="Calibri" pitchFamily="34" charset="-122"/>
+                <a:cs typeface="Calibri" pitchFamily="34" charset="-120"/>
+              </a:rPr>
+              <a:t>Mapa com a malha oficial do IBGE</a:t>
+            </a:r>
+            <a:endParaRPr lang="en-US" sz="1100" dirty="0"/>
+          </a:p>
+        </p:txBody>
+      </p:sp>
+      <p:sp>
+        <p:nvSpPr>
+          <p:cNvPr id="14" name="Text 11"/>
+          <p:cNvSpPr/>
+          <p:nvPr/>
+        </p:nvSpPr>
+        <p:spPr>
+          <a:xfrm>
+            <a:off x="7973568" y="3730752"/>
+            <a:ext cx="3557016" cy="621792"/>
+          </a:xfrm>
+          <a:prstGeom prst="rect">
+            <a:avLst/>
+          </a:prstGeom>
+          <a:noFill/>
+          <a:ln/>
+        </p:spPr>
+        <p:txBody>
+          <a:bodyPr wrap="square" lIns="0" tIns="0" rIns="0" bIns="0" rtlCol="0" anchor="ctr"/>
+          <a:lstStyle/>
+          <a:p>
+            <a:pPr indent="0" marL="0">
+              <a:lnSpc>
+                <a:spcPct val="112000"/>
+              </a:lnSpc>
+              <a:buNone/>
+            </a:pPr>
+            <a:r>
+              <a:rPr lang="en-US" sz="1000" dirty="0">
+                <a:solidFill>
+                  <a:srgbClr val="EAF6F3"/>
+                </a:solidFill>
+                <a:latin typeface="Calibri" pitchFamily="34" charset="0"/>
+                <a:ea typeface="Calibri" pitchFamily="34" charset="-122"/>
+                <a:cs typeface="Calibri" pitchFamily="34" charset="-120"/>
+              </a:rPr>
+              <a:t>UFs coloridas pelos tercis de pressão assistencial da competência — os cortes aparecem na própria legenda.</a:t>
+            </a:r>
+            <a:endParaRPr lang="en-US" sz="1000" dirty="0"/>
+          </a:p>
+        </p:txBody>
+      </p:sp>
+      <p:sp>
+        <p:nvSpPr>
+          <p:cNvPr id="15" name="Text 12"/>
+          <p:cNvSpPr/>
+          <p:nvPr/>
+        </p:nvSpPr>
+        <p:spPr>
+          <a:xfrm>
+            <a:off x="7973568" y="4352544"/>
+            <a:ext cx="3557016" cy="237744"/>
+          </a:xfrm>
+          <a:prstGeom prst="rect">
+            <a:avLst/>
+          </a:prstGeom>
+          <a:noFill/>
+          <a:ln/>
+        </p:spPr>
+        <p:txBody>
+          <a:bodyPr wrap="square" lIns="0" tIns="0" rIns="0" bIns="0" rtlCol="0" anchor="ctr"/>
+          <a:lstStyle/>
+          <a:p>
+            <a:pPr indent="0" marL="0">
+              <a:buNone/>
+            </a:pPr>
+            <a:r>
+              <a:rPr lang="en-US" sz="1100" b="1" dirty="0">
+                <a:solidFill>
+                  <a:srgbClr val="FFFFFF"/>
+                </a:solidFill>
+                <a:latin typeface="Calibri" pitchFamily="34" charset="0"/>
+                <a:ea typeface="Calibri" pitchFamily="34" charset="-122"/>
+                <a:cs typeface="Calibri" pitchFamily="34" charset="-120"/>
+              </a:rPr>
+              <a:t>Clicar numa UF recorta a tela inteira</a:t>
+            </a:r>
+            <a:endParaRPr lang="en-US" sz="1100" dirty="0"/>
+          </a:p>
+        </p:txBody>
+      </p:sp>
+      <p:sp>
+        <p:nvSpPr>
+          <p:cNvPr id="16" name="Text 13"/>
+          <p:cNvSpPr/>
+          <p:nvPr/>
+        </p:nvSpPr>
+        <p:spPr>
+          <a:xfrm>
+            <a:off x="7973568" y="4581144"/>
+            <a:ext cx="3557016" cy="621792"/>
+          </a:xfrm>
+          <a:prstGeom prst="rect">
+            <a:avLst/>
+          </a:prstGeom>
+          <a:noFill/>
+          <a:ln/>
+        </p:spPr>
+        <p:txBody>
+          <a:bodyPr wrap="square" lIns="0" tIns="0" rIns="0" bIns="0" rtlCol="0" anchor="ctr"/>
+          <a:lstStyle/>
+          <a:p>
+            <a:pPr indent="0" marL="0">
+              <a:lnSpc>
+                <a:spcPct val="112000"/>
+              </a:lnSpc>
+              <a:buNone/>
+            </a:pPr>
+            <a:r>
+              <a:rPr lang="en-US" sz="1000" dirty="0">
+                <a:solidFill>
+                  <a:srgbClr val="EAF6F3"/>
+                </a:solidFill>
+                <a:latin typeface="Calibri" pitchFamily="34" charset="0"/>
+                <a:ea typeface="Calibri" pitchFamily="34" charset="-122"/>
+                <a:cs typeface="Calibri" pitchFamily="34" charset="-120"/>
+              </a:rPr>
+              <a:t>Paraná na captura: KPIs, subtítulo, ranking e série de internações passam a responder só por aquela UF.</a:t>
+            </a:r>
+            <a:endParaRPr lang="en-US" sz="1000" dirty="0"/>
+          </a:p>
+        </p:txBody>
+      </p:sp>
+      <p:sp>
+        <p:nvSpPr>
+          <p:cNvPr id="17" name="Text 14"/>
+          <p:cNvSpPr/>
+          <p:nvPr/>
+        </p:nvSpPr>
+        <p:spPr>
+          <a:xfrm>
+            <a:off x="7973568" y="5202936"/>
+            <a:ext cx="3557016" cy="237744"/>
+          </a:xfrm>
+          <a:prstGeom prst="rect">
+            <a:avLst/>
+          </a:prstGeom>
+          <a:noFill/>
+          <a:ln/>
+        </p:spPr>
+        <p:txBody>
+          <a:bodyPr wrap="square" lIns="0" tIns="0" rIns="0" bIns="0" rtlCol="0" anchor="ctr"/>
+          <a:lstStyle/>
+          <a:p>
+            <a:pPr indent="0" marL="0">
+              <a:buNone/>
+            </a:pPr>
+            <a:r>
+              <a:rPr lang="en-US" sz="1100" b="1" dirty="0">
+                <a:solidFill>
+                  <a:srgbClr val="FFFFFF"/>
+                </a:solidFill>
+                <a:latin typeface="Calibri" pitchFamily="34" charset="0"/>
+                <a:ea typeface="Calibri" pitchFamily="34" charset="-122"/>
+                <a:cs typeface="Calibri" pitchFamily="34" charset="-120"/>
+              </a:rPr>
+              <a:t>Ranking e série de seis competências</a:t>
+            </a:r>
+            <a:endParaRPr lang="en-US" sz="1100" dirty="0"/>
+          </a:p>
+        </p:txBody>
+      </p:sp>
+      <p:sp>
+        <p:nvSpPr>
+          <p:cNvPr id="18" name="Text 15"/>
+          <p:cNvSpPr/>
+          <p:nvPr/>
+        </p:nvSpPr>
+        <p:spPr>
+          <a:xfrm>
+            <a:off x="7973568" y="5431536"/>
+            <a:ext cx="3557016" cy="621792"/>
+          </a:xfrm>
+          <a:prstGeom prst="rect">
+            <a:avLst/>
+          </a:prstGeom>
+          <a:noFill/>
+          <a:ln/>
+        </p:spPr>
+        <p:txBody>
+          <a:bodyPr wrap="square" lIns="0" tIns="0" rIns="0" bIns="0" rtlCol="0" anchor="ctr"/>
+          <a:lstStyle/>
+          <a:p>
+            <a:pPr indent="0" marL="0">
+              <a:lnSpc>
+                <a:spcPct val="112000"/>
+              </a:lnSpc>
+              <a:buNone/>
+            </a:pPr>
+            <a:r>
+              <a:rPr lang="en-US" sz="1000" dirty="0">
+                <a:solidFill>
+                  <a:srgbClr val="EAF6F3"/>
+                </a:solidFill>
+                <a:latin typeface="Calibri" pitchFamily="34" charset="0"/>
+                <a:ea typeface="Calibri" pitchFamily="34" charset="-122"/>
+                <a:cs typeface="Calibri" pitchFamily="34" charset="-120"/>
+              </a:rPr>
+              <a:t>As 5 UFs sob maior pressão e a evolução das internações do recorte, com os valores rotulados.</a:t>
+            </a:r>
+            <a:endParaRPr lang="en-US" sz="1000" dirty="0"/>
+          </a:p>
+        </p:txBody>
+      </p:sp>
+      <p:sp>
+        <p:nvSpPr>
+          <p:cNvPr id="19" name="Text 16"/>
+          <p:cNvSpPr/>
+          <p:nvPr/>
+        </p:nvSpPr>
+        <p:spPr>
+          <a:xfrm>
+            <a:off x="457200" y="6208776"/>
+            <a:ext cx="7068312" cy="274320"/>
+          </a:xfrm>
+          <a:prstGeom prst="rect">
+            <a:avLst/>
+          </a:prstGeom>
+          <a:noFill/>
+          <a:ln/>
+        </p:spPr>
+        <p:txBody>
+          <a:bodyPr wrap="square" lIns="0" tIns="0" rIns="0" bIns="0" rtlCol="0" anchor="ctr"/>
+          <a:lstStyle/>
+          <a:p>
+            <a:pPr indent="0" marL="0">
+              <a:buNone/>
+            </a:pPr>
+            <a:r>
+              <a:rPr lang="en-US" sz="950" i="1" dirty="0">
                 <a:solidFill>
                   <a:srgbClr val="94A3B8"/>
                 </a:solidFill>
@@ -20864,32 +21618,15 @@
                 <a:ea typeface="Calibri" pitchFamily="34" charset="-122"/>
                 <a:cs typeface="Calibri" pitchFamily="34" charset="-120"/>
               </a:rPr>
-              <a:t>Capturar em: gabriellive1817-stack.github.io/Leito_360</a:t>
-            </a:r>
-            <a:endParaRPr lang="en-US" sz="1200" dirty="0"/>
-          </a:p>
-          <a:p>
-            <a:pPr algn="ctr" indent="0" marL="0">
-              <a:buNone/>
-            </a:pPr>
-            <a:r>
-              <a:rPr lang="en-US" sz="1050" dirty="0">
-                <a:solidFill>
-                  <a:srgbClr val="94A3B8"/>
-                </a:solidFill>
-                <a:latin typeface="Calibri" pitchFamily="34" charset="0"/>
-                <a:ea typeface="Calibri" pitchFamily="34" charset="-122"/>
-                <a:cs typeface="Calibri" pitchFamily="34" charset="-120"/>
-              </a:rPr>
-              <a:t>(tela Visão Executiva — filtro de competência + região + UF selecionada)</a:t>
-            </a:r>
-            <a:endParaRPr lang="en-US" sz="1200" dirty="0"/>
-          </a:p>
-        </p:txBody>
-      </p:sp>
-      <p:sp>
-        <p:nvSpPr>
-          <p:cNvPr id="8" name="Text 6"/>
+              <a:t>Captura em gabriellive1817-stack.github.io/Leito_360 · competência Abr/2026 · Brasil · UF selecionada: Paraná.</a:t>
+            </a:r>
+            <a:endParaRPr lang="en-US" sz="950" dirty="0"/>
+          </a:p>
+        </p:txBody>
+      </p:sp>
+      <p:sp>
+        <p:nvSpPr>
+          <p:cNvPr id="20" name="Text 17"/>
           <p:cNvSpPr/>
           <p:nvPr/>
         </p:nvSpPr>
@@ -20928,7 +21665,7 @@
       </p:sp>
       <p:sp>
         <p:nvSpPr>
-          <p:cNvPr id="9" name="Text 7"/>
+          <p:cNvPr id="21" name="Text 18"/>
           <p:cNvSpPr/>
           <p:nvPr/>
         </p:nvSpPr>
@@ -21053,7 +21790,27 @@
       </p:sp>
       <p:sp>
         <p:nvSpPr>
-          <p:cNvPr id="4" name="Text 2"/>
+          <p:cNvPr id="4" name="Shape 2"/>
+          <p:cNvSpPr/>
+          <p:nvPr/>
+        </p:nvSpPr>
+        <p:spPr>
+          <a:xfrm>
+            <a:off x="457200" y="1938528"/>
+            <a:ext cx="11277295" cy="18288"/>
+          </a:xfrm>
+          <a:prstGeom prst="rect">
+            <a:avLst/>
+          </a:prstGeom>
+          <a:solidFill>
+            <a:srgbClr val="1E3A5F"/>
+          </a:solidFill>
+          <a:ln/>
+        </p:spPr>
+      </p:sp>
+      <p:sp>
+        <p:nvSpPr>
+          <p:cNvPr id="5" name="Text 3"/>
           <p:cNvSpPr/>
           <p:nvPr/>
         </p:nvSpPr>
@@ -21092,7 +21849,7 @@
       </p:sp>
       <p:sp>
         <p:nvSpPr>
-          <p:cNvPr id="5" name="Text 3"/>
+          <p:cNvPr id="6" name="Text 4"/>
           <p:cNvSpPr/>
           <p:nvPr/>
         </p:nvSpPr>
@@ -21123,7 +21880,7 @@
                 <a:ea typeface="Calibri" pitchFamily="34" charset="-122"/>
                 <a:cs typeface="Calibri" pitchFamily="34" charset="-120"/>
               </a:rPr>
-              <a:t>Filtros guiados, SQL equivalente (identificado como não gerado por IA), tabela ordenável e exportação CSV.</a:t>
+              <a:t>Quatro consultas guiadas sobre os mesmos dados, com SQL equivalente, cobertura do pipeline e exportação em CSV.</a:t>
             </a:r>
             <a:endParaRPr lang="en-US" sz="1400" dirty="0"/>
           </a:p>
@@ -21131,75 +21888,485 @@
       </p:sp>
       <p:sp>
         <p:nvSpPr>
-          <p:cNvPr id="6" name="Shape 4"/>
-          <p:cNvSpPr/>
-          <p:nvPr/>
-        </p:nvSpPr>
-        <p:spPr>
-          <a:xfrm>
-            <a:off x="457200" y="2103120"/>
-            <a:ext cx="11247120" cy="4114800"/>
+          <p:cNvPr id="7" name="Shape 5"/>
+          <p:cNvSpPr/>
+          <p:nvPr/>
+        </p:nvSpPr>
+        <p:spPr>
+          <a:xfrm>
+            <a:off x="402336" y="2048256"/>
+            <a:ext cx="7178040" cy="4087368"/>
           </a:xfrm>
           <a:prstGeom prst="roundRect">
             <a:avLst>
-              <a:gd name="adj" fmla="val 1333"/>
+              <a:gd name="adj" fmla="val 1119"/>
             </a:avLst>
           </a:prstGeom>
           <a:solidFill>
             <a:srgbClr val="060D1E"/>
           </a:solidFill>
-          <a:ln w="15875">
+          <a:ln w="12700">
             <a:solidFill>
-              <a:srgbClr val="F59E0B"/>
+              <a:srgbClr val="1E3A5F"/>
             </a:solidFill>
-            <a:prstDash val="dash"/>
+            <a:prstDash val="solid"/>
           </a:ln>
-        </p:spPr>
-      </p:sp>
-      <p:sp>
-        <p:nvSpPr>
-          <p:cNvPr id="7" name="Text 5"/>
-          <p:cNvSpPr/>
-          <p:nvPr/>
-        </p:nvSpPr>
-        <p:spPr>
-          <a:xfrm>
-            <a:off x="640080" y="2286000"/>
-            <a:ext cx="10881360" cy="3749040"/>
-          </a:xfrm>
-          <a:prstGeom prst="rect">
-            <a:avLst/>
-          </a:prstGeom>
-          <a:noFill/>
-          <a:ln/>
-        </p:spPr>
-        <p:txBody>
-          <a:bodyPr wrap="square" lIns="0" tIns="0" rIns="0" bIns="0" rtlCol="0" anchor="ctr"/>
-          <a:lstStyle/>
-          <a:p>
-            <a:pPr algn="ctr" indent="0" marL="0">
-              <a:buNone/>
-            </a:pPr>
-            <a:r>
-              <a:rPr lang="en-US" sz="1200" b="1" dirty="0">
-                <a:solidFill>
-                  <a:srgbClr val="F59E0B"/>
-                </a:solidFill>
-                <a:latin typeface="Calibri" pitchFamily="34" charset="0"/>
-                <a:ea typeface="Calibri" pitchFamily="34" charset="-122"/>
-                <a:cs typeface="Calibri" pitchFamily="34" charset="-120"/>
-              </a:rPr>
-              <a:t>PRINT PENDENTE
-</a:t>
-            </a:r>
-            <a:endParaRPr lang="en-US" sz="1200" dirty="0"/>
-          </a:p>
-          <a:p>
-            <a:pPr algn="ctr" indent="0" marL="0">
-              <a:buNone/>
-            </a:pPr>
-            <a:r>
-              <a:rPr lang="en-US" sz="1050" dirty="0">
+          <a:effectLst>
+            <a:outerShdw sx="100000" sy="100000" kx="0" ky="0" algn="bl" rotWithShape="0" blurRad="127000" dist="38100" dir="5400000">
+              <a:srgbClr val="000000">
+                <a:alpha val="45000"/>
+              </a:srgbClr>
+            </a:outerShdw>
+          </a:effectLst>
+        </p:spPr>
+      </p:sp>
+      <p:pic>
+        <p:nvPicPr>
+          <p:cNvPr id="8" name="Image 0" descr="shots/print_analitico.png">    </p:cNvPr>
+          <p:cNvPicPr>
+            <a:picLocks noChangeAspect="1"/>
+          </p:cNvPicPr>
+          <p:nvPr/>
+        </p:nvPicPr>
+        <p:blipFill>
+          <a:blip r:embed="rId1"/>
+          <a:stretch>
+            <a:fillRect/>
+          </a:stretch>
+        </p:blipFill>
+        <p:spPr>
+          <a:xfrm>
+            <a:off x="457200" y="2103120"/>
+            <a:ext cx="7068312" cy="3977640"/>
+          </a:xfrm>
+          <a:prstGeom prst="rect">
+            <a:avLst/>
+          </a:prstGeom>
+        </p:spPr>
+      </p:pic>
+      <p:sp>
+        <p:nvSpPr>
+          <p:cNvPr id="9" name="Shape 6"/>
+          <p:cNvSpPr/>
+          <p:nvPr/>
+        </p:nvSpPr>
+        <p:spPr>
+          <a:xfrm>
+            <a:off x="7772400" y="2103120"/>
+            <a:ext cx="3959352" cy="3977640"/>
+          </a:xfrm>
+          <a:prstGeom prst="roundRect">
+            <a:avLst>
+              <a:gd name="adj" fmla="val 1848"/>
+            </a:avLst>
+          </a:prstGeom>
+          <a:solidFill>
+            <a:srgbClr val="0F2A4A"/>
+          </a:solidFill>
+          <a:ln w="12700">
+            <a:solidFill>
+              <a:srgbClr val="1E3A5F"/>
+            </a:solidFill>
+            <a:prstDash val="solid"/>
+          </a:ln>
+          <a:effectLst>
+            <a:outerShdw sx="100000" sy="100000" kx="0" ky="0" algn="bl" rotWithShape="0" blurRad="101600" dist="38100" dir="5400000">
+              <a:srgbClr val="000000">
+                <a:alpha val="35000"/>
+              </a:srgbClr>
+            </a:outerShdw>
+          </a:effectLst>
+        </p:spPr>
+      </p:sp>
+      <p:sp>
+        <p:nvSpPr>
+          <p:cNvPr id="10" name="Text 7"/>
+          <p:cNvSpPr/>
+          <p:nvPr/>
+        </p:nvSpPr>
+        <p:spPr>
+          <a:xfrm>
+            <a:off x="7973568" y="2267712"/>
+            <a:ext cx="3557016" cy="320040"/>
+          </a:xfrm>
+          <a:prstGeom prst="rect">
+            <a:avLst/>
+          </a:prstGeom>
+          <a:noFill/>
+          <a:ln/>
+        </p:spPr>
+        <p:txBody>
+          <a:bodyPr wrap="square" lIns="0" tIns="0" rIns="0" bIns="0" rtlCol="0" anchor="ctr"/>
+          <a:lstStyle/>
+          <a:p>
+            <a:pPr indent="0" marL="0">
+              <a:buNone/>
+            </a:pPr>
+            <a:r>
+              <a:rPr lang="en-US" sz="1300" b="1" dirty="0">
+                <a:solidFill>
+                  <a:srgbClr val="14B8A6"/>
+                </a:solidFill>
+                <a:latin typeface="Calibri" pitchFamily="34" charset="0"/>
+                <a:ea typeface="Calibri" pitchFamily="34" charset="-122"/>
+                <a:cs typeface="Calibri" pitchFamily="34" charset="-120"/>
+              </a:rPr>
+              <a:t>O que a tela mostra</a:t>
+            </a:r>
+            <a:endParaRPr lang="en-US" sz="1300" dirty="0"/>
+          </a:p>
+        </p:txBody>
+      </p:sp>
+      <p:sp>
+        <p:nvSpPr>
+          <p:cNvPr id="11" name="Text 8"/>
+          <p:cNvSpPr/>
+          <p:nvPr/>
+        </p:nvSpPr>
+        <p:spPr>
+          <a:xfrm>
+            <a:off x="7973568" y="2651760"/>
+            <a:ext cx="3557016" cy="237744"/>
+          </a:xfrm>
+          <a:prstGeom prst="rect">
+            <a:avLst/>
+          </a:prstGeom>
+          <a:noFill/>
+          <a:ln/>
+        </p:spPr>
+        <p:txBody>
+          <a:bodyPr wrap="square" lIns="0" tIns="0" rIns="0" bIns="0" rtlCol="0" anchor="ctr"/>
+          <a:lstStyle/>
+          <a:p>
+            <a:pPr indent="0" marL="0">
+              <a:buNone/>
+            </a:pPr>
+            <a:r>
+              <a:rPr lang="en-US" sz="1100" b="1" dirty="0">
+                <a:solidFill>
+                  <a:srgbClr val="FFFFFF"/>
+                </a:solidFill>
+                <a:latin typeface="Calibri" pitchFamily="34" charset="0"/>
+                <a:ea typeface="Calibri" pitchFamily="34" charset="-122"/>
+                <a:cs typeface="Calibri" pitchFamily="34" charset="-120"/>
+              </a:rPr>
+              <a:t>Quatro perguntas de negócio</a:t>
+            </a:r>
+            <a:endParaRPr lang="en-US" sz="1100" dirty="0"/>
+          </a:p>
+        </p:txBody>
+      </p:sp>
+      <p:sp>
+        <p:nvSpPr>
+          <p:cNvPr id="12" name="Text 9"/>
+          <p:cNvSpPr/>
+          <p:nvPr/>
+        </p:nvSpPr>
+        <p:spPr>
+          <a:xfrm>
+            <a:off x="7973568" y="2880360"/>
+            <a:ext cx="3557016" cy="621792"/>
+          </a:xfrm>
+          <a:prstGeom prst="rect">
+            <a:avLst/>
+          </a:prstGeom>
+          <a:noFill/>
+          <a:ln/>
+        </p:spPr>
+        <p:txBody>
+          <a:bodyPr wrap="square" lIns="0" tIns="0" rIns="0" bIns="0" rtlCol="0" anchor="ctr"/>
+          <a:lstStyle/>
+          <a:p>
+            <a:pPr indent="0" marL="0">
+              <a:lnSpc>
+                <a:spcPct val="112000"/>
+              </a:lnSpc>
+              <a:buNone/>
+            </a:pPr>
+            <a:r>
+              <a:rPr lang="en-US" sz="1000" dirty="0">
+                <a:solidFill>
+                  <a:srgbClr val="EAF6F3"/>
+                </a:solidFill>
+                <a:latin typeface="Calibri" pitchFamily="34" charset="0"/>
+                <a:ea typeface="Calibri" pitchFamily="34" charset="-122"/>
+                <a:cs typeface="Calibri" pitchFamily="34" charset="-120"/>
+              </a:rPr>
+              <a:t>Maior pressão, menor oferta de leitos, maior permanência e maior mortalidade — resultados reproduzíveis.</a:t>
+            </a:r>
+            <a:endParaRPr lang="en-US" sz="1000" dirty="0"/>
+          </a:p>
+        </p:txBody>
+      </p:sp>
+      <p:sp>
+        <p:nvSpPr>
+          <p:cNvPr id="13" name="Text 10"/>
+          <p:cNvSpPr/>
+          <p:nvPr/>
+        </p:nvSpPr>
+        <p:spPr>
+          <a:xfrm>
+            <a:off x="7973568" y="3502152"/>
+            <a:ext cx="3557016" cy="237744"/>
+          </a:xfrm>
+          <a:prstGeom prst="rect">
+            <a:avLst/>
+          </a:prstGeom>
+          <a:noFill/>
+          <a:ln/>
+        </p:spPr>
+        <p:txBody>
+          <a:bodyPr wrap="square" lIns="0" tIns="0" rIns="0" bIns="0" rtlCol="0" anchor="ctr"/>
+          <a:lstStyle/>
+          <a:p>
+            <a:pPr indent="0" marL="0">
+              <a:buNone/>
+            </a:pPr>
+            <a:r>
+              <a:rPr lang="en-US" sz="1100" b="1" dirty="0">
+                <a:solidFill>
+                  <a:srgbClr val="FFFFFF"/>
+                </a:solidFill>
+                <a:latin typeface="Calibri" pitchFamily="34" charset="0"/>
+                <a:ea typeface="Calibri" pitchFamily="34" charset="-122"/>
+                <a:cs typeface="Calibri" pitchFamily="34" charset="-120"/>
+              </a:rPr>
+              <a:t>SQL equivalente sempre visível</a:t>
+            </a:r>
+            <a:endParaRPr lang="en-US" sz="1100" dirty="0"/>
+          </a:p>
+        </p:txBody>
+      </p:sp>
+      <p:sp>
+        <p:nvSpPr>
+          <p:cNvPr id="14" name="Text 11"/>
+          <p:cNvSpPr/>
+          <p:nvPr/>
+        </p:nvSpPr>
+        <p:spPr>
+          <a:xfrm>
+            <a:off x="7973568" y="3730752"/>
+            <a:ext cx="3557016" cy="621792"/>
+          </a:xfrm>
+          <a:prstGeom prst="rect">
+            <a:avLst/>
+          </a:prstGeom>
+          <a:noFill/>
+          <a:ln/>
+        </p:spPr>
+        <p:txBody>
+          <a:bodyPr wrap="square" lIns="0" tIns="0" rIns="0" bIns="0" rtlCol="0" anchor="ctr"/>
+          <a:lstStyle/>
+          <a:p>
+            <a:pPr indent="0" marL="0">
+              <a:lnSpc>
+                <a:spcPct val="112000"/>
+              </a:lnSpc>
+              <a:buNone/>
+            </a:pPr>
+            <a:r>
+              <a:rPr lang="en-US" sz="1000" dirty="0">
+                <a:solidFill>
+                  <a:srgbClr val="EAF6F3"/>
+                </a:solidFill>
+                <a:latin typeface="Calibri" pitchFamily="34" charset="0"/>
+                <a:ea typeface="Calibri" pitchFamily="34" charset="-122"/>
+                <a:cs typeface="Calibri" pitchFamily="34" charset="-120"/>
+              </a:rPr>
+              <a:t>A consulta correspondente sobre VW_LEITO360_ANALITICO, identificada como não gerada por IA.</a:t>
+            </a:r>
+            <a:endParaRPr lang="en-US" sz="1000" dirty="0"/>
+          </a:p>
+        </p:txBody>
+      </p:sp>
+      <p:sp>
+        <p:nvSpPr>
+          <p:cNvPr id="15" name="Text 12"/>
+          <p:cNvSpPr/>
+          <p:nvPr/>
+        </p:nvSpPr>
+        <p:spPr>
+          <a:xfrm>
+            <a:off x="7973568" y="4352544"/>
+            <a:ext cx="3557016" cy="237744"/>
+          </a:xfrm>
+          <a:prstGeom prst="rect">
+            <a:avLst/>
+          </a:prstGeom>
+          <a:noFill/>
+          <a:ln/>
+        </p:spPr>
+        <p:txBody>
+          <a:bodyPr wrap="square" lIns="0" tIns="0" rIns="0" bIns="0" rtlCol="0" anchor="ctr"/>
+          <a:lstStyle/>
+          <a:p>
+            <a:pPr indent="0" marL="0">
+              <a:buNone/>
+            </a:pPr>
+            <a:r>
+              <a:rPr lang="en-US" sz="1100" b="1" dirty="0">
+                <a:solidFill>
+                  <a:srgbClr val="FFFFFF"/>
+                </a:solidFill>
+                <a:latin typeface="Calibri" pitchFamily="34" charset="0"/>
+                <a:ea typeface="Calibri" pitchFamily="34" charset="-122"/>
+                <a:cs typeface="Calibri" pitchFamily="34" charset="-120"/>
+              </a:rPr>
+              <a:t>Qualidade e cobertura declaradas</a:t>
+            </a:r>
+            <a:endParaRPr lang="en-US" sz="1100" dirty="0"/>
+          </a:p>
+        </p:txBody>
+      </p:sp>
+      <p:sp>
+        <p:nvSpPr>
+          <p:cNvPr id="16" name="Text 13"/>
+          <p:cNvSpPr/>
+          <p:nvPr/>
+        </p:nvSpPr>
+        <p:spPr>
+          <a:xfrm>
+            <a:off x="7973568" y="4581144"/>
+            <a:ext cx="3557016" cy="621792"/>
+          </a:xfrm>
+          <a:prstGeom prst="rect">
+            <a:avLst/>
+          </a:prstGeom>
+          <a:noFill/>
+          <a:ln/>
+        </p:spPr>
+        <p:txBody>
+          <a:bodyPr wrap="square" lIns="0" tIns="0" rIns="0" bIns="0" rtlCol="0" anchor="ctr"/>
+          <a:lstStyle/>
+          <a:p>
+            <a:pPr indent="0" marL="0">
+              <a:lnSpc>
+                <a:spcPct val="112000"/>
+              </a:lnSpc>
+              <a:buNone/>
+            </a:pPr>
+            <a:r>
+              <a:rPr lang="en-US" sz="1000" dirty="0">
+                <a:solidFill>
+                  <a:srgbClr val="EAF6F3"/>
+                </a:solidFill>
+                <a:latin typeface="Calibri" pitchFamily="34" charset="0"/>
+                <a:ea typeface="Calibri" pitchFamily="34" charset="-122"/>
+                <a:cs typeface="Calibri" pitchFamily="34" charset="-120"/>
+              </a:rPr>
+              <a:t>27 UFs, 6 períodos, 162 registros e reconciliação OK, direto do relatório de validação do ETL.</a:t>
+            </a:r>
+            <a:endParaRPr lang="en-US" sz="1000" dirty="0"/>
+          </a:p>
+        </p:txBody>
+      </p:sp>
+      <p:sp>
+        <p:nvSpPr>
+          <p:cNvPr id="17" name="Text 14"/>
+          <p:cNvSpPr/>
+          <p:nvPr/>
+        </p:nvSpPr>
+        <p:spPr>
+          <a:xfrm>
+            <a:off x="7973568" y="5202936"/>
+            <a:ext cx="3557016" cy="237744"/>
+          </a:xfrm>
+          <a:prstGeom prst="rect">
+            <a:avLst/>
+          </a:prstGeom>
+          <a:noFill/>
+          <a:ln/>
+        </p:spPr>
+        <p:txBody>
+          <a:bodyPr wrap="square" lIns="0" tIns="0" rIns="0" bIns="0" rtlCol="0" anchor="ctr"/>
+          <a:lstStyle/>
+          <a:p>
+            <a:pPr indent="0" marL="0">
+              <a:buNone/>
+            </a:pPr>
+            <a:r>
+              <a:rPr lang="en-US" sz="1100" b="1" dirty="0">
+                <a:solidFill>
+                  <a:srgbClr val="FFFFFF"/>
+                </a:solidFill>
+                <a:latin typeface="Calibri" pitchFamily="34" charset="0"/>
+                <a:ea typeface="Calibri" pitchFamily="34" charset="-122"/>
+                <a:cs typeface="Calibri" pitchFamily="34" charset="-120"/>
+              </a:rPr>
+              <a:t>Fontes e limitações na própria tela</a:t>
+            </a:r>
+            <a:endParaRPr lang="en-US" sz="1100" dirty="0"/>
+          </a:p>
+        </p:txBody>
+      </p:sp>
+      <p:sp>
+        <p:nvSpPr>
+          <p:cNvPr id="18" name="Text 15"/>
+          <p:cNvSpPr/>
+          <p:nvPr/>
+        </p:nvSpPr>
+        <p:spPr>
+          <a:xfrm>
+            <a:off x="7973568" y="5431536"/>
+            <a:ext cx="3557016" cy="621792"/>
+          </a:xfrm>
+          <a:prstGeom prst="rect">
+            <a:avLst/>
+          </a:prstGeom>
+          <a:noFill/>
+          <a:ln/>
+        </p:spPr>
+        <p:txBody>
+          <a:bodyPr wrap="square" lIns="0" tIns="0" rIns="0" bIns="0" rtlCol="0" anchor="ctr"/>
+          <a:lstStyle/>
+          <a:p>
+            <a:pPr indent="0" marL="0">
+              <a:lnSpc>
+                <a:spcPct val="112000"/>
+              </a:lnSpc>
+              <a:buNone/>
+            </a:pPr>
+            <a:r>
+              <a:rPr lang="en-US" sz="1000" dirty="0">
+                <a:solidFill>
+                  <a:srgbClr val="EAF6F3"/>
+                </a:solidFill>
+                <a:latin typeface="Calibri" pitchFamily="34" charset="0"/>
+                <a:ea typeface="Calibri" pitchFamily="34" charset="-122"/>
+                <a:cs typeface="Calibri" pitchFamily="34" charset="-120"/>
+              </a:rPr>
+              <a:t>Links oficiais do SIH/SUS, CNES e IBGE e as limitações metodológicas ao lado dos números.</a:t>
+            </a:r>
+            <a:endParaRPr lang="en-US" sz="1000" dirty="0"/>
+          </a:p>
+        </p:txBody>
+      </p:sp>
+      <p:sp>
+        <p:nvSpPr>
+          <p:cNvPr id="19" name="Text 16"/>
+          <p:cNvSpPr/>
+          <p:nvPr/>
+        </p:nvSpPr>
+        <p:spPr>
+          <a:xfrm>
+            <a:off x="457200" y="6208776"/>
+            <a:ext cx="7068312" cy="274320"/>
+          </a:xfrm>
+          <a:prstGeom prst="rect">
+            <a:avLst/>
+          </a:prstGeom>
+          <a:noFill/>
+          <a:ln/>
+        </p:spPr>
+        <p:txBody>
+          <a:bodyPr wrap="square" lIns="0" tIns="0" rIns="0" bIns="0" rtlCol="0" anchor="ctr"/>
+          <a:lstStyle/>
+          <a:p>
+            <a:pPr indent="0" marL="0">
+              <a:buNone/>
+            </a:pPr>
+            <a:r>
+              <a:rPr lang="en-US" sz="950" i="1" dirty="0">
                 <a:solidFill>
                   <a:srgbClr val="94A3B8"/>
                 </a:solidFill>
@@ -21207,32 +22374,15 @@
                 <a:ea typeface="Calibri" pitchFamily="34" charset="-122"/>
                 <a:cs typeface="Calibri" pitchFamily="34" charset="-120"/>
               </a:rPr>
-              <a:t>Capturar em: gabriellive1817-stack.github.io/Leito_360</a:t>
-            </a:r>
-            <a:endParaRPr lang="en-US" sz="1200" dirty="0"/>
-          </a:p>
-          <a:p>
-            <a:pPr algn="ctr" indent="0" marL="0">
-              <a:buNone/>
-            </a:pPr>
-            <a:r>
-              <a:rPr lang="en-US" sz="1050" dirty="0">
-                <a:solidFill>
-                  <a:srgbClr val="94A3B8"/>
-                </a:solidFill>
-                <a:latin typeface="Calibri" pitchFamily="34" charset="0"/>
-                <a:ea typeface="Calibri" pitchFamily="34" charset="-122"/>
-                <a:cs typeface="Calibri" pitchFamily="34" charset="-120"/>
-              </a:rPr>
-              <a:t>(tela Explorador Analítico — tabela ordenada + painel de fontes/limitações)</a:t>
-            </a:r>
-            <a:endParaRPr lang="en-US" sz="1200" dirty="0"/>
-          </a:p>
-        </p:txBody>
-      </p:sp>
-      <p:sp>
-        <p:nvSpPr>
-          <p:cNvPr id="8" name="Text 6"/>
+              <a:t>Captura em gabriellive1817-stack.github.io/Leito_360 · competência Abr/2026 · consulta de maior pressão assistencial.</a:t>
+            </a:r>
+            <a:endParaRPr lang="en-US" sz="950" dirty="0"/>
+          </a:p>
+        </p:txBody>
+      </p:sp>
+      <p:sp>
+        <p:nvSpPr>
+          <p:cNvPr id="20" name="Text 17"/>
           <p:cNvSpPr/>
           <p:nvPr/>
         </p:nvSpPr>
@@ -21271,7 +22421,7 @@
       </p:sp>
       <p:sp>
         <p:nvSpPr>
-          <p:cNvPr id="9" name="Text 7"/>
+          <p:cNvPr id="21" name="Text 18"/>
           <p:cNvSpPr/>
           <p:nvPr/>
         </p:nvSpPr>
@@ -21396,7 +22546,27 @@
       </p:sp>
       <p:sp>
         <p:nvSpPr>
-          <p:cNvPr id="4" name="Text 2"/>
+          <p:cNvPr id="4" name="Shape 2"/>
+          <p:cNvSpPr/>
+          <p:nvPr/>
+        </p:nvSpPr>
+        <p:spPr>
+          <a:xfrm>
+            <a:off x="457200" y="1938528"/>
+            <a:ext cx="11277295" cy="18288"/>
+          </a:xfrm>
+          <a:prstGeom prst="rect">
+            <a:avLst/>
+          </a:prstGeom>
+          <a:solidFill>
+            <a:srgbClr val="1E3A5F"/>
+          </a:solidFill>
+          <a:ln/>
+        </p:spPr>
+      </p:sp>
+      <p:sp>
+        <p:nvSpPr>
+          <p:cNvPr id="5" name="Text 3"/>
           <p:cNvSpPr/>
           <p:nvPr/>
         </p:nvSpPr>
@@ -21435,7 +22605,7 @@
       </p:sp>
       <p:sp>
         <p:nvSpPr>
-          <p:cNvPr id="5" name="Text 3"/>
+          <p:cNvPr id="6" name="Text 4"/>
           <p:cNvSpPr/>
           <p:nvPr/>
         </p:nvSpPr>
@@ -21474,7 +22644,7 @@
       </p:sp>
       <p:sp>
         <p:nvSpPr>
-          <p:cNvPr id="6" name="Shape 4"/>
+          <p:cNvPr id="7" name="Shape 5"/>
           <p:cNvSpPr/>
           <p:nvPr/>
         </p:nvSpPr>
@@ -21508,7 +22678,7 @@
       </p:sp>
       <p:sp>
         <p:nvSpPr>
-          <p:cNvPr id="7" name="Shape 5"/>
+          <p:cNvPr id="8" name="Shape 6"/>
           <p:cNvSpPr/>
           <p:nvPr/>
         </p:nvSpPr>
@@ -21528,7 +22698,7 @@
       </p:sp>
       <p:sp>
         <p:nvSpPr>
-          <p:cNvPr id="8" name="Text 6"/>
+          <p:cNvPr id="9" name="Text 7"/>
           <p:cNvSpPr/>
           <p:nvPr/>
         </p:nvSpPr>
@@ -21567,7 +22737,7 @@
       </p:sp>
       <p:sp>
         <p:nvSpPr>
-          <p:cNvPr id="9" name="Text 7"/>
+          <p:cNvPr id="10" name="Text 8"/>
           <p:cNvSpPr/>
           <p:nvPr/>
         </p:nvSpPr>
@@ -21615,45 +22785,9 @@
                 <a:ea typeface="Calibri" pitchFamily="34" charset="-122"/>
                 <a:cs typeface="Calibri" pitchFamily="34" charset="-120"/>
               </a:rPr>
-              <a:t>API IBGE/SIDRA</a:t>
+              <a:t>IBGE SIDRA + Malhas</a:t>
             </a:r>
             <a:endParaRPr lang="en-US" sz="1000" dirty="0"/>
-          </a:p>
-        </p:txBody>
-      </p:sp>
-      <p:sp>
-        <p:nvSpPr>
-          <p:cNvPr id="10" name="Text 8"/>
-          <p:cNvSpPr/>
-          <p:nvPr/>
-        </p:nvSpPr>
-        <p:spPr>
-          <a:xfrm>
-            <a:off x="2523744" y="3200400"/>
-            <a:ext cx="320040" cy="548640"/>
-          </a:xfrm>
-          <a:prstGeom prst="rect">
-            <a:avLst/>
-          </a:prstGeom>
-          <a:noFill/>
-          <a:ln/>
-        </p:spPr>
-        <p:txBody>
-          <a:bodyPr wrap="square" lIns="0" tIns="0" rIns="0" bIns="0" rtlCol="0" anchor="ctr"/>
-          <a:lstStyle/>
-          <a:p>
-            <a:pPr algn="ctr" indent="0" marL="0">
-              <a:buNone/>
-            </a:pPr>
-            <a:r>
-              <a:rPr lang="en-US" sz="2000" dirty="0">
-                <a:solidFill>
-                  <a:srgbClr val="14B8A6"/>
-                </a:solidFill>
-              </a:rPr>
-              <a:t>→</a:t>
-            </a:r>
-            <a:endParaRPr lang="en-US" sz="2000" dirty="0"/>
           </a:p>
         </p:txBody>
       </p:sp>
@@ -21808,43 +22942,7 @@
       </p:sp>
       <p:sp>
         <p:nvSpPr>
-          <p:cNvPr id="15" name="Text 13"/>
-          <p:cNvSpPr/>
-          <p:nvPr/>
-        </p:nvSpPr>
-        <p:spPr>
-          <a:xfrm>
-            <a:off x="4764024" y="3200400"/>
-            <a:ext cx="320040" cy="548640"/>
-          </a:xfrm>
-          <a:prstGeom prst="rect">
-            <a:avLst/>
-          </a:prstGeom>
-          <a:noFill/>
-          <a:ln/>
-        </p:spPr>
-        <p:txBody>
-          <a:bodyPr wrap="square" lIns="0" tIns="0" rIns="0" bIns="0" rtlCol="0" anchor="ctr"/>
-          <a:lstStyle/>
-          <a:p>
-            <a:pPr algn="ctr" indent="0" marL="0">
-              <a:buNone/>
-            </a:pPr>
-            <a:r>
-              <a:rPr lang="en-US" sz="2000" dirty="0">
-                <a:solidFill>
-                  <a:srgbClr val="14B8A6"/>
-                </a:solidFill>
-              </a:rPr>
-              <a:t>→</a:t>
-            </a:r>
-            <a:endParaRPr lang="en-US" sz="2000" dirty="0"/>
-          </a:p>
-        </p:txBody>
-      </p:sp>
-      <p:sp>
-        <p:nvSpPr>
-          <p:cNvPr id="16" name="Shape 14"/>
+          <p:cNvPr id="15" name="Shape 13"/>
           <p:cNvSpPr/>
           <p:nvPr/>
         </p:nvSpPr>
@@ -21878,7 +22976,7 @@
       </p:sp>
       <p:sp>
         <p:nvSpPr>
-          <p:cNvPr id="17" name="Shape 15"/>
+          <p:cNvPr id="16" name="Shape 14"/>
           <p:cNvSpPr/>
           <p:nvPr/>
         </p:nvSpPr>
@@ -21898,7 +22996,7 @@
       </p:sp>
       <p:sp>
         <p:nvSpPr>
-          <p:cNvPr id="18" name="Text 16"/>
+          <p:cNvPr id="17" name="Text 15"/>
           <p:cNvSpPr/>
           <p:nvPr/>
         </p:nvSpPr>
@@ -21937,7 +23035,7 @@
       </p:sp>
       <p:sp>
         <p:nvSpPr>
-          <p:cNvPr id="19" name="Text 17"/>
+          <p:cNvPr id="18" name="Text 16"/>
           <p:cNvSpPr/>
           <p:nvPr/>
         </p:nvSpPr>
@@ -21993,43 +23091,7 @@
       </p:sp>
       <p:sp>
         <p:nvSpPr>
-          <p:cNvPr id="20" name="Text 18"/>
-          <p:cNvSpPr/>
-          <p:nvPr/>
-        </p:nvSpPr>
-        <p:spPr>
-          <a:xfrm>
-            <a:off x="7004304" y="3200400"/>
-            <a:ext cx="320040" cy="548640"/>
-          </a:xfrm>
-          <a:prstGeom prst="rect">
-            <a:avLst/>
-          </a:prstGeom>
-          <a:noFill/>
-          <a:ln/>
-        </p:spPr>
-        <p:txBody>
-          <a:bodyPr wrap="square" lIns="0" tIns="0" rIns="0" bIns="0" rtlCol="0" anchor="ctr"/>
-          <a:lstStyle/>
-          <a:p>
-            <a:pPr algn="ctr" indent="0" marL="0">
-              <a:buNone/>
-            </a:pPr>
-            <a:r>
-              <a:rPr lang="en-US" sz="2000" dirty="0">
-                <a:solidFill>
-                  <a:srgbClr val="14B8A6"/>
-                </a:solidFill>
-              </a:rPr>
-              <a:t>→</a:t>
-            </a:r>
-            <a:endParaRPr lang="en-US" sz="2000" dirty="0"/>
-          </a:p>
-        </p:txBody>
-      </p:sp>
-      <p:sp>
-        <p:nvSpPr>
-          <p:cNvPr id="21" name="Shape 19"/>
+          <p:cNvPr id="19" name="Shape 17"/>
           <p:cNvSpPr/>
           <p:nvPr/>
         </p:nvSpPr>
@@ -22063,7 +23125,7 @@
       </p:sp>
       <p:sp>
         <p:nvSpPr>
-          <p:cNvPr id="22" name="Shape 20"/>
+          <p:cNvPr id="20" name="Shape 18"/>
           <p:cNvSpPr/>
           <p:nvPr/>
         </p:nvSpPr>
@@ -22083,7 +23145,7 @@
       </p:sp>
       <p:sp>
         <p:nvSpPr>
-          <p:cNvPr id="23" name="Text 21"/>
+          <p:cNvPr id="21" name="Text 19"/>
           <p:cNvSpPr/>
           <p:nvPr/>
         </p:nvSpPr>
@@ -22122,7 +23184,7 @@
       </p:sp>
       <p:sp>
         <p:nvSpPr>
-          <p:cNvPr id="24" name="Text 22"/>
+          <p:cNvPr id="22" name="Text 20"/>
           <p:cNvSpPr/>
           <p:nvPr/>
         </p:nvSpPr>
@@ -22178,43 +23240,7 @@
       </p:sp>
       <p:sp>
         <p:nvSpPr>
-          <p:cNvPr id="25" name="Text 23"/>
-          <p:cNvSpPr/>
-          <p:nvPr/>
-        </p:nvSpPr>
-        <p:spPr>
-          <a:xfrm>
-            <a:off x="9244584" y="3200400"/>
-            <a:ext cx="320040" cy="548640"/>
-          </a:xfrm>
-          <a:prstGeom prst="rect">
-            <a:avLst/>
-          </a:prstGeom>
-          <a:noFill/>
-          <a:ln/>
-        </p:spPr>
-        <p:txBody>
-          <a:bodyPr wrap="square" lIns="0" tIns="0" rIns="0" bIns="0" rtlCol="0" anchor="ctr"/>
-          <a:lstStyle/>
-          <a:p>
-            <a:pPr algn="ctr" indent="0" marL="0">
-              <a:buNone/>
-            </a:pPr>
-            <a:r>
-              <a:rPr lang="en-US" sz="2000" dirty="0">
-                <a:solidFill>
-                  <a:srgbClr val="14B8A6"/>
-                </a:solidFill>
-              </a:rPr>
-              <a:t>→</a:t>
-            </a:r>
-            <a:endParaRPr lang="en-US" sz="2000" dirty="0"/>
-          </a:p>
-        </p:txBody>
-      </p:sp>
-      <p:sp>
-        <p:nvSpPr>
-          <p:cNvPr id="26" name="Shape 24"/>
+          <p:cNvPr id="23" name="Shape 21"/>
           <p:cNvSpPr/>
           <p:nvPr/>
         </p:nvSpPr>
@@ -22248,7 +23274,7 @@
       </p:sp>
       <p:sp>
         <p:nvSpPr>
-          <p:cNvPr id="27" name="Shape 25"/>
+          <p:cNvPr id="24" name="Shape 22"/>
           <p:cNvSpPr/>
           <p:nvPr/>
         </p:nvSpPr>
@@ -22268,7 +23294,7 @@
       </p:sp>
       <p:sp>
         <p:nvSpPr>
-          <p:cNvPr id="28" name="Text 26"/>
+          <p:cNvPr id="25" name="Text 23"/>
           <p:cNvSpPr/>
           <p:nvPr/>
         </p:nvSpPr>
@@ -22307,7 +23333,7 @@
       </p:sp>
       <p:sp>
         <p:nvSpPr>
-          <p:cNvPr id="29" name="Text 27"/>
+          <p:cNvPr id="26" name="Text 24"/>
           <p:cNvSpPr/>
           <p:nvPr/>
         </p:nvSpPr>
@@ -22363,7 +23389,151 @@
       </p:sp>
       <p:sp>
         <p:nvSpPr>
+          <p:cNvPr id="27" name="Text 25"/>
+          <p:cNvSpPr/>
+          <p:nvPr/>
+        </p:nvSpPr>
+        <p:spPr>
+          <a:xfrm>
+            <a:off x="2459736" y="3200400"/>
+            <a:ext cx="320040" cy="548640"/>
+          </a:xfrm>
+          <a:prstGeom prst="rect">
+            <a:avLst/>
+          </a:prstGeom>
+          <a:noFill/>
+          <a:ln/>
+        </p:spPr>
+        <p:txBody>
+          <a:bodyPr wrap="square" lIns="0" tIns="0" rIns="0" bIns="0" rtlCol="0" anchor="ctr"/>
+          <a:lstStyle/>
+          <a:p>
+            <a:pPr algn="ctr" indent="0" marL="0">
+              <a:buNone/>
+            </a:pPr>
+            <a:r>
+              <a:rPr lang="en-US" sz="1600" dirty="0">
+                <a:solidFill>
+                  <a:srgbClr val="14B8A6"/>
+                </a:solidFill>
+              </a:rPr>
+              <a:t>→</a:t>
+            </a:r>
+            <a:endParaRPr lang="en-US" sz="1600" dirty="0"/>
+          </a:p>
+        </p:txBody>
+      </p:sp>
+      <p:sp>
+        <p:nvSpPr>
+          <p:cNvPr id="28" name="Text 26"/>
+          <p:cNvSpPr/>
+          <p:nvPr/>
+        </p:nvSpPr>
+        <p:spPr>
+          <a:xfrm>
+            <a:off x="4700016" y="3200400"/>
+            <a:ext cx="320040" cy="548640"/>
+          </a:xfrm>
+          <a:prstGeom prst="rect">
+            <a:avLst/>
+          </a:prstGeom>
+          <a:noFill/>
+          <a:ln/>
+        </p:spPr>
+        <p:txBody>
+          <a:bodyPr wrap="square" lIns="0" tIns="0" rIns="0" bIns="0" rtlCol="0" anchor="ctr"/>
+          <a:lstStyle/>
+          <a:p>
+            <a:pPr algn="ctr" indent="0" marL="0">
+              <a:buNone/>
+            </a:pPr>
+            <a:r>
+              <a:rPr lang="en-US" sz="1600" dirty="0">
+                <a:solidFill>
+                  <a:srgbClr val="14B8A6"/>
+                </a:solidFill>
+              </a:rPr>
+              <a:t>→</a:t>
+            </a:r>
+            <a:endParaRPr lang="en-US" sz="1600" dirty="0"/>
+          </a:p>
+        </p:txBody>
+      </p:sp>
+      <p:sp>
+        <p:nvSpPr>
+          <p:cNvPr id="29" name="Text 27"/>
+          <p:cNvSpPr/>
+          <p:nvPr/>
+        </p:nvSpPr>
+        <p:spPr>
+          <a:xfrm>
+            <a:off x="6940296" y="3200400"/>
+            <a:ext cx="320040" cy="548640"/>
+          </a:xfrm>
+          <a:prstGeom prst="rect">
+            <a:avLst/>
+          </a:prstGeom>
+          <a:noFill/>
+          <a:ln/>
+        </p:spPr>
+        <p:txBody>
+          <a:bodyPr wrap="square" lIns="0" tIns="0" rIns="0" bIns="0" rtlCol="0" anchor="ctr"/>
+          <a:lstStyle/>
+          <a:p>
+            <a:pPr algn="ctr" indent="0" marL="0">
+              <a:buNone/>
+            </a:pPr>
+            <a:r>
+              <a:rPr lang="en-US" sz="1600" dirty="0">
+                <a:solidFill>
+                  <a:srgbClr val="14B8A6"/>
+                </a:solidFill>
+              </a:rPr>
+              <a:t>→</a:t>
+            </a:r>
+            <a:endParaRPr lang="en-US" sz="1600" dirty="0"/>
+          </a:p>
+        </p:txBody>
+      </p:sp>
+      <p:sp>
+        <p:nvSpPr>
           <p:cNvPr id="30" name="Text 28"/>
+          <p:cNvSpPr/>
+          <p:nvPr/>
+        </p:nvSpPr>
+        <p:spPr>
+          <a:xfrm>
+            <a:off x="9180576" y="3200400"/>
+            <a:ext cx="320040" cy="548640"/>
+          </a:xfrm>
+          <a:prstGeom prst="rect">
+            <a:avLst/>
+          </a:prstGeom>
+          <a:noFill/>
+          <a:ln/>
+        </p:spPr>
+        <p:txBody>
+          <a:bodyPr wrap="square" lIns="0" tIns="0" rIns="0" bIns="0" rtlCol="0" anchor="ctr"/>
+          <a:lstStyle/>
+          <a:p>
+            <a:pPr algn="ctr" indent="0" marL="0">
+              <a:buNone/>
+            </a:pPr>
+            <a:r>
+              <a:rPr lang="en-US" sz="1600" dirty="0">
+                <a:solidFill>
+                  <a:srgbClr val="14B8A6"/>
+                </a:solidFill>
+              </a:rPr>
+              <a:t>→</a:t>
+            </a:r>
+            <a:endParaRPr lang="en-US" sz="1600" dirty="0"/>
+          </a:p>
+        </p:txBody>
+      </p:sp>
+      <p:sp>
+        <p:nvSpPr>
+          <p:cNvPr id="31" name="Text 29"/>
           <p:cNvSpPr/>
           <p:nvPr/>
         </p:nvSpPr>
@@ -22416,7 +23586,7 @@
       </p:sp>
       <p:sp>
         <p:nvSpPr>
-          <p:cNvPr id="31" name="Text 29"/>
+          <p:cNvPr id="32" name="Text 30"/>
           <p:cNvSpPr/>
           <p:nvPr/>
         </p:nvSpPr>
@@ -22461,7 +23631,7 @@
                 <a:ea typeface="Calibri" pitchFamily="34" charset="-122"/>
                 <a:cs typeface="Calibri" pitchFamily="34" charset="-120"/>
               </a:rPr>
-              <a:t>SIH/SUS, CNES, IBGE/SIDRA — HTTP real</a:t>
+              <a:t>SIH/SUS, CNES, IBGE (SIDRA + malha das UFs) — HTTP real</a:t>
             </a:r>
             <a:endParaRPr lang="en-US" sz="1050" dirty="0"/>
           </a:p>
@@ -22469,7 +23639,7 @@
       </p:sp>
       <p:sp>
         <p:nvSpPr>
-          <p:cNvPr id="32" name="Text 30"/>
+          <p:cNvPr id="33" name="Text 31"/>
           <p:cNvSpPr/>
           <p:nvPr/>
         </p:nvSpPr>
@@ -22514,7 +23684,7 @@
                 <a:ea typeface="Calibri" pitchFamily="34" charset="-122"/>
                 <a:cs typeface="Calibri" pitchFamily="34" charset="-120"/>
               </a:rPr>
-              <a:t>Python stdlib — etl/fetch_raw.py + parse_validate_build.py</a:t>
+              <a:t>Python stdlib — fetch_raw.py + parse_validate_build.py + build_malha_uf.py</a:t>
             </a:r>
             <a:endParaRPr lang="en-US" sz="1050" dirty="0"/>
           </a:p>
@@ -22522,7 +23692,7 @@
       </p:sp>
       <p:sp>
         <p:nvSpPr>
-          <p:cNvPr id="33" name="Text 31"/>
+          <p:cNvPr id="34" name="Text 32"/>
           <p:cNvSpPr/>
           <p:nvPr/>
         </p:nvSpPr>
@@ -22575,7 +23745,7 @@
       </p:sp>
       <p:sp>
         <p:nvSpPr>
-          <p:cNvPr id="34" name="Text 32"/>
+          <p:cNvPr id="35" name="Text 33"/>
           <p:cNvSpPr/>
           <p:nvPr/>
         </p:nvSpPr>
@@ -22628,7 +23798,7 @@
       </p:sp>
       <p:sp>
         <p:nvSpPr>
-          <p:cNvPr id="35" name="Text 33"/>
+          <p:cNvPr id="36" name="Text 34"/>
           <p:cNvSpPr/>
           <p:nvPr/>
         </p:nvSpPr>
@@ -22667,7 +23837,7 @@
       </p:sp>
       <p:sp>
         <p:nvSpPr>
-          <p:cNvPr id="36" name="Text 34"/>
+          <p:cNvPr id="37" name="Text 35"/>
           <p:cNvSpPr/>
           <p:nvPr/>
         </p:nvSpPr>

--- a/EC_Sprint_2_1TSCOA_EvidenciasConstrucao_LEITO360_GRUPO61.pptx
+++ b/EC_Sprint_2_1TSCOA_EvidenciasConstrucao_LEITO360_GRUPO61.pptx
@@ -2505,7 +2505,7 @@
       </p:grpSpPr>
       <p:pic>
         <p:nvPicPr>
-          <p:cNvPr id="2" name="Image 0" descr="shots/mapa_marca.png">    </p:cNvPr>
+          <p:cNvPr id="2" name="Image 0" descr="C:\Users\Gabri\Downloads\Healthcare Data Analytics Dashboard\apresentacao\assets\mapa_marca.png">    </p:cNvPr>
           <p:cNvPicPr>
             <a:picLocks noChangeAspect="1"/>
           </p:cNvPicPr>
@@ -9351,7 +9351,7 @@
               <a:buNone/>
             </a:pPr>
             <a:r>
-              <a:rPr lang="en-US" sz="1100" dirty="0">
+              <a:rPr lang="en-US" sz="1050" dirty="0">
                 <a:solidFill>
                   <a:srgbClr val="EAF6F3"/>
                 </a:solidFill>
@@ -9361,7 +9361,7 @@
               </a:rPr>
               <a:t>LEITO360/</a:t>
             </a:r>
-            <a:endParaRPr lang="en-US" sz="1100" dirty="0"/>
+            <a:endParaRPr lang="en-US" sz="1050" dirty="0"/>
           </a:p>
         </p:txBody>
       </p:sp>
@@ -9373,7 +9373,7 @@
         </p:nvSpPr>
         <p:spPr>
           <a:xfrm>
-            <a:off x="685800" y="2578608"/>
+            <a:off x="685800" y="2560320"/>
             <a:ext cx="6492240" cy="274320"/>
           </a:xfrm>
           <a:prstGeom prst="rect">
@@ -9390,7 +9390,7 @@
               <a:buNone/>
             </a:pPr>
             <a:r>
-              <a:rPr lang="en-US" sz="1100" dirty="0">
+              <a:rPr lang="en-US" sz="1050" dirty="0">
                 <a:solidFill>
                   <a:srgbClr val="EAF6F3"/>
                 </a:solidFill>
@@ -9400,7 +9400,7 @@
               </a:rPr>
               <a:t>├── src/                  front-end React + TypeScript + Vite</a:t>
             </a:r>
-            <a:endParaRPr lang="en-US" sz="1100" dirty="0"/>
+            <a:endParaRPr lang="en-US" sz="1050" dirty="0"/>
           </a:p>
         </p:txBody>
       </p:sp>
@@ -9412,7 +9412,7 @@
         </p:nvSpPr>
         <p:spPr>
           <a:xfrm>
-            <a:off x="685800" y="2871216"/>
+            <a:off x="685800" y="2834640"/>
             <a:ext cx="6492240" cy="274320"/>
           </a:xfrm>
           <a:prstGeom prst="rect">
@@ -9429,7 +9429,7 @@
               <a:buNone/>
             </a:pPr>
             <a:r>
-              <a:rPr lang="en-US" sz="1100" dirty="0">
+              <a:rPr lang="en-US" sz="1050" dirty="0">
                 <a:solidFill>
                   <a:srgbClr val="EAF6F3"/>
                 </a:solidFill>
@@ -9439,7 +9439,7 @@
               </a:rPr>
               <a:t>├── public/data/          JSON sanitizado consumido pelo dashboard</a:t>
             </a:r>
-            <a:endParaRPr lang="en-US" sz="1100" dirty="0"/>
+            <a:endParaRPr lang="en-US" sz="1050" dirty="0"/>
           </a:p>
         </p:txBody>
       </p:sp>
@@ -9451,7 +9451,7 @@
         </p:nvSpPr>
         <p:spPr>
           <a:xfrm>
-            <a:off x="685800" y="3163824"/>
+            <a:off x="685800" y="3108960"/>
             <a:ext cx="6492240" cy="274320"/>
           </a:xfrm>
           <a:prstGeom prst="rect">
@@ -9468,7 +9468,7 @@
               <a:buNone/>
             </a:pPr>
             <a:r>
-              <a:rPr lang="en-US" sz="1100" dirty="0">
+              <a:rPr lang="en-US" sz="1050" dirty="0">
                 <a:solidFill>
                   <a:srgbClr val="EAF6F3"/>
                 </a:solidFill>
@@ -9476,9 +9476,9 @@
                 <a:ea typeface="Courier New" pitchFamily="34" charset="-122"/>
                 <a:cs typeface="Courier New" pitchFamily="34" charset="-120"/>
               </a:rPr>
-              <a:t>├── etl/                  pipeline Python (fetch, parse, validação, indicadores, malha)</a:t>
-            </a:r>
-            <a:endParaRPr lang="en-US" sz="1100" dirty="0"/>
+              <a:t>├── etl/                  pipeline Python (fetch, parse, validação, indicadores)</a:t>
+            </a:r>
+            <a:endParaRPr lang="en-US" sz="1050" dirty="0"/>
           </a:p>
         </p:txBody>
       </p:sp>
@@ -9490,7 +9490,7 @@
         </p:nvSpPr>
         <p:spPr>
           <a:xfrm>
-            <a:off x="685800" y="3456432"/>
+            <a:off x="685800" y="3383280"/>
             <a:ext cx="6492240" cy="274320"/>
           </a:xfrm>
           <a:prstGeom prst="rect">
@@ -9507,7 +9507,7 @@
               <a:buNone/>
             </a:pPr>
             <a:r>
-              <a:rPr lang="en-US" sz="1100" dirty="0">
+              <a:rPr lang="en-US" sz="1050" dirty="0">
                 <a:solidFill>
                   <a:srgbClr val="EAF6F3"/>
                 </a:solidFill>
@@ -9517,7 +9517,7 @@
               </a:rPr>
               <a:t>├── data/raw/             respostas originais das fontes (preservadas)</a:t>
             </a:r>
-            <a:endParaRPr lang="en-US" sz="1100" dirty="0"/>
+            <a:endParaRPr lang="en-US" sz="1050" dirty="0"/>
           </a:p>
         </p:txBody>
       </p:sp>
@@ -9529,7 +9529,7 @@
         </p:nvSpPr>
         <p:spPr>
           <a:xfrm>
-            <a:off x="685800" y="3749040"/>
+            <a:off x="685800" y="3657600"/>
             <a:ext cx="6492240" cy="274320"/>
           </a:xfrm>
           <a:prstGeom prst="rect">
@@ -9546,7 +9546,7 @@
               <a:buNone/>
             </a:pPr>
             <a:r>
-              <a:rPr lang="en-US" sz="1100" dirty="0">
+              <a:rPr lang="en-US" sz="1050" dirty="0">
                 <a:solidFill>
                   <a:srgbClr val="EAF6F3"/>
                 </a:solidFill>
@@ -9556,7 +9556,7 @@
               </a:rPr>
               <a:t>├── data/processed/       CSV/JSON tratados + relatório de validação</a:t>
             </a:r>
-            <a:endParaRPr lang="en-US" sz="1100" dirty="0"/>
+            <a:endParaRPr lang="en-US" sz="1050" dirty="0"/>
           </a:p>
         </p:txBody>
       </p:sp>
@@ -9568,7 +9568,7 @@
         </p:nvSpPr>
         <p:spPr>
           <a:xfrm>
-            <a:off x="685800" y="4041648"/>
+            <a:off x="685800" y="3931920"/>
             <a:ext cx="6492240" cy="274320"/>
           </a:xfrm>
           <a:prstGeom prst="rect">
@@ -9585,7 +9585,7 @@
               <a:buNone/>
             </a:pPr>
             <a:r>
-              <a:rPr lang="en-US" sz="1100" dirty="0">
+              <a:rPr lang="en-US" sz="1050" dirty="0">
                 <a:solidFill>
                   <a:srgbClr val="EAF6F3"/>
                 </a:solidFill>
@@ -9593,9 +9593,9 @@
                 <a:ea typeface="Courier New" pitchFamily="34" charset="-122"/>
                 <a:cs typeface="Courier New" pitchFamily="34" charset="-120"/>
               </a:rPr>
-              <a:t>├── oracle/data/          3 formatos separados (CSV relacional, JSON, CSV externo)</a:t>
-            </a:r>
-            <a:endParaRPr lang="en-US" sz="1100" dirty="0"/>
+              <a:t>├── oracle/data/          3 formatos separados (CSV, JSON, CSV externo)</a:t>
+            </a:r>
+            <a:endParaRPr lang="en-US" sz="1050" dirty="0"/>
           </a:p>
         </p:txBody>
       </p:sp>
@@ -9607,7 +9607,7 @@
         </p:nvSpPr>
         <p:spPr>
           <a:xfrm>
-            <a:off x="685800" y="4334256"/>
+            <a:off x="685800" y="4206240"/>
             <a:ext cx="6492240" cy="274320"/>
           </a:xfrm>
           <a:prstGeom prst="rect">
@@ -9624,7 +9624,7 @@
               <a:buNone/>
             </a:pPr>
             <a:r>
-              <a:rPr lang="en-US" sz="1100" dirty="0">
+              <a:rPr lang="en-US" sz="1050" dirty="0">
                 <a:solidFill>
                   <a:srgbClr val="EAF6F3"/>
                 </a:solidFill>
@@ -9634,7 +9634,7 @@
               </a:rPr>
               <a:t>├── oracle/sql/           DDL, carga, view analítica, Select AI</a:t>
             </a:r>
-            <a:endParaRPr lang="en-US" sz="1100" dirty="0"/>
+            <a:endParaRPr lang="en-US" sz="1050" dirty="0"/>
           </a:p>
         </p:txBody>
       </p:sp>
@@ -9646,7 +9646,7 @@
         </p:nvSpPr>
         <p:spPr>
           <a:xfrm>
-            <a:off x="685800" y="4626864"/>
+            <a:off x="685800" y="4480560"/>
             <a:ext cx="6492240" cy="274320"/>
           </a:xfrm>
           <a:prstGeom prst="rect">
@@ -9663,7 +9663,7 @@
               <a:buNone/>
             </a:pPr>
             <a:r>
-              <a:rPr lang="en-US" sz="1100" dirty="0">
+              <a:rPr lang="en-US" sz="1050" dirty="0">
                 <a:solidFill>
                   <a:srgbClr val="EAF6F3"/>
                 </a:solidFill>
@@ -9673,7 +9673,7 @@
               </a:rPr>
               <a:t>├── docs/evidencias/      evidências (o quê, prova, fonte, limitação)</a:t>
             </a:r>
-            <a:endParaRPr lang="en-US" sz="1100" dirty="0"/>
+            <a:endParaRPr lang="en-US" sz="1050" dirty="0"/>
           </a:p>
         </p:txBody>
       </p:sp>
@@ -9685,7 +9685,7 @@
         </p:nvSpPr>
         <p:spPr>
           <a:xfrm>
-            <a:off x="685800" y="4919472"/>
+            <a:off x="685800" y="4754880"/>
             <a:ext cx="6492240" cy="274320"/>
           </a:xfrm>
           <a:prstGeom prst="rect">
@@ -9702,7 +9702,7 @@
               <a:buNone/>
             </a:pPr>
             <a:r>
-              <a:rPr lang="en-US" sz="1100" dirty="0">
+              <a:rPr lang="en-US" sz="1050" dirty="0">
                 <a:solidFill>
                   <a:srgbClr val="EAF6F3"/>
                 </a:solidFill>
@@ -9712,7 +9712,7 @@
               </a:rPr>
               <a:t>├── docs/arquitetura/     diagramas e decisões</a:t>
             </a:r>
-            <a:endParaRPr lang="en-US" sz="1100" dirty="0"/>
+            <a:endParaRPr lang="en-US" sz="1050" dirty="0"/>
           </a:p>
         </p:txBody>
       </p:sp>
@@ -9724,7 +9724,7 @@
         </p:nvSpPr>
         <p:spPr>
           <a:xfrm>
-            <a:off x="685800" y="5212080"/>
+            <a:off x="685800" y="5029200"/>
             <a:ext cx="6492240" cy="274320"/>
           </a:xfrm>
           <a:prstGeom prst="rect">
@@ -9741,7 +9741,7 @@
               <a:buNone/>
             </a:pPr>
             <a:r>
-              <a:rPr lang="en-US" sz="1100" dirty="0">
+              <a:rPr lang="en-US" sz="1050" dirty="0">
                 <a:solidFill>
                   <a:srgbClr val="EAF6F3"/>
                 </a:solidFill>
@@ -9751,7 +9751,7 @@
               </a:rPr>
               <a:t>├── docs/gerenciamento/   gestão do projeto</a:t>
             </a:r>
-            <a:endParaRPr lang="en-US" sz="1100" dirty="0"/>
+            <a:endParaRPr lang="en-US" sz="1050" dirty="0"/>
           </a:p>
         </p:txBody>
       </p:sp>
@@ -9763,7 +9763,7 @@
         </p:nvSpPr>
         <p:spPr>
           <a:xfrm>
-            <a:off x="685800" y="5504688"/>
+            <a:off x="685800" y="5303520"/>
             <a:ext cx="6492240" cy="274320"/>
           </a:xfrm>
           <a:prstGeom prst="rect">
@@ -9780,7 +9780,7 @@
               <a:buNone/>
             </a:pPr>
             <a:r>
-              <a:rPr lang="en-US" sz="1100" dirty="0">
+              <a:rPr lang="en-US" sz="1050" dirty="0">
                 <a:solidFill>
                   <a:srgbClr val="EAF6F3"/>
                 </a:solidFill>
@@ -9788,9 +9788,9 @@
                 <a:ea typeface="Courier New" pitchFamily="34" charset="-122"/>
                 <a:cs typeface="Courier New" pitchFamily="34" charset="-120"/>
               </a:rPr>
-              <a:t>├── docs/roteiro_pitch/   roteiro do vídeo hands-on</a:t>
-            </a:r>
-            <a:endParaRPr lang="en-US" sz="1100" dirty="0"/>
+              <a:t>├── docs/roteiro_pitch/   roteiro de gravação + texto falado do pitch</a:t>
+            </a:r>
+            <a:endParaRPr lang="en-US" sz="1050" dirty="0"/>
           </a:p>
         </p:txBody>
       </p:sp>
@@ -9802,7 +9802,7 @@
         </p:nvSpPr>
         <p:spPr>
           <a:xfrm>
-            <a:off x="685800" y="5797296"/>
+            <a:off x="685800" y="5577840"/>
             <a:ext cx="6492240" cy="274320"/>
           </a:xfrm>
           <a:prstGeom prst="rect">
@@ -9819,7 +9819,7 @@
               <a:buNone/>
             </a:pPr>
             <a:r>
-              <a:rPr lang="en-US" sz="1100" dirty="0">
+              <a:rPr lang="en-US" sz="1050" dirty="0">
                 <a:solidFill>
                   <a:srgbClr val="EAF6F3"/>
                 </a:solidFill>
@@ -9827,15 +9827,54 @@
                 <a:ea typeface="Courier New" pitchFamily="34" charset="-122"/>
                 <a:cs typeface="Courier New" pitchFamily="34" charset="-120"/>
               </a:rPr>
+              <a:t>├── apresentacao/         gerador deste PPTX (pptxgenjs, reprodutível)</a:t>
+            </a:r>
+            <a:endParaRPr lang="en-US" sz="1050" dirty="0"/>
+          </a:p>
+        </p:txBody>
+      </p:sp>
+      <p:sp>
+        <p:nvSpPr>
+          <p:cNvPr id="21" name="Text 19"/>
+          <p:cNvSpPr/>
+          <p:nvPr/>
+        </p:nvSpPr>
+        <p:spPr>
+          <a:xfrm>
+            <a:off x="685800" y="5852160"/>
+            <a:ext cx="6492240" cy="274320"/>
+          </a:xfrm>
+          <a:prstGeom prst="rect">
+            <a:avLst/>
+          </a:prstGeom>
+          <a:noFill/>
+          <a:ln/>
+        </p:spPr>
+        <p:txBody>
+          <a:bodyPr wrap="square" lIns="0" tIns="0" rIns="0" bIns="0" rtlCol="0" anchor="ctr"/>
+          <a:lstStyle/>
+          <a:p>
+            <a:pPr indent="0" marL="0">
+              <a:buNone/>
+            </a:pPr>
+            <a:r>
+              <a:rPr lang="en-US" sz="1050" dirty="0">
+                <a:solidFill>
+                  <a:srgbClr val="EAF6F3"/>
+                </a:solidFill>
+                <a:latin typeface="Courier New" pitchFamily="34" charset="0"/>
+                <a:ea typeface="Courier New" pitchFamily="34" charset="-122"/>
+                <a:cs typeface="Courier New" pitchFamily="34" charset="-120"/>
+              </a:rPr>
               <a:t>└── README.md             arquitetura, indicadores, como executar tudo</a:t>
             </a:r>
-            <a:endParaRPr lang="en-US" sz="1100" dirty="0"/>
-          </a:p>
-        </p:txBody>
-      </p:sp>
-      <p:sp>
-        <p:nvSpPr>
-          <p:cNvPr id="21" name="Shape 19"/>
+            <a:endParaRPr lang="en-US" sz="1050" dirty="0"/>
+          </a:p>
+        </p:txBody>
+      </p:sp>
+      <p:sp>
+        <p:nvSpPr>
+          <p:cNvPr id="22" name="Shape 20"/>
           <p:cNvSpPr/>
           <p:nvPr/>
         </p:nvSpPr>
@@ -9869,7 +9908,7 @@
       </p:sp>
       <p:sp>
         <p:nvSpPr>
-          <p:cNvPr id="22" name="Text 20"/>
+          <p:cNvPr id="23" name="Text 21"/>
           <p:cNvSpPr/>
           <p:nvPr/>
         </p:nvSpPr>
@@ -9908,7 +9947,7 @@
       </p:sp>
       <p:sp>
         <p:nvSpPr>
-          <p:cNvPr id="23" name="Text 21"/>
+          <p:cNvPr id="24" name="Text 22"/>
           <p:cNvSpPr/>
           <p:nvPr/>
         </p:nvSpPr>
@@ -9947,7 +9986,7 @@
       </p:sp>
       <p:sp>
         <p:nvSpPr>
-          <p:cNvPr id="24" name="Text 22"/>
+          <p:cNvPr id="25" name="Text 23"/>
           <p:cNvSpPr/>
           <p:nvPr/>
         </p:nvSpPr>
@@ -9986,7 +10025,7 @@
       </p:sp>
       <p:sp>
         <p:nvSpPr>
-          <p:cNvPr id="25" name="Text 23"/>
+          <p:cNvPr id="26" name="Text 24"/>
           <p:cNvSpPr/>
           <p:nvPr/>
         </p:nvSpPr>
@@ -10025,7 +10064,7 @@
       </p:sp>
       <p:sp>
         <p:nvSpPr>
-          <p:cNvPr id="26" name="Text 24"/>
+          <p:cNvPr id="27" name="Text 25"/>
           <p:cNvSpPr/>
           <p:nvPr/>
         </p:nvSpPr>
@@ -10064,7 +10103,7 @@
       </p:sp>
       <p:sp>
         <p:nvSpPr>
-          <p:cNvPr id="27" name="Text 25"/>
+          <p:cNvPr id="28" name="Text 26"/>
           <p:cNvSpPr/>
           <p:nvPr/>
         </p:nvSpPr>
@@ -10103,7 +10142,7 @@
       </p:sp>
       <p:sp>
         <p:nvSpPr>
-          <p:cNvPr id="28" name="Text 26"/>
+          <p:cNvPr id="29" name="Text 27"/>
           <p:cNvSpPr/>
           <p:nvPr/>
         </p:nvSpPr>
@@ -10142,7 +10181,7 @@
       </p:sp>
       <p:sp>
         <p:nvSpPr>
-          <p:cNvPr id="29" name="Text 27"/>
+          <p:cNvPr id="30" name="Text 28"/>
           <p:cNvSpPr/>
           <p:nvPr/>
         </p:nvSpPr>
@@ -10357,7 +10396,7 @@
                 <a:ea typeface="Calibri" pitchFamily="34" charset="-122"/>
                 <a:cs typeface="Calibri" pitchFamily="34" charset="-120"/>
               </a:rPr>
-              <a:t>Até 5 minutos — roteiro completo em docs/roteiro_pitch/roteiro.md. Gravar somente após todos os links/componentes estarem funcionando.</a:t>
+              <a:t>Até 5 minutos — plano de gravação em docs/roteiro_pitch/roteiro.md e o texto falado, dividido por integrante, em texto_pitch.md.</a:t>
             </a:r>
             <a:endParaRPr lang="en-US" sz="1400" dirty="0"/>
           </a:p>
@@ -21166,7 +21205,7 @@
       </p:sp>
       <p:pic>
         <p:nvPicPr>
-          <p:cNvPr id="8" name="Image 0" descr="shots/print_executivo.png">    </p:cNvPr>
+          <p:cNvPr id="8" name="Image 0" descr="C:\Users\Gabri\Downloads\Healthcare Data Analytics Dashboard\docs\evidencias\prints\dashboard_visao_executiva.png">    </p:cNvPr>
           <p:cNvPicPr>
             <a:picLocks noChangeAspect="1"/>
           </p:cNvPicPr>
@@ -21922,7 +21961,7 @@
       </p:sp>
       <p:pic>
         <p:nvPicPr>
-          <p:cNvPr id="8" name="Image 0" descr="shots/print_analitico.png">    </p:cNvPr>
+          <p:cNvPr id="8" name="Image 0" descr="C:\Users\Gabri\Downloads\Healthcare Data Analytics Dashboard\docs\evidencias\prints\dashboard_explorador_analitico.png">    </p:cNvPr>
           <p:cNvPicPr>
             <a:picLocks noChangeAspect="1"/>
           </p:cNvPicPr>

--- a/EC_Sprint_2_1TSCOA_EvidenciasConstrucao_LEITO360_GRUPO61.pptx
+++ b/EC_Sprint_2_1TSCOA_EvidenciasConstrucao_LEITO360_GRUPO61.pptx
@@ -3761,7 +3761,7 @@
                 <a:ea typeface="Calibri" pitchFamily="34" charset="-122"/>
                 <a:cs typeface="Calibri" pitchFamily="34" charset="-120"/>
               </a:rPr>
-              <a:t>Select AI — perfil criado; GENERATE bloqueado por indisponibilidade do OCI GenAI no sandbox</a:t>
+              <a:t>Select AI (perfil real, NL2SQL confirmado, provider Cohere)</a:t>
             </a:r>
             <a:endParaRPr lang="en-US" sz="1200" dirty="0"/>
           </a:p>
@@ -3798,7 +3798,7 @@
         <p:spPr>
           <a:xfrm>
             <a:off x="6903720" y="3739896"/>
-            <a:ext cx="1664208" cy="219456"/>
+            <a:ext cx="2377440" cy="219456"/>
           </a:xfrm>
           <a:prstGeom prst="roundRect">
             <a:avLst>
@@ -3806,6 +3806,576 @@
             </a:avLst>
           </a:prstGeom>
           <a:solidFill>
+            <a:srgbClr val="14B8A6"/>
+          </a:solidFill>
+          <a:ln/>
+        </p:spPr>
+      </p:sp>
+      <p:sp>
+        <p:nvSpPr>
+          <p:cNvPr id="22" name="Text 20"/>
+          <p:cNvSpPr/>
+          <p:nvPr/>
+        </p:nvSpPr>
+        <p:spPr>
+          <a:xfrm>
+            <a:off x="9372600" y="3666744"/>
+            <a:ext cx="594360" cy="365760"/>
+          </a:xfrm>
+          <a:prstGeom prst="rect">
+            <a:avLst/>
+          </a:prstGeom>
+          <a:noFill/>
+          <a:ln/>
+        </p:spPr>
+        <p:txBody>
+          <a:bodyPr wrap="square" lIns="0" tIns="0" rIns="0" bIns="0" rtlCol="0" anchor="ctr"/>
+          <a:lstStyle/>
+          <a:p>
+            <a:pPr indent="0" marL="0">
+              <a:buNone/>
+            </a:pPr>
+            <a:r>
+              <a:rPr lang="en-US" sz="1100" b="1" dirty="0">
+                <a:solidFill>
+                  <a:srgbClr val="14B8A6"/>
+                </a:solidFill>
+                <a:latin typeface="Calibri" pitchFamily="34" charset="0"/>
+                <a:ea typeface="Calibri" pitchFamily="34" charset="-122"/>
+                <a:cs typeface="Calibri" pitchFamily="34" charset="-120"/>
+              </a:rPr>
+              <a:t>100%</a:t>
+            </a:r>
+            <a:endParaRPr lang="en-US" sz="1100" dirty="0"/>
+          </a:p>
+        </p:txBody>
+      </p:sp>
+      <p:sp>
+        <p:nvSpPr>
+          <p:cNvPr id="23" name="Shape 21"/>
+          <p:cNvSpPr/>
+          <p:nvPr/>
+        </p:nvSpPr>
+        <p:spPr>
+          <a:xfrm>
+            <a:off x="10058400" y="3694176"/>
+            <a:ext cx="1737360" cy="320040"/>
+          </a:xfrm>
+          <a:prstGeom prst="roundRect">
+            <a:avLst>
+              <a:gd name="adj" fmla="val 48571"/>
+            </a:avLst>
+          </a:prstGeom>
+          <a:solidFill>
+            <a:srgbClr val="1E3A5F">
+              <a:alpha val="80000"/>
+            </a:srgbClr>
+          </a:solidFill>
+          <a:ln w="12700">
+            <a:solidFill>
+              <a:srgbClr val="14B8A6"/>
+            </a:solidFill>
+            <a:prstDash val="solid"/>
+          </a:ln>
+        </p:spPr>
+      </p:sp>
+      <p:sp>
+        <p:nvSpPr>
+          <p:cNvPr id="24" name="Text 22"/>
+          <p:cNvSpPr/>
+          <p:nvPr/>
+        </p:nvSpPr>
+        <p:spPr>
+          <a:xfrm>
+            <a:off x="10058400" y="3694176"/>
+            <a:ext cx="1737360" cy="320040"/>
+          </a:xfrm>
+          <a:prstGeom prst="rect">
+            <a:avLst/>
+          </a:prstGeom>
+          <a:noFill/>
+          <a:ln/>
+        </p:spPr>
+        <p:txBody>
+          <a:bodyPr wrap="square" lIns="0" tIns="0" rIns="0" bIns="0" rtlCol="0" anchor="ctr"/>
+          <a:lstStyle/>
+          <a:p>
+            <a:pPr algn="ctr" indent="0" marL="0">
+              <a:buNone/>
+            </a:pPr>
+            <a:r>
+              <a:rPr lang="en-US" sz="1000" b="1" dirty="0">
+                <a:solidFill>
+                  <a:srgbClr val="14B8A6"/>
+                </a:solidFill>
+                <a:latin typeface="Calibri" pitchFamily="34" charset="0"/>
+                <a:ea typeface="Calibri" pitchFamily="34" charset="-122"/>
+                <a:cs typeface="Calibri" pitchFamily="34" charset="-120"/>
+              </a:rPr>
+              <a:t>Implementado</a:t>
+            </a:r>
+            <a:endParaRPr lang="en-US" sz="1000" dirty="0"/>
+          </a:p>
+        </p:txBody>
+      </p:sp>
+      <p:sp>
+        <p:nvSpPr>
+          <p:cNvPr id="25" name="Text 23"/>
+          <p:cNvSpPr/>
+          <p:nvPr/>
+        </p:nvSpPr>
+        <p:spPr>
+          <a:xfrm>
+            <a:off x="457200" y="4379976"/>
+            <a:ext cx="6309360" cy="365760"/>
+          </a:xfrm>
+          <a:prstGeom prst="rect">
+            <a:avLst/>
+          </a:prstGeom>
+          <a:noFill/>
+          <a:ln/>
+        </p:spPr>
+        <p:txBody>
+          <a:bodyPr wrap="square" lIns="0" tIns="0" rIns="0" bIns="0" rtlCol="0" anchor="ctr"/>
+          <a:lstStyle/>
+          <a:p>
+            <a:pPr indent="0" marL="0">
+              <a:buNone/>
+            </a:pPr>
+            <a:r>
+              <a:rPr lang="en-US" sz="1200" dirty="0">
+                <a:solidFill>
+                  <a:srgbClr val="EAF6F3"/>
+                </a:solidFill>
+                <a:latin typeface="Calibri" pitchFamily="34" charset="0"/>
+                <a:ea typeface="Calibri" pitchFamily="34" charset="-122"/>
+                <a:cs typeface="Calibri" pitchFamily="34" charset="-120"/>
+              </a:rPr>
+              <a:t>Dashboard sem mocks (filtros, mapa, export CSV)</a:t>
+            </a:r>
+            <a:endParaRPr lang="en-US" sz="1200" dirty="0"/>
+          </a:p>
+        </p:txBody>
+      </p:sp>
+      <p:sp>
+        <p:nvSpPr>
+          <p:cNvPr id="26" name="Shape 24"/>
+          <p:cNvSpPr/>
+          <p:nvPr/>
+        </p:nvSpPr>
+        <p:spPr>
+          <a:xfrm>
+            <a:off x="6903720" y="4453128"/>
+            <a:ext cx="2377440" cy="219456"/>
+          </a:xfrm>
+          <a:prstGeom prst="roundRect">
+            <a:avLst>
+              <a:gd name="adj" fmla="val 20833"/>
+            </a:avLst>
+          </a:prstGeom>
+          <a:solidFill>
+            <a:srgbClr val="1E3A5F"/>
+          </a:solidFill>
+          <a:ln/>
+        </p:spPr>
+      </p:sp>
+      <p:sp>
+        <p:nvSpPr>
+          <p:cNvPr id="27" name="Shape 25"/>
+          <p:cNvSpPr/>
+          <p:nvPr/>
+        </p:nvSpPr>
+        <p:spPr>
+          <a:xfrm>
+            <a:off x="6903720" y="4453128"/>
+            <a:ext cx="2377440" cy="219456"/>
+          </a:xfrm>
+          <a:prstGeom prst="roundRect">
+            <a:avLst>
+              <a:gd name="adj" fmla="val 20833"/>
+            </a:avLst>
+          </a:prstGeom>
+          <a:solidFill>
+            <a:srgbClr val="14B8A6"/>
+          </a:solidFill>
+          <a:ln/>
+        </p:spPr>
+      </p:sp>
+      <p:sp>
+        <p:nvSpPr>
+          <p:cNvPr id="28" name="Text 26"/>
+          <p:cNvSpPr/>
+          <p:nvPr/>
+        </p:nvSpPr>
+        <p:spPr>
+          <a:xfrm>
+            <a:off x="9372600" y="4379976"/>
+            <a:ext cx="594360" cy="365760"/>
+          </a:xfrm>
+          <a:prstGeom prst="rect">
+            <a:avLst/>
+          </a:prstGeom>
+          <a:noFill/>
+          <a:ln/>
+        </p:spPr>
+        <p:txBody>
+          <a:bodyPr wrap="square" lIns="0" tIns="0" rIns="0" bIns="0" rtlCol="0" anchor="ctr"/>
+          <a:lstStyle/>
+          <a:p>
+            <a:pPr indent="0" marL="0">
+              <a:buNone/>
+            </a:pPr>
+            <a:r>
+              <a:rPr lang="en-US" sz="1100" b="1" dirty="0">
+                <a:solidFill>
+                  <a:srgbClr val="14B8A6"/>
+                </a:solidFill>
+                <a:latin typeface="Calibri" pitchFamily="34" charset="0"/>
+                <a:ea typeface="Calibri" pitchFamily="34" charset="-122"/>
+                <a:cs typeface="Calibri" pitchFamily="34" charset="-120"/>
+              </a:rPr>
+              <a:t>100%</a:t>
+            </a:r>
+            <a:endParaRPr lang="en-US" sz="1100" dirty="0"/>
+          </a:p>
+        </p:txBody>
+      </p:sp>
+      <p:sp>
+        <p:nvSpPr>
+          <p:cNvPr id="29" name="Shape 27"/>
+          <p:cNvSpPr/>
+          <p:nvPr/>
+        </p:nvSpPr>
+        <p:spPr>
+          <a:xfrm>
+            <a:off x="10058400" y="4407408"/>
+            <a:ext cx="1737360" cy="320040"/>
+          </a:xfrm>
+          <a:prstGeom prst="roundRect">
+            <a:avLst>
+              <a:gd name="adj" fmla="val 48571"/>
+            </a:avLst>
+          </a:prstGeom>
+          <a:solidFill>
+            <a:srgbClr val="1E3A5F">
+              <a:alpha val="80000"/>
+            </a:srgbClr>
+          </a:solidFill>
+          <a:ln w="12700">
+            <a:solidFill>
+              <a:srgbClr val="14B8A6"/>
+            </a:solidFill>
+            <a:prstDash val="solid"/>
+          </a:ln>
+        </p:spPr>
+      </p:sp>
+      <p:sp>
+        <p:nvSpPr>
+          <p:cNvPr id="30" name="Text 28"/>
+          <p:cNvSpPr/>
+          <p:nvPr/>
+        </p:nvSpPr>
+        <p:spPr>
+          <a:xfrm>
+            <a:off x="10058400" y="4407408"/>
+            <a:ext cx="1737360" cy="320040"/>
+          </a:xfrm>
+          <a:prstGeom prst="rect">
+            <a:avLst/>
+          </a:prstGeom>
+          <a:noFill/>
+          <a:ln/>
+        </p:spPr>
+        <p:txBody>
+          <a:bodyPr wrap="square" lIns="0" tIns="0" rIns="0" bIns="0" rtlCol="0" anchor="ctr"/>
+          <a:lstStyle/>
+          <a:p>
+            <a:pPr algn="ctr" indent="0" marL="0">
+              <a:buNone/>
+            </a:pPr>
+            <a:r>
+              <a:rPr lang="en-US" sz="1000" b="1" dirty="0">
+                <a:solidFill>
+                  <a:srgbClr val="14B8A6"/>
+                </a:solidFill>
+                <a:latin typeface="Calibri" pitchFamily="34" charset="0"/>
+                <a:ea typeface="Calibri" pitchFamily="34" charset="-122"/>
+                <a:cs typeface="Calibri" pitchFamily="34" charset="-120"/>
+              </a:rPr>
+              <a:t>Implementado</a:t>
+            </a:r>
+            <a:endParaRPr lang="en-US" sz="1000" dirty="0"/>
+          </a:p>
+        </p:txBody>
+      </p:sp>
+      <p:sp>
+        <p:nvSpPr>
+          <p:cNvPr id="31" name="Text 29"/>
+          <p:cNvSpPr/>
+          <p:nvPr/>
+        </p:nvSpPr>
+        <p:spPr>
+          <a:xfrm>
+            <a:off x="457200" y="5093208"/>
+            <a:ext cx="6309360" cy="365760"/>
+          </a:xfrm>
+          <a:prstGeom prst="rect">
+            <a:avLst/>
+          </a:prstGeom>
+          <a:noFill/>
+          <a:ln/>
+        </p:spPr>
+        <p:txBody>
+          <a:bodyPr wrap="square" lIns="0" tIns="0" rIns="0" bIns="0" rtlCol="0" anchor="ctr"/>
+          <a:lstStyle/>
+          <a:p>
+            <a:pPr indent="0" marL="0">
+              <a:buNone/>
+            </a:pPr>
+            <a:r>
+              <a:rPr lang="en-US" sz="1200" dirty="0">
+                <a:solidFill>
+                  <a:srgbClr val="EAF6F3"/>
+                </a:solidFill>
+                <a:latin typeface="Calibri" pitchFamily="34" charset="0"/>
+                <a:ea typeface="Calibri" pitchFamily="34" charset="-122"/>
+                <a:cs typeface="Calibri" pitchFamily="34" charset="-120"/>
+              </a:rPr>
+              <a:t>Publicação (GitHub público + GitHub Pages ao vivo)</a:t>
+            </a:r>
+            <a:endParaRPr lang="en-US" sz="1200" dirty="0"/>
+          </a:p>
+        </p:txBody>
+      </p:sp>
+      <p:sp>
+        <p:nvSpPr>
+          <p:cNvPr id="32" name="Shape 30"/>
+          <p:cNvSpPr/>
+          <p:nvPr/>
+        </p:nvSpPr>
+        <p:spPr>
+          <a:xfrm>
+            <a:off x="6903720" y="5166360"/>
+            <a:ext cx="2377440" cy="219456"/>
+          </a:xfrm>
+          <a:prstGeom prst="roundRect">
+            <a:avLst>
+              <a:gd name="adj" fmla="val 20833"/>
+            </a:avLst>
+          </a:prstGeom>
+          <a:solidFill>
+            <a:srgbClr val="1E3A5F"/>
+          </a:solidFill>
+          <a:ln/>
+        </p:spPr>
+      </p:sp>
+      <p:sp>
+        <p:nvSpPr>
+          <p:cNvPr id="33" name="Shape 31"/>
+          <p:cNvSpPr/>
+          <p:nvPr/>
+        </p:nvSpPr>
+        <p:spPr>
+          <a:xfrm>
+            <a:off x="6903720" y="5166360"/>
+            <a:ext cx="2377440" cy="219456"/>
+          </a:xfrm>
+          <a:prstGeom prst="roundRect">
+            <a:avLst>
+              <a:gd name="adj" fmla="val 20833"/>
+            </a:avLst>
+          </a:prstGeom>
+          <a:solidFill>
+            <a:srgbClr val="14B8A6"/>
+          </a:solidFill>
+          <a:ln/>
+        </p:spPr>
+      </p:sp>
+      <p:sp>
+        <p:nvSpPr>
+          <p:cNvPr id="34" name="Text 32"/>
+          <p:cNvSpPr/>
+          <p:nvPr/>
+        </p:nvSpPr>
+        <p:spPr>
+          <a:xfrm>
+            <a:off x="9372600" y="5093208"/>
+            <a:ext cx="594360" cy="365760"/>
+          </a:xfrm>
+          <a:prstGeom prst="rect">
+            <a:avLst/>
+          </a:prstGeom>
+          <a:noFill/>
+          <a:ln/>
+        </p:spPr>
+        <p:txBody>
+          <a:bodyPr wrap="square" lIns="0" tIns="0" rIns="0" bIns="0" rtlCol="0" anchor="ctr"/>
+          <a:lstStyle/>
+          <a:p>
+            <a:pPr indent="0" marL="0">
+              <a:buNone/>
+            </a:pPr>
+            <a:r>
+              <a:rPr lang="en-US" sz="1100" b="1" dirty="0">
+                <a:solidFill>
+                  <a:srgbClr val="14B8A6"/>
+                </a:solidFill>
+                <a:latin typeface="Calibri" pitchFamily="34" charset="0"/>
+                <a:ea typeface="Calibri" pitchFamily="34" charset="-122"/>
+                <a:cs typeface="Calibri" pitchFamily="34" charset="-120"/>
+              </a:rPr>
+              <a:t>100%</a:t>
+            </a:r>
+            <a:endParaRPr lang="en-US" sz="1100" dirty="0"/>
+          </a:p>
+        </p:txBody>
+      </p:sp>
+      <p:sp>
+        <p:nvSpPr>
+          <p:cNvPr id="35" name="Shape 33"/>
+          <p:cNvSpPr/>
+          <p:nvPr/>
+        </p:nvSpPr>
+        <p:spPr>
+          <a:xfrm>
+            <a:off x="10058400" y="5120640"/>
+            <a:ext cx="1737360" cy="320040"/>
+          </a:xfrm>
+          <a:prstGeom prst="roundRect">
+            <a:avLst>
+              <a:gd name="adj" fmla="val 48571"/>
+            </a:avLst>
+          </a:prstGeom>
+          <a:solidFill>
+            <a:srgbClr val="1E3A5F">
+              <a:alpha val="80000"/>
+            </a:srgbClr>
+          </a:solidFill>
+          <a:ln w="12700">
+            <a:solidFill>
+              <a:srgbClr val="14B8A6"/>
+            </a:solidFill>
+            <a:prstDash val="solid"/>
+          </a:ln>
+        </p:spPr>
+      </p:sp>
+      <p:sp>
+        <p:nvSpPr>
+          <p:cNvPr id="36" name="Text 34"/>
+          <p:cNvSpPr/>
+          <p:nvPr/>
+        </p:nvSpPr>
+        <p:spPr>
+          <a:xfrm>
+            <a:off x="10058400" y="5120640"/>
+            <a:ext cx="1737360" cy="320040"/>
+          </a:xfrm>
+          <a:prstGeom prst="rect">
+            <a:avLst/>
+          </a:prstGeom>
+          <a:noFill/>
+          <a:ln/>
+        </p:spPr>
+        <p:txBody>
+          <a:bodyPr wrap="square" lIns="0" tIns="0" rIns="0" bIns="0" rtlCol="0" anchor="ctr"/>
+          <a:lstStyle/>
+          <a:p>
+            <a:pPr algn="ctr" indent="0" marL="0">
+              <a:buNone/>
+            </a:pPr>
+            <a:r>
+              <a:rPr lang="en-US" sz="1000" b="1" dirty="0">
+                <a:solidFill>
+                  <a:srgbClr val="14B8A6"/>
+                </a:solidFill>
+                <a:latin typeface="Calibri" pitchFamily="34" charset="0"/>
+                <a:ea typeface="Calibri" pitchFamily="34" charset="-122"/>
+                <a:cs typeface="Calibri" pitchFamily="34" charset="-120"/>
+              </a:rPr>
+              <a:t>Implementado</a:t>
+            </a:r>
+            <a:endParaRPr lang="en-US" sz="1000" dirty="0"/>
+          </a:p>
+        </p:txBody>
+      </p:sp>
+      <p:sp>
+        <p:nvSpPr>
+          <p:cNvPr id="37" name="Text 35"/>
+          <p:cNvSpPr/>
+          <p:nvPr/>
+        </p:nvSpPr>
+        <p:spPr>
+          <a:xfrm>
+            <a:off x="457200" y="5806440"/>
+            <a:ext cx="6309360" cy="365760"/>
+          </a:xfrm>
+          <a:prstGeom prst="rect">
+            <a:avLst/>
+          </a:prstGeom>
+          <a:noFill/>
+          <a:ln/>
+        </p:spPr>
+        <p:txBody>
+          <a:bodyPr wrap="square" lIns="0" tIns="0" rIns="0" bIns="0" rtlCol="0" anchor="ctr"/>
+          <a:lstStyle/>
+          <a:p>
+            <a:pPr indent="0" marL="0">
+              <a:buNone/>
+            </a:pPr>
+            <a:r>
+              <a:rPr lang="en-US" sz="1200" dirty="0">
+                <a:solidFill>
+                  <a:srgbClr val="EAF6F3"/>
+                </a:solidFill>
+                <a:latin typeface="Calibri" pitchFamily="34" charset="0"/>
+                <a:ea typeface="Calibri" pitchFamily="34" charset="-122"/>
+                <a:cs typeface="Calibri" pitchFamily="34" charset="-120"/>
+              </a:rPr>
+              <a:t>Vídeo pitch (gravado; edição e publicação com outro integrante)</a:t>
+            </a:r>
+            <a:endParaRPr lang="en-US" sz="1200" dirty="0"/>
+          </a:p>
+        </p:txBody>
+      </p:sp>
+      <p:sp>
+        <p:nvSpPr>
+          <p:cNvPr id="38" name="Shape 36"/>
+          <p:cNvSpPr/>
+          <p:nvPr/>
+        </p:nvSpPr>
+        <p:spPr>
+          <a:xfrm>
+            <a:off x="6903720" y="5879592"/>
+            <a:ext cx="2377440" cy="219456"/>
+          </a:xfrm>
+          <a:prstGeom prst="roundRect">
+            <a:avLst>
+              <a:gd name="adj" fmla="val 20833"/>
+            </a:avLst>
+          </a:prstGeom>
+          <a:solidFill>
+            <a:srgbClr val="1E3A5F"/>
+          </a:solidFill>
+          <a:ln/>
+        </p:spPr>
+      </p:sp>
+      <p:sp>
+        <p:nvSpPr>
+          <p:cNvPr id="39" name="Shape 37"/>
+          <p:cNvSpPr/>
+          <p:nvPr/>
+        </p:nvSpPr>
+        <p:spPr>
+          <a:xfrm>
+            <a:off x="6903720" y="5879592"/>
+            <a:ext cx="1664208" cy="219456"/>
+          </a:xfrm>
+          <a:prstGeom prst="roundRect">
+            <a:avLst>
+              <a:gd name="adj" fmla="val 20833"/>
+            </a:avLst>
+          </a:prstGeom>
+          <a:solidFill>
             <a:srgbClr val="F59E0B"/>
           </a:solidFill>
           <a:ln/>
@@ -3813,13 +4383,13 @@
       </p:sp>
       <p:sp>
         <p:nvSpPr>
-          <p:cNvPr id="22" name="Text 20"/>
-          <p:cNvSpPr/>
-          <p:nvPr/>
-        </p:nvSpPr>
-        <p:spPr>
-          <a:xfrm>
-            <a:off x="9372600" y="3666744"/>
+          <p:cNvPr id="40" name="Text 38"/>
+          <p:cNvSpPr/>
+          <p:nvPr/>
+        </p:nvSpPr>
+        <p:spPr>
+          <a:xfrm>
+            <a:off x="9372600" y="5806440"/>
             <a:ext cx="594360" cy="365760"/>
           </a:xfrm>
           <a:prstGeom prst="rect">
@@ -3852,13 +4422,13 @@
       </p:sp>
       <p:sp>
         <p:nvSpPr>
-          <p:cNvPr id="23" name="Shape 21"/>
-          <p:cNvSpPr/>
-          <p:nvPr/>
-        </p:nvSpPr>
-        <p:spPr>
-          <a:xfrm>
-            <a:off x="10058400" y="3694176"/>
+          <p:cNvPr id="41" name="Shape 39"/>
+          <p:cNvSpPr/>
+          <p:nvPr/>
+        </p:nvSpPr>
+        <p:spPr>
+          <a:xfrm>
+            <a:off x="10058400" y="5833872"/>
             <a:ext cx="1737360" cy="320040"/>
           </a:xfrm>
           <a:prstGeom prst="roundRect">
@@ -3881,548 +4451,7 @@
       </p:sp>
       <p:sp>
         <p:nvSpPr>
-          <p:cNvPr id="24" name="Text 22"/>
-          <p:cNvSpPr/>
-          <p:nvPr/>
-        </p:nvSpPr>
-        <p:spPr>
-          <a:xfrm>
-            <a:off x="10058400" y="3694176"/>
-            <a:ext cx="1737360" cy="320040"/>
-          </a:xfrm>
-          <a:prstGeom prst="rect">
-            <a:avLst/>
-          </a:prstGeom>
-          <a:noFill/>
-          <a:ln/>
-        </p:spPr>
-        <p:txBody>
-          <a:bodyPr wrap="square" lIns="0" tIns="0" rIns="0" bIns="0" rtlCol="0" anchor="ctr"/>
-          <a:lstStyle/>
-          <a:p>
-            <a:pPr algn="ctr" indent="0" marL="0">
-              <a:buNone/>
-            </a:pPr>
-            <a:r>
-              <a:rPr lang="en-US" sz="1000" b="1" dirty="0">
-                <a:solidFill>
-                  <a:srgbClr val="F59E0B"/>
-                </a:solidFill>
-                <a:latin typeface="Calibri" pitchFamily="34" charset="0"/>
-                <a:ea typeface="Calibri" pitchFamily="34" charset="-122"/>
-                <a:cs typeface="Calibri" pitchFamily="34" charset="-120"/>
-              </a:rPr>
-              <a:t>Parcial</a:t>
-            </a:r>
-            <a:endParaRPr lang="en-US" sz="1000" dirty="0"/>
-          </a:p>
-        </p:txBody>
-      </p:sp>
-      <p:sp>
-        <p:nvSpPr>
-          <p:cNvPr id="25" name="Text 23"/>
-          <p:cNvSpPr/>
-          <p:nvPr/>
-        </p:nvSpPr>
-        <p:spPr>
-          <a:xfrm>
-            <a:off x="457200" y="4379976"/>
-            <a:ext cx="6309360" cy="365760"/>
-          </a:xfrm>
-          <a:prstGeom prst="rect">
-            <a:avLst/>
-          </a:prstGeom>
-          <a:noFill/>
-          <a:ln/>
-        </p:spPr>
-        <p:txBody>
-          <a:bodyPr wrap="square" lIns="0" tIns="0" rIns="0" bIns="0" rtlCol="0" anchor="ctr"/>
-          <a:lstStyle/>
-          <a:p>
-            <a:pPr indent="0" marL="0">
-              <a:buNone/>
-            </a:pPr>
-            <a:r>
-              <a:rPr lang="en-US" sz="1200" dirty="0">
-                <a:solidFill>
-                  <a:srgbClr val="EAF6F3"/>
-                </a:solidFill>
-                <a:latin typeface="Calibri" pitchFamily="34" charset="0"/>
-                <a:ea typeface="Calibri" pitchFamily="34" charset="-122"/>
-                <a:cs typeface="Calibri" pitchFamily="34" charset="-120"/>
-              </a:rPr>
-              <a:t>Dashboard sem mocks (filtros, mapa, export CSV)</a:t>
-            </a:r>
-            <a:endParaRPr lang="en-US" sz="1200" dirty="0"/>
-          </a:p>
-        </p:txBody>
-      </p:sp>
-      <p:sp>
-        <p:nvSpPr>
-          <p:cNvPr id="26" name="Shape 24"/>
-          <p:cNvSpPr/>
-          <p:nvPr/>
-        </p:nvSpPr>
-        <p:spPr>
-          <a:xfrm>
-            <a:off x="6903720" y="4453128"/>
-            <a:ext cx="2377440" cy="219456"/>
-          </a:xfrm>
-          <a:prstGeom prst="roundRect">
-            <a:avLst>
-              <a:gd name="adj" fmla="val 20833"/>
-            </a:avLst>
-          </a:prstGeom>
-          <a:solidFill>
-            <a:srgbClr val="1E3A5F"/>
-          </a:solidFill>
-          <a:ln/>
-        </p:spPr>
-      </p:sp>
-      <p:sp>
-        <p:nvSpPr>
-          <p:cNvPr id="27" name="Shape 25"/>
-          <p:cNvSpPr/>
-          <p:nvPr/>
-        </p:nvSpPr>
-        <p:spPr>
-          <a:xfrm>
-            <a:off x="6903720" y="4453128"/>
-            <a:ext cx="2377440" cy="219456"/>
-          </a:xfrm>
-          <a:prstGeom prst="roundRect">
-            <a:avLst>
-              <a:gd name="adj" fmla="val 20833"/>
-            </a:avLst>
-          </a:prstGeom>
-          <a:solidFill>
-            <a:srgbClr val="14B8A6"/>
-          </a:solidFill>
-          <a:ln/>
-        </p:spPr>
-      </p:sp>
-      <p:sp>
-        <p:nvSpPr>
-          <p:cNvPr id="28" name="Text 26"/>
-          <p:cNvSpPr/>
-          <p:nvPr/>
-        </p:nvSpPr>
-        <p:spPr>
-          <a:xfrm>
-            <a:off x="9372600" y="4379976"/>
-            <a:ext cx="594360" cy="365760"/>
-          </a:xfrm>
-          <a:prstGeom prst="rect">
-            <a:avLst/>
-          </a:prstGeom>
-          <a:noFill/>
-          <a:ln/>
-        </p:spPr>
-        <p:txBody>
-          <a:bodyPr wrap="square" lIns="0" tIns="0" rIns="0" bIns="0" rtlCol="0" anchor="ctr"/>
-          <a:lstStyle/>
-          <a:p>
-            <a:pPr indent="0" marL="0">
-              <a:buNone/>
-            </a:pPr>
-            <a:r>
-              <a:rPr lang="en-US" sz="1100" b="1" dirty="0">
-                <a:solidFill>
-                  <a:srgbClr val="14B8A6"/>
-                </a:solidFill>
-                <a:latin typeface="Calibri" pitchFamily="34" charset="0"/>
-                <a:ea typeface="Calibri" pitchFamily="34" charset="-122"/>
-                <a:cs typeface="Calibri" pitchFamily="34" charset="-120"/>
-              </a:rPr>
-              <a:t>100%</a:t>
-            </a:r>
-            <a:endParaRPr lang="en-US" sz="1100" dirty="0"/>
-          </a:p>
-        </p:txBody>
-      </p:sp>
-      <p:sp>
-        <p:nvSpPr>
-          <p:cNvPr id="29" name="Shape 27"/>
-          <p:cNvSpPr/>
-          <p:nvPr/>
-        </p:nvSpPr>
-        <p:spPr>
-          <a:xfrm>
-            <a:off x="10058400" y="4407408"/>
-            <a:ext cx="1737360" cy="320040"/>
-          </a:xfrm>
-          <a:prstGeom prst="roundRect">
-            <a:avLst>
-              <a:gd name="adj" fmla="val 48571"/>
-            </a:avLst>
-          </a:prstGeom>
-          <a:solidFill>
-            <a:srgbClr val="1E3A5F">
-              <a:alpha val="80000"/>
-            </a:srgbClr>
-          </a:solidFill>
-          <a:ln w="12700">
-            <a:solidFill>
-              <a:srgbClr val="14B8A6"/>
-            </a:solidFill>
-            <a:prstDash val="solid"/>
-          </a:ln>
-        </p:spPr>
-      </p:sp>
-      <p:sp>
-        <p:nvSpPr>
-          <p:cNvPr id="30" name="Text 28"/>
-          <p:cNvSpPr/>
-          <p:nvPr/>
-        </p:nvSpPr>
-        <p:spPr>
-          <a:xfrm>
-            <a:off x="10058400" y="4407408"/>
-            <a:ext cx="1737360" cy="320040"/>
-          </a:xfrm>
-          <a:prstGeom prst="rect">
-            <a:avLst/>
-          </a:prstGeom>
-          <a:noFill/>
-          <a:ln/>
-        </p:spPr>
-        <p:txBody>
-          <a:bodyPr wrap="square" lIns="0" tIns="0" rIns="0" bIns="0" rtlCol="0" anchor="ctr"/>
-          <a:lstStyle/>
-          <a:p>
-            <a:pPr algn="ctr" indent="0" marL="0">
-              <a:buNone/>
-            </a:pPr>
-            <a:r>
-              <a:rPr lang="en-US" sz="1000" b="1" dirty="0">
-                <a:solidFill>
-                  <a:srgbClr val="14B8A6"/>
-                </a:solidFill>
-                <a:latin typeface="Calibri" pitchFamily="34" charset="0"/>
-                <a:ea typeface="Calibri" pitchFamily="34" charset="-122"/>
-                <a:cs typeface="Calibri" pitchFamily="34" charset="-120"/>
-              </a:rPr>
-              <a:t>Implementado</a:t>
-            </a:r>
-            <a:endParaRPr lang="en-US" sz="1000" dirty="0"/>
-          </a:p>
-        </p:txBody>
-      </p:sp>
-      <p:sp>
-        <p:nvSpPr>
-          <p:cNvPr id="31" name="Text 29"/>
-          <p:cNvSpPr/>
-          <p:nvPr/>
-        </p:nvSpPr>
-        <p:spPr>
-          <a:xfrm>
-            <a:off x="457200" y="5093208"/>
-            <a:ext cx="6309360" cy="365760"/>
-          </a:xfrm>
-          <a:prstGeom prst="rect">
-            <a:avLst/>
-          </a:prstGeom>
-          <a:noFill/>
-          <a:ln/>
-        </p:spPr>
-        <p:txBody>
-          <a:bodyPr wrap="square" lIns="0" tIns="0" rIns="0" bIns="0" rtlCol="0" anchor="ctr"/>
-          <a:lstStyle/>
-          <a:p>
-            <a:pPr indent="0" marL="0">
-              <a:buNone/>
-            </a:pPr>
-            <a:r>
-              <a:rPr lang="en-US" sz="1200" dirty="0">
-                <a:solidFill>
-                  <a:srgbClr val="EAF6F3"/>
-                </a:solidFill>
-                <a:latin typeface="Calibri" pitchFamily="34" charset="0"/>
-                <a:ea typeface="Calibri" pitchFamily="34" charset="-122"/>
-                <a:cs typeface="Calibri" pitchFamily="34" charset="-120"/>
-              </a:rPr>
-              <a:t>Publicação (GitHub público + GitHub Pages ao vivo)</a:t>
-            </a:r>
-            <a:endParaRPr lang="en-US" sz="1200" dirty="0"/>
-          </a:p>
-        </p:txBody>
-      </p:sp>
-      <p:sp>
-        <p:nvSpPr>
-          <p:cNvPr id="32" name="Shape 30"/>
-          <p:cNvSpPr/>
-          <p:nvPr/>
-        </p:nvSpPr>
-        <p:spPr>
-          <a:xfrm>
-            <a:off x="6903720" y="5166360"/>
-            <a:ext cx="2377440" cy="219456"/>
-          </a:xfrm>
-          <a:prstGeom prst="roundRect">
-            <a:avLst>
-              <a:gd name="adj" fmla="val 20833"/>
-            </a:avLst>
-          </a:prstGeom>
-          <a:solidFill>
-            <a:srgbClr val="1E3A5F"/>
-          </a:solidFill>
-          <a:ln/>
-        </p:spPr>
-      </p:sp>
-      <p:sp>
-        <p:nvSpPr>
-          <p:cNvPr id="33" name="Shape 31"/>
-          <p:cNvSpPr/>
-          <p:nvPr/>
-        </p:nvSpPr>
-        <p:spPr>
-          <a:xfrm>
-            <a:off x="6903720" y="5166360"/>
-            <a:ext cx="2377440" cy="219456"/>
-          </a:xfrm>
-          <a:prstGeom prst="roundRect">
-            <a:avLst>
-              <a:gd name="adj" fmla="val 20833"/>
-            </a:avLst>
-          </a:prstGeom>
-          <a:solidFill>
-            <a:srgbClr val="14B8A6"/>
-          </a:solidFill>
-          <a:ln/>
-        </p:spPr>
-      </p:sp>
-      <p:sp>
-        <p:nvSpPr>
-          <p:cNvPr id="34" name="Text 32"/>
-          <p:cNvSpPr/>
-          <p:nvPr/>
-        </p:nvSpPr>
-        <p:spPr>
-          <a:xfrm>
-            <a:off x="9372600" y="5093208"/>
-            <a:ext cx="594360" cy="365760"/>
-          </a:xfrm>
-          <a:prstGeom prst="rect">
-            <a:avLst/>
-          </a:prstGeom>
-          <a:noFill/>
-          <a:ln/>
-        </p:spPr>
-        <p:txBody>
-          <a:bodyPr wrap="square" lIns="0" tIns="0" rIns="0" bIns="0" rtlCol="0" anchor="ctr"/>
-          <a:lstStyle/>
-          <a:p>
-            <a:pPr indent="0" marL="0">
-              <a:buNone/>
-            </a:pPr>
-            <a:r>
-              <a:rPr lang="en-US" sz="1100" b="1" dirty="0">
-                <a:solidFill>
-                  <a:srgbClr val="14B8A6"/>
-                </a:solidFill>
-                <a:latin typeface="Calibri" pitchFamily="34" charset="0"/>
-                <a:ea typeface="Calibri" pitchFamily="34" charset="-122"/>
-                <a:cs typeface="Calibri" pitchFamily="34" charset="-120"/>
-              </a:rPr>
-              <a:t>100%</a:t>
-            </a:r>
-            <a:endParaRPr lang="en-US" sz="1100" dirty="0"/>
-          </a:p>
-        </p:txBody>
-      </p:sp>
-      <p:sp>
-        <p:nvSpPr>
-          <p:cNvPr id="35" name="Shape 33"/>
-          <p:cNvSpPr/>
-          <p:nvPr/>
-        </p:nvSpPr>
-        <p:spPr>
-          <a:xfrm>
-            <a:off x="10058400" y="5120640"/>
-            <a:ext cx="1737360" cy="320040"/>
-          </a:xfrm>
-          <a:prstGeom prst="roundRect">
-            <a:avLst>
-              <a:gd name="adj" fmla="val 48571"/>
-            </a:avLst>
-          </a:prstGeom>
-          <a:solidFill>
-            <a:srgbClr val="1E3A5F">
-              <a:alpha val="80000"/>
-            </a:srgbClr>
-          </a:solidFill>
-          <a:ln w="12700">
-            <a:solidFill>
-              <a:srgbClr val="14B8A6"/>
-            </a:solidFill>
-            <a:prstDash val="solid"/>
-          </a:ln>
-        </p:spPr>
-      </p:sp>
-      <p:sp>
-        <p:nvSpPr>
-          <p:cNvPr id="36" name="Text 34"/>
-          <p:cNvSpPr/>
-          <p:nvPr/>
-        </p:nvSpPr>
-        <p:spPr>
-          <a:xfrm>
-            <a:off x="10058400" y="5120640"/>
-            <a:ext cx="1737360" cy="320040"/>
-          </a:xfrm>
-          <a:prstGeom prst="rect">
-            <a:avLst/>
-          </a:prstGeom>
-          <a:noFill/>
-          <a:ln/>
-        </p:spPr>
-        <p:txBody>
-          <a:bodyPr wrap="square" lIns="0" tIns="0" rIns="0" bIns="0" rtlCol="0" anchor="ctr"/>
-          <a:lstStyle/>
-          <a:p>
-            <a:pPr algn="ctr" indent="0" marL="0">
-              <a:buNone/>
-            </a:pPr>
-            <a:r>
-              <a:rPr lang="en-US" sz="1000" b="1" dirty="0">
-                <a:solidFill>
-                  <a:srgbClr val="14B8A6"/>
-                </a:solidFill>
-                <a:latin typeface="Calibri" pitchFamily="34" charset="0"/>
-                <a:ea typeface="Calibri" pitchFamily="34" charset="-122"/>
-                <a:cs typeface="Calibri" pitchFamily="34" charset="-120"/>
-              </a:rPr>
-              <a:t>Implementado</a:t>
-            </a:r>
-            <a:endParaRPr lang="en-US" sz="1000" dirty="0"/>
-          </a:p>
-        </p:txBody>
-      </p:sp>
-      <p:sp>
-        <p:nvSpPr>
-          <p:cNvPr id="37" name="Text 35"/>
-          <p:cNvSpPr/>
-          <p:nvPr/>
-        </p:nvSpPr>
-        <p:spPr>
-          <a:xfrm>
-            <a:off x="457200" y="5806440"/>
-            <a:ext cx="6309360" cy="365760"/>
-          </a:xfrm>
-          <a:prstGeom prst="rect">
-            <a:avLst/>
-          </a:prstGeom>
-          <a:noFill/>
-          <a:ln/>
-        </p:spPr>
-        <p:txBody>
-          <a:bodyPr wrap="square" lIns="0" tIns="0" rIns="0" bIns="0" rtlCol="0" anchor="ctr"/>
-          <a:lstStyle/>
-          <a:p>
-            <a:pPr indent="0" marL="0">
-              <a:buNone/>
-            </a:pPr>
-            <a:r>
-              <a:rPr lang="en-US" sz="1200" dirty="0">
-                <a:solidFill>
-                  <a:srgbClr val="EAF6F3"/>
-                </a:solidFill>
-                <a:latin typeface="Calibri" pitchFamily="34" charset="0"/>
-                <a:ea typeface="Calibri" pitchFamily="34" charset="-122"/>
-                <a:cs typeface="Calibri" pitchFamily="34" charset="-120"/>
-              </a:rPr>
-              <a:t>Vídeo pitch (produção com outro integrante do grupo)</a:t>
-            </a:r>
-            <a:endParaRPr lang="en-US" sz="1200" dirty="0"/>
-          </a:p>
-        </p:txBody>
-      </p:sp>
-      <p:sp>
-        <p:nvSpPr>
-          <p:cNvPr id="38" name="Shape 36"/>
-          <p:cNvSpPr/>
-          <p:nvPr/>
-        </p:nvSpPr>
-        <p:spPr>
-          <a:xfrm>
-            <a:off x="6903720" y="5879592"/>
-            <a:ext cx="2377440" cy="219456"/>
-          </a:xfrm>
-          <a:prstGeom prst="roundRect">
-            <a:avLst>
-              <a:gd name="adj" fmla="val 20833"/>
-            </a:avLst>
-          </a:prstGeom>
-          <a:solidFill>
-            <a:srgbClr val="1E3A5F"/>
-          </a:solidFill>
-          <a:ln/>
-        </p:spPr>
-      </p:sp>
-      <p:sp>
-        <p:nvSpPr>
-          <p:cNvPr id="39" name="Shape 37"/>
-          <p:cNvSpPr/>
-          <p:nvPr/>
-        </p:nvSpPr>
-        <p:spPr>
-          <a:xfrm>
-            <a:off x="6903720" y="5879592"/>
-            <a:ext cx="45720" cy="219456"/>
-          </a:xfrm>
-          <a:prstGeom prst="roundRect">
-            <a:avLst>
-              <a:gd name="adj" fmla="val 100000"/>
-            </a:avLst>
-          </a:prstGeom>
-          <a:solidFill>
-            <a:srgbClr val="EF4444"/>
-          </a:solidFill>
-          <a:ln/>
-        </p:spPr>
-      </p:sp>
-      <p:sp>
-        <p:nvSpPr>
-          <p:cNvPr id="40" name="Text 38"/>
-          <p:cNvSpPr/>
-          <p:nvPr/>
-        </p:nvSpPr>
-        <p:spPr>
-          <a:xfrm>
-            <a:off x="9372600" y="5806440"/>
-            <a:ext cx="594360" cy="365760"/>
-          </a:xfrm>
-          <a:prstGeom prst="rect">
-            <a:avLst/>
-          </a:prstGeom>
-          <a:noFill/>
-          <a:ln/>
-        </p:spPr>
-        <p:txBody>
-          <a:bodyPr wrap="square" lIns="0" tIns="0" rIns="0" bIns="0" rtlCol="0" anchor="ctr"/>
-          <a:lstStyle/>
-          <a:p>
-            <a:pPr indent="0" marL="0">
-              <a:buNone/>
-            </a:pPr>
-            <a:r>
-              <a:rPr lang="en-US" sz="1100" b="1" dirty="0">
-                <a:solidFill>
-                  <a:srgbClr val="EF4444"/>
-                </a:solidFill>
-                <a:latin typeface="Calibri" pitchFamily="34" charset="0"/>
-                <a:ea typeface="Calibri" pitchFamily="34" charset="-122"/>
-                <a:cs typeface="Calibri" pitchFamily="34" charset="-120"/>
-              </a:rPr>
-              <a:t>0%</a:t>
-            </a:r>
-            <a:endParaRPr lang="en-US" sz="1100" dirty="0"/>
-          </a:p>
-        </p:txBody>
-      </p:sp>
-      <p:sp>
-        <p:nvSpPr>
-          <p:cNvPr id="41" name="Shape 39"/>
+          <p:cNvPr id="42" name="Text 40"/>
           <p:cNvSpPr/>
           <p:nvPr/>
         </p:nvSpPr>
@@ -4431,35 +4460,6 @@
             <a:off x="10058400" y="5833872"/>
             <a:ext cx="1737360" cy="320040"/>
           </a:xfrm>
-          <a:prstGeom prst="roundRect">
-            <a:avLst>
-              <a:gd name="adj" fmla="val 48571"/>
-            </a:avLst>
-          </a:prstGeom>
-          <a:solidFill>
-            <a:srgbClr val="1E3A5F">
-              <a:alpha val="80000"/>
-            </a:srgbClr>
-          </a:solidFill>
-          <a:ln w="12700">
-            <a:solidFill>
-              <a:srgbClr val="EF4444"/>
-            </a:solidFill>
-            <a:prstDash val="solid"/>
-          </a:ln>
-        </p:spPr>
-      </p:sp>
-      <p:sp>
-        <p:nvSpPr>
-          <p:cNvPr id="42" name="Text 40"/>
-          <p:cNvSpPr/>
-          <p:nvPr/>
-        </p:nvSpPr>
-        <p:spPr>
-          <a:xfrm>
-            <a:off x="10058400" y="5833872"/>
-            <a:ext cx="1737360" cy="320040"/>
-          </a:xfrm>
           <a:prstGeom prst="rect">
             <a:avLst/>
           </a:prstGeom>
@@ -4476,13 +4476,13 @@
             <a:r>
               <a:rPr lang="en-US" sz="1000" b="1" dirty="0">
                 <a:solidFill>
-                  <a:srgbClr val="EF4444"/>
-                </a:solidFill>
-                <a:latin typeface="Calibri" pitchFamily="34" charset="0"/>
-                <a:ea typeface="Calibri" pitchFamily="34" charset="-122"/>
-                <a:cs typeface="Calibri" pitchFamily="34" charset="-120"/>
-              </a:rPr>
-              <a:t>Planejado</a:t>
+                  <a:srgbClr val="F59E0B"/>
+                </a:solidFill>
+                <a:latin typeface="Calibri" pitchFamily="34" charset="0"/>
+                <a:ea typeface="Calibri" pitchFamily="34" charset="-122"/>
+                <a:cs typeface="Calibri" pitchFamily="34" charset="-120"/>
+              </a:rPr>
+              <a:t>Em produção</a:t>
             </a:r>
             <a:endParaRPr lang="en-US" sz="1000" dirty="0"/>
           </a:p>
@@ -7167,7 +7167,7 @@
                 <a:ea typeface="Calibri" pitchFamily="34" charset="-122"/>
                 <a:cs typeface="Calibri" pitchFamily="34" charset="-120"/>
               </a:rPr>
-              <a:t>Evidências reais (prompt, SQL gerado, resultado, interpretação, limitações) documentadas em docs/evidencias/select_ai_perguntas.md após execução no ambiente Oracle acadêmico.</a:t>
+              <a:t>Executadas de verdade no Database Actions com o perfil LEITO360_AI (provider Cohere). O SQL gerado, o resultado e as limitações observadas estão em docs/evidencias/select_ai_perguntas.md — nada aqui foi escrito à mão e apresentado como saída da IA.</a:t>
             </a:r>
             <a:endParaRPr lang="en-US" sz="1000" dirty="0"/>
           </a:p>
@@ -7390,7 +7390,7 @@
                 <a:ea typeface="Cambria" pitchFamily="34" charset="-122"/>
                 <a:cs typeface="Cambria" pitchFamily="34" charset="-120"/>
               </a:rPr>
-              <a:t>Evidências — execução real no Oracle (LiveLabs sandbox #229599)</a:t>
+              <a:t>Evidências — execução real no Oracle</a:t>
             </a:r>
             <a:endParaRPr lang="en-US" sz="2800" dirty="0"/>
           </a:p>
@@ -7429,7 +7429,7 @@
                 <a:ea typeface="Calibri" pitchFamily="34" charset="-122"/>
                 <a:cs typeface="Calibri" pitchFamily="34" charset="-120"/>
               </a:rPr>
-              <a:t>Rodado de verdade em 31/08–01/09/2026, usuário MOVIESTREAM, tenancy C4U04 (India South).</a:t>
+              <a:t>Rodado em dois sandboxes independentes do LiveLabs (#229599 e MovieStreamWorkshop229748), 31/08–01/09/2026. O schema foi recriado do zero no segundo e devolveu exatamente os mesmos números.</a:t>
             </a:r>
             <a:endParaRPr lang="en-US" sz="1400" dirty="0"/>
           </a:p>
@@ -7461,7 +7461,7 @@
                 <a:gridCol w="5029200"/>
                 <a:gridCol w="6217920"/>
               </a:tblGrid>
-              <a:tr h="655320">
+              <a:tr h="561703">
                 <a:tc>
                   <a:txBody>
                     <a:bodyPr/>
@@ -7599,7 +7599,7 @@
                   </a:tcPr>
                 </a:tc>
               </a:tr>
-              <a:tr h="655320">
+              <a:tr h="561703">
                 <a:tc>
                   <a:txBody>
                     <a:bodyPr/>
@@ -7737,7 +7737,7 @@
                   </a:tcPr>
                 </a:tc>
               </a:tr>
-              <a:tr h="655320">
+              <a:tr h="561703">
                 <a:tc>
                   <a:txBody>
                     <a:bodyPr/>
@@ -7875,7 +7875,7 @@
                   </a:tcPr>
                 </a:tc>
               </a:tr>
-              <a:tr h="655320">
+              <a:tr h="561703">
                 <a:tc>
                   <a:txBody>
                     <a:bodyPr/>
@@ -8013,7 +8013,7 @@
                   </a:tcPr>
                 </a:tc>
               </a:tr>
-              <a:tr h="655320">
+              <a:tr h="561703">
                 <a:tc>
                   <a:txBody>
                     <a:bodyPr/>
@@ -8151,7 +8151,145 @@
                   </a:tcPr>
                 </a:tc>
               </a:tr>
-              <a:tr h="655320">
+              <a:tr h="561703">
+                <a:tc>
+                  <a:txBody>
+                    <a:bodyPr/>
+                    <a:lstStyle/>
+                    <a:p>
+                      <a:pPr indent="0" marL="0">
+                        <a:buNone/>
+                      </a:pPr>
+                      <a:r>
+                        <a:rPr lang="en-US" sz="1050" dirty="0">
+                          <a:solidFill>
+                            <a:srgbClr val="EAF6F3"/>
+                          </a:solidFill>
+                          <a:latin typeface="Calibri" pitchFamily="34" charset="0"/>
+                          <a:ea typeface="Calibri" pitchFamily="34" charset="-122"/>
+                          <a:cs typeface="Calibri" pitchFamily="34" charset="-120"/>
+                        </a:rPr>
+                        <a:t>Ranking abr/2026 no Oracle x ETL local (internações/100 mil hab)</a:t>
+                      </a:r>
+                      <a:endParaRPr lang="en-US" sz="1050" dirty="0">
+                        <a:latin typeface="Calibri" charset="0"/>
+                        <a:ea typeface="Calibri" charset="0"/>
+                        <a:cs typeface="Calibri" charset="0"/>
+                      </a:endParaRPr>
+                    </a:p>
+                  </a:txBody>
+                  <a:tcPr marL="91440" marR="91440" marT="45720" marB="45720" anchor="ctr">
+                    <a:lnL w="6350" cap="flat" cmpd="sng" algn="ctr">
+                      <a:solidFill>
+                        <a:srgbClr val="1E3A5F"/>
+                      </a:solidFill>
+                      <a:prstDash val="solid"/>
+                      <a:round/>
+                      <a:headEnd type="none" w="med" len="med"/>
+                      <a:tailEnd type="none" w="med" len="med"/>
+                    </a:lnL>
+                    <a:lnR w="6350" cap="flat" cmpd="sng" algn="ctr">
+                      <a:solidFill>
+                        <a:srgbClr val="1E3A5F"/>
+                      </a:solidFill>
+                      <a:prstDash val="solid"/>
+                      <a:round/>
+                      <a:headEnd type="none" w="med" len="med"/>
+                      <a:tailEnd type="none" w="med" len="med"/>
+                    </a:lnR>
+                    <a:lnT w="6350" cap="flat" cmpd="sng" algn="ctr">
+                      <a:solidFill>
+                        <a:srgbClr val="1E3A5F"/>
+                      </a:solidFill>
+                      <a:prstDash val="solid"/>
+                      <a:round/>
+                      <a:headEnd type="none" w="med" len="med"/>
+                      <a:tailEnd type="none" w="med" len="med"/>
+                    </a:lnT>
+                    <a:lnB w="6350" cap="flat" cmpd="sng" algn="ctr">
+                      <a:solidFill>
+                        <a:srgbClr val="1E3A5F"/>
+                      </a:solidFill>
+                      <a:prstDash val="solid"/>
+                      <a:round/>
+                      <a:headEnd type="none" w="med" len="med"/>
+                      <a:tailEnd type="none" w="med" len="med"/>
+                    </a:lnB>
+                    <a:solidFill>
+                      <a:srgbClr val="0F2A4A"/>
+                    </a:solidFill>
+                  </a:tcPr>
+                </a:tc>
+                <a:tc>
+                  <a:txBody>
+                    <a:bodyPr/>
+                    <a:lstStyle/>
+                    <a:p>
+                      <a:pPr indent="0" marL="0">
+                        <a:buNone/>
+                      </a:pPr>
+                      <a:r>
+                        <a:rPr lang="en-US" sz="1050" dirty="0">
+                          <a:solidFill>
+                            <a:srgbClr val="EAF6F3"/>
+                          </a:solidFill>
+                          <a:latin typeface="Calibri" pitchFamily="34" charset="0"/>
+                          <a:ea typeface="Calibri" pitchFamily="34" charset="-122"/>
+                          <a:cs typeface="Calibri" pitchFamily="34" charset="-120"/>
+                        </a:rPr>
+                        <a:t>PR 703,74 · SC 702,27 · RO 701,17 · AP 686,83 · RS 664,58 — idêntico ao data/processed/</a:t>
+                      </a:r>
+                      <a:endParaRPr lang="en-US" sz="1050" dirty="0">
+                        <a:latin typeface="Calibri" charset="0"/>
+                        <a:ea typeface="Calibri" charset="0"/>
+                        <a:cs typeface="Calibri" charset="0"/>
+                      </a:endParaRPr>
+                    </a:p>
+                  </a:txBody>
+                  <a:tcPr marL="91440" marR="91440" marT="45720" marB="45720" anchor="ctr">
+                    <a:lnL w="6350" cap="flat" cmpd="sng" algn="ctr">
+                      <a:solidFill>
+                        <a:srgbClr val="1E3A5F"/>
+                      </a:solidFill>
+                      <a:prstDash val="solid"/>
+                      <a:round/>
+                      <a:headEnd type="none" w="med" len="med"/>
+                      <a:tailEnd type="none" w="med" len="med"/>
+                    </a:lnL>
+                    <a:lnR w="6350" cap="flat" cmpd="sng" algn="ctr">
+                      <a:solidFill>
+                        <a:srgbClr val="1E3A5F"/>
+                      </a:solidFill>
+                      <a:prstDash val="solid"/>
+                      <a:round/>
+                      <a:headEnd type="none" w="med" len="med"/>
+                      <a:tailEnd type="none" w="med" len="med"/>
+                    </a:lnR>
+                    <a:lnT w="6350" cap="flat" cmpd="sng" algn="ctr">
+                      <a:solidFill>
+                        <a:srgbClr val="1E3A5F"/>
+                      </a:solidFill>
+                      <a:prstDash val="solid"/>
+                      <a:round/>
+                      <a:headEnd type="none" w="med" len="med"/>
+                      <a:tailEnd type="none" w="med" len="med"/>
+                    </a:lnT>
+                    <a:lnB w="6350" cap="flat" cmpd="sng" algn="ctr">
+                      <a:solidFill>
+                        <a:srgbClr val="1E3A5F"/>
+                      </a:solidFill>
+                      <a:prstDash val="solid"/>
+                      <a:round/>
+                      <a:headEnd type="none" w="med" len="med"/>
+                      <a:tailEnd type="none" w="med" len="med"/>
+                    </a:lnB>
+                    <a:solidFill>
+                      <a:srgbClr val="0F2A4A"/>
+                    </a:solidFill>
+                  </a:tcPr>
+                </a:tc>
+              </a:tr>
+              <a:tr h="561703">
                 <a:tc>
                   <a:txBody>
                     <a:bodyPr/>
@@ -8326,7 +8464,7 @@
                 <a:ea typeface="Calibri" pitchFamily="34" charset="-122"/>
                 <a:cs typeface="Calibri" pitchFamily="34" charset="-120"/>
               </a:rPr>
-              <a:t>Executado por MOVIESTREAM no SQL Worksheet do Database Actions. Ambiente temporário do LiveLabs (expira após a reserva) — usado apenas para gerar estas evidências, não é a infraestrutura definitiva do projeto.</a:t>
+              <a:t>Executado no SQL Worksheet do Database Actions. Ambientes temporários do LiveLabs (expiram após a reserva) — usados para gerar estas evidências, não são a infraestrutura definitiva. Os scripts de oracle/sql/consolidado_recriacao/ recriam o schema inteiro em qualquer instância nova.</a:t>
             </a:r>
             <a:endParaRPr lang="en-US" sz="900" dirty="0"/>
           </a:p>
@@ -8549,7 +8687,7 @@
                 <a:ea typeface="Cambria" pitchFamily="34" charset="-122"/>
                 <a:cs typeface="Cambria" pitchFamily="34" charset="-120"/>
               </a:rPr>
-              <a:t>Select AI — perfil real criado, execução bloqueada por infraestrutura</a:t>
+              <a:t>Select AI — NL2SQL real sobre os dados do projeto</a:t>
             </a:r>
             <a:endParaRPr lang="en-US" sz="2800" dirty="0"/>
           </a:p>
@@ -8588,7 +8726,7 @@
                 <a:ea typeface="Calibri" pitchFamily="34" charset="-122"/>
                 <a:cs typeface="Calibri" pitchFamily="34" charset="-120"/>
               </a:rPr>
-              <a:t>Diagnóstico técnico completo em docs/evidencias/select_ai_perguntas.md — nada aqui foi inventado ou simulado.</a:t>
+              <a:t>Pergunta em português → SQL gerado pelo modelo → resultado. Transcrito da tela, sem edição.</a:t>
             </a:r>
             <a:endParaRPr lang="en-US" sz="1400" dirty="0"/>
           </a:p>
@@ -8602,12 +8740,12 @@
         </p:nvSpPr>
         <p:spPr>
           <a:xfrm>
-            <a:off x="457200" y="2103120"/>
-            <a:ext cx="11247120" cy="914400"/>
+            <a:off x="457200" y="2057400"/>
+            <a:ext cx="11247120" cy="1691640"/>
           </a:xfrm>
           <a:prstGeom prst="roundRect">
             <a:avLst>
-              <a:gd name="adj" fmla="val 8000"/>
+              <a:gd name="adj" fmla="val 4324"/>
             </a:avLst>
           </a:prstGeom>
           <a:solidFill>
@@ -8636,24 +8774,24 @@
         </p:nvSpPr>
         <p:spPr>
           <a:xfrm>
-            <a:off x="685800" y="2212848"/>
-            <a:ext cx="10789920" cy="274320"/>
-          </a:xfrm>
-          <a:prstGeom prst="rect">
-            <a:avLst/>
-          </a:prstGeom>
-          <a:noFill/>
-          <a:ln/>
-        </p:spPr>
-        <p:txBody>
-          <a:bodyPr wrap="square" lIns="0" tIns="0" rIns="0" bIns="0" rtlCol="0" anchor="ctr"/>
-          <a:lstStyle/>
-          <a:p>
-            <a:pPr indent="0" marL="0">
-              <a:buNone/>
-            </a:pPr>
-            <a:r>
-              <a:rPr lang="en-US" sz="1200" b="1" dirty="0">
+            <a:off x="685800" y="2148840"/>
+            <a:ext cx="10789920" cy="256032"/>
+          </a:xfrm>
+          <a:prstGeom prst="rect">
+            <a:avLst/>
+          </a:prstGeom>
+          <a:noFill/>
+          <a:ln/>
+        </p:spPr>
+        <p:txBody>
+          <a:bodyPr wrap="square" lIns="0" tIns="0" rIns="0" bIns="0" rtlCol="0" anchor="ctr"/>
+          <a:lstStyle/>
+          <a:p>
+            <a:pPr indent="0" marL="0">
+              <a:buNone/>
+            </a:pPr>
+            <a:r>
+              <a:rPr lang="en-US" sz="1150" b="1" dirty="0">
                 <a:solidFill>
                   <a:srgbClr val="14B8A6"/>
                 </a:solidFill>
@@ -8661,9 +8799,9 @@
                 <a:ea typeface="Calibri" pitchFamily="34" charset="-122"/>
                 <a:cs typeface="Calibri" pitchFamily="34" charset="-120"/>
               </a:rPr>
-              <a:t>✓ Implementado e confirmado</a:t>
-            </a:r>
-            <a:endParaRPr lang="en-US" sz="1200" dirty="0"/>
+              <a:t>✓ Pergunta 1 — SHOWSQL (2,87 s): SQL gerado pelo modelo</a:t>
+            </a:r>
+            <a:endParaRPr lang="en-US" sz="1150" dirty="0"/>
           </a:p>
         </p:txBody>
       </p:sp>
@@ -8675,8 +8813,103 @@
         </p:nvSpPr>
         <p:spPr>
           <a:xfrm>
-            <a:off x="685800" y="2468880"/>
-            <a:ext cx="10789920" cy="502920"/>
+            <a:off x="685800" y="2404872"/>
+            <a:ext cx="10789920" cy="228600"/>
+          </a:xfrm>
+          <a:prstGeom prst="rect">
+            <a:avLst/>
+          </a:prstGeom>
+          <a:noFill/>
+          <a:ln/>
+        </p:spPr>
+        <p:txBody>
+          <a:bodyPr wrap="square" lIns="0" tIns="0" rIns="0" bIns="0" rtlCol="0" anchor="ctr"/>
+          <a:lstStyle/>
+          <a:p>
+            <a:pPr indent="0" marL="0">
+              <a:buNone/>
+            </a:pPr>
+            <a:r>
+              <a:rPr lang="en-US" sz="1000" i="1" dirty="0">
+                <a:solidFill>
+                  <a:srgbClr val="94A3B8"/>
+                </a:solidFill>
+                <a:latin typeface="Calibri" pitchFamily="34" charset="0"/>
+                <a:ea typeface="Calibri" pitchFamily="34" charset="-122"/>
+                <a:cs typeface="Calibri" pitchFamily="34" charset="-120"/>
+              </a:rPr>
+              <a:t>"Quais Unidades da Federação tiveram mais internações por 100 mil habitantes em abril de 2026?"</a:t>
+            </a:r>
+            <a:endParaRPr lang="en-US" sz="1000" dirty="0"/>
+          </a:p>
+        </p:txBody>
+      </p:sp>
+      <p:sp>
+        <p:nvSpPr>
+          <p:cNvPr id="10" name="Text 8"/>
+          <p:cNvSpPr/>
+          <p:nvPr/>
+        </p:nvSpPr>
+        <p:spPr>
+          <a:xfrm>
+            <a:off x="685800" y="2679192"/>
+            <a:ext cx="10789920" cy="457200"/>
+          </a:xfrm>
+          <a:prstGeom prst="rect">
+            <a:avLst/>
+          </a:prstGeom>
+          <a:noFill/>
+          <a:ln/>
+        </p:spPr>
+        <p:txBody>
+          <a:bodyPr wrap="square" lIns="0" tIns="0" rIns="0" bIns="0" rtlCol="0" anchor="ctr"/>
+          <a:lstStyle/>
+          <a:p>
+            <a:pPr indent="0" marL="0">
+              <a:buNone/>
+            </a:pPr>
+            <a:r>
+              <a:rPr lang="en-US" sz="950" dirty="0">
+                <a:solidFill>
+                  <a:srgbClr val="7DD3C0"/>
+                </a:solidFill>
+                <a:latin typeface="Courier New" pitchFamily="34" charset="0"/>
+                <a:ea typeface="Courier New" pitchFamily="34" charset="-122"/>
+                <a:cs typeface="Courier New" pitchFamily="34" charset="-120"/>
+              </a:rPr>
+              <a:t>SELECT vw."ESTADO", vw."SIGLA_UF" FROM "ADMIN"."VW_LEITO360_ANALITICO" vw</a:t>
+            </a:r>
+            <a:endParaRPr lang="en-US" sz="950" dirty="0"/>
+          </a:p>
+          <a:p>
+            <a:pPr indent="0" marL="0">
+              <a:buNone/>
+            </a:pPr>
+            <a:r>
+              <a:rPr lang="en-US" sz="950" dirty="0">
+                <a:solidFill>
+                  <a:srgbClr val="7DD3C0"/>
+                </a:solidFill>
+                <a:latin typeface="Courier New" pitchFamily="34" charset="0"/>
+                <a:ea typeface="Courier New" pitchFamily="34" charset="-122"/>
+                <a:cs typeface="Courier New" pitchFamily="34" charset="-120"/>
+              </a:rPr>
+              <a:t>WHERE vw."COMPETENCIA" = '2026-04' ORDER BY vw."INTERNACOES_POR_100K_HAB" DESC</a:t>
+            </a:r>
+            <a:endParaRPr lang="en-US" sz="950" dirty="0"/>
+          </a:p>
+        </p:txBody>
+      </p:sp>
+      <p:sp>
+        <p:nvSpPr>
+          <p:cNvPr id="11" name="Text 9"/>
+          <p:cNvSpPr/>
+          <p:nvPr/>
+        </p:nvSpPr>
+        <p:spPr>
+          <a:xfrm>
+            <a:off x="685800" y="3200400"/>
+            <a:ext cx="10789920" cy="457200"/>
           </a:xfrm>
           <a:prstGeom prst="rect">
             <a:avLst/>
@@ -8700,7 +8933,7 @@
                 <a:ea typeface="Calibri" pitchFamily="34" charset="-122"/>
                 <a:cs typeface="Calibri" pitchFamily="34" charset="-120"/>
               </a:rPr>
-              <a:t>Perfil LEITO360_AI criado com sucesso (credencial nativa AI_CREDENTIAL indicada pela Task 2 do workshop, não OCI$RESOURCE_PRINCIPAL); DROP/CREATE_PROFILE respondem em ~1-2s; as 5 perguntas de negócio estão prontas em oracle/sql/08_select_ai_perguntas.sql.</a:t>
+              <a:t>O modelo escolheu sozinho a view analítica, a competência e o indicador corretos. O atributo "comments": "true" envia os COMMENT ON TABLE/COLUMN dos scripts 01, 02 e 05 como contexto semântico.</a:t>
             </a:r>
             <a:endParaRPr lang="en-US" sz="1000" dirty="0"/>
           </a:p>
@@ -8708,22 +8941,22 @@
       </p:sp>
       <p:sp>
         <p:nvSpPr>
-          <p:cNvPr id="10" name="Shape 8"/>
-          <p:cNvSpPr/>
-          <p:nvPr/>
-        </p:nvSpPr>
-        <p:spPr>
-          <a:xfrm>
-            <a:off x="457200" y="3154680"/>
-            <a:ext cx="11247120" cy="2286000"/>
+          <p:cNvPr id="12" name="Shape 10"/>
+          <p:cNvSpPr/>
+          <p:nvPr/>
+        </p:nvSpPr>
+        <p:spPr>
+          <a:xfrm>
+            <a:off x="457200" y="3886200"/>
+            <a:ext cx="11247120" cy="914400"/>
           </a:xfrm>
           <a:prstGeom prst="roundRect">
             <a:avLst>
-              <a:gd name="adj" fmla="val 3200"/>
+              <a:gd name="adj" fmla="val 8000"/>
             </a:avLst>
           </a:prstGeom>
           <a:solidFill>
-            <a:srgbClr val="2A1810"/>
+            <a:srgbClr val="0F2A4A"/>
           </a:solidFill>
           <a:ln w="12700">
             <a:solidFill>
@@ -8742,13 +8975,164 @@
       </p:sp>
       <p:sp>
         <p:nvSpPr>
-          <p:cNvPr id="11" name="Text 9"/>
-          <p:cNvSpPr/>
-          <p:nvPr/>
-        </p:nvSpPr>
-        <p:spPr>
-          <a:xfrm>
-            <a:off x="685800" y="3273552"/>
+          <p:cNvPr id="13" name="Text 11"/>
+          <p:cNvSpPr/>
+          <p:nvPr/>
+        </p:nvSpPr>
+        <p:spPr>
+          <a:xfrm>
+            <a:off x="685800" y="3977640"/>
+            <a:ext cx="10789920" cy="256032"/>
+          </a:xfrm>
+          <a:prstGeom prst="rect">
+            <a:avLst/>
+          </a:prstGeom>
+          <a:noFill/>
+          <a:ln/>
+        </p:spPr>
+        <p:txBody>
+          <a:bodyPr wrap="square" lIns="0" tIns="0" rIns="0" bIns="0" rtlCol="0" anchor="ctr"/>
+          <a:lstStyle/>
+          <a:p>
+            <a:pPr indent="0" marL="0">
+              <a:buNone/>
+            </a:pPr>
+            <a:r>
+              <a:rPr lang="en-US" sz="1150" b="1" dirty="0">
+                <a:solidFill>
+                  <a:srgbClr val="14B8A6"/>
+                </a:solidFill>
+                <a:latin typeface="Calibri" pitchFamily="34" charset="0"/>
+                <a:ea typeface="Calibri" pitchFamily="34" charset="-122"/>
+                <a:cs typeface="Calibri" pitchFamily="34" charset="-120"/>
+              </a:rPr>
+              <a:t>✓ Pergunta 1 — RUNSQL (1,75 s): resultado real</a:t>
+            </a:r>
+            <a:endParaRPr lang="en-US" sz="1150" dirty="0"/>
+          </a:p>
+        </p:txBody>
+      </p:sp>
+      <p:sp>
+        <p:nvSpPr>
+          <p:cNvPr id="14" name="Text 12"/>
+          <p:cNvSpPr/>
+          <p:nvPr/>
+        </p:nvSpPr>
+        <p:spPr>
+          <a:xfrm>
+            <a:off x="685800" y="4251960"/>
+            <a:ext cx="10789920" cy="411480"/>
+          </a:xfrm>
+          <a:prstGeom prst="rect">
+            <a:avLst/>
+          </a:prstGeom>
+          <a:noFill/>
+          <a:ln/>
+        </p:spPr>
+        <p:txBody>
+          <a:bodyPr wrap="square" lIns="0" tIns="0" rIns="0" bIns="0" rtlCol="0" anchor="ctr"/>
+          <a:lstStyle/>
+          <a:p>
+            <a:pPr indent="0" marL="0">
+              <a:buNone/>
+            </a:pPr>
+            <a:r>
+              <a:rPr lang="en-US" sz="950" dirty="0">
+                <a:solidFill>
+                  <a:srgbClr val="7DD3C0"/>
+                </a:solidFill>
+                <a:latin typeface="Courier New" pitchFamily="34" charset="0"/>
+                <a:ea typeface="Courier New" pitchFamily="34" charset="-122"/>
+                <a:cs typeface="Courier New" pitchFamily="34" charset="-120"/>
+              </a:rPr>
+              <a:t>[ { "ESTADO":"Rondônia", "SIGLA_UF":"RO", "INTERNACOES_POR_100K_HAB":701.17 }, { "ESTADO":"Acre", "SIGLA_UF":"AC", ... } ]</a:t>
+            </a:r>
+            <a:endParaRPr lang="en-US" sz="950" dirty="0"/>
+          </a:p>
+        </p:txBody>
+      </p:sp>
+      <p:sp>
+        <p:nvSpPr>
+          <p:cNvPr id="15" name="Shape 13"/>
+          <p:cNvSpPr/>
+          <p:nvPr/>
+        </p:nvSpPr>
+        <p:spPr>
+          <a:xfrm>
+            <a:off x="457200" y="4937760"/>
+            <a:ext cx="11247120" cy="1234440"/>
+          </a:xfrm>
+          <a:prstGeom prst="roundRect">
+            <a:avLst>
+              <a:gd name="adj" fmla="val 5926"/>
+            </a:avLst>
+          </a:prstGeom>
+          <a:solidFill>
+            <a:srgbClr val="2A2410"/>
+          </a:solidFill>
+          <a:ln w="12700">
+            <a:solidFill>
+              <a:srgbClr val="1E3A5F"/>
+            </a:solidFill>
+            <a:prstDash val="solid"/>
+          </a:ln>
+          <a:effectLst>
+            <a:outerShdw sx="100000" sy="100000" kx="0" ky="0" algn="bl" rotWithShape="0" blurRad="101600" dist="38100" dir="5400000">
+              <a:srgbClr val="000000">
+                <a:alpha val="35000"/>
+              </a:srgbClr>
+            </a:outerShdw>
+          </a:effectLst>
+        </p:spPr>
+      </p:sp>
+      <p:sp>
+        <p:nvSpPr>
+          <p:cNvPr id="16" name="Text 14"/>
+          <p:cNvSpPr/>
+          <p:nvPr/>
+        </p:nvSpPr>
+        <p:spPr>
+          <a:xfrm>
+            <a:off x="685800" y="5029200"/>
+            <a:ext cx="10789920" cy="256032"/>
+          </a:xfrm>
+          <a:prstGeom prst="rect">
+            <a:avLst/>
+          </a:prstGeom>
+          <a:noFill/>
+          <a:ln/>
+        </p:spPr>
+        <p:txBody>
+          <a:bodyPr wrap="square" lIns="0" tIns="0" rIns="0" bIns="0" rtlCol="0" anchor="ctr"/>
+          <a:lstStyle/>
+          <a:p>
+            <a:pPr indent="0" marL="0">
+              <a:buNone/>
+            </a:pPr>
+            <a:r>
+              <a:rPr lang="en-US" sz="1150" b="1" dirty="0">
+                <a:solidFill>
+                  <a:srgbClr val="F59E0B"/>
+                </a:solidFill>
+                <a:latin typeface="Calibri" pitchFamily="34" charset="0"/>
+                <a:ea typeface="Calibri" pitchFamily="34" charset="-122"/>
+                <a:cs typeface="Calibri" pitchFamily="34" charset="-120"/>
+              </a:rPr>
+              <a:t>Limitações declaradas (não escondidas)</a:t>
+            </a:r>
+            <a:endParaRPr lang="en-US" sz="1150" dirty="0"/>
+          </a:p>
+        </p:txBody>
+      </p:sp>
+      <p:sp>
+        <p:nvSpPr>
+          <p:cNvPr id="17" name="Text 15"/>
+          <p:cNvSpPr/>
+          <p:nvPr/>
+        </p:nvSpPr>
+        <p:spPr>
+          <a:xfrm>
+            <a:off x="685800" y="5303520"/>
             <a:ext cx="10789920" cy="274320"/>
           </a:xfrm>
           <a:prstGeom prst="rect">
@@ -8765,48 +9149,9 @@
               <a:buNone/>
             </a:pPr>
             <a:r>
-              <a:rPr lang="en-US" sz="1200" b="1" dirty="0">
-                <a:solidFill>
-                  <a:srgbClr val="EF4444"/>
-                </a:solidFill>
-                <a:latin typeface="Calibri" pitchFamily="34" charset="0"/>
-                <a:ea typeface="Calibri" pitchFamily="34" charset="-122"/>
-                <a:cs typeface="Calibri" pitchFamily="34" charset="-120"/>
-              </a:rPr>
-              <a:t>✗ Bloqueado nesta execução</a:t>
-            </a:r>
-            <a:endParaRPr lang="en-US" sz="1200" dirty="0"/>
-          </a:p>
-        </p:txBody>
-      </p:sp>
-      <p:sp>
-        <p:nvSpPr>
-          <p:cNvPr id="12" name="Text 10"/>
-          <p:cNvSpPr/>
-          <p:nvPr/>
-        </p:nvSpPr>
-        <p:spPr>
-          <a:xfrm>
-            <a:off x="685800" y="3611880"/>
-            <a:ext cx="10789920" cy="457200"/>
-          </a:xfrm>
-          <a:prstGeom prst="rect">
-            <a:avLst/>
-          </a:prstGeom>
-          <a:noFill/>
-          <a:ln/>
-        </p:spPr>
-        <p:txBody>
-          <a:bodyPr wrap="square" lIns="0" tIns="0" rIns="0" bIns="0" rtlCol="0" anchor="ctr"/>
-          <a:lstStyle/>
-          <a:p>
-            <a:pPr indent="0" marL="0">
-              <a:buNone/>
-            </a:pPr>
-            <a:r>
-              <a:rPr lang="en-US" sz="1000" dirty="0">
-                <a:solidFill>
-                  <a:srgbClr val="EF4444"/>
+              <a:rPr lang="en-US" sz="950" dirty="0">
+                <a:solidFill>
+                  <a:srgbClr val="F59E0B"/>
                 </a:solidFill>
                 <a:latin typeface="Calibri" pitchFamily="34" charset="0"/>
                 <a:ea typeface="Calibri" pitchFamily="34" charset="-122"/>
@@ -8818,7 +9163,7 @@
               <a:buNone/>
             </a:pPr>
             <a:r>
-              <a:rPr lang="en-US" sz="1000" dirty="0">
+              <a:rPr lang="en-US" sz="950" dirty="0">
                 <a:solidFill>
                   <a:srgbClr val="EAF6F3"/>
                 </a:solidFill>
@@ -8826,40 +9171,40 @@
                 <a:ea typeface="Calibri" pitchFamily="34" charset="-122"/>
                 <a:cs typeface="Calibri" pitchFamily="34" charset="-120"/>
               </a:rPr>
-              <a:t>Toda chamada a DBMS_CLOUD_AI.GENERATE (chat, showsql) ficou pendente 3-10 min e falhou — testado 4x, em 2 worksheets, com prompts diferentes.</a:t>
-            </a:r>
-            <a:endParaRPr lang="en-US" sz="1000" dirty="0"/>
-          </a:p>
-        </p:txBody>
-      </p:sp>
-      <p:sp>
-        <p:nvSpPr>
-          <p:cNvPr id="13" name="Text 11"/>
-          <p:cNvSpPr/>
-          <p:nvPr/>
-        </p:nvSpPr>
-        <p:spPr>
-          <a:xfrm>
-            <a:off x="685800" y="4050792"/>
-            <a:ext cx="10789920" cy="457200"/>
-          </a:xfrm>
-          <a:prstGeom prst="rect">
-            <a:avLst/>
-          </a:prstGeom>
-          <a:noFill/>
-          <a:ln/>
-        </p:spPr>
-        <p:txBody>
-          <a:bodyPr wrap="square" lIns="0" tIns="0" rIns="0" bIns="0" rtlCol="0" anchor="ctr"/>
-          <a:lstStyle/>
-          <a:p>
-            <a:pPr indent="0" marL="0">
-              <a:buNone/>
-            </a:pPr>
-            <a:r>
-              <a:rPr lang="en-US" sz="1000" dirty="0">
-                <a:solidFill>
-                  <a:srgbClr val="EF4444"/>
+              <a:t>SHOWSQL e RUNSQL são chamadas independentes ao modelo — podem gerar SQL diferente entre si (não determinismo do LLM).</a:t>
+            </a:r>
+            <a:endParaRPr lang="en-US" sz="950" dirty="0"/>
+          </a:p>
+        </p:txBody>
+      </p:sp>
+      <p:sp>
+        <p:nvSpPr>
+          <p:cNvPr id="18" name="Text 16"/>
+          <p:cNvSpPr/>
+          <p:nvPr/>
+        </p:nvSpPr>
+        <p:spPr>
+          <a:xfrm>
+            <a:off x="685800" y="5586984"/>
+            <a:ext cx="10789920" cy="274320"/>
+          </a:xfrm>
+          <a:prstGeom prst="rect">
+            <a:avLst/>
+          </a:prstGeom>
+          <a:noFill/>
+          <a:ln/>
+        </p:spPr>
+        <p:txBody>
+          <a:bodyPr wrap="square" lIns="0" tIns="0" rIns="0" bIns="0" rtlCol="0" anchor="ctr"/>
+          <a:lstStyle/>
+          <a:p>
+            <a:pPr indent="0" marL="0">
+              <a:buNone/>
+            </a:pPr>
+            <a:r>
+              <a:rPr lang="en-US" sz="950" dirty="0">
+                <a:solidFill>
+                  <a:srgbClr val="F59E0B"/>
                 </a:solidFill>
                 <a:latin typeface="Calibri" pitchFamily="34" charset="0"/>
                 <a:ea typeface="Calibri" pitchFamily="34" charset="-122"/>
@@ -8871,7 +9216,7 @@
               <a:buNone/>
             </a:pPr>
             <a:r>
-              <a:rPr lang="en-US" sz="1000" dirty="0">
+              <a:rPr lang="en-US" sz="950" dirty="0">
                 <a:solidFill>
                   <a:srgbClr val="EAF6F3"/>
                 </a:solidFill>
@@ -8879,40 +9224,40 @@
                 <a:ea typeface="Calibri" pitchFamily="34" charset="-122"/>
                 <a:cs typeface="Calibri" pitchFamily="34" charset="-120"/>
               </a:rPr>
-              <a:t>1ª tentativa (credencial OCI$RESOURCE_PRINCIPAL): erro imediato ORA-20404 com URL contendo "my$cloud_domain" não substituído — bug de configuração do sandbox, não do LEITO360.</a:t>
-            </a:r>
-            <a:endParaRPr lang="en-US" sz="1000" dirty="0"/>
-          </a:p>
-        </p:txBody>
-      </p:sp>
-      <p:sp>
-        <p:nvSpPr>
-          <p:cNvPr id="14" name="Text 12"/>
-          <p:cNvSpPr/>
-          <p:nvPr/>
-        </p:nvSpPr>
-        <p:spPr>
-          <a:xfrm>
-            <a:off x="685800" y="4489704"/>
-            <a:ext cx="10789920" cy="457200"/>
-          </a:xfrm>
-          <a:prstGeom prst="rect">
-            <a:avLst/>
-          </a:prstGeom>
-          <a:noFill/>
-          <a:ln/>
-        </p:spPr>
-        <p:txBody>
-          <a:bodyPr wrap="square" lIns="0" tIns="0" rIns="0" bIns="0" rtlCol="0" anchor="ctr"/>
-          <a:lstStyle/>
-          <a:p>
-            <a:pPr indent="0" marL="0">
-              <a:buNone/>
-            </a:pPr>
-            <a:r>
-              <a:rPr lang="en-US" sz="1000" dirty="0">
-                <a:solidFill>
-                  <a:srgbClr val="EF4444"/>
+              <a:t>O RUNSQL devolveu os valores corretos (RO 701,17 confere com o ETL) mas fora da ordem pedida — conferimos sempre contra data/processed/.</a:t>
+            </a:r>
+            <a:endParaRPr lang="en-US" sz="950" dirty="0"/>
+          </a:p>
+        </p:txBody>
+      </p:sp>
+      <p:sp>
+        <p:nvSpPr>
+          <p:cNvPr id="19" name="Text 17"/>
+          <p:cNvSpPr/>
+          <p:nvPr/>
+        </p:nvSpPr>
+        <p:spPr>
+          <a:xfrm>
+            <a:off x="685800" y="5870448"/>
+            <a:ext cx="10789920" cy="274320"/>
+          </a:xfrm>
+          <a:prstGeom prst="rect">
+            <a:avLst/>
+          </a:prstGeom>
+          <a:noFill/>
+          <a:ln/>
+        </p:spPr>
+        <p:txBody>
+          <a:bodyPr wrap="square" lIns="0" tIns="0" rIns="0" bIns="0" rtlCol="0" anchor="ctr"/>
+          <a:lstStyle/>
+          <a:p>
+            <a:pPr indent="0" marL="0">
+              <a:buNone/>
+            </a:pPr>
+            <a:r>
+              <a:rPr lang="en-US" sz="950" dirty="0">
+                <a:solidFill>
+                  <a:srgbClr val="F59E0B"/>
                 </a:solidFill>
                 <a:latin typeface="Calibri" pitchFamily="34" charset="0"/>
                 <a:ea typeface="Calibri" pitchFamily="34" charset="-122"/>
@@ -8924,7 +9269,7 @@
               <a:buNone/>
             </a:pPr>
             <a:r>
-              <a:rPr lang="en-US" sz="1000" dirty="0">
+              <a:rPr lang="en-US" sz="950" dirty="0">
                 <a:solidFill>
                   <a:srgbClr val="EAF6F3"/>
                 </a:solidFill>
@@ -8932,91 +9277,38 @@
                 <a:ea typeface="Calibri" pitchFamily="34" charset="-122"/>
                 <a:cs typeface="Calibri" pitchFamily="34" charset="-120"/>
               </a:rPr>
-              <a:t>2ª tentativa (credencial correta AI_CREDENTIAL, indicada pelo próprio workshop): sem erro imediato, mas timeout após vários minutos, sem corpo de erro recuperável.</a:t>
-            </a:r>
-            <a:endParaRPr lang="en-US" sz="1000" dirty="0"/>
-          </a:p>
-        </p:txBody>
-      </p:sp>
-      <p:sp>
-        <p:nvSpPr>
-          <p:cNvPr id="15" name="Text 13"/>
-          <p:cNvSpPr/>
-          <p:nvPr/>
-        </p:nvSpPr>
-        <p:spPr>
-          <a:xfrm>
-            <a:off x="685800" y="4928616"/>
-            <a:ext cx="10789920" cy="457200"/>
-          </a:xfrm>
-          <a:prstGeom prst="rect">
-            <a:avLst/>
-          </a:prstGeom>
-          <a:noFill/>
-          <a:ln/>
-        </p:spPr>
-        <p:txBody>
-          <a:bodyPr wrap="square" lIns="0" tIns="0" rIns="0" bIns="0" rtlCol="0" anchor="ctr"/>
-          <a:lstStyle/>
-          <a:p>
-            <a:pPr indent="0" marL="0">
-              <a:buNone/>
-            </a:pPr>
-            <a:r>
-              <a:rPr lang="en-US" sz="1000" dirty="0">
-                <a:solidFill>
-                  <a:srgbClr val="EF4444"/>
-                </a:solidFill>
-                <a:latin typeface="Calibri" pitchFamily="34" charset="0"/>
-                <a:ea typeface="Calibri" pitchFamily="34" charset="-122"/>
-                <a:cs typeface="Calibri" pitchFamily="34" charset="-120"/>
-              </a:rPr>
-              <a:t>• </a:t>
-            </a:r>
-            <a:pPr indent="0" marL="0">
-              <a:buNone/>
-            </a:pPr>
-            <a:r>
-              <a:rPr lang="en-US" sz="1000" dirty="0">
-                <a:solidFill>
-                  <a:srgbClr val="EAF6F3"/>
-                </a:solidFill>
-                <a:latin typeface="Calibri" pitchFamily="34" charset="0"/>
-                <a:ea typeface="Calibri" pitchFamily="34" charset="-122"/>
-                <a:cs typeface="Calibri" pitchFamily="34" charset="-120"/>
-              </a:rPr>
-              <a:t>Uma consulta SQL comum (SELECT 1 FROM dual) no mesmo worksheet respondeu em milissegundos — confirma que o banco está saudável; o problema é isolado ao serviço de inferência do OCI Generative AI.</a:t>
-            </a:r>
-            <a:endParaRPr lang="en-US" sz="1000" dirty="0"/>
-          </a:p>
-        </p:txBody>
-      </p:sp>
-      <p:sp>
-        <p:nvSpPr>
-          <p:cNvPr id="16" name="Text 14"/>
-          <p:cNvSpPr/>
-          <p:nvPr/>
-        </p:nvSpPr>
-        <p:spPr>
-          <a:xfrm>
-            <a:off x="457200" y="5577840"/>
-            <a:ext cx="11247120" cy="365760"/>
-          </a:xfrm>
-          <a:prstGeom prst="rect">
-            <a:avLst/>
-          </a:prstGeom>
-          <a:noFill/>
-          <a:ln/>
-        </p:spPr>
-        <p:txBody>
-          <a:bodyPr wrap="square" lIns="0" tIns="0" rIns="0" bIns="0" rtlCol="0" anchor="ctr"/>
-          <a:lstStyle/>
-          <a:p>
-            <a:pPr indent="0" marL="0">
-              <a:buNone/>
-            </a:pPr>
-            <a:r>
-              <a:rPr lang="en-US" sz="1000" i="1" dirty="0">
+              <a:t>A ação 'chat' não consulta o banco e alucinou sobre o próprio projeto. Só SHOWSQL e RUNSQL usam os dados do LEITO360.</a:t>
+            </a:r>
+            <a:endParaRPr lang="en-US" sz="950" dirty="0"/>
+          </a:p>
+        </p:txBody>
+      </p:sp>
+      <p:sp>
+        <p:nvSpPr>
+          <p:cNvPr id="20" name="Text 18"/>
+          <p:cNvSpPr/>
+          <p:nvPr/>
+        </p:nvSpPr>
+        <p:spPr>
+          <a:xfrm>
+            <a:off x="457200" y="6263640"/>
+            <a:ext cx="11247120" cy="320040"/>
+          </a:xfrm>
+          <a:prstGeom prst="rect">
+            <a:avLst/>
+          </a:prstGeom>
+          <a:noFill/>
+          <a:ln/>
+        </p:spPr>
+        <p:txBody>
+          <a:bodyPr wrap="square" lIns="0" tIns="0" rIns="0" bIns="0" rtlCol="0" anchor="ctr"/>
+          <a:lstStyle/>
+          <a:p>
+            <a:pPr indent="0" marL="0">
+              <a:buNone/>
+            </a:pPr>
+            <a:r>
+              <a:rPr lang="en-US" sz="900" i="1" dirty="0">
                 <a:solidFill>
                   <a:srgbClr val="94A3B8"/>
                 </a:solidFill>
@@ -9024,15 +9316,15 @@
                 <a:ea typeface="Calibri" pitchFamily="34" charset="-122"/>
                 <a:cs typeface="Calibri" pitchFamily="34" charset="-120"/>
               </a:rPr>
-              <a:t>Próximo passo: reexecutar em um ambiente com OCI Generative AI confirmadamente saudável (tenancy própria ou nova reserva de sandbox) e preencher as evidências reais das 5 perguntas.</a:t>
-            </a:r>
-            <a:endParaRPr lang="en-US" sz="1000" dirty="0"/>
-          </a:p>
-        </p:txBody>
-      </p:sp>
-      <p:sp>
-        <p:nvSpPr>
-          <p:cNvPr id="17" name="Text 15"/>
+              <a:t>Provider Cohere. As opções OCI Generative AI foram testadas em 2 sandboxes, 2 tenancies, 3 regiões e 2 credenciais — todas devolveram ORA-20404 com a URL malformada "…oci.my$cloud_domain…". Percurso completo em docs/evidencias/select_ai_perguntas.md.</a:t>
+            </a:r>
+            <a:endParaRPr lang="en-US" sz="900" dirty="0"/>
+          </a:p>
+        </p:txBody>
+      </p:sp>
+      <p:sp>
+        <p:nvSpPr>
+          <p:cNvPr id="21" name="Text 19"/>
           <p:cNvSpPr/>
           <p:nvPr/>
         </p:nvSpPr>
@@ -9071,7 +9363,7 @@
       </p:sp>
       <p:sp>
         <p:nvSpPr>
-          <p:cNvPr id="18" name="Text 16"/>
+          <p:cNvPr id="22" name="Text 20"/>
           <p:cNvSpPr/>
           <p:nvPr/>
         </p:nvSpPr>
@@ -11719,7 +12011,7 @@
                 <a:ea typeface="Calibri" pitchFamily="34" charset="-122"/>
                 <a:cs typeface="Calibri" pitchFamily="34" charset="-120"/>
               </a:rPr>
-              <a:t>• Select AI seguindo literalmente o LiveLabs 4222</a:t>
+              <a:t>• Select AI respondendo: NL2SQL real sobre a view analítica</a:t>
             </a:r>
             <a:endParaRPr lang="en-US" sz="1100" dirty="0"/>
           </a:p>
@@ -11954,7 +12246,7 @@
                 <a:ea typeface="Calibri" pitchFamily="34" charset="-122"/>
                 <a:cs typeface="Calibri" pitchFamily="34" charset="-120"/>
               </a:rPr>
-              <a:t>• Select AI depende de provedor de LLM configurado pelo usuário</a:t>
+              <a:t>• SQL gerado pelo LLM é não determinístico — sempre conferido</a:t>
             </a:r>
             <a:endParaRPr lang="en-US" sz="1100" dirty="0"/>
           </a:p>
@@ -12129,7 +12421,7 @@
                 <a:ea typeface="Calibri" pitchFamily="34" charset="-122"/>
                 <a:cs typeface="Calibri" pitchFamily="34" charset="-120"/>
               </a:rPr>
-              <a:t>• Gravar e publicar o vídeo pitch</a:t>
+              <a:t>• Publicar o vídeo pitch (já gravado)</a:t>
             </a:r>
             <a:endParaRPr lang="en-US" sz="1100" dirty="0"/>
           </a:p>
@@ -14510,7 +14802,7 @@
                           <a:ea typeface="Calibri" pitchFamily="34" charset="-122"/>
                           <a:cs typeface="Calibri" pitchFamily="34" charset="-120"/>
                         </a:rPr>
-                        <a:t>Perfil real criado; GENERATE bloqueado pelo OCI GenAI do sandbox</a:t>
+                        <a:t>Perfil real respondendo (provider Cohere): NL2SQL sobre a view analítica</a:t>
                       </a:r>
                       <a:endParaRPr lang="en-US" sz="1050" dirty="0">
                         <a:latin typeface="Calibri" charset="0"/>
@@ -14572,13 +14864,13 @@
                       <a:r>
                         <a:rPr lang="en-US" sz="1050" b="1" dirty="0">
                           <a:solidFill>
-                            <a:srgbClr val="F59E0B"/>
+                            <a:srgbClr val="14B8A6"/>
                           </a:solidFill>
                           <a:latin typeface="Calibri" pitchFamily="34" charset="0"/>
                           <a:ea typeface="Calibri" pitchFamily="34" charset="-122"/>
                           <a:cs typeface="Calibri" pitchFamily="34" charset="-120"/>
                         </a:rPr>
-                        <a:t>Parcial*</a:t>
+                        <a:t>Implementado</a:t>
                       </a:r>
                       <a:endParaRPr lang="en-US" sz="1050" dirty="0">
                         <a:latin typeface="Calibri" charset="0"/>
@@ -15215,7 +15507,7 @@
                 <a:ea typeface="Calibri" pitchFamily="34" charset="-122"/>
                 <a:cs typeface="Calibri" pitchFamily="34" charset="-120"/>
               </a:rPr>
-              <a:t>* Oracle e dashboard executados de verdade (evidências nos slides 6, 7, 8 e 14). O Select AI teve o perfil criado com sucesso, mas o serviço OCI Generative AI do sandbox LiveLabs não respondeu — diagnóstico completo no slide 15.</a:t>
+              <a:t>Oracle, Select AI e dashboard executados de verdade (evidências nos slides 6, 7, 8, 14 e 15). O Select AI só funcionou depois de trocar o provider de OCI Generative AI para Cohere — o percurso do diagnóstico está no slide 15.</a:t>
             </a:r>
             <a:endParaRPr lang="en-US" sz="950" dirty="0"/>
           </a:p>

--- a/EC_Sprint_2_1TSCOA_EvidenciasConstrucao_LEITO360_GRUPO61.pptx
+++ b/EC_Sprint_2_1TSCOA_EvidenciasConstrucao_LEITO360_GRUPO61.pptx
@@ -4331,7 +4331,7 @@
                 <a:ea typeface="Calibri" pitchFamily="34" charset="-122"/>
                 <a:cs typeface="Calibri" pitchFamily="34" charset="-120"/>
               </a:rPr>
-              <a:t>Vídeo pitch (gravado; edição e publicação com outro integrante)</a:t>
+              <a:t>Vídeo pitch (gravado, com demonstração ao vivo do Oracle e do dashboard)</a:t>
             </a:r>
             <a:endParaRPr lang="en-US" sz="1200" dirty="0"/>
           </a:p>
@@ -4368,7 +4368,7 @@
         <p:spPr>
           <a:xfrm>
             <a:off x="6903720" y="5879592"/>
-            <a:ext cx="1664208" cy="219456"/>
+            <a:ext cx="2377440" cy="219456"/>
           </a:xfrm>
           <a:prstGeom prst="roundRect">
             <a:avLst>
@@ -4376,7 +4376,7 @@
             </a:avLst>
           </a:prstGeom>
           <a:solidFill>
-            <a:srgbClr val="F59E0B"/>
+            <a:srgbClr val="14B8A6"/>
           </a:solidFill>
           <a:ln/>
         </p:spPr>
@@ -4408,13 +4408,13 @@
             <a:r>
               <a:rPr lang="en-US" sz="1100" b="1" dirty="0">
                 <a:solidFill>
-                  <a:srgbClr val="F59E0B"/>
-                </a:solidFill>
-                <a:latin typeface="Calibri" pitchFamily="34" charset="0"/>
-                <a:ea typeface="Calibri" pitchFamily="34" charset="-122"/>
-                <a:cs typeface="Calibri" pitchFamily="34" charset="-120"/>
-              </a:rPr>
-              <a:t>70%</a:t>
+                  <a:srgbClr val="14B8A6"/>
+                </a:solidFill>
+                <a:latin typeface="Calibri" pitchFamily="34" charset="0"/>
+                <a:ea typeface="Calibri" pitchFamily="34" charset="-122"/>
+                <a:cs typeface="Calibri" pitchFamily="34" charset="-120"/>
+              </a:rPr>
+              <a:t>100%</a:t>
             </a:r>
             <a:endParaRPr lang="en-US" sz="1100" dirty="0"/>
           </a:p>
@@ -4443,7 +4443,7 @@
           </a:solidFill>
           <a:ln w="12700">
             <a:solidFill>
-              <a:srgbClr val="F59E0B"/>
+              <a:srgbClr val="14B8A6"/>
             </a:solidFill>
             <a:prstDash val="solid"/>
           </a:ln>
@@ -4476,13 +4476,13 @@
             <a:r>
               <a:rPr lang="en-US" sz="1000" b="1" dirty="0">
                 <a:solidFill>
-                  <a:srgbClr val="F59E0B"/>
-                </a:solidFill>
-                <a:latin typeface="Calibri" pitchFamily="34" charset="0"/>
-                <a:ea typeface="Calibri" pitchFamily="34" charset="-122"/>
-                <a:cs typeface="Calibri" pitchFamily="34" charset="-120"/>
-              </a:rPr>
-              <a:t>Em produção</a:t>
+                  <a:srgbClr val="14B8A6"/>
+                </a:solidFill>
+                <a:latin typeface="Calibri" pitchFamily="34" charset="0"/>
+                <a:ea typeface="Calibri" pitchFamily="34" charset="-122"/>
+                <a:cs typeface="Calibri" pitchFamily="34" charset="-120"/>
+              </a:rPr>
+              <a:t>Implementado</a:t>
             </a:r>
             <a:endParaRPr lang="en-US" sz="1000" dirty="0"/>
           </a:p>
@@ -10688,7 +10688,7 @@
                 <a:ea typeface="Calibri" pitchFamily="34" charset="-122"/>
                 <a:cs typeface="Calibri" pitchFamily="34" charset="-120"/>
               </a:rPr>
-              <a:t>Até 5 minutos — plano de gravação em docs/roteiro_pitch/roteiro.md e o texto falado, dividido por integrante, em texto_pitch.md.</a:t>
+              <a:t>Gravado, com demonstração ao vivo do dashboard publicado e do Oracle Database Actions. Plano em docs/roteiro_pitch/roteiro.md e o texto falado, dividido por integrante, em texto_pitch.md.</a:t>
             </a:r>
             <a:endParaRPr lang="en-US" sz="1400" dirty="0"/>
           </a:p>
@@ -11625,7 +11625,21 @@
               <a:buNone/>
             </a:pPr>
             <a:r>
-              <a:rPr lang="en-US" sz="1200" i="1" dirty="0">
+              <a:rPr lang="en-US" sz="1300" b="1" dirty="0">
+                <a:solidFill>
+                  <a:srgbClr val="EAF6F3"/>
+                </a:solidFill>
+                <a:latin typeface="Calibri" pitchFamily="34" charset="0"/>
+                <a:ea typeface="Calibri" pitchFamily="34" charset="-122"/>
+                <a:cs typeface="Calibri" pitchFamily="34" charset="-120"/>
+              </a:rPr>
+              <a:t>Link do vídeo (YouTube): </a:t>
+            </a:r>
+            <a:pPr indent="0" marL="0">
+              <a:buNone/>
+            </a:pPr>
+            <a:r>
+              <a:rPr lang="en-US" sz="1300" b="1" dirty="0">
                 <a:solidFill>
                   <a:srgbClr val="F59E0B"/>
                 </a:solidFill>
@@ -11633,9 +11647,9 @@
                 <a:ea typeface="Calibri" pitchFamily="34" charset="-122"/>
                 <a:cs typeface="Calibri" pitchFamily="34" charset="-120"/>
               </a:rPr>
-              <a:t>Link do vídeo (YouTube): [preencher após gravação e publicação]</a:t>
-            </a:r>
-            <a:endParaRPr lang="en-US" sz="1200" dirty="0"/>
+              <a:t>COLE O LINK AQUI</a:t>
+            </a:r>
+            <a:endParaRPr lang="en-US" sz="1300" dirty="0"/>
           </a:p>
         </p:txBody>
       </p:sp>
@@ -12421,7 +12435,7 @@
                 <a:ea typeface="Calibri" pitchFamily="34" charset="-122"/>
                 <a:cs typeface="Calibri" pitchFamily="34" charset="-120"/>
               </a:rPr>
-              <a:t>• Publicar o vídeo pitch (já gravado)</a:t>
+              <a:t>• Transcrever as saídas das perguntas 2 a 5 do Select AI</a:t>
             </a:r>
             <a:endParaRPr lang="en-US" sz="1100" dirty="0"/>
           </a:p>

--- a/EC_Sprint_2_1TSCOA_EvidenciasConstrucao_LEITO360_GRUPO61.pptx
+++ b/EC_Sprint_2_1TSCOA_EvidenciasConstrucao_LEITO360_GRUPO61.pptx
@@ -8687,7 +8687,7 @@
                 <a:ea typeface="Cambria" pitchFamily="34" charset="-122"/>
                 <a:cs typeface="Cambria" pitchFamily="34" charset="-120"/>
               </a:rPr>
-              <a:t>Select AI — NL2SQL real sobre os dados do projeto</a:t>
+              <a:t>Select AI — NL2SQL real, e conferido contra a fonte</a:t>
             </a:r>
             <a:endParaRPr lang="en-US" sz="2800" dirty="0"/>
           </a:p>
@@ -8726,7 +8726,7 @@
                 <a:ea typeface="Calibri" pitchFamily="34" charset="-122"/>
                 <a:cs typeface="Calibri" pitchFamily="34" charset="-120"/>
               </a:rPr>
-              <a:t>Pergunta em português → SQL gerado pelo modelo → resultado. Transcrito da tela, sem edição.</a:t>
+              <a:t>Pergunta em português → SQL gerado pelo modelo → resultado. Transcrito da tela, sem edição. Provider Cohere (as opções OCI GenAI falharam em 2 sandboxes, 3 regiões e 2 credenciais — percurso em docs/evidencias/).</a:t>
             </a:r>
             <a:endParaRPr lang="en-US" sz="1400" dirty="0"/>
           </a:p>
@@ -8740,7 +8740,7 @@
         </p:nvSpPr>
         <p:spPr>
           <a:xfrm>
-            <a:off x="457200" y="2057400"/>
+            <a:off x="457200" y="2011680"/>
             <a:ext cx="11247120" cy="1691640"/>
           </a:xfrm>
           <a:prstGeom prst="roundRect">
@@ -8774,7 +8774,7 @@
         </p:nvSpPr>
         <p:spPr>
           <a:xfrm>
-            <a:off x="685800" y="2148840"/>
+            <a:off x="685800" y="2084832"/>
             <a:ext cx="10789920" cy="256032"/>
           </a:xfrm>
           <a:prstGeom prst="rect">
@@ -8799,7 +8799,7 @@
                 <a:ea typeface="Calibri" pitchFamily="34" charset="-122"/>
                 <a:cs typeface="Calibri" pitchFamily="34" charset="-120"/>
               </a:rPr>
-              <a:t>✓ Pergunta 1 — SHOWSQL (2,87 s): SQL gerado pelo modelo</a:t>
+              <a:t>Pergunta 1 — SHOWSQL (2,87 s): o SQL que o modelo gerou sozinho</a:t>
             </a:r>
             <a:endParaRPr lang="en-US" sz="1150" dirty="0"/>
           </a:p>
@@ -8813,7 +8813,7 @@
         </p:nvSpPr>
         <p:spPr>
           <a:xfrm>
-            <a:off x="685800" y="2404872"/>
+            <a:off x="685800" y="2340864"/>
             <a:ext cx="10789920" cy="228600"/>
           </a:xfrm>
           <a:prstGeom prst="rect">
@@ -8852,7 +8852,7 @@
         </p:nvSpPr>
         <p:spPr>
           <a:xfrm>
-            <a:off x="685800" y="2679192"/>
+            <a:off x="685800" y="2615184"/>
             <a:ext cx="10789920" cy="457200"/>
           </a:xfrm>
           <a:prstGeom prst="rect">
@@ -8908,7 +8908,7 @@
         </p:nvSpPr>
         <p:spPr>
           <a:xfrm>
-            <a:off x="685800" y="3200400"/>
+            <a:off x="685800" y="3136392"/>
             <a:ext cx="10789920" cy="457200"/>
           </a:xfrm>
           <a:prstGeom prst="rect">
@@ -8933,7 +8933,7 @@
                 <a:ea typeface="Calibri" pitchFamily="34" charset="-122"/>
                 <a:cs typeface="Calibri" pitchFamily="34" charset="-120"/>
               </a:rPr>
-              <a:t>O modelo escolheu sozinho a view analítica, a competência e o indicador corretos. O atributo "comments": "true" envia os COMMENT ON TABLE/COLUMN dos scripts 01, 02 e 05 como contexto semântico.</a:t>
+              <a:t>Escolheu a view analítica, a competência e o indicador corretos sem dica no prompt — o atributo "comments": "true" envia os COMMENT ON TABLE/COLUMN dos scripts 01, 02 e 05 como contexto semântico.</a:t>
             </a:r>
             <a:endParaRPr lang="en-US" sz="1000" dirty="0"/>
           </a:p>
@@ -8941,130 +8941,1324 @@
       </p:sp>
       <p:sp>
         <p:nvSpPr>
-          <p:cNvPr id="12" name="Shape 10"/>
-          <p:cNvSpPr/>
-          <p:nvPr/>
-        </p:nvSpPr>
-        <p:spPr>
-          <a:xfrm>
-            <a:off x="457200" y="3886200"/>
-            <a:ext cx="11247120" cy="914400"/>
+          <p:cNvPr id="12" name="Text 10"/>
+          <p:cNvSpPr/>
+          <p:nvPr/>
+        </p:nvSpPr>
+        <p:spPr>
+          <a:xfrm>
+            <a:off x="457200" y="3840480"/>
+            <a:ext cx="11247120" cy="274320"/>
+          </a:xfrm>
+          <a:prstGeom prst="rect">
+            <a:avLst/>
+          </a:prstGeom>
+          <a:noFill/>
+          <a:ln/>
+        </p:spPr>
+        <p:txBody>
+          <a:bodyPr wrap="square" lIns="0" tIns="0" rIns="0" bIns="0" rtlCol="0" anchor="ctr"/>
+          <a:lstStyle/>
+          <a:p>
+            <a:pPr indent="0" marL="0">
+              <a:buNone/>
+            </a:pPr>
+            <a:r>
+              <a:rPr lang="en-US" sz="1150" b="1" dirty="0">
+                <a:solidFill>
+                  <a:srgbClr val="FFFFFF"/>
+                </a:solidFill>
+                <a:latin typeface="Calibri" pitchFamily="34" charset="0"/>
+                <a:ea typeface="Calibri" pitchFamily="34" charset="-122"/>
+                <a:cs typeface="Calibri" pitchFamily="34" charset="-120"/>
+              </a:rPr>
+              <a:t>Conferimos as 5 respostas contra o pipeline validado (data/processed/) — o resultado honesto:</a:t>
+            </a:r>
+            <a:endParaRPr lang="en-US" sz="1150" dirty="0"/>
+          </a:p>
+        </p:txBody>
+      </p:sp>
+      <p:graphicFrame>
+        <p:nvGraphicFramePr>
+          <p:cNvPr id="16" name="Table 0"/>
+          <p:cNvGraphicFramePr>
+            <a:graphicFrameLocks noGrp="1"/>
+          </p:cNvGraphicFramePr>
+          <p:nvPr>
+            <p:extLst>
+              <p:ext uri="{D42A27DB-BD31-4B8C-83A1-F6EECF244321}">
+                <p14:modId xmlns:p14="http://schemas.microsoft.com/office/powerpoint/2010/main" val="1579011935"/>
+              </p:ext>
+            </p:extLst>
+          </p:nvPr>
+        </p:nvGraphicFramePr>
+        <p:xfrm>
+          <a:off x="457200" y="4160520"/>
+          <a:ext cx="11247120" cy="1691640"/>
+        </p:xfrm>
+        <a:graphic>
+          <a:graphicData uri="http://schemas.openxmlformats.org/drawingml/2006/table">
+            <a:tbl>
+              <a:tblPr/>
+              <a:tblGrid>
+                <a:gridCol w="3108960"/>
+                <a:gridCol w="6766560"/>
+                <a:gridCol w="1371600"/>
+              </a:tblGrid>
+              <a:tr h="281940">
+                <a:tc>
+                  <a:txBody>
+                    <a:bodyPr/>
+                    <a:lstStyle/>
+                    <a:p>
+                      <a:pPr indent="0" marL="0">
+                        <a:buNone/>
+                      </a:pPr>
+                      <a:r>
+                        <a:rPr lang="en-US" sz="950" b="1" dirty="0">
+                          <a:solidFill>
+                            <a:srgbClr val="FFFFFF"/>
+                          </a:solidFill>
+                          <a:latin typeface="Calibri" pitchFamily="34" charset="0"/>
+                          <a:ea typeface="Calibri" pitchFamily="34" charset="-122"/>
+                          <a:cs typeface="Calibri" pitchFamily="34" charset="-120"/>
+                        </a:rPr>
+                        <a:t>Pergunta de negócio</a:t>
+                      </a:r>
+                      <a:endParaRPr lang="en-US" sz="950" dirty="0">
+                        <a:latin typeface="Calibri" charset="0"/>
+                        <a:ea typeface="Calibri" charset="0"/>
+                        <a:cs typeface="Calibri" charset="0"/>
+                      </a:endParaRPr>
+                    </a:p>
+                  </a:txBody>
+                  <a:tcPr marL="91440" marR="91440" marT="45720" marB="45720">
+                    <a:lnL w="6350" cap="flat" cmpd="sng" algn="ctr">
+                      <a:solidFill>
+                        <a:srgbClr val="1E3A5F"/>
+                      </a:solidFill>
+                      <a:prstDash val="solid"/>
+                      <a:round/>
+                      <a:headEnd type="none" w="med" len="med"/>
+                      <a:tailEnd type="none" w="med" len="med"/>
+                    </a:lnL>
+                    <a:lnR w="6350" cap="flat" cmpd="sng" algn="ctr">
+                      <a:solidFill>
+                        <a:srgbClr val="1E3A5F"/>
+                      </a:solidFill>
+                      <a:prstDash val="solid"/>
+                      <a:round/>
+                      <a:headEnd type="none" w="med" len="med"/>
+                      <a:tailEnd type="none" w="med" len="med"/>
+                    </a:lnR>
+                    <a:lnT w="6350" cap="flat" cmpd="sng" algn="ctr">
+                      <a:solidFill>
+                        <a:srgbClr val="1E3A5F"/>
+                      </a:solidFill>
+                      <a:prstDash val="solid"/>
+                      <a:round/>
+                      <a:headEnd type="none" w="med" len="med"/>
+                      <a:tailEnd type="none" w="med" len="med"/>
+                    </a:lnT>
+                    <a:lnB w="6350" cap="flat" cmpd="sng" algn="ctr">
+                      <a:solidFill>
+                        <a:srgbClr val="1E3A5F"/>
+                      </a:solidFill>
+                      <a:prstDash val="solid"/>
+                      <a:round/>
+                      <a:headEnd type="none" w="med" len="med"/>
+                      <a:tailEnd type="none" w="med" len="med"/>
+                    </a:lnB>
+                    <a:solidFill>
+                      <a:srgbClr val="091832"/>
+                    </a:solidFill>
+                  </a:tcPr>
+                </a:tc>
+                <a:tc>
+                  <a:txBody>
+                    <a:bodyPr/>
+                    <a:lstStyle/>
+                    <a:p>
+                      <a:pPr indent="0" marL="0">
+                        <a:buNone/>
+                      </a:pPr>
+                      <a:r>
+                        <a:rPr lang="en-US" sz="950" b="1" dirty="0">
+                          <a:solidFill>
+                            <a:srgbClr val="FFFFFF"/>
+                          </a:solidFill>
+                          <a:latin typeface="Calibri" pitchFamily="34" charset="0"/>
+                          <a:ea typeface="Calibri" pitchFamily="34" charset="-122"/>
+                          <a:cs typeface="Calibri" pitchFamily="34" charset="-120"/>
+                        </a:rPr>
+                        <a:t>Resposta do Select AI</a:t>
+                      </a:r>
+                      <a:endParaRPr lang="en-US" sz="950" dirty="0">
+                        <a:latin typeface="Calibri" charset="0"/>
+                        <a:ea typeface="Calibri" charset="0"/>
+                        <a:cs typeface="Calibri" charset="0"/>
+                      </a:endParaRPr>
+                    </a:p>
+                  </a:txBody>
+                  <a:tcPr marL="91440" marR="91440" marT="45720" marB="45720">
+                    <a:lnL w="6350" cap="flat" cmpd="sng" algn="ctr">
+                      <a:solidFill>
+                        <a:srgbClr val="1E3A5F"/>
+                      </a:solidFill>
+                      <a:prstDash val="solid"/>
+                      <a:round/>
+                      <a:headEnd type="none" w="med" len="med"/>
+                      <a:tailEnd type="none" w="med" len="med"/>
+                    </a:lnL>
+                    <a:lnR w="6350" cap="flat" cmpd="sng" algn="ctr">
+                      <a:solidFill>
+                        <a:srgbClr val="1E3A5F"/>
+                      </a:solidFill>
+                      <a:prstDash val="solid"/>
+                      <a:round/>
+                      <a:headEnd type="none" w="med" len="med"/>
+                      <a:tailEnd type="none" w="med" len="med"/>
+                    </a:lnR>
+                    <a:lnT w="6350" cap="flat" cmpd="sng" algn="ctr">
+                      <a:solidFill>
+                        <a:srgbClr val="1E3A5F"/>
+                      </a:solidFill>
+                      <a:prstDash val="solid"/>
+                      <a:round/>
+                      <a:headEnd type="none" w="med" len="med"/>
+                      <a:tailEnd type="none" w="med" len="med"/>
+                    </a:lnT>
+                    <a:lnB w="6350" cap="flat" cmpd="sng" algn="ctr">
+                      <a:solidFill>
+                        <a:srgbClr val="1E3A5F"/>
+                      </a:solidFill>
+                      <a:prstDash val="solid"/>
+                      <a:round/>
+                      <a:headEnd type="none" w="med" len="med"/>
+                      <a:tailEnd type="none" w="med" len="med"/>
+                    </a:lnB>
+                    <a:solidFill>
+                      <a:srgbClr val="091832"/>
+                    </a:solidFill>
+                  </a:tcPr>
+                </a:tc>
+                <a:tc>
+                  <a:txBody>
+                    <a:bodyPr/>
+                    <a:lstStyle/>
+                    <a:p>
+                      <a:pPr indent="0" marL="0">
+                        <a:buNone/>
+                      </a:pPr>
+                      <a:r>
+                        <a:rPr lang="en-US" sz="950" b="1" dirty="0">
+                          <a:solidFill>
+                            <a:srgbClr val="FFFFFF"/>
+                          </a:solidFill>
+                          <a:latin typeface="Calibri" pitchFamily="34" charset="0"/>
+                          <a:ea typeface="Calibri" pitchFamily="34" charset="-122"/>
+                          <a:cs typeface="Calibri" pitchFamily="34" charset="-120"/>
+                        </a:rPr>
+                        <a:t>Conferência</a:t>
+                      </a:r>
+                      <a:endParaRPr lang="en-US" sz="950" dirty="0">
+                        <a:latin typeface="Calibri" charset="0"/>
+                        <a:ea typeface="Calibri" charset="0"/>
+                        <a:cs typeface="Calibri" charset="0"/>
+                      </a:endParaRPr>
+                    </a:p>
+                  </a:txBody>
+                  <a:tcPr marL="91440" marR="91440" marT="45720" marB="45720">
+                    <a:lnL w="6350" cap="flat" cmpd="sng" algn="ctr">
+                      <a:solidFill>
+                        <a:srgbClr val="1E3A5F"/>
+                      </a:solidFill>
+                      <a:prstDash val="solid"/>
+                      <a:round/>
+                      <a:headEnd type="none" w="med" len="med"/>
+                      <a:tailEnd type="none" w="med" len="med"/>
+                    </a:lnL>
+                    <a:lnR w="6350" cap="flat" cmpd="sng" algn="ctr">
+                      <a:solidFill>
+                        <a:srgbClr val="1E3A5F"/>
+                      </a:solidFill>
+                      <a:prstDash val="solid"/>
+                      <a:round/>
+                      <a:headEnd type="none" w="med" len="med"/>
+                      <a:tailEnd type="none" w="med" len="med"/>
+                    </a:lnR>
+                    <a:lnT w="6350" cap="flat" cmpd="sng" algn="ctr">
+                      <a:solidFill>
+                        <a:srgbClr val="1E3A5F"/>
+                      </a:solidFill>
+                      <a:prstDash val="solid"/>
+                      <a:round/>
+                      <a:headEnd type="none" w="med" len="med"/>
+                      <a:tailEnd type="none" w="med" len="med"/>
+                    </a:lnT>
+                    <a:lnB w="6350" cap="flat" cmpd="sng" algn="ctr">
+                      <a:solidFill>
+                        <a:srgbClr val="1E3A5F"/>
+                      </a:solidFill>
+                      <a:prstDash val="solid"/>
+                      <a:round/>
+                      <a:headEnd type="none" w="med" len="med"/>
+                      <a:tailEnd type="none" w="med" len="med"/>
+                    </a:lnB>
+                    <a:solidFill>
+                      <a:srgbClr val="091832"/>
+                    </a:solidFill>
+                  </a:tcPr>
+                </a:tc>
+              </a:tr>
+              <a:tr h="281940">
+                <a:tc>
+                  <a:txBody>
+                    <a:bodyPr/>
+                    <a:lstStyle/>
+                    <a:p>
+                      <a:pPr indent="0" marL="0">
+                        <a:buNone/>
+                      </a:pPr>
+                      <a:r>
+                        <a:rPr lang="en-US" sz="950" dirty="0">
+                          <a:solidFill>
+                            <a:srgbClr val="EAF6F3"/>
+                          </a:solidFill>
+                          <a:latin typeface="Calibri" pitchFamily="34" charset="0"/>
+                          <a:ea typeface="Calibri" pitchFamily="34" charset="-122"/>
+                          <a:cs typeface="Calibri" pitchFamily="34" charset="-120"/>
+                        </a:rPr>
+                        <a:t>1 · Pressão assistencial por UF</a:t>
+                      </a:r>
+                      <a:endParaRPr lang="en-US" sz="950" dirty="0">
+                        <a:latin typeface="Calibri" charset="0"/>
+                        <a:ea typeface="Calibri" charset="0"/>
+                        <a:cs typeface="Calibri" charset="0"/>
+                      </a:endParaRPr>
+                    </a:p>
+                  </a:txBody>
+                  <a:tcPr marL="91440" marR="91440" marT="45720" marB="45720" anchor="ctr">
+                    <a:lnL w="6350" cap="flat" cmpd="sng" algn="ctr">
+                      <a:solidFill>
+                        <a:srgbClr val="1E3A5F"/>
+                      </a:solidFill>
+                      <a:prstDash val="solid"/>
+                      <a:round/>
+                      <a:headEnd type="none" w="med" len="med"/>
+                      <a:tailEnd type="none" w="med" len="med"/>
+                    </a:lnL>
+                    <a:lnR w="6350" cap="flat" cmpd="sng" algn="ctr">
+                      <a:solidFill>
+                        <a:srgbClr val="1E3A5F"/>
+                      </a:solidFill>
+                      <a:prstDash val="solid"/>
+                      <a:round/>
+                      <a:headEnd type="none" w="med" len="med"/>
+                      <a:tailEnd type="none" w="med" len="med"/>
+                    </a:lnR>
+                    <a:lnT w="6350" cap="flat" cmpd="sng" algn="ctr">
+                      <a:solidFill>
+                        <a:srgbClr val="1E3A5F"/>
+                      </a:solidFill>
+                      <a:prstDash val="solid"/>
+                      <a:round/>
+                      <a:headEnd type="none" w="med" len="med"/>
+                      <a:tailEnd type="none" w="med" len="med"/>
+                    </a:lnT>
+                    <a:lnB w="6350" cap="flat" cmpd="sng" algn="ctr">
+                      <a:solidFill>
+                        <a:srgbClr val="1E3A5F"/>
+                      </a:solidFill>
+                      <a:prstDash val="solid"/>
+                      <a:round/>
+                      <a:headEnd type="none" w="med" len="med"/>
+                      <a:tailEnd type="none" w="med" len="med"/>
+                    </a:lnB>
+                    <a:solidFill>
+                      <a:srgbClr val="0F2A4A"/>
+                    </a:solidFill>
+                  </a:tcPr>
+                </a:tc>
+                <a:tc>
+                  <a:txBody>
+                    <a:bodyPr/>
+                    <a:lstStyle/>
+                    <a:p>
+                      <a:pPr indent="0" marL="0">
+                        <a:buNone/>
+                      </a:pPr>
+                      <a:r>
+                        <a:rPr lang="en-US" sz="950" dirty="0">
+                          <a:solidFill>
+                            <a:srgbClr val="EAF6F3"/>
+                          </a:solidFill>
+                          <a:latin typeface="Calibri" pitchFamily="34" charset="0"/>
+                          <a:ea typeface="Calibri" pitchFamily="34" charset="-122"/>
+                          <a:cs typeface="Calibri" pitchFamily="34" charset="-120"/>
+                        </a:rPr>
+                        <a:t>Valores conferem (RO 701,17), mas fora da ordem pedida</a:t>
+                      </a:r>
+                      <a:endParaRPr lang="en-US" sz="950" dirty="0">
+                        <a:latin typeface="Calibri" charset="0"/>
+                        <a:ea typeface="Calibri" charset="0"/>
+                        <a:cs typeface="Calibri" charset="0"/>
+                      </a:endParaRPr>
+                    </a:p>
+                  </a:txBody>
+                  <a:tcPr marL="91440" marR="91440" marT="45720" marB="45720" anchor="ctr">
+                    <a:lnL w="6350" cap="flat" cmpd="sng" algn="ctr">
+                      <a:solidFill>
+                        <a:srgbClr val="1E3A5F"/>
+                      </a:solidFill>
+                      <a:prstDash val="solid"/>
+                      <a:round/>
+                      <a:headEnd type="none" w="med" len="med"/>
+                      <a:tailEnd type="none" w="med" len="med"/>
+                    </a:lnL>
+                    <a:lnR w="6350" cap="flat" cmpd="sng" algn="ctr">
+                      <a:solidFill>
+                        <a:srgbClr val="1E3A5F"/>
+                      </a:solidFill>
+                      <a:prstDash val="solid"/>
+                      <a:round/>
+                      <a:headEnd type="none" w="med" len="med"/>
+                      <a:tailEnd type="none" w="med" len="med"/>
+                    </a:lnR>
+                    <a:lnT w="6350" cap="flat" cmpd="sng" algn="ctr">
+                      <a:solidFill>
+                        <a:srgbClr val="1E3A5F"/>
+                      </a:solidFill>
+                      <a:prstDash val="solid"/>
+                      <a:round/>
+                      <a:headEnd type="none" w="med" len="med"/>
+                      <a:tailEnd type="none" w="med" len="med"/>
+                    </a:lnT>
+                    <a:lnB w="6350" cap="flat" cmpd="sng" algn="ctr">
+                      <a:solidFill>
+                        <a:srgbClr val="1E3A5F"/>
+                      </a:solidFill>
+                      <a:prstDash val="solid"/>
+                      <a:round/>
+                      <a:headEnd type="none" w="med" len="med"/>
+                      <a:tailEnd type="none" w="med" len="med"/>
+                    </a:lnB>
+                    <a:solidFill>
+                      <a:srgbClr val="0F2A4A"/>
+                    </a:solidFill>
+                  </a:tcPr>
+                </a:tc>
+                <a:tc>
+                  <a:txBody>
+                    <a:bodyPr/>
+                    <a:lstStyle/>
+                    <a:p>
+                      <a:pPr indent="0" marL="0">
+                        <a:buNone/>
+                      </a:pPr>
+                      <a:r>
+                        <a:rPr lang="en-US" sz="950" b="1" dirty="0">
+                          <a:solidFill>
+                            <a:srgbClr val="F59E0B"/>
+                          </a:solidFill>
+                          <a:latin typeface="Calibri" pitchFamily="34" charset="0"/>
+                          <a:ea typeface="Calibri" pitchFamily="34" charset="-122"/>
+                          <a:cs typeface="Calibri" pitchFamily="34" charset="-120"/>
+                        </a:rPr>
+                        <a:t>Parcial</a:t>
+                      </a:r>
+                      <a:endParaRPr lang="en-US" sz="950" dirty="0">
+                        <a:latin typeface="Calibri" charset="0"/>
+                        <a:ea typeface="Calibri" charset="0"/>
+                        <a:cs typeface="Calibri" charset="0"/>
+                      </a:endParaRPr>
+                    </a:p>
+                  </a:txBody>
+                  <a:tcPr marL="91440" marR="91440" marT="45720" marB="45720" anchor="ctr">
+                    <a:lnL w="6350" cap="flat" cmpd="sng" algn="ctr">
+                      <a:solidFill>
+                        <a:srgbClr val="1E3A5F"/>
+                      </a:solidFill>
+                      <a:prstDash val="solid"/>
+                      <a:round/>
+                      <a:headEnd type="none" w="med" len="med"/>
+                      <a:tailEnd type="none" w="med" len="med"/>
+                    </a:lnL>
+                    <a:lnR w="6350" cap="flat" cmpd="sng" algn="ctr">
+                      <a:solidFill>
+                        <a:srgbClr val="1E3A5F"/>
+                      </a:solidFill>
+                      <a:prstDash val="solid"/>
+                      <a:round/>
+                      <a:headEnd type="none" w="med" len="med"/>
+                      <a:tailEnd type="none" w="med" len="med"/>
+                    </a:lnR>
+                    <a:lnT w="6350" cap="flat" cmpd="sng" algn="ctr">
+                      <a:solidFill>
+                        <a:srgbClr val="1E3A5F"/>
+                      </a:solidFill>
+                      <a:prstDash val="solid"/>
+                      <a:round/>
+                      <a:headEnd type="none" w="med" len="med"/>
+                      <a:tailEnd type="none" w="med" len="med"/>
+                    </a:lnT>
+                    <a:lnB w="6350" cap="flat" cmpd="sng" algn="ctr">
+                      <a:solidFill>
+                        <a:srgbClr val="1E3A5F"/>
+                      </a:solidFill>
+                      <a:prstDash val="solid"/>
+                      <a:round/>
+                      <a:headEnd type="none" w="med" len="med"/>
+                      <a:tailEnd type="none" w="med" len="med"/>
+                    </a:lnB>
+                    <a:solidFill>
+                      <a:srgbClr val="0F2A4A"/>
+                    </a:solidFill>
+                  </a:tcPr>
+                </a:tc>
+              </a:tr>
+              <a:tr h="281940">
+                <a:tc>
+                  <a:txBody>
+                    <a:bodyPr/>
+                    <a:lstStyle/>
+                    <a:p>
+                      <a:pPr indent="0" marL="0">
+                        <a:buNone/>
+                      </a:pPr>
+                      <a:r>
+                        <a:rPr lang="en-US" sz="950" dirty="0">
+                          <a:solidFill>
+                            <a:srgbClr val="EAF6F3"/>
+                          </a:solidFill>
+                          <a:latin typeface="Calibri" pitchFamily="34" charset="0"/>
+                          <a:ea typeface="Calibri" pitchFamily="34" charset="-122"/>
+                          <a:cs typeface="Calibri" pitchFamily="34" charset="-120"/>
+                        </a:rPr>
+                        <a:t>2 · Menor oferta de leitos por região</a:t>
+                      </a:r>
+                      <a:endParaRPr lang="en-US" sz="950" dirty="0">
+                        <a:latin typeface="Calibri" charset="0"/>
+                        <a:ea typeface="Calibri" charset="0"/>
+                        <a:cs typeface="Calibri" charset="0"/>
+                      </a:endParaRPr>
+                    </a:p>
+                  </a:txBody>
+                  <a:tcPr marL="91440" marR="91440" marT="45720" marB="45720" anchor="ctr">
+                    <a:lnL w="6350" cap="flat" cmpd="sng" algn="ctr">
+                      <a:solidFill>
+                        <a:srgbClr val="1E3A5F"/>
+                      </a:solidFill>
+                      <a:prstDash val="solid"/>
+                      <a:round/>
+                      <a:headEnd type="none" w="med" len="med"/>
+                      <a:tailEnd type="none" w="med" len="med"/>
+                    </a:lnL>
+                    <a:lnR w="6350" cap="flat" cmpd="sng" algn="ctr">
+                      <a:solidFill>
+                        <a:srgbClr val="1E3A5F"/>
+                      </a:solidFill>
+                      <a:prstDash val="solid"/>
+                      <a:round/>
+                      <a:headEnd type="none" w="med" len="med"/>
+                      <a:tailEnd type="none" w="med" len="med"/>
+                    </a:lnR>
+                    <a:lnT w="6350" cap="flat" cmpd="sng" algn="ctr">
+                      <a:solidFill>
+                        <a:srgbClr val="1E3A5F"/>
+                      </a:solidFill>
+                      <a:prstDash val="solid"/>
+                      <a:round/>
+                      <a:headEnd type="none" w="med" len="med"/>
+                      <a:tailEnd type="none" w="med" len="med"/>
+                    </a:lnT>
+                    <a:lnB w="6350" cap="flat" cmpd="sng" algn="ctr">
+                      <a:solidFill>
+                        <a:srgbClr val="1E3A5F"/>
+                      </a:solidFill>
+                      <a:prstDash val="solid"/>
+                      <a:round/>
+                      <a:headEnd type="none" w="med" len="med"/>
+                      <a:tailEnd type="none" w="med" len="med"/>
+                    </a:lnB>
+                    <a:solidFill>
+                      <a:srgbClr val="0F2A4A"/>
+                    </a:solidFill>
+                  </a:tcPr>
+                </a:tc>
+                <a:tc>
+                  <a:txBody>
+                    <a:bodyPr/>
+                    <a:lstStyle/>
+                    <a:p>
+                      <a:pPr indent="0" marL="0">
+                        <a:buNone/>
+                      </a:pPr>
+                      <a:r>
+                        <a:rPr lang="en-US" sz="950" dirty="0">
+                          <a:solidFill>
+                            <a:srgbClr val="EAF6F3"/>
+                          </a:solidFill>
+                          <a:latin typeface="Calibri" pitchFamily="34" charset="0"/>
+                          <a:ea typeface="Calibri" pitchFamily="34" charset="-122"/>
+                          <a:cs typeface="Calibri" pitchFamily="34" charset="-120"/>
+                        </a:rPr>
+                        <a:t>Respondeu "Nordeste", que é a de MAIOR oferta (17,15); a menor é Sudeste (12,53). E o SQL do SHOWSQL retornaria outro resultado ainda — o RUNSQL executou SQL diferente</a:t>
+                      </a:r>
+                      <a:endParaRPr lang="en-US" sz="950" dirty="0">
+                        <a:latin typeface="Calibri" charset="0"/>
+                        <a:ea typeface="Calibri" charset="0"/>
+                        <a:cs typeface="Calibri" charset="0"/>
+                      </a:endParaRPr>
+                    </a:p>
+                  </a:txBody>
+                  <a:tcPr marL="91440" marR="91440" marT="45720" marB="45720" anchor="ctr">
+                    <a:lnL w="6350" cap="flat" cmpd="sng" algn="ctr">
+                      <a:solidFill>
+                        <a:srgbClr val="1E3A5F"/>
+                      </a:solidFill>
+                      <a:prstDash val="solid"/>
+                      <a:round/>
+                      <a:headEnd type="none" w="med" len="med"/>
+                      <a:tailEnd type="none" w="med" len="med"/>
+                    </a:lnL>
+                    <a:lnR w="6350" cap="flat" cmpd="sng" algn="ctr">
+                      <a:solidFill>
+                        <a:srgbClr val="1E3A5F"/>
+                      </a:solidFill>
+                      <a:prstDash val="solid"/>
+                      <a:round/>
+                      <a:headEnd type="none" w="med" len="med"/>
+                      <a:tailEnd type="none" w="med" len="med"/>
+                    </a:lnR>
+                    <a:lnT w="6350" cap="flat" cmpd="sng" algn="ctr">
+                      <a:solidFill>
+                        <a:srgbClr val="1E3A5F"/>
+                      </a:solidFill>
+                      <a:prstDash val="solid"/>
+                      <a:round/>
+                      <a:headEnd type="none" w="med" len="med"/>
+                      <a:tailEnd type="none" w="med" len="med"/>
+                    </a:lnT>
+                    <a:lnB w="6350" cap="flat" cmpd="sng" algn="ctr">
+                      <a:solidFill>
+                        <a:srgbClr val="1E3A5F"/>
+                      </a:solidFill>
+                      <a:prstDash val="solid"/>
+                      <a:round/>
+                      <a:headEnd type="none" w="med" len="med"/>
+                      <a:tailEnd type="none" w="med" len="med"/>
+                    </a:lnB>
+                    <a:solidFill>
+                      <a:srgbClr val="0F2A4A"/>
+                    </a:solidFill>
+                  </a:tcPr>
+                </a:tc>
+                <a:tc>
+                  <a:txBody>
+                    <a:bodyPr/>
+                    <a:lstStyle/>
+                    <a:p>
+                      <a:pPr indent="0" marL="0">
+                        <a:buNone/>
+                      </a:pPr>
+                      <a:r>
+                        <a:rPr lang="en-US" sz="950" b="1" dirty="0">
+                          <a:solidFill>
+                            <a:srgbClr val="EF4444"/>
+                          </a:solidFill>
+                          <a:latin typeface="Calibri" pitchFamily="34" charset="0"/>
+                          <a:ea typeface="Calibri" pitchFamily="34" charset="-122"/>
+                          <a:cs typeface="Calibri" pitchFamily="34" charset="-120"/>
+                        </a:rPr>
+                        <a:t>Incorreta</a:t>
+                      </a:r>
+                      <a:endParaRPr lang="en-US" sz="950" dirty="0">
+                        <a:latin typeface="Calibri" charset="0"/>
+                        <a:ea typeface="Calibri" charset="0"/>
+                        <a:cs typeface="Calibri" charset="0"/>
+                      </a:endParaRPr>
+                    </a:p>
+                  </a:txBody>
+                  <a:tcPr marL="91440" marR="91440" marT="45720" marB="45720" anchor="ctr">
+                    <a:lnL w="6350" cap="flat" cmpd="sng" algn="ctr">
+                      <a:solidFill>
+                        <a:srgbClr val="1E3A5F"/>
+                      </a:solidFill>
+                      <a:prstDash val="solid"/>
+                      <a:round/>
+                      <a:headEnd type="none" w="med" len="med"/>
+                      <a:tailEnd type="none" w="med" len="med"/>
+                    </a:lnL>
+                    <a:lnR w="6350" cap="flat" cmpd="sng" algn="ctr">
+                      <a:solidFill>
+                        <a:srgbClr val="1E3A5F"/>
+                      </a:solidFill>
+                      <a:prstDash val="solid"/>
+                      <a:round/>
+                      <a:headEnd type="none" w="med" len="med"/>
+                      <a:tailEnd type="none" w="med" len="med"/>
+                    </a:lnR>
+                    <a:lnT w="6350" cap="flat" cmpd="sng" algn="ctr">
+                      <a:solidFill>
+                        <a:srgbClr val="1E3A5F"/>
+                      </a:solidFill>
+                      <a:prstDash val="solid"/>
+                      <a:round/>
+                      <a:headEnd type="none" w="med" len="med"/>
+                      <a:tailEnd type="none" w="med" len="med"/>
+                    </a:lnT>
+                    <a:lnB w="6350" cap="flat" cmpd="sng" algn="ctr">
+                      <a:solidFill>
+                        <a:srgbClr val="1E3A5F"/>
+                      </a:solidFill>
+                      <a:prstDash val="solid"/>
+                      <a:round/>
+                      <a:headEnd type="none" w="med" len="med"/>
+                      <a:tailEnd type="none" w="med" len="med"/>
+                    </a:lnB>
+                    <a:solidFill>
+                      <a:srgbClr val="0F2A4A"/>
+                    </a:solidFill>
+                  </a:tcPr>
+                </a:tc>
+              </a:tr>
+              <a:tr h="281940">
+                <a:tc>
+                  <a:txBody>
+                    <a:bodyPr/>
+                    <a:lstStyle/>
+                    <a:p>
+                      <a:pPr indent="0" marL="0">
+                        <a:buNone/>
+                      </a:pPr>
+                      <a:r>
+                        <a:rPr lang="en-US" sz="950" dirty="0">
+                          <a:solidFill>
+                            <a:srgbClr val="EAF6F3"/>
+                          </a:solidFill>
+                          <a:latin typeface="Calibri" pitchFamily="34" charset="0"/>
+                          <a:ea typeface="Calibri" pitchFamily="34" charset="-122"/>
+                          <a:cs typeface="Calibri" pitchFamily="34" charset="-120"/>
+                        </a:rPr>
+                        <a:t>3 · Permanência acima da média nacional</a:t>
+                      </a:r>
+                      <a:endParaRPr lang="en-US" sz="950" dirty="0">
+                        <a:latin typeface="Calibri" charset="0"/>
+                        <a:ea typeface="Calibri" charset="0"/>
+                        <a:cs typeface="Calibri" charset="0"/>
+                      </a:endParaRPr>
+                    </a:p>
+                  </a:txBody>
+                  <a:tcPr marL="91440" marR="91440" marT="45720" marB="45720" anchor="ctr">
+                    <a:lnL w="6350" cap="flat" cmpd="sng" algn="ctr">
+                      <a:solidFill>
+                        <a:srgbClr val="1E3A5F"/>
+                      </a:solidFill>
+                      <a:prstDash val="solid"/>
+                      <a:round/>
+                      <a:headEnd type="none" w="med" len="med"/>
+                      <a:tailEnd type="none" w="med" len="med"/>
+                    </a:lnL>
+                    <a:lnR w="6350" cap="flat" cmpd="sng" algn="ctr">
+                      <a:solidFill>
+                        <a:srgbClr val="1E3A5F"/>
+                      </a:solidFill>
+                      <a:prstDash val="solid"/>
+                      <a:round/>
+                      <a:headEnd type="none" w="med" len="med"/>
+                      <a:tailEnd type="none" w="med" len="med"/>
+                    </a:lnR>
+                    <a:lnT w="6350" cap="flat" cmpd="sng" algn="ctr">
+                      <a:solidFill>
+                        <a:srgbClr val="1E3A5F"/>
+                      </a:solidFill>
+                      <a:prstDash val="solid"/>
+                      <a:round/>
+                      <a:headEnd type="none" w="med" len="med"/>
+                      <a:tailEnd type="none" w="med" len="med"/>
+                    </a:lnT>
+                    <a:lnB w="6350" cap="flat" cmpd="sng" algn="ctr">
+                      <a:solidFill>
+                        <a:srgbClr val="1E3A5F"/>
+                      </a:solidFill>
+                      <a:prstDash val="solid"/>
+                      <a:round/>
+                      <a:headEnd type="none" w="med" len="med"/>
+                      <a:tailEnd type="none" w="med" len="med"/>
+                    </a:lnB>
+                    <a:solidFill>
+                      <a:srgbClr val="0F2A4A"/>
+                    </a:solidFill>
+                  </a:tcPr>
+                </a:tc>
+                <a:tc>
+                  <a:txBody>
+                    <a:bodyPr/>
+                    <a:lstStyle/>
+                    <a:p>
+                      <a:pPr indent="0" marL="0">
+                        <a:buNone/>
+                      </a:pPr>
+                      <a:r>
+                        <a:rPr lang="en-US" sz="950" dirty="0">
+                          <a:solidFill>
+                            <a:srgbClr val="EAF6F3"/>
+                          </a:solidFill>
+                          <a:latin typeface="Calibri" pitchFamily="34" charset="0"/>
+                          <a:ea typeface="Calibri" pitchFamily="34" charset="-122"/>
+                          <a:cs typeface="Calibri" pitchFamily="34" charset="-120"/>
+                        </a:rPr>
+                        <a:t>RR, TO, MA, PI, CE, PB — todas no conjunto correto (média ponderada 4,882 dias)</a:t>
+                      </a:r>
+                      <a:endParaRPr lang="en-US" sz="950" dirty="0">
+                        <a:latin typeface="Calibri" charset="0"/>
+                        <a:ea typeface="Calibri" charset="0"/>
+                        <a:cs typeface="Calibri" charset="0"/>
+                      </a:endParaRPr>
+                    </a:p>
+                  </a:txBody>
+                  <a:tcPr marL="91440" marR="91440" marT="45720" marB="45720" anchor="ctr">
+                    <a:lnL w="6350" cap="flat" cmpd="sng" algn="ctr">
+                      <a:solidFill>
+                        <a:srgbClr val="1E3A5F"/>
+                      </a:solidFill>
+                      <a:prstDash val="solid"/>
+                      <a:round/>
+                      <a:headEnd type="none" w="med" len="med"/>
+                      <a:tailEnd type="none" w="med" len="med"/>
+                    </a:lnL>
+                    <a:lnR w="6350" cap="flat" cmpd="sng" algn="ctr">
+                      <a:solidFill>
+                        <a:srgbClr val="1E3A5F"/>
+                      </a:solidFill>
+                      <a:prstDash val="solid"/>
+                      <a:round/>
+                      <a:headEnd type="none" w="med" len="med"/>
+                      <a:tailEnd type="none" w="med" len="med"/>
+                    </a:lnR>
+                    <a:lnT w="6350" cap="flat" cmpd="sng" algn="ctr">
+                      <a:solidFill>
+                        <a:srgbClr val="1E3A5F"/>
+                      </a:solidFill>
+                      <a:prstDash val="solid"/>
+                      <a:round/>
+                      <a:headEnd type="none" w="med" len="med"/>
+                      <a:tailEnd type="none" w="med" len="med"/>
+                    </a:lnT>
+                    <a:lnB w="6350" cap="flat" cmpd="sng" algn="ctr">
+                      <a:solidFill>
+                        <a:srgbClr val="1E3A5F"/>
+                      </a:solidFill>
+                      <a:prstDash val="solid"/>
+                      <a:round/>
+                      <a:headEnd type="none" w="med" len="med"/>
+                      <a:tailEnd type="none" w="med" len="med"/>
+                    </a:lnB>
+                    <a:solidFill>
+                      <a:srgbClr val="0F2A4A"/>
+                    </a:solidFill>
+                  </a:tcPr>
+                </a:tc>
+                <a:tc>
+                  <a:txBody>
+                    <a:bodyPr/>
+                    <a:lstStyle/>
+                    <a:p>
+                      <a:pPr indent="0" marL="0">
+                        <a:buNone/>
+                      </a:pPr>
+                      <a:r>
+                        <a:rPr lang="en-US" sz="950" b="1" dirty="0">
+                          <a:solidFill>
+                            <a:srgbClr val="14B8A6"/>
+                          </a:solidFill>
+                          <a:latin typeface="Calibri" pitchFamily="34" charset="0"/>
+                          <a:ea typeface="Calibri" pitchFamily="34" charset="-122"/>
+                          <a:cs typeface="Calibri" pitchFamily="34" charset="-120"/>
+                        </a:rPr>
+                        <a:t>Correta</a:t>
+                      </a:r>
+                      <a:endParaRPr lang="en-US" sz="950" dirty="0">
+                        <a:latin typeface="Calibri" charset="0"/>
+                        <a:ea typeface="Calibri" charset="0"/>
+                        <a:cs typeface="Calibri" charset="0"/>
+                      </a:endParaRPr>
+                    </a:p>
+                  </a:txBody>
+                  <a:tcPr marL="91440" marR="91440" marT="45720" marB="45720" anchor="ctr">
+                    <a:lnL w="6350" cap="flat" cmpd="sng" algn="ctr">
+                      <a:solidFill>
+                        <a:srgbClr val="1E3A5F"/>
+                      </a:solidFill>
+                      <a:prstDash val="solid"/>
+                      <a:round/>
+                      <a:headEnd type="none" w="med" len="med"/>
+                      <a:tailEnd type="none" w="med" len="med"/>
+                    </a:lnL>
+                    <a:lnR w="6350" cap="flat" cmpd="sng" algn="ctr">
+                      <a:solidFill>
+                        <a:srgbClr val="1E3A5F"/>
+                      </a:solidFill>
+                      <a:prstDash val="solid"/>
+                      <a:round/>
+                      <a:headEnd type="none" w="med" len="med"/>
+                      <a:tailEnd type="none" w="med" len="med"/>
+                    </a:lnR>
+                    <a:lnT w="6350" cap="flat" cmpd="sng" algn="ctr">
+                      <a:solidFill>
+                        <a:srgbClr val="1E3A5F"/>
+                      </a:solidFill>
+                      <a:prstDash val="solid"/>
+                      <a:round/>
+                      <a:headEnd type="none" w="med" len="med"/>
+                      <a:tailEnd type="none" w="med" len="med"/>
+                    </a:lnT>
+                    <a:lnB w="6350" cap="flat" cmpd="sng" algn="ctr">
+                      <a:solidFill>
+                        <a:srgbClr val="1E3A5F"/>
+                      </a:solidFill>
+                      <a:prstDash val="solid"/>
+                      <a:round/>
+                      <a:headEnd type="none" w="med" len="med"/>
+                      <a:tailEnd type="none" w="med" len="med"/>
+                    </a:lnB>
+                    <a:solidFill>
+                      <a:srgbClr val="0F2A4A"/>
+                    </a:solidFill>
+                  </a:tcPr>
+                </a:tc>
+              </a:tr>
+              <a:tr h="281940">
+                <a:tc>
+                  <a:txBody>
+                    <a:bodyPr/>
+                    <a:lstStyle/>
+                    <a:p>
+                      <a:pPr indent="0" marL="0">
+                        <a:buNone/>
+                      </a:pPr>
+                      <a:r>
+                        <a:rPr lang="en-US" sz="950" dirty="0">
+                          <a:solidFill>
+                            <a:srgbClr val="EAF6F3"/>
+                          </a:solidFill>
+                          <a:latin typeface="Calibri" pitchFamily="34" charset="0"/>
+                          <a:ea typeface="Calibri" pitchFamily="34" charset="-122"/>
+                          <a:cs typeface="Calibri" pitchFamily="34" charset="-120"/>
+                        </a:rPr>
+                        <a:t>4 · Maior aumento de internações mar→abr</a:t>
+                      </a:r>
+                      <a:endParaRPr lang="en-US" sz="950" dirty="0">
+                        <a:latin typeface="Calibri" charset="0"/>
+                        <a:ea typeface="Calibri" charset="0"/>
+                        <a:cs typeface="Calibri" charset="0"/>
+                      </a:endParaRPr>
+                    </a:p>
+                  </a:txBody>
+                  <a:tcPr marL="91440" marR="91440" marT="45720" marB="45720" anchor="ctr">
+                    <a:lnL w="6350" cap="flat" cmpd="sng" algn="ctr">
+                      <a:solidFill>
+                        <a:srgbClr val="1E3A5F"/>
+                      </a:solidFill>
+                      <a:prstDash val="solid"/>
+                      <a:round/>
+                      <a:headEnd type="none" w="med" len="med"/>
+                      <a:tailEnd type="none" w="med" len="med"/>
+                    </a:lnL>
+                    <a:lnR w="6350" cap="flat" cmpd="sng" algn="ctr">
+                      <a:solidFill>
+                        <a:srgbClr val="1E3A5F"/>
+                      </a:solidFill>
+                      <a:prstDash val="solid"/>
+                      <a:round/>
+                      <a:headEnd type="none" w="med" len="med"/>
+                      <a:tailEnd type="none" w="med" len="med"/>
+                    </a:lnR>
+                    <a:lnT w="6350" cap="flat" cmpd="sng" algn="ctr">
+                      <a:solidFill>
+                        <a:srgbClr val="1E3A5F"/>
+                      </a:solidFill>
+                      <a:prstDash val="solid"/>
+                      <a:round/>
+                      <a:headEnd type="none" w="med" len="med"/>
+                      <a:tailEnd type="none" w="med" len="med"/>
+                    </a:lnT>
+                    <a:lnB w="6350" cap="flat" cmpd="sng" algn="ctr">
+                      <a:solidFill>
+                        <a:srgbClr val="1E3A5F"/>
+                      </a:solidFill>
+                      <a:prstDash val="solid"/>
+                      <a:round/>
+                      <a:headEnd type="none" w="med" len="med"/>
+                      <a:tailEnd type="none" w="med" len="med"/>
+                    </a:lnB>
+                    <a:solidFill>
+                      <a:srgbClr val="0F2A4A"/>
+                    </a:solidFill>
+                  </a:tcPr>
+                </a:tc>
+                <a:tc>
+                  <a:txBody>
+                    <a:bodyPr/>
+                    <a:lstStyle/>
+                    <a:p>
+                      <a:pPr indent="0" marL="0">
+                        <a:buNone/>
+                      </a:pPr>
+                      <a:r>
+                        <a:rPr lang="en-US" sz="950" dirty="0">
+                          <a:solidFill>
+                            <a:srgbClr val="EAF6F3"/>
+                          </a:solidFill>
+                          <a:latin typeface="Calibri" pitchFamily="34" charset="0"/>
+                          <a:ea typeface="Calibri" pitchFamily="34" charset="-122"/>
+                          <a:cs typeface="Calibri" pitchFamily="34" charset="-120"/>
+                        </a:rPr>
+                        <a:t>RS +1.187 — exato (só 5 UFs cresceram num mês de queda nacional)</a:t>
+                      </a:r>
+                      <a:endParaRPr lang="en-US" sz="950" dirty="0">
+                        <a:latin typeface="Calibri" charset="0"/>
+                        <a:ea typeface="Calibri" charset="0"/>
+                        <a:cs typeface="Calibri" charset="0"/>
+                      </a:endParaRPr>
+                    </a:p>
+                  </a:txBody>
+                  <a:tcPr marL="91440" marR="91440" marT="45720" marB="45720" anchor="ctr">
+                    <a:lnL w="6350" cap="flat" cmpd="sng" algn="ctr">
+                      <a:solidFill>
+                        <a:srgbClr val="1E3A5F"/>
+                      </a:solidFill>
+                      <a:prstDash val="solid"/>
+                      <a:round/>
+                      <a:headEnd type="none" w="med" len="med"/>
+                      <a:tailEnd type="none" w="med" len="med"/>
+                    </a:lnL>
+                    <a:lnR w="6350" cap="flat" cmpd="sng" algn="ctr">
+                      <a:solidFill>
+                        <a:srgbClr val="1E3A5F"/>
+                      </a:solidFill>
+                      <a:prstDash val="solid"/>
+                      <a:round/>
+                      <a:headEnd type="none" w="med" len="med"/>
+                      <a:tailEnd type="none" w="med" len="med"/>
+                    </a:lnR>
+                    <a:lnT w="6350" cap="flat" cmpd="sng" algn="ctr">
+                      <a:solidFill>
+                        <a:srgbClr val="1E3A5F"/>
+                      </a:solidFill>
+                      <a:prstDash val="solid"/>
+                      <a:round/>
+                      <a:headEnd type="none" w="med" len="med"/>
+                      <a:tailEnd type="none" w="med" len="med"/>
+                    </a:lnT>
+                    <a:lnB w="6350" cap="flat" cmpd="sng" algn="ctr">
+                      <a:solidFill>
+                        <a:srgbClr val="1E3A5F"/>
+                      </a:solidFill>
+                      <a:prstDash val="solid"/>
+                      <a:round/>
+                      <a:headEnd type="none" w="med" len="med"/>
+                      <a:tailEnd type="none" w="med" len="med"/>
+                    </a:lnB>
+                    <a:solidFill>
+                      <a:srgbClr val="0F2A4A"/>
+                    </a:solidFill>
+                  </a:tcPr>
+                </a:tc>
+                <a:tc>
+                  <a:txBody>
+                    <a:bodyPr/>
+                    <a:lstStyle/>
+                    <a:p>
+                      <a:pPr indent="0" marL="0">
+                        <a:buNone/>
+                      </a:pPr>
+                      <a:r>
+                        <a:rPr lang="en-US" sz="950" b="1" dirty="0">
+                          <a:solidFill>
+                            <a:srgbClr val="14B8A6"/>
+                          </a:solidFill>
+                          <a:latin typeface="Calibri" pitchFamily="34" charset="0"/>
+                          <a:ea typeface="Calibri" pitchFamily="34" charset="-122"/>
+                          <a:cs typeface="Calibri" pitchFamily="34" charset="-120"/>
+                        </a:rPr>
+                        <a:t>Correta</a:t>
+                      </a:r>
+                      <a:endParaRPr lang="en-US" sz="950" dirty="0">
+                        <a:latin typeface="Calibri" charset="0"/>
+                        <a:ea typeface="Calibri" charset="0"/>
+                        <a:cs typeface="Calibri" charset="0"/>
+                      </a:endParaRPr>
+                    </a:p>
+                  </a:txBody>
+                  <a:tcPr marL="91440" marR="91440" marT="45720" marB="45720" anchor="ctr">
+                    <a:lnL w="6350" cap="flat" cmpd="sng" algn="ctr">
+                      <a:solidFill>
+                        <a:srgbClr val="1E3A5F"/>
+                      </a:solidFill>
+                      <a:prstDash val="solid"/>
+                      <a:round/>
+                      <a:headEnd type="none" w="med" len="med"/>
+                      <a:tailEnd type="none" w="med" len="med"/>
+                    </a:lnL>
+                    <a:lnR w="6350" cap="flat" cmpd="sng" algn="ctr">
+                      <a:solidFill>
+                        <a:srgbClr val="1E3A5F"/>
+                      </a:solidFill>
+                      <a:prstDash val="solid"/>
+                      <a:round/>
+                      <a:headEnd type="none" w="med" len="med"/>
+                      <a:tailEnd type="none" w="med" len="med"/>
+                    </a:lnR>
+                    <a:lnT w="6350" cap="flat" cmpd="sng" algn="ctr">
+                      <a:solidFill>
+                        <a:srgbClr val="1E3A5F"/>
+                      </a:solidFill>
+                      <a:prstDash val="solid"/>
+                      <a:round/>
+                      <a:headEnd type="none" w="med" len="med"/>
+                      <a:tailEnd type="none" w="med" len="med"/>
+                    </a:lnT>
+                    <a:lnB w="6350" cap="flat" cmpd="sng" algn="ctr">
+                      <a:solidFill>
+                        <a:srgbClr val="1E3A5F"/>
+                      </a:solidFill>
+                      <a:prstDash val="solid"/>
+                      <a:round/>
+                      <a:headEnd type="none" w="med" len="med"/>
+                      <a:tailEnd type="none" w="med" len="med"/>
+                    </a:lnB>
+                    <a:solidFill>
+                      <a:srgbClr val="0F2A4A"/>
+                    </a:solidFill>
+                  </a:tcPr>
+                </a:tc>
+              </a:tr>
+              <a:tr h="281940">
+                <a:tc>
+                  <a:txBody>
+                    <a:bodyPr/>
+                    <a:lstStyle/>
+                    <a:p>
+                      <a:pPr indent="0" marL="0">
+                        <a:buNone/>
+                      </a:pPr>
+                      <a:r>
+                        <a:rPr lang="en-US" sz="950" dirty="0">
+                          <a:solidFill>
+                            <a:srgbClr val="EAF6F3"/>
+                          </a:solidFill>
+                          <a:latin typeface="Calibri" pitchFamily="34" charset="0"/>
+                          <a:ea typeface="Calibri" pitchFamily="34" charset="-122"/>
+                          <a:cs typeface="Calibri" pitchFamily="34" charset="-120"/>
+                        </a:rPr>
+                        <a:t>5 · Internações x leitos por região</a:t>
+                      </a:r>
+                      <a:endParaRPr lang="en-US" sz="950" dirty="0">
+                        <a:latin typeface="Calibri" charset="0"/>
+                        <a:ea typeface="Calibri" charset="0"/>
+                        <a:cs typeface="Calibri" charset="0"/>
+                      </a:endParaRPr>
+                    </a:p>
+                  </a:txBody>
+                  <a:tcPr marL="91440" marR="91440" marT="45720" marB="45720" anchor="ctr">
+                    <a:lnL w="6350" cap="flat" cmpd="sng" algn="ctr">
+                      <a:solidFill>
+                        <a:srgbClr val="1E3A5F"/>
+                      </a:solidFill>
+                      <a:prstDash val="solid"/>
+                      <a:round/>
+                      <a:headEnd type="none" w="med" len="med"/>
+                      <a:tailEnd type="none" w="med" len="med"/>
+                    </a:lnL>
+                    <a:lnR w="6350" cap="flat" cmpd="sng" algn="ctr">
+                      <a:solidFill>
+                        <a:srgbClr val="1E3A5F"/>
+                      </a:solidFill>
+                      <a:prstDash val="solid"/>
+                      <a:round/>
+                      <a:headEnd type="none" w="med" len="med"/>
+                      <a:tailEnd type="none" w="med" len="med"/>
+                    </a:lnR>
+                    <a:lnT w="6350" cap="flat" cmpd="sng" algn="ctr">
+                      <a:solidFill>
+                        <a:srgbClr val="1E3A5F"/>
+                      </a:solidFill>
+                      <a:prstDash val="solid"/>
+                      <a:round/>
+                      <a:headEnd type="none" w="med" len="med"/>
+                      <a:tailEnd type="none" w="med" len="med"/>
+                    </a:lnT>
+                    <a:lnB w="6350" cap="flat" cmpd="sng" algn="ctr">
+                      <a:solidFill>
+                        <a:srgbClr val="1E3A5F"/>
+                      </a:solidFill>
+                      <a:prstDash val="solid"/>
+                      <a:round/>
+                      <a:headEnd type="none" w="med" len="med"/>
+                      <a:tailEnd type="none" w="med" len="med"/>
+                    </a:lnB>
+                    <a:solidFill>
+                      <a:srgbClr val="0F2A4A"/>
+                    </a:solidFill>
+                  </a:tcPr>
+                </a:tc>
+                <a:tc>
+                  <a:txBody>
+                    <a:bodyPr/>
+                    <a:lstStyle/>
+                    <a:p>
+                      <a:pPr indent="0" marL="0">
+                        <a:buNone/>
+                      </a:pPr>
+                      <a:r>
+                        <a:rPr lang="en-US" sz="950" dirty="0">
+                          <a:solidFill>
+                            <a:srgbClr val="EAF6F3"/>
+                          </a:solidFill>
+                          <a:latin typeface="Calibri" pitchFamily="34" charset="0"/>
+                          <a:ea typeface="Calibri" pitchFamily="34" charset="-122"/>
+                          <a:cs typeface="Calibri" pitchFamily="34" charset="-120"/>
+                        </a:rPr>
+                        <a:t>Norte 108.136/28.346 · Nordeste 311.866/98.381 — batem número a número</a:t>
+                      </a:r>
+                      <a:endParaRPr lang="en-US" sz="950" dirty="0">
+                        <a:latin typeface="Calibri" charset="0"/>
+                        <a:ea typeface="Calibri" charset="0"/>
+                        <a:cs typeface="Calibri" charset="0"/>
+                      </a:endParaRPr>
+                    </a:p>
+                  </a:txBody>
+                  <a:tcPr marL="91440" marR="91440" marT="45720" marB="45720" anchor="ctr">
+                    <a:lnL w="6350" cap="flat" cmpd="sng" algn="ctr">
+                      <a:solidFill>
+                        <a:srgbClr val="1E3A5F"/>
+                      </a:solidFill>
+                      <a:prstDash val="solid"/>
+                      <a:round/>
+                      <a:headEnd type="none" w="med" len="med"/>
+                      <a:tailEnd type="none" w="med" len="med"/>
+                    </a:lnL>
+                    <a:lnR w="6350" cap="flat" cmpd="sng" algn="ctr">
+                      <a:solidFill>
+                        <a:srgbClr val="1E3A5F"/>
+                      </a:solidFill>
+                      <a:prstDash val="solid"/>
+                      <a:round/>
+                      <a:headEnd type="none" w="med" len="med"/>
+                      <a:tailEnd type="none" w="med" len="med"/>
+                    </a:lnR>
+                    <a:lnT w="6350" cap="flat" cmpd="sng" algn="ctr">
+                      <a:solidFill>
+                        <a:srgbClr val="1E3A5F"/>
+                      </a:solidFill>
+                      <a:prstDash val="solid"/>
+                      <a:round/>
+                      <a:headEnd type="none" w="med" len="med"/>
+                      <a:tailEnd type="none" w="med" len="med"/>
+                    </a:lnT>
+                    <a:lnB w="6350" cap="flat" cmpd="sng" algn="ctr">
+                      <a:solidFill>
+                        <a:srgbClr val="1E3A5F"/>
+                      </a:solidFill>
+                      <a:prstDash val="solid"/>
+                      <a:round/>
+                      <a:headEnd type="none" w="med" len="med"/>
+                      <a:tailEnd type="none" w="med" len="med"/>
+                    </a:lnB>
+                    <a:solidFill>
+                      <a:srgbClr val="0F2A4A"/>
+                    </a:solidFill>
+                  </a:tcPr>
+                </a:tc>
+                <a:tc>
+                  <a:txBody>
+                    <a:bodyPr/>
+                    <a:lstStyle/>
+                    <a:p>
+                      <a:pPr indent="0" marL="0">
+                        <a:buNone/>
+                      </a:pPr>
+                      <a:r>
+                        <a:rPr lang="en-US" sz="950" b="1" dirty="0">
+                          <a:solidFill>
+                            <a:srgbClr val="14B8A6"/>
+                          </a:solidFill>
+                          <a:latin typeface="Calibri" pitchFamily="34" charset="0"/>
+                          <a:ea typeface="Calibri" pitchFamily="34" charset="-122"/>
+                          <a:cs typeface="Calibri" pitchFamily="34" charset="-120"/>
+                        </a:rPr>
+                        <a:t>Correta</a:t>
+                      </a:r>
+                      <a:endParaRPr lang="en-US" sz="950" dirty="0">
+                        <a:latin typeface="Calibri" charset="0"/>
+                        <a:ea typeface="Calibri" charset="0"/>
+                        <a:cs typeface="Calibri" charset="0"/>
+                      </a:endParaRPr>
+                    </a:p>
+                  </a:txBody>
+                  <a:tcPr marL="91440" marR="91440" marT="45720" marB="45720" anchor="ctr">
+                    <a:lnL w="6350" cap="flat" cmpd="sng" algn="ctr">
+                      <a:solidFill>
+                        <a:srgbClr val="1E3A5F"/>
+                      </a:solidFill>
+                      <a:prstDash val="solid"/>
+                      <a:round/>
+                      <a:headEnd type="none" w="med" len="med"/>
+                      <a:tailEnd type="none" w="med" len="med"/>
+                    </a:lnL>
+                    <a:lnR w="6350" cap="flat" cmpd="sng" algn="ctr">
+                      <a:solidFill>
+                        <a:srgbClr val="1E3A5F"/>
+                      </a:solidFill>
+                      <a:prstDash val="solid"/>
+                      <a:round/>
+                      <a:headEnd type="none" w="med" len="med"/>
+                      <a:tailEnd type="none" w="med" len="med"/>
+                    </a:lnR>
+                    <a:lnT w="6350" cap="flat" cmpd="sng" algn="ctr">
+                      <a:solidFill>
+                        <a:srgbClr val="1E3A5F"/>
+                      </a:solidFill>
+                      <a:prstDash val="solid"/>
+                      <a:round/>
+                      <a:headEnd type="none" w="med" len="med"/>
+                      <a:tailEnd type="none" w="med" len="med"/>
+                    </a:lnT>
+                    <a:lnB w="6350" cap="flat" cmpd="sng" algn="ctr">
+                      <a:solidFill>
+                        <a:srgbClr val="1E3A5F"/>
+                      </a:solidFill>
+                      <a:prstDash val="solid"/>
+                      <a:round/>
+                      <a:headEnd type="none" w="med" len="med"/>
+                      <a:tailEnd type="none" w="med" len="med"/>
+                    </a:lnB>
+                    <a:solidFill>
+                      <a:srgbClr val="0F2A4A"/>
+                    </a:solidFill>
+                  </a:tcPr>
+                </a:tc>
+              </a:tr>
+            </a:tbl>
+          </a:graphicData>
+        </a:graphic>
+      </p:graphicFrame>
+      <p:sp>
+        <p:nvSpPr>
+          <p:cNvPr id="14" name="Shape 11"/>
+          <p:cNvSpPr/>
+          <p:nvPr/>
+        </p:nvSpPr>
+        <p:spPr>
+          <a:xfrm>
+            <a:off x="457200" y="5943600"/>
+            <a:ext cx="11247120" cy="566928"/>
           </a:xfrm>
           <a:prstGeom prst="roundRect">
             <a:avLst>
-              <a:gd name="adj" fmla="val 8000"/>
-            </a:avLst>
-          </a:prstGeom>
-          <a:solidFill>
-            <a:srgbClr val="0F2A4A"/>
-          </a:solidFill>
-          <a:ln w="12700">
-            <a:solidFill>
-              <a:srgbClr val="1E3A5F"/>
-            </a:solidFill>
-            <a:prstDash val="solid"/>
-          </a:ln>
-          <a:effectLst>
-            <a:outerShdw sx="100000" sy="100000" kx="0" ky="0" algn="bl" rotWithShape="0" blurRad="101600" dist="38100" dir="5400000">
-              <a:srgbClr val="000000">
-                <a:alpha val="35000"/>
-              </a:srgbClr>
-            </a:outerShdw>
-          </a:effectLst>
-        </p:spPr>
-      </p:sp>
-      <p:sp>
-        <p:nvSpPr>
-          <p:cNvPr id="13" name="Text 11"/>
-          <p:cNvSpPr/>
-          <p:nvPr/>
-        </p:nvSpPr>
-        <p:spPr>
-          <a:xfrm>
-            <a:off x="685800" y="3977640"/>
-            <a:ext cx="10789920" cy="256032"/>
-          </a:xfrm>
-          <a:prstGeom prst="rect">
-            <a:avLst/>
-          </a:prstGeom>
-          <a:noFill/>
-          <a:ln/>
-        </p:spPr>
-        <p:txBody>
-          <a:bodyPr wrap="square" lIns="0" tIns="0" rIns="0" bIns="0" rtlCol="0" anchor="ctr"/>
-          <a:lstStyle/>
-          <a:p>
-            <a:pPr indent="0" marL="0">
-              <a:buNone/>
-            </a:pPr>
-            <a:r>
-              <a:rPr lang="en-US" sz="1150" b="1" dirty="0">
-                <a:solidFill>
-                  <a:srgbClr val="14B8A6"/>
-                </a:solidFill>
-                <a:latin typeface="Calibri" pitchFamily="34" charset="0"/>
-                <a:ea typeface="Calibri" pitchFamily="34" charset="-122"/>
-                <a:cs typeface="Calibri" pitchFamily="34" charset="-120"/>
-              </a:rPr>
-              <a:t>✓ Pergunta 1 — RUNSQL (1,75 s): resultado real</a:t>
-            </a:r>
-            <a:endParaRPr lang="en-US" sz="1150" dirty="0"/>
-          </a:p>
-        </p:txBody>
-      </p:sp>
-      <p:sp>
-        <p:nvSpPr>
-          <p:cNvPr id="14" name="Text 12"/>
-          <p:cNvSpPr/>
-          <p:nvPr/>
-        </p:nvSpPr>
-        <p:spPr>
-          <a:xfrm>
-            <a:off x="685800" y="4251960"/>
-            <a:ext cx="10789920" cy="411480"/>
-          </a:xfrm>
-          <a:prstGeom prst="rect">
-            <a:avLst/>
-          </a:prstGeom>
-          <a:noFill/>
-          <a:ln/>
-        </p:spPr>
-        <p:txBody>
-          <a:bodyPr wrap="square" lIns="0" tIns="0" rIns="0" bIns="0" rtlCol="0" anchor="ctr"/>
-          <a:lstStyle/>
-          <a:p>
-            <a:pPr indent="0" marL="0">
-              <a:buNone/>
-            </a:pPr>
-            <a:r>
-              <a:rPr lang="en-US" sz="950" dirty="0">
-                <a:solidFill>
-                  <a:srgbClr val="7DD3C0"/>
-                </a:solidFill>
-                <a:latin typeface="Courier New" pitchFamily="34" charset="0"/>
-                <a:ea typeface="Courier New" pitchFamily="34" charset="-122"/>
-                <a:cs typeface="Courier New" pitchFamily="34" charset="-120"/>
-              </a:rPr>
-              <a:t>[ { "ESTADO":"Rondônia", "SIGLA_UF":"RO", "INTERNACOES_POR_100K_HAB":701.17 }, { "ESTADO":"Acre", "SIGLA_UF":"AC", ... } ]</a:t>
-            </a:r>
-            <a:endParaRPr lang="en-US" sz="950" dirty="0"/>
-          </a:p>
-        </p:txBody>
-      </p:sp>
-      <p:sp>
-        <p:nvSpPr>
-          <p:cNvPr id="15" name="Shape 13"/>
-          <p:cNvSpPr/>
-          <p:nvPr/>
-        </p:nvSpPr>
-        <p:spPr>
-          <a:xfrm>
-            <a:off x="457200" y="4937760"/>
-            <a:ext cx="11247120" cy="1234440"/>
-          </a:xfrm>
-          <a:prstGeom prst="roundRect">
-            <a:avLst>
-              <a:gd name="adj" fmla="val 5926"/>
+              <a:gd name="adj" fmla="val 12903"/>
             </a:avLst>
           </a:prstGeom>
           <a:solidFill>
@@ -9087,14 +10281,14 @@
       </p:sp>
       <p:sp>
         <p:nvSpPr>
-          <p:cNvPr id="16" name="Text 14"/>
-          <p:cNvSpPr/>
-          <p:nvPr/>
-        </p:nvSpPr>
-        <p:spPr>
-          <a:xfrm>
-            <a:off x="685800" y="5029200"/>
-            <a:ext cx="10789920" cy="256032"/>
+          <p:cNvPr id="15" name="Text 12"/>
+          <p:cNvSpPr/>
+          <p:nvPr/>
+        </p:nvSpPr>
+        <p:spPr>
+          <a:xfrm>
+            <a:off x="685800" y="5943600"/>
+            <a:ext cx="10789920" cy="566928"/>
           </a:xfrm>
           <a:prstGeom prst="rect">
             <a:avLst/>
@@ -9110,7 +10304,7 @@
               <a:buNone/>
             </a:pPr>
             <a:r>
-              <a:rPr lang="en-US" sz="1150" b="1" dirty="0">
+              <a:rPr lang="en-US" sz="1000" b="1" dirty="0">
                 <a:solidFill>
                   <a:srgbClr val="F59E0B"/>
                 </a:solidFill>
@@ -9118,52 +10312,13 @@
                 <a:ea typeface="Calibri" pitchFamily="34" charset="-122"/>
                 <a:cs typeface="Calibri" pitchFamily="34" charset="-120"/>
               </a:rPr>
-              <a:t>Limitações declaradas (não escondidas)</a:t>
-            </a:r>
-            <a:endParaRPr lang="en-US" sz="1150" dirty="0"/>
-          </a:p>
-        </p:txBody>
-      </p:sp>
-      <p:sp>
-        <p:nvSpPr>
-          <p:cNvPr id="17" name="Text 15"/>
-          <p:cNvSpPr/>
-          <p:nvPr/>
-        </p:nvSpPr>
-        <p:spPr>
-          <a:xfrm>
-            <a:off x="685800" y="5303520"/>
-            <a:ext cx="10789920" cy="274320"/>
-          </a:xfrm>
-          <a:prstGeom prst="rect">
-            <a:avLst/>
-          </a:prstGeom>
-          <a:noFill/>
-          <a:ln/>
-        </p:spPr>
-        <p:txBody>
-          <a:bodyPr wrap="square" lIns="0" tIns="0" rIns="0" bIns="0" rtlCol="0" anchor="ctr"/>
-          <a:lstStyle/>
-          <a:p>
-            <a:pPr indent="0" marL="0">
-              <a:buNone/>
-            </a:pPr>
-            <a:r>
-              <a:rPr lang="en-US" sz="950" dirty="0">
-                <a:solidFill>
-                  <a:srgbClr val="F59E0B"/>
-                </a:solidFill>
-                <a:latin typeface="Calibri" pitchFamily="34" charset="0"/>
-                <a:ea typeface="Calibri" pitchFamily="34" charset="-122"/>
-                <a:cs typeface="Calibri" pitchFamily="34" charset="-120"/>
-              </a:rPr>
-              <a:t>• </a:t>
-            </a:r>
-            <a:pPr indent="0" marL="0">
-              <a:buNone/>
-            </a:pPr>
-            <a:r>
-              <a:rPr lang="en-US" sz="950" dirty="0">
+              <a:t>Conclusão: </a:t>
+            </a:r>
+            <a:pPr indent="0" marL="0">
+              <a:buNone/>
+            </a:pPr>
+            <a:r>
+              <a:rPr lang="en-US" sz="1000" dirty="0">
                 <a:solidFill>
                   <a:srgbClr val="EAF6F3"/>
                 </a:solidFill>
@@ -9171,160 +10326,15 @@
                 <a:ea typeface="Calibri" pitchFamily="34" charset="-122"/>
                 <a:cs typeface="Calibri" pitchFamily="34" charset="-120"/>
               </a:rPr>
-              <a:t>SHOWSQL e RUNSQL são chamadas independentes ao modelo — podem gerar SQL diferente entre si (não determinismo do LLM).</a:t>
-            </a:r>
-            <a:endParaRPr lang="en-US" sz="950" dirty="0"/>
-          </a:p>
-        </p:txBody>
-      </p:sp>
-      <p:sp>
-        <p:nvSpPr>
-          <p:cNvPr id="18" name="Text 16"/>
-          <p:cNvSpPr/>
-          <p:nvPr/>
-        </p:nvSpPr>
-        <p:spPr>
-          <a:xfrm>
-            <a:off x="685800" y="5586984"/>
-            <a:ext cx="10789920" cy="274320"/>
-          </a:xfrm>
-          <a:prstGeom prst="rect">
-            <a:avLst/>
-          </a:prstGeom>
-          <a:noFill/>
-          <a:ln/>
-        </p:spPr>
-        <p:txBody>
-          <a:bodyPr wrap="square" lIns="0" tIns="0" rIns="0" bIns="0" rtlCol="0" anchor="ctr"/>
-          <a:lstStyle/>
-          <a:p>
-            <a:pPr indent="0" marL="0">
-              <a:buNone/>
-            </a:pPr>
-            <a:r>
-              <a:rPr lang="en-US" sz="950" dirty="0">
-                <a:solidFill>
-                  <a:srgbClr val="F59E0B"/>
-                </a:solidFill>
-                <a:latin typeface="Calibri" pitchFamily="34" charset="0"/>
-                <a:ea typeface="Calibri" pitchFamily="34" charset="-122"/>
-                <a:cs typeface="Calibri" pitchFamily="34" charset="-120"/>
-              </a:rPr>
-              <a:t>• </a:t>
-            </a:r>
-            <a:pPr indent="0" marL="0">
-              <a:buNone/>
-            </a:pPr>
-            <a:r>
-              <a:rPr lang="en-US" sz="950" dirty="0">
-                <a:solidFill>
-                  <a:srgbClr val="EAF6F3"/>
-                </a:solidFill>
-                <a:latin typeface="Calibri" pitchFamily="34" charset="0"/>
-                <a:ea typeface="Calibri" pitchFamily="34" charset="-122"/>
-                <a:cs typeface="Calibri" pitchFamily="34" charset="-120"/>
-              </a:rPr>
-              <a:t>O RUNSQL devolveu os valores corretos (RO 701,17 confere com o ETL) mas fora da ordem pedida — conferimos sempre contra data/processed/.</a:t>
-            </a:r>
-            <a:endParaRPr lang="en-US" sz="950" dirty="0"/>
-          </a:p>
-        </p:txBody>
-      </p:sp>
-      <p:sp>
-        <p:nvSpPr>
-          <p:cNvPr id="19" name="Text 17"/>
-          <p:cNvSpPr/>
-          <p:nvPr/>
-        </p:nvSpPr>
-        <p:spPr>
-          <a:xfrm>
-            <a:off x="685800" y="5870448"/>
-            <a:ext cx="10789920" cy="274320"/>
-          </a:xfrm>
-          <a:prstGeom prst="rect">
-            <a:avLst/>
-          </a:prstGeom>
-          <a:noFill/>
-          <a:ln/>
-        </p:spPr>
-        <p:txBody>
-          <a:bodyPr wrap="square" lIns="0" tIns="0" rIns="0" bIns="0" rtlCol="0" anchor="ctr"/>
-          <a:lstStyle/>
-          <a:p>
-            <a:pPr indent="0" marL="0">
-              <a:buNone/>
-            </a:pPr>
-            <a:r>
-              <a:rPr lang="en-US" sz="950" dirty="0">
-                <a:solidFill>
-                  <a:srgbClr val="F59E0B"/>
-                </a:solidFill>
-                <a:latin typeface="Calibri" pitchFamily="34" charset="0"/>
-                <a:ea typeface="Calibri" pitchFamily="34" charset="-122"/>
-                <a:cs typeface="Calibri" pitchFamily="34" charset="-120"/>
-              </a:rPr>
-              <a:t>• </a:t>
-            </a:r>
-            <a:pPr indent="0" marL="0">
-              <a:buNone/>
-            </a:pPr>
-            <a:r>
-              <a:rPr lang="en-US" sz="950" dirty="0">
-                <a:solidFill>
-                  <a:srgbClr val="EAF6F3"/>
-                </a:solidFill>
-                <a:latin typeface="Calibri" pitchFamily="34" charset="0"/>
-                <a:ea typeface="Calibri" pitchFamily="34" charset="-122"/>
-                <a:cs typeface="Calibri" pitchFamily="34" charset="-120"/>
-              </a:rPr>
-              <a:t>A ação 'chat' não consulta o banco e alucinou sobre o próprio projeto. Só SHOWSQL e RUNSQL usam os dados do LEITO360.</a:t>
-            </a:r>
-            <a:endParaRPr lang="en-US" sz="950" dirty="0"/>
-          </a:p>
-        </p:txBody>
-      </p:sp>
-      <p:sp>
-        <p:nvSpPr>
-          <p:cNvPr id="20" name="Text 18"/>
-          <p:cNvSpPr/>
-          <p:nvPr/>
-        </p:nvSpPr>
-        <p:spPr>
-          <a:xfrm>
-            <a:off x="457200" y="6263640"/>
-            <a:ext cx="11247120" cy="320040"/>
-          </a:xfrm>
-          <a:prstGeom prst="rect">
-            <a:avLst/>
-          </a:prstGeom>
-          <a:noFill/>
-          <a:ln/>
-        </p:spPr>
-        <p:txBody>
-          <a:bodyPr wrap="square" lIns="0" tIns="0" rIns="0" bIns="0" rtlCol="0" anchor="ctr"/>
-          <a:lstStyle/>
-          <a:p>
-            <a:pPr indent="0" marL="0">
-              <a:buNone/>
-            </a:pPr>
-            <a:r>
-              <a:rPr lang="en-US" sz="900" i="1" dirty="0">
-                <a:solidFill>
-                  <a:srgbClr val="94A3B8"/>
-                </a:solidFill>
-                <a:latin typeface="Calibri" pitchFamily="34" charset="0"/>
-                <a:ea typeface="Calibri" pitchFamily="34" charset="-122"/>
-                <a:cs typeface="Calibri" pitchFamily="34" charset="-120"/>
-              </a:rPr>
-              <a:t>Provider Cohere. As opções OCI Generative AI foram testadas em 2 sandboxes, 2 tenancies, 3 regiões e 2 credenciais — todas devolveram ORA-20404 com a URL malformada "…oci.my$cloud_domain…". Percurso completo em docs/evidencias/select_ai_perguntas.md.</a:t>
-            </a:r>
-            <a:endParaRPr lang="en-US" sz="900" dirty="0"/>
-          </a:p>
-        </p:txBody>
-      </p:sp>
-      <p:sp>
-        <p:nvSpPr>
-          <p:cNvPr id="21" name="Text 19"/>
+              <a:t>3 de 5 plenamente corretas, 1 com ordenação errada e 1 incorreta. O Select AI é uma ótima ferramenta de exploração, mas não substitui a consulta auditada — por isso o dashboard usa o JSON determinístico do ETL e marca seu SQL como "não gerado por IA".</a:t>
+            </a:r>
+            <a:endParaRPr lang="en-US" sz="1000" dirty="0"/>
+          </a:p>
+        </p:txBody>
+      </p:sp>
+      <p:sp>
+        <p:nvSpPr>
+          <p:cNvPr id="16" name="Text 13"/>
           <p:cNvSpPr/>
           <p:nvPr/>
         </p:nvSpPr>
@@ -9363,7 +10373,7 @@
       </p:sp>
       <p:sp>
         <p:nvSpPr>
-          <p:cNvPr id="22" name="Text 20"/>
+          <p:cNvPr id="17" name="Text 14"/>
           <p:cNvSpPr/>
           <p:nvPr/>
         </p:nvSpPr>

--- a/EC_Sprint_2_1TSCOA_EvidenciasConstrucao_LEITO360_GRUPO61.pptx
+++ b/EC_Sprint_2_1TSCOA_EvidenciasConstrucao_LEITO360_GRUPO61.pptx
@@ -12657,7 +12657,7 @@
                 <a:ea typeface="Calibri" pitchFamily="34" charset="-122"/>
                 <a:cs typeface="Calibri" pitchFamily="34" charset="-120"/>
               </a:rPr>
-              <a:t>COLE O LINK AQUI</a:t>
+              <a:t>https://www.youtube.com/watch?v=IAoJ_zeWXmQ</a:t>
             </a:r>
             <a:endParaRPr lang="en-US" sz="1300" dirty="0"/>
           </a:p>

--- a/EC_Sprint_2_1TSCOA_EvidenciasConstrucao_LEITO360_GRUPO61.pptx
+++ b/EC_Sprint_2_1TSCOA_EvidenciasConstrucao_LEITO360_GRUPO61.pptx
@@ -5639,7 +5639,7 @@
                 <a:ea typeface="Cambria" pitchFamily="34" charset="-122"/>
                 <a:cs typeface="Cambria" pitchFamily="34" charset="-120"/>
               </a:rPr>
-              <a:t>Oracle AI Database — relacional, JSON e CSV/External Table</a:t>
+              <a:t>Oracle AI Database — os três formatos, em objetos separados</a:t>
             </a:r>
             <a:endParaRPr lang="en-US" sz="2800" dirty="0"/>
           </a:p>
@@ -5678,7 +5678,7 @@
                 <a:ea typeface="Calibri" pitchFamily="34" charset="-122"/>
                 <a:cs typeface="Calibri" pitchFamily="34" charset="-120"/>
               </a:rPr>
-              <a:t>Os três formatos exigidos pelo Challenge, implementados em objetos separados e integrados por uma view analítica.</a:t>
+              <a:t>Relacional, documento JSON nativo e dados vindos de CSV — cada um em seu objeto, integrados por uma view analítica. Abaixo, o que foi de fato executado no Oracle.</a:t>
             </a:r>
             <a:endParaRPr lang="en-US" sz="1400" dirty="0"/>
           </a:p>
@@ -5980,7 +5980,7 @@
                 <a:ea typeface="Calibri" pitchFamily="34" charset="-122"/>
                 <a:cs typeface="Calibri" pitchFamily="34" charset="-120"/>
               </a:rPr>
-              <a:t>leitos SUS cadastrados + metadados da fonte, colunas virtuais para join</a:t>
+              <a:t>162 documentos: leitos SUS cadastrados + metadados da fonte. O join usa JSON_VALUE na view — as colunas virtuais deram ORA-01747 no ambiente real e foram retiradas</a:t>
             </a:r>
             <a:endParaRPr lang="en-US" sz="1100" dirty="0"/>
           </a:p>
@@ -6053,7 +6053,7 @@
                 <a:ea typeface="Courier New" pitchFamily="34" charset="-122"/>
                 <a:cs typeface="Courier New" pitchFamily="34" charset="-120"/>
               </a:rPr>
-              <a:t>LEITO360_POPULACAO_EXT</a:t>
+              <a:t>LEITO360_POPULACAO</a:t>
             </a:r>
             <a:endParaRPr lang="en-US" sz="1300" dirty="0"/>
           </a:p>
@@ -6092,7 +6092,7 @@
                 <a:ea typeface="Calibri" pitchFamily="34" charset="-122"/>
                 <a:cs typeface="Calibri" pitchFamily="34" charset="-120"/>
               </a:rPr>
-              <a:t>External table sobre CSV (Object Storage)</a:t>
+              <a:t>Carregada a partir do CSV do IBGE</a:t>
             </a:r>
             <a:endParaRPr lang="en-US" sz="1000" dirty="0"/>
           </a:p>
@@ -6131,7 +6131,7 @@
                 <a:ea typeface="Calibri" pitchFamily="34" charset="-122"/>
                 <a:cs typeface="Calibri" pitchFamily="34" charset="-120"/>
               </a:rPr>
-              <a:t>DBMS_CLOUD.CREATE_EXTERNAL_TABLE, população por UF</a:t>
+              <a:t>27 UFs, população estimada 2026. O script da external table (DBMS_CLOUD.CREATE_EXTERNAL_TABLE sobre Object Storage) está versionado em 03_external_table_ibge.sql; no sandbox rodamos a variante 03b</a:t>
             </a:r>
             <a:endParaRPr lang="en-US" sz="1100" dirty="0"/>
           </a:p>
@@ -6321,7 +6321,7 @@
                 <a:ea typeface="Calibri" pitchFamily="34" charset="-122"/>
                 <a:cs typeface="Calibri" pitchFamily="34" charset="-120"/>
               </a:rPr>
-              <a:t>Fonte de sintaxe: documentação oficial Oracle Autonomous AI Database 23ai (DDL/JSON/external table). O LiveLabs 4222 foi seguido literalmente apenas para o perfil do Select AI (DBMS_CLOUD_AI.CREATE_PROFILE, provider OCI, DBMS_CLOUD_AI.GENERATE) — ele não cobre criação de tabelas customizadas. Decisão documentada em docs/arquitetura/decisao_livelabs_4222.md.</a:t>
+              <a:t>Fonte de sintaxe: documentação oficial Oracle Autonomous AI Database 23ai. O LiveLabs 4222 foi seguido literalmente apenas para o perfil do Select AI — ele não cobre criação de tabelas customizadas (decisão em docs/arquitetura/decisao_livelabs_4222.md). Montar o bucket de Object Storage não cabia na janela do sandbox, que expira; por isso a população entrou por tabela carregada do mesmo CSV, com o script da external table versionado para quem tiver o bucket disponível.</a:t>
             </a:r>
             <a:endParaRPr lang="en-US" sz="950" dirty="0"/>
           </a:p>
@@ -11712,12 +11712,12 @@
         </p:nvSpPr>
         <p:spPr>
           <a:xfrm>
-            <a:off x="457200" y="2103120"/>
-            <a:ext cx="11247120" cy="621792"/>
+            <a:off x="457200" y="2084832"/>
+            <a:ext cx="11247120" cy="530352"/>
           </a:xfrm>
           <a:prstGeom prst="roundRect">
             <a:avLst>
-              <a:gd name="adj" fmla="val 11765"/>
+              <a:gd name="adj" fmla="val 13793"/>
             </a:avLst>
           </a:prstGeom>
           <a:solidFill>
@@ -11746,8 +11746,8 @@
         </p:nvSpPr>
         <p:spPr>
           <a:xfrm>
-            <a:off x="640080" y="2103120"/>
-            <a:ext cx="1463040" cy="621792"/>
+            <a:off x="640080" y="2084832"/>
+            <a:ext cx="1463040" cy="530352"/>
           </a:xfrm>
           <a:prstGeom prst="rect">
             <a:avLst/>
@@ -11785,8 +11785,8 @@
         </p:nvSpPr>
         <p:spPr>
           <a:xfrm>
-            <a:off x="2194560" y="2103120"/>
-            <a:ext cx="2743200" cy="621792"/>
+            <a:off x="2194560" y="2084832"/>
+            <a:ext cx="2743200" cy="530352"/>
           </a:xfrm>
           <a:prstGeom prst="rect">
             <a:avLst/>
@@ -11824,8 +11824,8 @@
         </p:nvSpPr>
         <p:spPr>
           <a:xfrm>
-            <a:off x="5029200" y="2103120"/>
-            <a:ext cx="6492240" cy="621792"/>
+            <a:off x="5029200" y="2084832"/>
+            <a:ext cx="6492240" cy="530352"/>
           </a:xfrm>
           <a:prstGeom prst="rect">
             <a:avLst/>
@@ -11863,12 +11863,12 @@
         </p:nvSpPr>
         <p:spPr>
           <a:xfrm>
-            <a:off x="457200" y="2788920"/>
-            <a:ext cx="11247120" cy="621792"/>
+            <a:off x="457200" y="2679192"/>
+            <a:ext cx="11247120" cy="530352"/>
           </a:xfrm>
           <a:prstGeom prst="roundRect">
             <a:avLst>
-              <a:gd name="adj" fmla="val 11765"/>
+              <a:gd name="adj" fmla="val 13793"/>
             </a:avLst>
           </a:prstGeom>
           <a:solidFill>
@@ -11897,8 +11897,8 @@
         </p:nvSpPr>
         <p:spPr>
           <a:xfrm>
-            <a:off x="640080" y="2788920"/>
-            <a:ext cx="1463040" cy="621792"/>
+            <a:off x="640080" y="2679192"/>
+            <a:ext cx="1463040" cy="530352"/>
           </a:xfrm>
           <a:prstGeom prst="rect">
             <a:avLst/>
@@ -11936,8 +11936,8 @@
         </p:nvSpPr>
         <p:spPr>
           <a:xfrm>
-            <a:off x="2194560" y="2788920"/>
-            <a:ext cx="2743200" cy="621792"/>
+            <a:off x="2194560" y="2679192"/>
+            <a:ext cx="2743200" cy="530352"/>
           </a:xfrm>
           <a:prstGeom prst="rect">
             <a:avLst/>
@@ -11975,8 +11975,8 @@
         </p:nvSpPr>
         <p:spPr>
           <a:xfrm>
-            <a:off x="5029200" y="2788920"/>
-            <a:ext cx="6492240" cy="621792"/>
+            <a:off x="5029200" y="2679192"/>
+            <a:ext cx="6492240" cy="530352"/>
           </a:xfrm>
           <a:prstGeom prst="rect">
             <a:avLst/>
@@ -12014,12 +12014,12 @@
         </p:nvSpPr>
         <p:spPr>
           <a:xfrm>
-            <a:off x="457200" y="3474720"/>
-            <a:ext cx="11247120" cy="621792"/>
+            <a:off x="457200" y="3273552"/>
+            <a:ext cx="11247120" cy="530352"/>
           </a:xfrm>
           <a:prstGeom prst="roundRect">
             <a:avLst>
-              <a:gd name="adj" fmla="val 11765"/>
+              <a:gd name="adj" fmla="val 13793"/>
             </a:avLst>
           </a:prstGeom>
           <a:solidFill>
@@ -12048,8 +12048,8 @@
         </p:nvSpPr>
         <p:spPr>
           <a:xfrm>
-            <a:off x="640080" y="3474720"/>
-            <a:ext cx="1463040" cy="621792"/>
+            <a:off x="640080" y="3273552"/>
+            <a:ext cx="1463040" cy="530352"/>
           </a:xfrm>
           <a:prstGeom prst="rect">
             <a:avLst/>
@@ -12087,8 +12087,8 @@
         </p:nvSpPr>
         <p:spPr>
           <a:xfrm>
-            <a:off x="2194560" y="3474720"/>
-            <a:ext cx="2743200" cy="621792"/>
+            <a:off x="2194560" y="3273552"/>
+            <a:ext cx="2743200" cy="530352"/>
           </a:xfrm>
           <a:prstGeom prst="rect">
             <a:avLst/>
@@ -12126,8 +12126,8 @@
         </p:nvSpPr>
         <p:spPr>
           <a:xfrm>
-            <a:off x="5029200" y="3474720"/>
-            <a:ext cx="6492240" cy="621792"/>
+            <a:off x="5029200" y="3273552"/>
+            <a:ext cx="6492240" cy="530352"/>
           </a:xfrm>
           <a:prstGeom prst="rect">
             <a:avLst/>
@@ -12165,12 +12165,12 @@
         </p:nvSpPr>
         <p:spPr>
           <a:xfrm>
-            <a:off x="457200" y="4160520"/>
-            <a:ext cx="11247120" cy="621792"/>
+            <a:off x="457200" y="3867912"/>
+            <a:ext cx="11247120" cy="530352"/>
           </a:xfrm>
           <a:prstGeom prst="roundRect">
             <a:avLst>
-              <a:gd name="adj" fmla="val 11765"/>
+              <a:gd name="adj" fmla="val 13793"/>
             </a:avLst>
           </a:prstGeom>
           <a:solidFill>
@@ -12199,8 +12199,8 @@
         </p:nvSpPr>
         <p:spPr>
           <a:xfrm>
-            <a:off x="640080" y="4160520"/>
-            <a:ext cx="1463040" cy="621792"/>
+            <a:off x="640080" y="3867912"/>
+            <a:ext cx="1463040" cy="530352"/>
           </a:xfrm>
           <a:prstGeom prst="rect">
             <a:avLst/>
@@ -12238,8 +12238,8 @@
         </p:nvSpPr>
         <p:spPr>
           <a:xfrm>
-            <a:off x="2194560" y="4160520"/>
-            <a:ext cx="2743200" cy="621792"/>
+            <a:off x="2194560" y="3867912"/>
+            <a:ext cx="2743200" cy="530352"/>
           </a:xfrm>
           <a:prstGeom prst="rect">
             <a:avLst/>
@@ -12277,8 +12277,8 @@
         </p:nvSpPr>
         <p:spPr>
           <a:xfrm>
-            <a:off x="5029200" y="4160520"/>
-            <a:ext cx="6492240" cy="621792"/>
+            <a:off x="5029200" y="3867912"/>
+            <a:ext cx="6492240" cy="530352"/>
           </a:xfrm>
           <a:prstGeom prst="rect">
             <a:avLst/>
@@ -12316,12 +12316,12 @@
         </p:nvSpPr>
         <p:spPr>
           <a:xfrm>
-            <a:off x="457200" y="4846320"/>
-            <a:ext cx="11247120" cy="621792"/>
+            <a:off x="457200" y="4462272"/>
+            <a:ext cx="11247120" cy="530352"/>
           </a:xfrm>
           <a:prstGeom prst="roundRect">
             <a:avLst>
-              <a:gd name="adj" fmla="val 11765"/>
+              <a:gd name="adj" fmla="val 13793"/>
             </a:avLst>
           </a:prstGeom>
           <a:solidFill>
@@ -12350,8 +12350,8 @@
         </p:nvSpPr>
         <p:spPr>
           <a:xfrm>
-            <a:off x="640080" y="4846320"/>
-            <a:ext cx="1463040" cy="621792"/>
+            <a:off x="640080" y="4462272"/>
+            <a:ext cx="1463040" cy="530352"/>
           </a:xfrm>
           <a:prstGeom prst="rect">
             <a:avLst/>
@@ -12389,8 +12389,8 @@
         </p:nvSpPr>
         <p:spPr>
           <a:xfrm>
-            <a:off x="2194560" y="4846320"/>
-            <a:ext cx="2743200" cy="621792"/>
+            <a:off x="2194560" y="4462272"/>
+            <a:ext cx="2743200" cy="530352"/>
           </a:xfrm>
           <a:prstGeom prst="rect">
             <a:avLst/>
@@ -12428,8 +12428,8 @@
         </p:nvSpPr>
         <p:spPr>
           <a:xfrm>
-            <a:off x="5029200" y="4846320"/>
-            <a:ext cx="6492240" cy="621792"/>
+            <a:off x="5029200" y="4462272"/>
+            <a:ext cx="6492240" cy="530352"/>
           </a:xfrm>
           <a:prstGeom prst="rect">
             <a:avLst/>
@@ -12467,12 +12467,12 @@
         </p:nvSpPr>
         <p:spPr>
           <a:xfrm>
-            <a:off x="457200" y="5532120"/>
-            <a:ext cx="11247120" cy="621792"/>
+            <a:off x="457200" y="5056632"/>
+            <a:ext cx="11247120" cy="530352"/>
           </a:xfrm>
           <a:prstGeom prst="roundRect">
             <a:avLst>
-              <a:gd name="adj" fmla="val 11765"/>
+              <a:gd name="adj" fmla="val 13793"/>
             </a:avLst>
           </a:prstGeom>
           <a:solidFill>
@@ -12501,8 +12501,8 @@
         </p:nvSpPr>
         <p:spPr>
           <a:xfrm>
-            <a:off x="640080" y="5532120"/>
-            <a:ext cx="1463040" cy="621792"/>
+            <a:off x="640080" y="5056632"/>
+            <a:ext cx="1463040" cy="530352"/>
           </a:xfrm>
           <a:prstGeom prst="rect">
             <a:avLst/>
@@ -12540,8 +12540,8 @@
         </p:nvSpPr>
         <p:spPr>
           <a:xfrm>
-            <a:off x="2194560" y="5532120"/>
-            <a:ext cx="2743200" cy="621792"/>
+            <a:off x="2194560" y="5056632"/>
+            <a:ext cx="2743200" cy="530352"/>
           </a:xfrm>
           <a:prstGeom prst="rect">
             <a:avLst/>
@@ -12579,8 +12579,8 @@
         </p:nvSpPr>
         <p:spPr>
           <a:xfrm>
-            <a:off x="5029200" y="5532120"/>
-            <a:ext cx="6492240" cy="621792"/>
+            <a:off x="5029200" y="5056632"/>
+            <a:ext cx="6492240" cy="530352"/>
           </a:xfrm>
           <a:prstGeom prst="rect">
             <a:avLst/>
@@ -12612,14 +12612,48 @@
       </p:sp>
       <p:sp>
         <p:nvSpPr>
-          <p:cNvPr id="31" name="Text 29"/>
-          <p:cNvSpPr/>
-          <p:nvPr/>
-        </p:nvSpPr>
-        <p:spPr>
-          <a:xfrm>
-            <a:off x="457200" y="6263640"/>
-            <a:ext cx="11247120" cy="365760"/>
+          <p:cNvPr id="31" name="Shape 29"/>
+          <p:cNvSpPr/>
+          <p:nvPr/>
+        </p:nvSpPr>
+        <p:spPr>
+          <a:xfrm>
+            <a:off x="457200" y="5705856"/>
+            <a:ext cx="11247120" cy="475488"/>
+          </a:xfrm>
+          <a:prstGeom prst="roundRect">
+            <a:avLst>
+              <a:gd name="adj" fmla="val 15385"/>
+            </a:avLst>
+          </a:prstGeom>
+          <a:solidFill>
+            <a:srgbClr val="12233F"/>
+          </a:solidFill>
+          <a:ln w="12700">
+            <a:solidFill>
+              <a:srgbClr val="1E3A5F"/>
+            </a:solidFill>
+            <a:prstDash val="solid"/>
+          </a:ln>
+          <a:effectLst>
+            <a:outerShdw sx="100000" sy="100000" kx="0" ky="0" algn="bl" rotWithShape="0" blurRad="101600" dist="38100" dir="5400000">
+              <a:srgbClr val="000000">
+                <a:alpha val="35000"/>
+              </a:srgbClr>
+            </a:outerShdw>
+          </a:effectLst>
+        </p:spPr>
+      </p:sp>
+      <p:sp>
+        <p:nvSpPr>
+          <p:cNvPr id="32" name="Text 30"/>
+          <p:cNvSpPr/>
+          <p:nvPr/>
+        </p:nvSpPr>
+        <p:spPr>
+          <a:xfrm>
+            <a:off x="685800" y="5705856"/>
+            <a:ext cx="10789920" cy="475488"/>
           </a:xfrm>
           <a:prstGeom prst="rect">
             <a:avLst/>
@@ -12643,7 +12677,7 @@
                 <a:ea typeface="Calibri" pitchFamily="34" charset="-122"/>
                 <a:cs typeface="Calibri" pitchFamily="34" charset="-120"/>
               </a:rPr>
-              <a:t>Link do vídeo (YouTube): </a:t>
+              <a:t>▶  Link do vídeo (YouTube):   </a:t>
             </a:r>
             <a:pPr indent="0" marL="0">
               <a:buNone/>
@@ -12665,7 +12699,7 @@
       </p:sp>
       <p:sp>
         <p:nvSpPr>
-          <p:cNvPr id="32" name="Text 30"/>
+          <p:cNvPr id="33" name="Text 31"/>
           <p:cNvSpPr/>
           <p:nvPr/>
         </p:nvSpPr>
@@ -12704,7 +12738,7 @@
       </p:sp>
       <p:sp>
         <p:nvSpPr>
-          <p:cNvPr id="33" name="Text 31"/>
+          <p:cNvPr id="34" name="Text 32"/>
           <p:cNvSpPr/>
           <p:nvPr/>
         </p:nvSpPr>
@@ -12977,7 +13011,7 @@
           <a:ln/>
         </p:spPr>
         <p:txBody>
-          <a:bodyPr wrap="square" lIns="0" tIns="0" rIns="0" bIns="0" rtlCol="0" anchor="ctr"/>
+          <a:bodyPr wrap="square" lIns="0" tIns="0" rIns="0" bIns="0" rtlCol="0" anchor="t"/>
           <a:lstStyle/>
           <a:p>
             <a:pPr indent="0" marL="0">
@@ -13172,7 +13206,7 @@
           <a:ln/>
         </p:spPr>
         <p:txBody>
-          <a:bodyPr wrap="square" lIns="0" tIns="0" rIns="0" bIns="0" rtlCol="0" anchor="ctr"/>
+          <a:bodyPr wrap="square" lIns="0" tIns="0" rIns="0" bIns="0" rtlCol="0" anchor="t"/>
           <a:lstStyle/>
           <a:p>
             <a:pPr indent="0" marL="0">
@@ -13367,7 +13401,7 @@
           <a:ln/>
         </p:spPr>
         <p:txBody>
-          <a:bodyPr wrap="square" lIns="0" tIns="0" rIns="0" bIns="0" rtlCol="0" anchor="ctr"/>
+          <a:bodyPr wrap="square" lIns="0" tIns="0" rIns="0" bIns="0" rtlCol="0" anchor="t"/>
           <a:lstStyle/>
           <a:p>
             <a:pPr indent="0" marL="0">
@@ -15552,7 +15586,7 @@
                           <a:ea typeface="Calibri" pitchFamily="34" charset="-122"/>
                           <a:cs typeface="Calibri" pitchFamily="34" charset="-120"/>
                         </a:rPr>
-                        <a:t>Relacional + JSON nativo + external table + view, executados no Oracle</a:t>
+                        <a:t>Relacional + JSON nativo + CSV + view, carregados e conferidos no Oracle</a:t>
                       </a:r>
                       <a:endParaRPr lang="en-US" sz="1050" dirty="0">
                         <a:latin typeface="Calibri" charset="0"/>
@@ -24438,7 +24472,7 @@
                 <a:ea typeface="Calibri" pitchFamily="34" charset="-122"/>
                 <a:cs typeface="Calibri" pitchFamily="34" charset="-120"/>
               </a:rPr>
-              <a:t>+ External Table</a:t>
+              <a:t>+ CSV + view</a:t>
             </a:r>
             <a:endParaRPr lang="en-US" sz="1000" dirty="0"/>
           </a:p>
@@ -25092,7 +25126,7 @@
                 <a:ea typeface="Calibri" pitchFamily="34" charset="-122"/>
                 <a:cs typeface="Calibri" pitchFamily="34" charset="-120"/>
               </a:rPr>
-              <a:t>Oracle: LEITO360_SIH, LEITO360_CNES_JSON, LEITO360_POPULACAO_EXT, VW_LEITO360_ANALITICO</a:t>
+              <a:t>Oracle: LEITO360_SIH (relacional), LEITO360_CNES_JSON (JSON nativo), LEITO360_POPULACAO (CSV), VW_LEITO360_ANALITICO</a:t>
             </a:r>
             <a:endParaRPr lang="en-US" sz="1050" dirty="0"/>
           </a:p>
